--- a/slides/pptx/第03回_文書とコミュニケーションのAI化.pptx
+++ b/slides/pptx/第03回_文書とコミュニケーションのAI化.pptx
@@ -12,9 +12,14 @@
     <p:sldId id="260" r:id="rId6"/>
     <p:sldId id="261" r:id="rId7"/>
     <p:sldId id="262" r:id="rId8"/>
+    <p:sldId id="263" r:id="rId9"/>
+    <p:sldId id="264" r:id="rId10"/>
+    <p:sldId id="265" r:id="rId11"/>
+    <p:sldId id="266" r:id="rId12"/>
+    <p:sldId id="267" r:id="rId13"/>
   </p:sldIdLst>
   <p:notesMasterIdLst>
-    <p:notesMasterId r:id="rId9"/>
+    <p:notesMasterId r:id="rId14"/>
   </p:notesMasterIdLst>
   <p:sldSz cx="12192000" cy="6858000"/>
   <p:notesSz cx="6858000" cy="12192000"/>
@@ -508,8 +513,7 @@
           <a:p>
             <a:r>
               <a:rPr lang="en-US" dirty="0"/>
-              <a:t>前回つくった型を、社内でいちばん量の多い文書に広げます。
-【ゴール】週に1回以上やっている文書業務を、1つAI化します。社員の方が使える形にします。</a:t>
+              <a:t>前回の宿題（箱の中で1週間作業したか）の確認から入る。履歴を画面に出してもらうと一目で分かる。できていれば、探す時間が減った実感を言語化してもらう。</a:t>
             </a:r>
             <a:endParaRPr lang="en-US" dirty="0"/>
           </a:p>
@@ -533,6 +537,270 @@
             <a:fld id="{F7021451-1387-4CA6-816F-3879F97B5CBC}" type="slidenum">
               <a:rPr lang="en-US"/>
               <a:t>1</a:t>
+            </a:fld>
+            <a:endParaRPr lang="en-US"/>
+          </a:p>
+        </p:txBody>
+      </p:sp>
+    </p:spTree>
+    <p:extLst>
+      <p:ext uri="{BB962C8B-B14F-4D97-AF65-F5344CB8AC3E}">
+        <p14:creationId xmlns:p14="http://schemas.microsoft.com/office/powerpoint/2010/main" val="1024086991"/>
+      </p:ext>
+    </p:extLst>
+  </p:cSld>
+  <p:clrMapOvr>
+    <a:masterClrMapping/>
+  </p:clrMapOvr>
+</p:notes>
+</file>
+
+<file path=ppt/notesSlides/notesSlide10.xml><?xml version="1.0" encoding="utf-8"?>
+<p:notes xmlns:a="http://schemas.openxmlformats.org/drawingml/2006/main" xmlns:r="http://schemas.openxmlformats.org/officeDocument/2006/relationships" xmlns:p="http://schemas.openxmlformats.org/presentationml/2006/main">
+  <p:cSld>
+    <p:spTree>
+      <p:nvGrpSpPr>
+        <p:cNvPr id="1" name=""/>
+        <p:cNvGrpSpPr/>
+        <p:nvPr/>
+      </p:nvGrpSpPr>
+      <p:grpSpPr>
+        <a:xfrm>
+          <a:off x="0" y="0"/>
+          <a:ext cx="0" cy="0"/>
+          <a:chOff x="0" y="0"/>
+          <a:chExt cx="0" cy="0"/>
+        </a:xfrm>
+      </p:grpSpPr>
+      <p:sp>
+        <p:nvSpPr>
+          <p:cNvPr id="2" name="Slide Image Placeholder 1"/>
+          <p:cNvSpPr>
+            <a:spLocks noGrp="1" noRot="1" noChangeAspect="1"/>
+          </p:cNvSpPr>
+          <p:nvPr>
+            <p:ph type="sldImg"/>
+          </p:nvPr>
+        </p:nvSpPr>
+        <p:spPr/>
+      </p:sp>
+      <p:sp>
+        <p:nvSpPr>
+          <p:cNvPr id="3" name="Notes Placeholder 2"/>
+          <p:cNvSpPr>
+            <a:spLocks noGrp="1"/>
+          </p:cNvSpPr>
+          <p:nvPr>
+            <p:ph type="body" idx="1"/>
+          </p:nvPr>
+        </p:nvSpPr>
+        <p:spPr/>
+        <p:txBody>
+          <a:bodyPr/>
+          <a:lstStyle/>
+          <a:p>
+            <a:r>
+              <a:rPr lang="en-US" dirty="0"/>
+              <a:t>渡す相手を実名で決めさせる。「事務の誰か」では渡らない。その場で名前を書いてもらう。</a:t>
+            </a:r>
+            <a:endParaRPr lang="en-US" dirty="0"/>
+          </a:p>
+        </p:txBody>
+      </p:sp>
+      <p:sp>
+        <p:nvSpPr>
+          <p:cNvPr id="4" name="Slide Number Placeholder 3"/>
+          <p:cNvSpPr>
+            <a:spLocks noGrp="1"/>
+          </p:cNvSpPr>
+          <p:nvPr>
+            <p:ph type="sldNum" sz="quarter" idx="10"/>
+          </p:nvPr>
+        </p:nvSpPr>
+        <p:spPr/>
+        <p:txBody>
+          <a:bodyPr/>
+          <a:lstStyle/>
+          <a:p>
+            <a:fld id="{F7021451-1387-4CA6-816F-3879F97B5CBC}" type="slidenum">
+              <a:rPr lang="en-US"/>
+              <a:t>10</a:t>
+            </a:fld>
+            <a:endParaRPr lang="en-US"/>
+          </a:p>
+        </p:txBody>
+      </p:sp>
+    </p:spTree>
+    <p:extLst>
+      <p:ext uri="{BB962C8B-B14F-4D97-AF65-F5344CB8AC3E}">
+        <p14:creationId xmlns:p14="http://schemas.microsoft.com/office/powerpoint/2010/main" val="1024086991"/>
+      </p:ext>
+    </p:extLst>
+  </p:cSld>
+  <p:clrMapOvr>
+    <a:masterClrMapping/>
+  </p:clrMapOvr>
+</p:notes>
+</file>
+
+<file path=ppt/notesSlides/notesSlide11.xml><?xml version="1.0" encoding="utf-8"?>
+<p:notes xmlns:a="http://schemas.openxmlformats.org/drawingml/2006/main" xmlns:r="http://schemas.openxmlformats.org/officeDocument/2006/relationships" xmlns:p="http://schemas.openxmlformats.org/presentationml/2006/main">
+  <p:cSld>
+    <p:spTree>
+      <p:nvGrpSpPr>
+        <p:cNvPr id="1" name=""/>
+        <p:cNvGrpSpPr/>
+        <p:nvPr/>
+      </p:nvGrpSpPr>
+      <p:grpSpPr>
+        <a:xfrm>
+          <a:off x="0" y="0"/>
+          <a:ext cx="0" cy="0"/>
+          <a:chOff x="0" y="0"/>
+          <a:chExt cx="0" cy="0"/>
+        </a:xfrm>
+      </p:grpSpPr>
+      <p:sp>
+        <p:nvSpPr>
+          <p:cNvPr id="2" name="Slide Image Placeholder 1"/>
+          <p:cNvSpPr>
+            <a:spLocks noGrp="1" noRot="1" noChangeAspect="1"/>
+          </p:cNvSpPr>
+          <p:nvPr>
+            <p:ph type="sldImg"/>
+          </p:nvPr>
+        </p:nvSpPr>
+        <p:spPr/>
+      </p:sp>
+      <p:sp>
+        <p:nvSpPr>
+          <p:cNvPr id="3" name="Notes Placeholder 2"/>
+          <p:cNvSpPr>
+            <a:spLocks noGrp="1"/>
+          </p:cNvSpPr>
+          <p:nvPr>
+            <p:ph type="body" idx="1"/>
+          </p:nvPr>
+        </p:nvSpPr>
+        <p:spPr/>
+        <p:txBody>
+          <a:bodyPr/>
+          <a:lstStyle/>
+          <a:p>
+            <a:r>
+              <a:rPr lang="en-US" dirty="0"/>
+              <a:t>録画を止める運用は、この回で必ず提案する。安心して実物を出せる状態を作れるかどうかが、第5回以降の質を決める。</a:t>
+            </a:r>
+            <a:endParaRPr lang="en-US" dirty="0"/>
+          </a:p>
+        </p:txBody>
+      </p:sp>
+      <p:sp>
+        <p:nvSpPr>
+          <p:cNvPr id="4" name="Slide Number Placeholder 3"/>
+          <p:cNvSpPr>
+            <a:spLocks noGrp="1"/>
+          </p:cNvSpPr>
+          <p:nvPr>
+            <p:ph type="sldNum" sz="quarter" idx="10"/>
+          </p:nvPr>
+        </p:nvSpPr>
+        <p:spPr/>
+        <p:txBody>
+          <a:bodyPr/>
+          <a:lstStyle/>
+          <a:p>
+            <a:fld id="{F7021451-1387-4CA6-816F-3879F97B5CBC}" type="slidenum">
+              <a:rPr lang="en-US"/>
+              <a:t>11</a:t>
+            </a:fld>
+            <a:endParaRPr lang="en-US"/>
+          </a:p>
+        </p:txBody>
+      </p:sp>
+    </p:spTree>
+    <p:extLst>
+      <p:ext uri="{BB962C8B-B14F-4D97-AF65-F5344CB8AC3E}">
+        <p14:creationId xmlns:p14="http://schemas.microsoft.com/office/powerpoint/2010/main" val="1024086991"/>
+      </p:ext>
+    </p:extLst>
+  </p:cSld>
+  <p:clrMapOvr>
+    <a:masterClrMapping/>
+  </p:clrMapOvr>
+</p:notes>
+</file>
+
+<file path=ppt/notesSlides/notesSlide12.xml><?xml version="1.0" encoding="utf-8"?>
+<p:notes xmlns:a="http://schemas.openxmlformats.org/drawingml/2006/main" xmlns:r="http://schemas.openxmlformats.org/officeDocument/2006/relationships" xmlns:p="http://schemas.openxmlformats.org/presentationml/2006/main">
+  <p:cSld>
+    <p:spTree>
+      <p:nvGrpSpPr>
+        <p:cNvPr id="1" name=""/>
+        <p:cNvGrpSpPr/>
+        <p:nvPr/>
+      </p:nvGrpSpPr>
+      <p:grpSpPr>
+        <a:xfrm>
+          <a:off x="0" y="0"/>
+          <a:ext cx="0" cy="0"/>
+          <a:chOff x="0" y="0"/>
+          <a:chExt cx="0" cy="0"/>
+        </a:xfrm>
+      </p:grpSpPr>
+      <p:sp>
+        <p:nvSpPr>
+          <p:cNvPr id="2" name="Slide Image Placeholder 1"/>
+          <p:cNvSpPr>
+            <a:spLocks noGrp="1" noRot="1" noChangeAspect="1"/>
+          </p:cNvSpPr>
+          <p:nvPr>
+            <p:ph type="sldImg"/>
+          </p:nvPr>
+        </p:nvSpPr>
+        <p:spPr/>
+      </p:sp>
+      <p:sp>
+        <p:nvSpPr>
+          <p:cNvPr id="3" name="Notes Placeholder 2"/>
+          <p:cNvSpPr>
+            <a:spLocks noGrp="1"/>
+          </p:cNvSpPr>
+          <p:nvPr>
+            <p:ph type="body" idx="1"/>
+          </p:nvPr>
+        </p:nvSpPr>
+        <p:spPr/>
+        <p:txBody>
+          <a:bodyPr/>
+          <a:lstStyle/>
+          <a:p>
+            <a:r>
+              <a:rPr lang="en-US" dirty="0"/>
+              <a:t>感想は「よかった」で終わらせず、使いにくかった点を1つ持ち帰ってもらうよう頼む。それが第4回の冒頭15分の材料になる。</a:t>
+            </a:r>
+            <a:endParaRPr lang="en-US" dirty="0"/>
+          </a:p>
+        </p:txBody>
+      </p:sp>
+      <p:sp>
+        <p:nvSpPr>
+          <p:cNvPr id="4" name="Slide Number Placeholder 3"/>
+          <p:cNvSpPr>
+            <a:spLocks noGrp="1"/>
+          </p:cNvSpPr>
+          <p:nvPr>
+            <p:ph type="sldNum" sz="quarter" idx="10"/>
+          </p:nvPr>
+        </p:nvSpPr>
+        <p:spPr/>
+        <p:txBody>
+          <a:bodyPr/>
+          <a:lstStyle/>
+          <a:p>
+            <a:fld id="{F7021451-1387-4CA6-816F-3879F97B5CBC}" type="slidenum">
+              <a:rPr lang="en-US"/>
+              <a:t>12</a:t>
             </a:fld>
             <a:endParaRPr lang="en-US"/>
           </a:p>
@@ -597,7 +865,7 @@
           <a:p>
             <a:r>
               <a:rPr lang="en-US" dirty="0"/>
-              <a:t>ここは30秒で。今日の到達点だけ言って、すぐ本題へ。</a:t>
+              <a:t>「社長だけが速くなっても会社は変わらない」は、経営者に最も刺さる一文。ここで社内展開のスイッチが入る。ただし全社展開はまだ早い、と釘を刺しておく。</a:t>
             </a:r>
             <a:endParaRPr lang="en-US" dirty="0"/>
           </a:p>
@@ -685,7 +953,7 @@
           <a:p>
             <a:r>
               <a:rPr lang="en-US" dirty="0"/>
-              <a:t>先に結論を言わず、受講者の実物を題材にしてこの型に当てはめて見せる。</a:t>
+              <a:t>今日から成果物の宛先が変わる、と明示する。これまでは自分用、今日からは他人が使うもの。設計の基準が変わることを先に伝える。</a:t>
             </a:r>
             <a:endParaRPr lang="en-US" dirty="0"/>
           </a:p>
@@ -773,7 +1041,7 @@
           <a:p>
             <a:r>
               <a:rPr lang="en-US" dirty="0"/>
-              <a:t>必ず左（失敗例）から。自分の失敗として話す。うまくいく例だけ見せると、受講者は自分の失敗を言わなくなる。</a:t>
+              <a:t>3分類のうち、非定型の危険性を最も強調する。謝罪文をAIに丸投げして事故った例は、どの業界にもある。ここで「任せてよい度」を判断する感覚を渡す。</a:t>
             </a:r>
             <a:endParaRPr lang="en-US" dirty="0"/>
           </a:p>
@@ -861,7 +1129,7 @@
           <a:p>
             <a:r>
               <a:rPr lang="en-US" dirty="0"/>
-              <a:t>ここから講師は口頭指示のみ。画面を操作するのは必ず受講者。歯がゆくても手を出さない。</a:t>
+              <a:t>5行のうち、3行目（必ず人が見る）が最も重要。これがないテンプレートを社員に渡すと、いつか金額の間違いがそのまま外に出る。</a:t>
             </a:r>
             <a:endParaRPr lang="en-US" dirty="0"/>
           </a:p>
@@ -949,7 +1217,7 @@
           <a:p>
             <a:r>
               <a:rPr lang="en-US" dirty="0"/>
-              <a:t>ここは資料を読み上げない。自分の言葉と、匿名事例で話す。</a:t>
+              <a:t>受講者自身が「自社らしくない」と感じた経験を先に聞き出してから、この失敗例に入る。実感が先にあると、次の改善例の効果が跳ね上がる。</a:t>
             </a:r>
             <a:endParaRPr lang="en-US" dirty="0"/>
           </a:p>
@@ -1037,7 +1305,7 @@
           <a:p>
             <a:r>
               <a:rPr lang="en-US" dirty="0"/>
-              <a:t>その場でカレンダーに入れてもらう。口頭の約束で終わらせない。</a:t>
+              <a:t>この回でいちばん喜ばれる場面。実際に送った文書3通を読ませて、その場で文体が変わるところを見せる。受講者が声を上げることが多い。</a:t>
             </a:r>
             <a:endParaRPr lang="en-US" dirty="0"/>
           </a:p>
@@ -1061,6 +1329,182 @@
             <a:fld id="{F7021451-1387-4CA6-816F-3879F97B5CBC}" type="slidenum">
               <a:rPr lang="en-US"/>
               <a:t>7</a:t>
+            </a:fld>
+            <a:endParaRPr lang="en-US"/>
+          </a:p>
+        </p:txBody>
+      </p:sp>
+    </p:spTree>
+    <p:extLst>
+      <p:ext uri="{BB962C8B-B14F-4D97-AF65-F5344CB8AC3E}">
+        <p14:creationId xmlns:p14="http://schemas.microsoft.com/office/powerpoint/2010/main" val="1024086991"/>
+      </p:ext>
+    </p:extLst>
+  </p:cSld>
+  <p:clrMapOvr>
+    <a:masterClrMapping/>
+  </p:clrMapOvr>
+</p:notes>
+</file>
+
+<file path=ppt/notesSlides/notesSlide8.xml><?xml version="1.0" encoding="utf-8"?>
+<p:notes xmlns:a="http://schemas.openxmlformats.org/drawingml/2006/main" xmlns:r="http://schemas.openxmlformats.org/officeDocument/2006/relationships" xmlns:p="http://schemas.openxmlformats.org/presentationml/2006/main">
+  <p:cSld>
+    <p:spTree>
+      <p:nvGrpSpPr>
+        <p:cNvPr id="1" name=""/>
+        <p:cNvGrpSpPr/>
+        <p:nvPr/>
+      </p:nvGrpSpPr>
+      <p:grpSpPr>
+        <a:xfrm>
+          <a:off x="0" y="0"/>
+          <a:ext cx="0" cy="0"/>
+          <a:chOff x="0" y="0"/>
+          <a:chExt cx="0" cy="0"/>
+        </a:xfrm>
+      </p:grpSpPr>
+      <p:sp>
+        <p:nvSpPr>
+          <p:cNvPr id="2" name="Slide Image Placeholder 1"/>
+          <p:cNvSpPr>
+            <a:spLocks noGrp="1" noRot="1" noChangeAspect="1"/>
+          </p:cNvSpPr>
+          <p:nvPr>
+            <p:ph type="sldImg"/>
+          </p:nvPr>
+        </p:nvSpPr>
+        <p:spPr/>
+      </p:sp>
+      <p:sp>
+        <p:nvSpPr>
+          <p:cNvPr id="3" name="Notes Placeholder 2"/>
+          <p:cNvSpPr>
+            <a:spLocks noGrp="1"/>
+          </p:cNvSpPr>
+          <p:nvPr>
+            <p:ph type="body" idx="1"/>
+          </p:nvPr>
+        </p:nvSpPr>
+        <p:spPr/>
+        <p:txBody>
+          <a:bodyPr/>
+          <a:lstStyle/>
+          <a:p>
+            <a:r>
+              <a:rPr lang="en-US" dirty="0"/>
+              <a:t>1つ目が最頻。「まだ早い」の裏には、社員に馬鹿にされたくない気持ちがあることが多い。だから1名だけ、前向きな人に、と絞る。</a:t>
+            </a:r>
+            <a:endParaRPr lang="en-US" dirty="0"/>
+          </a:p>
+        </p:txBody>
+      </p:sp>
+      <p:sp>
+        <p:nvSpPr>
+          <p:cNvPr id="4" name="Slide Number Placeholder 3"/>
+          <p:cNvSpPr>
+            <a:spLocks noGrp="1"/>
+          </p:cNvSpPr>
+          <p:nvPr>
+            <p:ph type="sldNum" sz="quarter" idx="10"/>
+          </p:nvPr>
+        </p:nvSpPr>
+        <p:spPr/>
+        <p:txBody>
+          <a:bodyPr/>
+          <a:lstStyle/>
+          <a:p>
+            <a:fld id="{F7021451-1387-4CA6-816F-3879F97B5CBC}" type="slidenum">
+              <a:rPr lang="en-US"/>
+              <a:t>8</a:t>
+            </a:fld>
+            <a:endParaRPr lang="en-US"/>
+          </a:p>
+        </p:txBody>
+      </p:sp>
+    </p:spTree>
+    <p:extLst>
+      <p:ext uri="{BB962C8B-B14F-4D97-AF65-F5344CB8AC3E}">
+        <p14:creationId xmlns:p14="http://schemas.microsoft.com/office/powerpoint/2010/main" val="1024086991"/>
+      </p:ext>
+    </p:extLst>
+  </p:cSld>
+  <p:clrMapOvr>
+    <a:masterClrMapping/>
+  </p:clrMapOvr>
+</p:notes>
+</file>
+
+<file path=ppt/notesSlides/notesSlide9.xml><?xml version="1.0" encoding="utf-8"?>
+<p:notes xmlns:a="http://schemas.openxmlformats.org/drawingml/2006/main" xmlns:r="http://schemas.openxmlformats.org/officeDocument/2006/relationships" xmlns:p="http://schemas.openxmlformats.org/presentationml/2006/main">
+  <p:cSld>
+    <p:spTree>
+      <p:nvGrpSpPr>
+        <p:cNvPr id="1" name=""/>
+        <p:cNvGrpSpPr/>
+        <p:nvPr/>
+      </p:nvGrpSpPr>
+      <p:grpSpPr>
+        <a:xfrm>
+          <a:off x="0" y="0"/>
+          <a:ext cx="0" cy="0"/>
+          <a:chOff x="0" y="0"/>
+          <a:chExt cx="0" cy="0"/>
+        </a:xfrm>
+      </p:grpSpPr>
+      <p:sp>
+        <p:nvSpPr>
+          <p:cNvPr id="2" name="Slide Image Placeholder 1"/>
+          <p:cNvSpPr>
+            <a:spLocks noGrp="1" noRot="1" noChangeAspect="1"/>
+          </p:cNvSpPr>
+          <p:nvPr>
+            <p:ph type="sldImg"/>
+          </p:nvPr>
+        </p:nvSpPr>
+        <p:spPr/>
+      </p:sp>
+      <p:sp>
+        <p:nvSpPr>
+          <p:cNvPr id="3" name="Notes Placeholder 2"/>
+          <p:cNvSpPr>
+            <a:spLocks noGrp="1"/>
+          </p:cNvSpPr>
+          <p:nvPr>
+            <p:ph type="body" idx="1"/>
+          </p:nvPr>
+        </p:nvSpPr>
+        <p:spPr/>
+        <p:txBody>
+          <a:bodyPr/>
+          <a:lstStyle/>
+          <a:p>
+            <a:r>
+              <a:rPr lang="en-US" dirty="0"/>
+              <a:t>3つ目（渡し方の一言）を飛ばさない。ここを飛ばすと、テンプレートは共有フォルダに置かれたまま誰にも使われない。</a:t>
+            </a:r>
+            <a:endParaRPr lang="en-US" dirty="0"/>
+          </a:p>
+        </p:txBody>
+      </p:sp>
+      <p:sp>
+        <p:nvSpPr>
+          <p:cNvPr id="4" name="Slide Number Placeholder 3"/>
+          <p:cNvSpPr>
+            <a:spLocks noGrp="1"/>
+          </p:cNvSpPr>
+          <p:nvPr>
+            <p:ph type="sldNum" sz="quarter" idx="10"/>
+          </p:nvPr>
+        </p:nvSpPr>
+        <p:spPr/>
+        <p:txBody>
+          <a:bodyPr/>
+          <a:lstStyle/>
+          <a:p>
+            <a:fld id="{F7021451-1387-4CA6-816F-3879F97B5CBC}" type="slidenum">
+              <a:rPr lang="en-US"/>
+              <a:t>9</a:t>
             </a:fld>
             <a:endParaRPr lang="en-US"/>
           </a:p>
@@ -1680,6 +2124,1284 @@
 </p:sld>
 </file>
 
+<file path=ppt/slides/slide10.xml><?xml version="1.0" encoding="utf-8"?>
+<p:sld xmlns:a="http://schemas.openxmlformats.org/drawingml/2006/main" xmlns:r="http://schemas.openxmlformats.org/officeDocument/2006/relationships" xmlns:p="http://schemas.openxmlformats.org/presentationml/2006/main">
+  <p:cSld name="Slide 10">
+    <p:bg>
+      <p:bgPr>
+        <a:solidFill>
+          <a:srgbClr val="F6F2EA"/>
+        </a:solidFill>
+      </p:bgPr>
+    </p:bg>
+    <p:spTree>
+      <p:nvGrpSpPr>
+        <p:cNvPr id="1" name=""/>
+        <p:cNvGrpSpPr/>
+        <p:nvPr/>
+      </p:nvGrpSpPr>
+      <p:grpSpPr>
+        <a:xfrm>
+          <a:off x="0" y="0"/>
+          <a:ext cx="0" cy="0"/>
+          <a:chOff x="0" y="0"/>
+          <a:chExt cx="0" cy="0"/>
+        </a:xfrm>
+      </p:grpSpPr>
+      <p:sp>
+        <p:nvSpPr>
+          <p:cNvPr id="2" name="Text 0"/>
+          <p:cNvSpPr txBox="1"/>
+          <p:nvPr/>
+        </p:nvSpPr>
+        <p:spPr>
+          <a:xfrm>
+            <a:off x="777240" y="566928"/>
+            <a:ext cx="10607040" cy="274320"/>
+          </a:xfrm>
+          <a:prstGeom prst="rect">
+            <a:avLst/>
+          </a:prstGeom>
+          <a:noFill/>
+          <a:ln/>
+        </p:spPr>
+        <p:txBody>
+          <a:bodyPr wrap="square" lIns="0" tIns="0" rIns="0" bIns="0" rtlCol="0" anchor="ctr"/>
+          <a:lstStyle/>
+          <a:p>
+            <a:pPr indent="0" marL="0">
+              <a:buNone/>
+            </a:pPr>
+            <a:r>
+              <a:rPr lang="en-US" sz="1100" b="1" spc="250" kern="0" dirty="0">
+                <a:solidFill>
+                  <a:srgbClr val="3B6B4A"/>
+                </a:solidFill>
+                <a:latin typeface="Yu Gothic" pitchFamily="34" charset="0"/>
+                <a:ea typeface="Yu Gothic" pitchFamily="34" charset="-122"/>
+                <a:cs typeface="Yu Gothic" pitchFamily="34" charset="-120"/>
+              </a:rPr>
+              <a:t>業務への組み込み</a:t>
+            </a:r>
+            <a:endParaRPr lang="en-US" sz="1100" dirty="0"/>
+          </a:p>
+        </p:txBody>
+      </p:sp>
+      <p:sp>
+        <p:nvSpPr>
+          <p:cNvPr id="3" name="Text 1"/>
+          <p:cNvSpPr txBox="1"/>
+          <p:nvPr/>
+        </p:nvSpPr>
+        <p:spPr>
+          <a:xfrm>
+            <a:off x="777240" y="896112"/>
+            <a:ext cx="10607040" cy="640080"/>
+          </a:xfrm>
+          <a:prstGeom prst="rect">
+            <a:avLst/>
+          </a:prstGeom>
+          <a:noFill/>
+          <a:ln/>
+        </p:spPr>
+        <p:txBody>
+          <a:bodyPr wrap="square" lIns="0" tIns="0" rIns="0" bIns="0" rtlCol="0" anchor="ctr"/>
+          <a:lstStyle/>
+          <a:p>
+            <a:pPr indent="0" marL="0">
+              <a:buNone/>
+            </a:pPr>
+            <a:r>
+              <a:rPr lang="en-US" sz="2600" b="1" dirty="0">
+                <a:solidFill>
+                  <a:srgbClr val="23201D"/>
+                </a:solidFill>
+                <a:latin typeface="Yu Gothic" pitchFamily="34" charset="0"/>
+                <a:ea typeface="Yu Gothic" pitchFamily="34" charset="-122"/>
+                <a:cs typeface="Yu Gothic" pitchFamily="34" charset="-120"/>
+              </a:rPr>
+              <a:t>帰る前に決めること</a:t>
+            </a:r>
+            <a:endParaRPr lang="en-US" sz="2600" dirty="0"/>
+          </a:p>
+        </p:txBody>
+      </p:sp>
+      <p:sp>
+        <p:nvSpPr>
+          <p:cNvPr id="4" name="Text 2"/>
+          <p:cNvSpPr txBox="1"/>
+          <p:nvPr/>
+        </p:nvSpPr>
+        <p:spPr>
+          <a:xfrm>
+            <a:off x="777240" y="1572768"/>
+            <a:ext cx="10607040" cy="320040"/>
+          </a:xfrm>
+          <a:prstGeom prst="rect">
+            <a:avLst/>
+          </a:prstGeom>
+          <a:noFill/>
+          <a:ln/>
+        </p:spPr>
+        <p:txBody>
+          <a:bodyPr wrap="square" lIns="0" tIns="0" rIns="0" bIns="0" rtlCol="0" anchor="ctr"/>
+          <a:lstStyle/>
+          <a:p>
+            <a:pPr indent="0" marL="0">
+              <a:buNone/>
+            </a:pPr>
+            <a:r>
+              <a:rPr lang="en-US" sz="1250" b="1" dirty="0">
+                <a:solidFill>
+                  <a:srgbClr val="3B6B4A"/>
+                </a:solidFill>
+                <a:latin typeface="Yu Gothic" pitchFamily="34" charset="0"/>
+                <a:ea typeface="Yu Gothic" pitchFamily="34" charset="-122"/>
+                <a:cs typeface="Yu Gothic" pitchFamily="34" charset="-120"/>
+              </a:rPr>
+              <a:t>ここを決めないと、持ち帰っても使われません。紙に書きます。</a:t>
+            </a:r>
+            <a:endParaRPr lang="en-US" sz="1250" dirty="0"/>
+          </a:p>
+        </p:txBody>
+      </p:sp>
+      <p:sp>
+        <p:nvSpPr>
+          <p:cNvPr id="5" name="Shape 3"/>
+          <p:cNvSpPr/>
+          <p:nvPr/>
+        </p:nvSpPr>
+        <p:spPr>
+          <a:xfrm>
+            <a:off x="777240" y="2103120"/>
+            <a:ext cx="10607040" cy="914400"/>
+          </a:xfrm>
+          <a:prstGeom prst="rect">
+            <a:avLst/>
+          </a:prstGeom>
+          <a:solidFill>
+            <a:srgbClr val="FFFFFF"/>
+          </a:solidFill>
+          <a:ln w="12700">
+            <a:solidFill>
+              <a:srgbClr val="EDE7DB"/>
+            </a:solidFill>
+            <a:prstDash val="solid"/>
+          </a:ln>
+        </p:spPr>
+      </p:sp>
+      <p:sp>
+        <p:nvSpPr>
+          <p:cNvPr id="6" name="Shape 4"/>
+          <p:cNvSpPr/>
+          <p:nvPr/>
+        </p:nvSpPr>
+        <p:spPr>
+          <a:xfrm>
+            <a:off x="777240" y="2103120"/>
+            <a:ext cx="54864" cy="914400"/>
+          </a:xfrm>
+          <a:prstGeom prst="rect">
+            <a:avLst/>
+          </a:prstGeom>
+          <a:solidFill>
+            <a:srgbClr val="3B6B4A"/>
+          </a:solidFill>
+          <a:ln w="12700">
+            <a:solidFill>
+              <a:srgbClr val="333333"/>
+            </a:solidFill>
+            <a:prstDash val="solid"/>
+          </a:ln>
+        </p:spPr>
+      </p:sp>
+      <p:sp>
+        <p:nvSpPr>
+          <p:cNvPr id="7" name="Text 5"/>
+          <p:cNvSpPr txBox="1"/>
+          <p:nvPr/>
+        </p:nvSpPr>
+        <p:spPr>
+          <a:xfrm>
+            <a:off x="1143000" y="2176272"/>
+            <a:ext cx="2757830" cy="768096"/>
+          </a:xfrm>
+          <a:prstGeom prst="rect">
+            <a:avLst/>
+          </a:prstGeom>
+          <a:noFill/>
+          <a:ln/>
+        </p:spPr>
+        <p:txBody>
+          <a:bodyPr wrap="square" lIns="0" tIns="0" rIns="0" bIns="0" rtlCol="0" anchor="ctr"/>
+          <a:lstStyle/>
+          <a:p>
+            <a:pPr indent="0" marL="0">
+              <a:buNone/>
+            </a:pPr>
+            <a:r>
+              <a:rPr lang="en-US" sz="1400" b="1" dirty="0">
+                <a:solidFill>
+                  <a:srgbClr val="3B6B4A"/>
+                </a:solidFill>
+                <a:latin typeface="Yu Gothic" pitchFamily="34" charset="0"/>
+                <a:ea typeface="Yu Gothic" pitchFamily="34" charset="-122"/>
+                <a:cs typeface="Yu Gothic" pitchFamily="34" charset="-120"/>
+              </a:rPr>
+              <a:t>誰に渡すか</a:t>
+            </a:r>
+            <a:endParaRPr lang="en-US" sz="1400" dirty="0"/>
+          </a:p>
+        </p:txBody>
+      </p:sp>
+      <p:sp>
+        <p:nvSpPr>
+          <p:cNvPr id="8" name="Text 6"/>
+          <p:cNvSpPr txBox="1"/>
+          <p:nvPr/>
+        </p:nvSpPr>
+        <p:spPr>
+          <a:xfrm>
+            <a:off x="4006901" y="2176272"/>
+            <a:ext cx="7011619" cy="768096"/>
+          </a:xfrm>
+          <a:prstGeom prst="rect">
+            <a:avLst/>
+          </a:prstGeom>
+          <a:noFill/>
+          <a:ln/>
+        </p:spPr>
+        <p:txBody>
+          <a:bodyPr wrap="square" lIns="0" tIns="0" rIns="0" bIns="0" rtlCol="0" anchor="ctr"/>
+          <a:lstStyle/>
+          <a:p>
+            <a:pPr indent="0" marL="0">
+              <a:lnSpc>
+                <a:spcPct val="130000"/>
+              </a:lnSpc>
+              <a:buNone/>
+            </a:pPr>
+            <a:r>
+              <a:rPr lang="en-US" sz="1250" dirty="0">
+                <a:solidFill>
+                  <a:srgbClr val="3F3933"/>
+                </a:solidFill>
+                <a:latin typeface="Yu Gothic" pitchFamily="34" charset="0"/>
+                <a:ea typeface="Yu Gothic" pitchFamily="34" charset="-122"/>
+                <a:cs typeface="Yu Gothic" pitchFamily="34" charset="-120"/>
+              </a:rPr>
+              <a:t>実名で決めます。前向きな方1名から</a:t>
+            </a:r>
+            <a:endParaRPr lang="en-US" sz="1250" dirty="0"/>
+          </a:p>
+        </p:txBody>
+      </p:sp>
+      <p:sp>
+        <p:nvSpPr>
+          <p:cNvPr id="9" name="Shape 7"/>
+          <p:cNvSpPr/>
+          <p:nvPr/>
+        </p:nvSpPr>
+        <p:spPr>
+          <a:xfrm>
+            <a:off x="777240" y="3154680"/>
+            <a:ext cx="10607040" cy="914400"/>
+          </a:xfrm>
+          <a:prstGeom prst="rect">
+            <a:avLst/>
+          </a:prstGeom>
+          <a:solidFill>
+            <a:srgbClr val="FFFFFF"/>
+          </a:solidFill>
+          <a:ln w="12700">
+            <a:solidFill>
+              <a:srgbClr val="EDE7DB"/>
+            </a:solidFill>
+            <a:prstDash val="solid"/>
+          </a:ln>
+        </p:spPr>
+      </p:sp>
+      <p:sp>
+        <p:nvSpPr>
+          <p:cNvPr id="10" name="Shape 8"/>
+          <p:cNvSpPr/>
+          <p:nvPr/>
+        </p:nvSpPr>
+        <p:spPr>
+          <a:xfrm>
+            <a:off x="777240" y="3154680"/>
+            <a:ext cx="54864" cy="914400"/>
+          </a:xfrm>
+          <a:prstGeom prst="rect">
+            <a:avLst/>
+          </a:prstGeom>
+          <a:solidFill>
+            <a:srgbClr val="3B6B4A"/>
+          </a:solidFill>
+          <a:ln w="12700">
+            <a:solidFill>
+              <a:srgbClr val="333333"/>
+            </a:solidFill>
+            <a:prstDash val="solid"/>
+          </a:ln>
+        </p:spPr>
+      </p:sp>
+      <p:sp>
+        <p:nvSpPr>
+          <p:cNvPr id="11" name="Text 9"/>
+          <p:cNvSpPr txBox="1"/>
+          <p:nvPr/>
+        </p:nvSpPr>
+        <p:spPr>
+          <a:xfrm>
+            <a:off x="1143000" y="3227832"/>
+            <a:ext cx="2757830" cy="768096"/>
+          </a:xfrm>
+          <a:prstGeom prst="rect">
+            <a:avLst/>
+          </a:prstGeom>
+          <a:noFill/>
+          <a:ln/>
+        </p:spPr>
+        <p:txBody>
+          <a:bodyPr wrap="square" lIns="0" tIns="0" rIns="0" bIns="0" rtlCol="0" anchor="ctr"/>
+          <a:lstStyle/>
+          <a:p>
+            <a:pPr indent="0" marL="0">
+              <a:buNone/>
+            </a:pPr>
+            <a:r>
+              <a:rPr lang="en-US" sz="1400" b="1" dirty="0">
+                <a:solidFill>
+                  <a:srgbClr val="3B6B4A"/>
+                </a:solidFill>
+                <a:latin typeface="Yu Gothic" pitchFamily="34" charset="0"/>
+                <a:ea typeface="Yu Gothic" pitchFamily="34" charset="-122"/>
+                <a:cs typeface="Yu Gothic" pitchFamily="34" charset="-120"/>
+              </a:rPr>
+              <a:t>いつ渡すか</a:t>
+            </a:r>
+            <a:endParaRPr lang="en-US" sz="1400" dirty="0"/>
+          </a:p>
+        </p:txBody>
+      </p:sp>
+      <p:sp>
+        <p:nvSpPr>
+          <p:cNvPr id="12" name="Text 10"/>
+          <p:cNvSpPr txBox="1"/>
+          <p:nvPr/>
+        </p:nvSpPr>
+        <p:spPr>
+          <a:xfrm>
+            <a:off x="4006901" y="3227832"/>
+            <a:ext cx="7011619" cy="768096"/>
+          </a:xfrm>
+          <a:prstGeom prst="rect">
+            <a:avLst/>
+          </a:prstGeom>
+          <a:noFill/>
+          <a:ln/>
+        </p:spPr>
+        <p:txBody>
+          <a:bodyPr wrap="square" lIns="0" tIns="0" rIns="0" bIns="0" rtlCol="0" anchor="ctr"/>
+          <a:lstStyle/>
+          <a:p>
+            <a:pPr indent="0" marL="0">
+              <a:lnSpc>
+                <a:spcPct val="130000"/>
+              </a:lnSpc>
+              <a:buNone/>
+            </a:pPr>
+            <a:r>
+              <a:rPr lang="en-US" sz="1250" dirty="0">
+                <a:solidFill>
+                  <a:srgbClr val="3F3933"/>
+                </a:solidFill>
+                <a:latin typeface="Yu Gothic" pitchFamily="34" charset="0"/>
+                <a:ea typeface="Yu Gothic" pitchFamily="34" charset="-122"/>
+                <a:cs typeface="Yu Gothic" pitchFamily="34" charset="-120"/>
+              </a:rPr>
+              <a:t>来週中。渡すときの一言も、その場で決めます</a:t>
+            </a:r>
+            <a:endParaRPr lang="en-US" sz="1250" dirty="0"/>
+          </a:p>
+        </p:txBody>
+      </p:sp>
+      <p:sp>
+        <p:nvSpPr>
+          <p:cNvPr id="13" name="Shape 11"/>
+          <p:cNvSpPr/>
+          <p:nvPr/>
+        </p:nvSpPr>
+        <p:spPr>
+          <a:xfrm>
+            <a:off x="777240" y="4206240"/>
+            <a:ext cx="10607040" cy="914400"/>
+          </a:xfrm>
+          <a:prstGeom prst="rect">
+            <a:avLst/>
+          </a:prstGeom>
+          <a:solidFill>
+            <a:srgbClr val="FFFFFF"/>
+          </a:solidFill>
+          <a:ln w="12700">
+            <a:solidFill>
+              <a:srgbClr val="EDE7DB"/>
+            </a:solidFill>
+            <a:prstDash val="solid"/>
+          </a:ln>
+        </p:spPr>
+      </p:sp>
+      <p:sp>
+        <p:nvSpPr>
+          <p:cNvPr id="14" name="Shape 12"/>
+          <p:cNvSpPr/>
+          <p:nvPr/>
+        </p:nvSpPr>
+        <p:spPr>
+          <a:xfrm>
+            <a:off x="777240" y="4206240"/>
+            <a:ext cx="54864" cy="914400"/>
+          </a:xfrm>
+          <a:prstGeom prst="rect">
+            <a:avLst/>
+          </a:prstGeom>
+          <a:solidFill>
+            <a:srgbClr val="3B6B4A"/>
+          </a:solidFill>
+          <a:ln w="12700">
+            <a:solidFill>
+              <a:srgbClr val="333333"/>
+            </a:solidFill>
+            <a:prstDash val="solid"/>
+          </a:ln>
+        </p:spPr>
+      </p:sp>
+      <p:sp>
+        <p:nvSpPr>
+          <p:cNvPr id="15" name="Text 13"/>
+          <p:cNvSpPr txBox="1"/>
+          <p:nvPr/>
+        </p:nvSpPr>
+        <p:spPr>
+          <a:xfrm>
+            <a:off x="1143000" y="4279392"/>
+            <a:ext cx="2757830" cy="768096"/>
+          </a:xfrm>
+          <a:prstGeom prst="rect">
+            <a:avLst/>
+          </a:prstGeom>
+          <a:noFill/>
+          <a:ln/>
+        </p:spPr>
+        <p:txBody>
+          <a:bodyPr wrap="square" lIns="0" tIns="0" rIns="0" bIns="0" rtlCol="0" anchor="ctr"/>
+          <a:lstStyle/>
+          <a:p>
+            <a:pPr indent="0" marL="0">
+              <a:buNone/>
+            </a:pPr>
+            <a:r>
+              <a:rPr lang="en-US" sz="1400" b="1" dirty="0">
+                <a:solidFill>
+                  <a:srgbClr val="3B6B4A"/>
+                </a:solidFill>
+                <a:latin typeface="Yu Gothic" pitchFamily="34" charset="0"/>
+                <a:ea typeface="Yu Gothic" pitchFamily="34" charset="-122"/>
+                <a:cs typeface="Yu Gothic" pitchFamily="34" charset="-120"/>
+              </a:rPr>
+              <a:t>どう聞き返すか</a:t>
+            </a:r>
+            <a:endParaRPr lang="en-US" sz="1400" dirty="0"/>
+          </a:p>
+        </p:txBody>
+      </p:sp>
+      <p:sp>
+        <p:nvSpPr>
+          <p:cNvPr id="16" name="Text 14"/>
+          <p:cNvSpPr txBox="1"/>
+          <p:nvPr/>
+        </p:nvSpPr>
+        <p:spPr>
+          <a:xfrm>
+            <a:off x="4006901" y="4279392"/>
+            <a:ext cx="7011619" cy="768096"/>
+          </a:xfrm>
+          <a:prstGeom prst="rect">
+            <a:avLst/>
+          </a:prstGeom>
+          <a:noFill/>
+          <a:ln/>
+        </p:spPr>
+        <p:txBody>
+          <a:bodyPr wrap="square" lIns="0" tIns="0" rIns="0" bIns="0" rtlCol="0" anchor="ctr"/>
+          <a:lstStyle/>
+          <a:p>
+            <a:pPr indent="0" marL="0">
+              <a:lnSpc>
+                <a:spcPct val="130000"/>
+              </a:lnSpc>
+              <a:buNone/>
+            </a:pPr>
+            <a:r>
+              <a:rPr lang="en-US" sz="1250" dirty="0">
+                <a:solidFill>
+                  <a:srgbClr val="3F3933"/>
+                </a:solidFill>
+                <a:latin typeface="Yu Gothic" pitchFamily="34" charset="0"/>
+                <a:ea typeface="Yu Gothic" pitchFamily="34" charset="-122"/>
+                <a:cs typeface="Yu Gothic" pitchFamily="34" charset="-120"/>
+              </a:rPr>
+              <a:t>「使ってみてどうだった」を1週間後に聞く。感想を第4回に持ってきていただきます</a:t>
+            </a:r>
+            <a:endParaRPr lang="en-US" sz="1250" dirty="0"/>
+          </a:p>
+        </p:txBody>
+      </p:sp>
+      <p:sp>
+        <p:nvSpPr>
+          <p:cNvPr id="17" name="Text 15"/>
+          <p:cNvSpPr txBox="1"/>
+          <p:nvPr/>
+        </p:nvSpPr>
+        <p:spPr>
+          <a:xfrm>
+            <a:off x="777240" y="6382512"/>
+            <a:ext cx="7424928" cy="256032"/>
+          </a:xfrm>
+          <a:prstGeom prst="rect">
+            <a:avLst/>
+          </a:prstGeom>
+          <a:noFill/>
+          <a:ln/>
+        </p:spPr>
+        <p:txBody>
+          <a:bodyPr wrap="square" lIns="0" tIns="0" rIns="0" bIns="0" rtlCol="0" anchor="ctr"/>
+          <a:lstStyle/>
+          <a:p>
+            <a:pPr indent="0" marL="0">
+              <a:buNone/>
+            </a:pPr>
+            <a:r>
+              <a:rPr lang="en-US" sz="900" dirty="0">
+                <a:solidFill>
+                  <a:srgbClr val="8A8177"/>
+                </a:solidFill>
+                <a:latin typeface="Yu Gothic" pitchFamily="34" charset="0"/>
+                <a:ea typeface="Yu Gothic" pitchFamily="34" charset="-122"/>
+                <a:cs typeface="Yu Gothic" pitchFamily="34" charset="-120"/>
+              </a:rPr>
+              <a:t>第3回　文書とコミュニケーションのAI化</a:t>
+            </a:r>
+            <a:endParaRPr lang="en-US" sz="900" dirty="0"/>
+          </a:p>
+        </p:txBody>
+      </p:sp>
+      <p:sp>
+        <p:nvSpPr>
+          <p:cNvPr id="18" name="Text 16"/>
+          <p:cNvSpPr txBox="1"/>
+          <p:nvPr/>
+        </p:nvSpPr>
+        <p:spPr>
+          <a:xfrm>
+            <a:off x="8202168" y="6382512"/>
+            <a:ext cx="3182112" cy="256032"/>
+          </a:xfrm>
+          <a:prstGeom prst="rect">
+            <a:avLst/>
+          </a:prstGeom>
+          <a:noFill/>
+          <a:ln/>
+        </p:spPr>
+        <p:txBody>
+          <a:bodyPr wrap="square" lIns="0" tIns="0" rIns="0" bIns="0" rtlCol="0" anchor="ctr"/>
+          <a:lstStyle/>
+          <a:p>
+            <a:pPr algn="r" indent="0" marL="0">
+              <a:buNone/>
+            </a:pPr>
+            <a:r>
+              <a:rPr lang="en-US" sz="900" dirty="0">
+                <a:solidFill>
+                  <a:srgbClr val="8A8177"/>
+                </a:solidFill>
+                <a:latin typeface="Yu Gothic" pitchFamily="34" charset="0"/>
+                <a:ea typeface="Yu Gothic" pitchFamily="34" charset="-122"/>
+                <a:cs typeface="Yu Gothic" pitchFamily="34" charset="-120"/>
+              </a:rPr>
+              <a:t>組み込み</a:t>
+            </a:r>
+            <a:endParaRPr lang="en-US" sz="900" dirty="0"/>
+          </a:p>
+        </p:txBody>
+      </p:sp>
+    </p:spTree>
+  </p:cSld>
+  <p:clrMapOvr>
+    <a:masterClrMapping/>
+  </p:clrMapOvr>
+</p:sld>
+</file>
+
+<file path=ppt/slides/slide11.xml><?xml version="1.0" encoding="utf-8"?>
+<p:sld xmlns:a="http://schemas.openxmlformats.org/drawingml/2006/main" xmlns:r="http://schemas.openxmlformats.org/officeDocument/2006/relationships" xmlns:p="http://schemas.openxmlformats.org/presentationml/2006/main">
+  <p:cSld name="Slide 11">
+    <p:bg>
+      <p:bgPr>
+        <a:solidFill>
+          <a:srgbClr val="F6F2EA"/>
+        </a:solidFill>
+      </p:bgPr>
+    </p:bg>
+    <p:spTree>
+      <p:nvGrpSpPr>
+        <p:cNvPr id="1" name=""/>
+        <p:cNvGrpSpPr/>
+        <p:nvPr/>
+      </p:nvGrpSpPr>
+      <p:grpSpPr>
+        <a:xfrm>
+          <a:off x="0" y="0"/>
+          <a:ext cx="0" cy="0"/>
+          <a:chOff x="0" y="0"/>
+          <a:chExt cx="0" cy="0"/>
+        </a:xfrm>
+      </p:grpSpPr>
+      <p:sp>
+        <p:nvSpPr>
+          <p:cNvPr id="2" name="Text 0"/>
+          <p:cNvSpPr txBox="1"/>
+          <p:nvPr/>
+        </p:nvSpPr>
+        <p:spPr>
+          <a:xfrm>
+            <a:off x="777240" y="566928"/>
+            <a:ext cx="10607040" cy="274320"/>
+          </a:xfrm>
+          <a:prstGeom prst="rect">
+            <a:avLst/>
+          </a:prstGeom>
+          <a:noFill/>
+          <a:ln/>
+        </p:spPr>
+        <p:txBody>
+          <a:bodyPr wrap="square" lIns="0" tIns="0" rIns="0" bIns="0" rtlCol="0" anchor="ctr"/>
+          <a:lstStyle/>
+          <a:p>
+            <a:pPr indent="0" marL="0">
+              <a:buNone/>
+            </a:pPr>
+            <a:r>
+              <a:rPr lang="en-US" sz="1100" b="1" spc="250" kern="0" dirty="0">
+                <a:solidFill>
+                  <a:srgbClr val="B04A2F"/>
+                </a:solidFill>
+                <a:latin typeface="Yu Gothic" pitchFamily="34" charset="0"/>
+                <a:ea typeface="Yu Gothic" pitchFamily="34" charset="-122"/>
+                <a:cs typeface="Yu Gothic" pitchFamily="34" charset="-120"/>
+              </a:rPr>
+              <a:t>ここだけは</a:t>
+            </a:r>
+            <a:endParaRPr lang="en-US" sz="1100" dirty="0"/>
+          </a:p>
+        </p:txBody>
+      </p:sp>
+      <p:sp>
+        <p:nvSpPr>
+          <p:cNvPr id="3" name="Text 1"/>
+          <p:cNvSpPr txBox="1"/>
+          <p:nvPr/>
+        </p:nvSpPr>
+        <p:spPr>
+          <a:xfrm>
+            <a:off x="777240" y="1097280"/>
+            <a:ext cx="10607040" cy="640080"/>
+          </a:xfrm>
+          <a:prstGeom prst="rect">
+            <a:avLst/>
+          </a:prstGeom>
+          <a:noFill/>
+          <a:ln/>
+        </p:spPr>
+        <p:txBody>
+          <a:bodyPr wrap="square" lIns="0" tIns="0" rIns="0" bIns="0" rtlCol="0" anchor="ctr"/>
+          <a:lstStyle/>
+          <a:p>
+            <a:pPr indent="0" marL="0">
+              <a:buNone/>
+            </a:pPr>
+            <a:r>
+              <a:rPr lang="en-US" sz="2600" b="1" dirty="0">
+                <a:solidFill>
+                  <a:srgbClr val="23201D"/>
+                </a:solidFill>
+                <a:latin typeface="Yu Gothic" pitchFamily="34" charset="0"/>
+                <a:ea typeface="Yu Gothic" pitchFamily="34" charset="-122"/>
+                <a:cs typeface="Yu Gothic" pitchFamily="34" charset="-120"/>
+              </a:rPr>
+              <a:t>この回から、機密資料が出てきます</a:t>
+            </a:r>
+            <a:endParaRPr lang="en-US" sz="2600" dirty="0"/>
+          </a:p>
+        </p:txBody>
+      </p:sp>
+      <p:sp>
+        <p:nvSpPr>
+          <p:cNvPr id="4" name="Shape 2"/>
+          <p:cNvSpPr/>
+          <p:nvPr/>
+        </p:nvSpPr>
+        <p:spPr>
+          <a:xfrm>
+            <a:off x="777240" y="2148840"/>
+            <a:ext cx="64008" cy="2194560"/>
+          </a:xfrm>
+          <a:prstGeom prst="rect">
+            <a:avLst/>
+          </a:prstGeom>
+          <a:solidFill>
+            <a:srgbClr val="B04A2F"/>
+          </a:solidFill>
+          <a:ln w="12700">
+            <a:solidFill>
+              <a:srgbClr val="333333"/>
+            </a:solidFill>
+            <a:prstDash val="solid"/>
+          </a:ln>
+        </p:spPr>
+      </p:sp>
+      <p:sp>
+        <p:nvSpPr>
+          <p:cNvPr id="5" name="Text 3"/>
+          <p:cNvSpPr txBox="1"/>
+          <p:nvPr/>
+        </p:nvSpPr>
+        <p:spPr>
+          <a:xfrm>
+            <a:off x="1188720" y="2148840"/>
+            <a:ext cx="9966960" cy="2194560"/>
+          </a:xfrm>
+          <a:prstGeom prst="rect">
+            <a:avLst/>
+          </a:prstGeom>
+          <a:noFill/>
+          <a:ln/>
+        </p:spPr>
+        <p:txBody>
+          <a:bodyPr wrap="square" lIns="0" tIns="0" rIns="0" bIns="0" rtlCol="0" anchor="ctr"/>
+          <a:lstStyle/>
+          <a:p>
+            <a:pPr indent="0" marL="0">
+              <a:lnSpc>
+                <a:spcPct val="160000"/>
+              </a:lnSpc>
+              <a:buNone/>
+            </a:pPr>
+            <a:r>
+              <a:rPr lang="en-US" sz="1650" dirty="0">
+                <a:solidFill>
+                  <a:srgbClr val="3F3933"/>
+                </a:solidFill>
+                <a:latin typeface="Yu Gothic" pitchFamily="34" charset="0"/>
+                <a:ea typeface="Yu Gothic" pitchFamily="34" charset="-122"/>
+                <a:cs typeface="Yu Gothic" pitchFamily="34" charset="-120"/>
+              </a:rPr>
+              <a:t>録画にどこまで映してよいか、事前に確認してください。「この区間は録画を止めます」という運用にしておくと、受講者は安心して実物を出せます。実物が出るかどうかで、この講座の価値は倍変わります。</a:t>
+            </a:r>
+            <a:endParaRPr lang="en-US" sz="1650" dirty="0"/>
+          </a:p>
+        </p:txBody>
+      </p:sp>
+      <p:sp>
+        <p:nvSpPr>
+          <p:cNvPr id="6" name="Shape 4"/>
+          <p:cNvSpPr/>
+          <p:nvPr/>
+        </p:nvSpPr>
+        <p:spPr>
+          <a:xfrm>
+            <a:off x="777240" y="4709160"/>
+            <a:ext cx="10607040" cy="960120"/>
+          </a:xfrm>
+          <a:prstGeom prst="rect">
+            <a:avLst/>
+          </a:prstGeom>
+          <a:solidFill>
+            <a:srgbClr val="EDE7DB"/>
+          </a:solidFill>
+          <a:ln w="12700">
+            <a:solidFill>
+              <a:srgbClr val="333333"/>
+            </a:solidFill>
+            <a:prstDash val="solid"/>
+          </a:ln>
+        </p:spPr>
+      </p:sp>
+      <p:sp>
+        <p:nvSpPr>
+          <p:cNvPr id="7" name="Text 5"/>
+          <p:cNvSpPr txBox="1"/>
+          <p:nvPr/>
+        </p:nvSpPr>
+        <p:spPr>
+          <a:xfrm>
+            <a:off x="1051560" y="4800600"/>
+            <a:ext cx="1463040" cy="256032"/>
+          </a:xfrm>
+          <a:prstGeom prst="rect">
+            <a:avLst/>
+          </a:prstGeom>
+          <a:noFill/>
+          <a:ln/>
+        </p:spPr>
+        <p:txBody>
+          <a:bodyPr wrap="square" lIns="0" tIns="0" rIns="0" bIns="0" rtlCol="0" anchor="ctr"/>
+          <a:lstStyle/>
+          <a:p>
+            <a:pPr indent="0" marL="0">
+              <a:buNone/>
+            </a:pPr>
+            <a:r>
+              <a:rPr lang="en-US" sz="900" b="1" spc="150" kern="0" dirty="0">
+                <a:solidFill>
+                  <a:srgbClr val="B04A2F"/>
+                </a:solidFill>
+                <a:latin typeface="Yu Gothic" pitchFamily="34" charset="0"/>
+                <a:ea typeface="Yu Gothic" pitchFamily="34" charset="-122"/>
+                <a:cs typeface="Yu Gothic" pitchFamily="34" charset="-120"/>
+              </a:rPr>
+              <a:t>他社では</a:t>
+            </a:r>
+            <a:endParaRPr lang="en-US" sz="900" dirty="0"/>
+          </a:p>
+        </p:txBody>
+      </p:sp>
+      <p:sp>
+        <p:nvSpPr>
+          <p:cNvPr id="8" name="Text 6"/>
+          <p:cNvSpPr txBox="1"/>
+          <p:nvPr/>
+        </p:nvSpPr>
+        <p:spPr>
+          <a:xfrm>
+            <a:off x="1051560" y="5029200"/>
+            <a:ext cx="10058400" cy="566928"/>
+          </a:xfrm>
+          <a:prstGeom prst="rect">
+            <a:avLst/>
+          </a:prstGeom>
+          <a:noFill/>
+          <a:ln/>
+        </p:spPr>
+        <p:txBody>
+          <a:bodyPr wrap="square" lIns="0" tIns="0" rIns="0" bIns="0" rtlCol="0" anchor="ctr"/>
+          <a:lstStyle/>
+          <a:p>
+            <a:pPr indent="0" marL="0">
+              <a:lnSpc>
+                <a:spcPct val="130000"/>
+              </a:lnSpc>
+              <a:buNone/>
+            </a:pPr>
+            <a:r>
+              <a:rPr lang="en-US" sz="1250" dirty="0">
+                <a:solidFill>
+                  <a:srgbClr val="3F3933"/>
+                </a:solidFill>
+                <a:latin typeface="Yu Gothic" pitchFamily="34" charset="0"/>
+                <a:ea typeface="Yu Gothic" pitchFamily="34" charset="-122"/>
+                <a:cs typeface="Yu Gothic" pitchFamily="34" charset="-120"/>
+              </a:rPr>
+              <a:t>ある会社では、議事録を全文書き起こしからではなく、箇条書きメモ＋AIで整形する形に変えました。効果は会議後30分が5分に。ただ、それより大きかったのは「議事録が必ず当日中に出る」ようになったことでした。</a:t>
+            </a:r>
+            <a:endParaRPr lang="en-US" sz="1250" dirty="0"/>
+          </a:p>
+        </p:txBody>
+      </p:sp>
+      <p:sp>
+        <p:nvSpPr>
+          <p:cNvPr id="9" name="Text 7"/>
+          <p:cNvSpPr txBox="1"/>
+          <p:nvPr/>
+        </p:nvSpPr>
+        <p:spPr>
+          <a:xfrm>
+            <a:off x="777240" y="6382512"/>
+            <a:ext cx="7424928" cy="256032"/>
+          </a:xfrm>
+          <a:prstGeom prst="rect">
+            <a:avLst/>
+          </a:prstGeom>
+          <a:noFill/>
+          <a:ln/>
+        </p:spPr>
+        <p:txBody>
+          <a:bodyPr wrap="square" lIns="0" tIns="0" rIns="0" bIns="0" rtlCol="0" anchor="ctr"/>
+          <a:lstStyle/>
+          <a:p>
+            <a:pPr indent="0" marL="0">
+              <a:buNone/>
+            </a:pPr>
+            <a:r>
+              <a:rPr lang="en-US" sz="900" dirty="0">
+                <a:solidFill>
+                  <a:srgbClr val="8A8177"/>
+                </a:solidFill>
+                <a:latin typeface="Yu Gothic" pitchFamily="34" charset="0"/>
+                <a:ea typeface="Yu Gothic" pitchFamily="34" charset="-122"/>
+                <a:cs typeface="Yu Gothic" pitchFamily="34" charset="-120"/>
+              </a:rPr>
+              <a:t>第3回　文書とコミュニケーションのAI化</a:t>
+            </a:r>
+            <a:endParaRPr lang="en-US" sz="900" dirty="0"/>
+          </a:p>
+        </p:txBody>
+      </p:sp>
+      <p:sp>
+        <p:nvSpPr>
+          <p:cNvPr id="10" name="Text 8"/>
+          <p:cNvSpPr txBox="1"/>
+          <p:nvPr/>
+        </p:nvSpPr>
+        <p:spPr>
+          <a:xfrm>
+            <a:off x="8202168" y="6382512"/>
+            <a:ext cx="3182112" cy="256032"/>
+          </a:xfrm>
+          <a:prstGeom prst="rect">
+            <a:avLst/>
+          </a:prstGeom>
+          <a:noFill/>
+          <a:ln/>
+        </p:spPr>
+        <p:txBody>
+          <a:bodyPr wrap="square" lIns="0" tIns="0" rIns="0" bIns="0" rtlCol="0" anchor="ctr"/>
+          <a:lstStyle/>
+          <a:p>
+            <a:pPr algn="r" indent="0" marL="0">
+              <a:buNone/>
+            </a:pPr>
+            <a:r>
+              <a:rPr lang="en-US" sz="900" dirty="0">
+                <a:solidFill>
+                  <a:srgbClr val="8A8177"/>
+                </a:solidFill>
+                <a:latin typeface="Yu Gothic" pitchFamily="34" charset="0"/>
+                <a:ea typeface="Yu Gothic" pitchFamily="34" charset="-122"/>
+                <a:cs typeface="Yu Gothic" pitchFamily="34" charset="-120"/>
+              </a:rPr>
+              <a:t>ここだけは</a:t>
+            </a:r>
+            <a:endParaRPr lang="en-US" sz="900" dirty="0"/>
+          </a:p>
+        </p:txBody>
+      </p:sp>
+    </p:spTree>
+  </p:cSld>
+  <p:clrMapOvr>
+    <a:masterClrMapping/>
+  </p:clrMapOvr>
+</p:sld>
+</file>
+
+<file path=ppt/slides/slide12.xml><?xml version="1.0" encoding="utf-8"?>
+<p:sld xmlns:a="http://schemas.openxmlformats.org/drawingml/2006/main" xmlns:r="http://schemas.openxmlformats.org/officeDocument/2006/relationships" xmlns:p="http://schemas.openxmlformats.org/presentationml/2006/main">
+  <p:cSld name="Slide 12">
+    <p:bg>
+      <p:bgPr>
+        <a:solidFill>
+          <a:srgbClr val="23201D"/>
+        </a:solidFill>
+      </p:bgPr>
+    </p:bg>
+    <p:spTree>
+      <p:nvGrpSpPr>
+        <p:cNvPr id="1" name=""/>
+        <p:cNvGrpSpPr/>
+        <p:nvPr/>
+      </p:nvGrpSpPr>
+      <p:grpSpPr>
+        <a:xfrm>
+          <a:off x="0" y="0"/>
+          <a:ext cx="0" cy="0"/>
+          <a:chOff x="0" y="0"/>
+          <a:chExt cx="0" cy="0"/>
+        </a:xfrm>
+      </p:grpSpPr>
+      <p:sp>
+        <p:nvSpPr>
+          <p:cNvPr id="2" name="Text 0"/>
+          <p:cNvSpPr txBox="1"/>
+          <p:nvPr/>
+        </p:nvSpPr>
+        <p:spPr>
+          <a:xfrm>
+            <a:off x="777240" y="1280160"/>
+            <a:ext cx="10607040" cy="365760"/>
+          </a:xfrm>
+          <a:prstGeom prst="rect">
+            <a:avLst/>
+          </a:prstGeom>
+          <a:noFill/>
+          <a:ln/>
+        </p:spPr>
+        <p:txBody>
+          <a:bodyPr wrap="square" lIns="0" tIns="0" rIns="0" bIns="0" rtlCol="0" anchor="ctr"/>
+          <a:lstStyle/>
+          <a:p>
+            <a:pPr indent="0" marL="0">
+              <a:buNone/>
+            </a:pPr>
+            <a:r>
+              <a:rPr lang="en-US" sz="1200" b="1" spc="300" kern="0" dirty="0">
+                <a:solidFill>
+                  <a:srgbClr val="B04A2F"/>
+                </a:solidFill>
+                <a:latin typeface="Yu Gothic" pitchFamily="34" charset="0"/>
+                <a:ea typeface="Yu Gothic" pitchFamily="34" charset="-122"/>
+                <a:cs typeface="Yu Gothic" pitchFamily="34" charset="-120"/>
+              </a:rPr>
+              <a:t>今日の宿題</a:t>
+            </a:r>
+            <a:endParaRPr lang="en-US" sz="1200" dirty="0"/>
+          </a:p>
+        </p:txBody>
+      </p:sp>
+      <p:sp>
+        <p:nvSpPr>
+          <p:cNvPr id="3" name="Text 1"/>
+          <p:cNvSpPr txBox="1"/>
+          <p:nvPr/>
+        </p:nvSpPr>
+        <p:spPr>
+          <a:xfrm>
+            <a:off x="777240" y="1691640"/>
+            <a:ext cx="10607040" cy="640080"/>
+          </a:xfrm>
+          <a:prstGeom prst="rect">
+            <a:avLst/>
+          </a:prstGeom>
+          <a:noFill/>
+          <a:ln/>
+        </p:spPr>
+        <p:txBody>
+          <a:bodyPr wrap="square" lIns="0" tIns="0" rIns="0" bIns="0" rtlCol="0" anchor="ctr"/>
+          <a:lstStyle/>
+          <a:p>
+            <a:pPr indent="0" marL="0">
+              <a:buNone/>
+            </a:pPr>
+            <a:r>
+              <a:rPr lang="en-US" sz="3200" b="1" dirty="0">
+                <a:solidFill>
+                  <a:srgbClr val="FFFFFF"/>
+                </a:solidFill>
+                <a:latin typeface="Yu Gothic" pitchFamily="34" charset="0"/>
+                <a:ea typeface="Yu Gothic" pitchFamily="34" charset="-122"/>
+                <a:cs typeface="Yu Gothic" pitchFamily="34" charset="-120"/>
+              </a:rPr>
+              <a:t>ひとつだけ</a:t>
+            </a:r>
+            <a:endParaRPr lang="en-US" sz="3200" dirty="0"/>
+          </a:p>
+        </p:txBody>
+      </p:sp>
+      <p:sp>
+        <p:nvSpPr>
+          <p:cNvPr id="4" name="Shape 2"/>
+          <p:cNvSpPr/>
+          <p:nvPr/>
+        </p:nvSpPr>
+        <p:spPr>
+          <a:xfrm>
+            <a:off x="777240" y="2651760"/>
+            <a:ext cx="10607040" cy="1371600"/>
+          </a:xfrm>
+          <a:prstGeom prst="rect">
+            <a:avLst/>
+          </a:prstGeom>
+          <a:solidFill>
+            <a:srgbClr val="2E2A26"/>
+          </a:solidFill>
+          <a:ln w="12700">
+            <a:solidFill>
+              <a:srgbClr val="B04A2F"/>
+            </a:solidFill>
+            <a:prstDash val="solid"/>
+          </a:ln>
+        </p:spPr>
+      </p:sp>
+      <p:sp>
+        <p:nvSpPr>
+          <p:cNvPr id="5" name="Text 3"/>
+          <p:cNvSpPr txBox="1"/>
+          <p:nvPr/>
+        </p:nvSpPr>
+        <p:spPr>
+          <a:xfrm>
+            <a:off x="1234440" y="2743200"/>
+            <a:ext cx="9692640" cy="1188720"/>
+          </a:xfrm>
+          <a:prstGeom prst="rect">
+            <a:avLst/>
+          </a:prstGeom>
+          <a:noFill/>
+          <a:ln/>
+        </p:spPr>
+        <p:txBody>
+          <a:bodyPr wrap="square" lIns="0" tIns="0" rIns="0" bIns="0" rtlCol="0" anchor="ctr"/>
+          <a:lstStyle/>
+          <a:p>
+            <a:pPr indent="0" marL="0">
+              <a:lnSpc>
+                <a:spcPct val="140000"/>
+              </a:lnSpc>
+              <a:buNone/>
+            </a:pPr>
+            <a:r>
+              <a:rPr lang="en-US" sz="1900" b="1" dirty="0">
+                <a:solidFill>
+                  <a:srgbClr val="FFFFFF"/>
+                </a:solidFill>
+                <a:latin typeface="Yu Gothic" pitchFamily="34" charset="0"/>
+                <a:ea typeface="Yu Gothic" pitchFamily="34" charset="-122"/>
+                <a:cs typeface="Yu Gothic" pitchFamily="34" charset="-120"/>
+              </a:rPr>
+              <a:t>テンプレート1本を社員1名に渡し、実際に使ってもらって感想を聞いてくる。</a:t>
+            </a:r>
+            <a:endParaRPr lang="en-US" sz="1900" dirty="0"/>
+          </a:p>
+        </p:txBody>
+      </p:sp>
+      <p:sp>
+        <p:nvSpPr>
+          <p:cNvPr id="6" name="Text 4"/>
+          <p:cNvSpPr txBox="1"/>
+          <p:nvPr/>
+        </p:nvSpPr>
+        <p:spPr>
+          <a:xfrm>
+            <a:off x="777240" y="4297680"/>
+            <a:ext cx="10607040" cy="274320"/>
+          </a:xfrm>
+          <a:prstGeom prst="rect">
+            <a:avLst/>
+          </a:prstGeom>
+          <a:noFill/>
+          <a:ln/>
+        </p:spPr>
+        <p:txBody>
+          <a:bodyPr wrap="square" lIns="0" tIns="0" rIns="0" bIns="0" rtlCol="0" anchor="ctr"/>
+          <a:lstStyle/>
+          <a:p>
+            <a:pPr indent="0" marL="0">
+              <a:buNone/>
+            </a:pPr>
+            <a:r>
+              <a:rPr lang="en-US" sz="1000" b="1" spc="200" kern="0" dirty="0">
+                <a:solidFill>
+                  <a:srgbClr val="B04A2F"/>
+                </a:solidFill>
+                <a:latin typeface="Yu Gothic" pitchFamily="34" charset="0"/>
+                <a:ea typeface="Yu Gothic" pitchFamily="34" charset="-122"/>
+                <a:cs typeface="Yu Gothic" pitchFamily="34" charset="-120"/>
+              </a:rPr>
+              <a:t>なぜこの宿題か</a:t>
+            </a:r>
+            <a:endParaRPr lang="en-US" sz="1000" dirty="0"/>
+          </a:p>
+        </p:txBody>
+      </p:sp>
+      <p:sp>
+        <p:nvSpPr>
+          <p:cNvPr id="7" name="Text 5"/>
+          <p:cNvSpPr txBox="1"/>
+          <p:nvPr/>
+        </p:nvSpPr>
+        <p:spPr>
+          <a:xfrm>
+            <a:off x="777240" y="4572000"/>
+            <a:ext cx="9546336" cy="914400"/>
+          </a:xfrm>
+          <a:prstGeom prst="rect">
+            <a:avLst/>
+          </a:prstGeom>
+          <a:noFill/>
+          <a:ln/>
+        </p:spPr>
+        <p:txBody>
+          <a:bodyPr wrap="square" lIns="0" tIns="0" rIns="0" bIns="0" rtlCol="0" anchor="ctr"/>
+          <a:lstStyle/>
+          <a:p>
+            <a:pPr indent="0" marL="0">
+              <a:lnSpc>
+                <a:spcPct val="145000"/>
+              </a:lnSpc>
+              <a:buNone/>
+            </a:pPr>
+            <a:r>
+              <a:rPr lang="en-US" sz="1350" dirty="0">
+                <a:solidFill>
+                  <a:srgbClr val="CFC6B8"/>
+                </a:solidFill>
+                <a:latin typeface="Yu Gothic" pitchFamily="34" charset="0"/>
+                <a:ea typeface="Yu Gothic" pitchFamily="34" charset="-122"/>
+                <a:cs typeface="Yu Gothic" pitchFamily="34" charset="-120"/>
+              </a:rPr>
+              <a:t>社員の反応が、第6回のお披露目の材料になります。うまくいかなかった場合こそ貴重です。何が使いにくかったのかを、そのまま聞いてきてください。</a:t>
+            </a:r>
+            <a:endParaRPr lang="en-US" sz="1350" dirty="0"/>
+          </a:p>
+        </p:txBody>
+      </p:sp>
+      <p:sp>
+        <p:nvSpPr>
+          <p:cNvPr id="8" name="Text 6"/>
+          <p:cNvSpPr txBox="1"/>
+          <p:nvPr/>
+        </p:nvSpPr>
+        <p:spPr>
+          <a:xfrm>
+            <a:off x="777240" y="6382512"/>
+            <a:ext cx="10607040" cy="256032"/>
+          </a:xfrm>
+          <a:prstGeom prst="rect">
+            <a:avLst/>
+          </a:prstGeom>
+          <a:noFill/>
+          <a:ln/>
+        </p:spPr>
+        <p:txBody>
+          <a:bodyPr wrap="square" lIns="0" tIns="0" rIns="0" bIns="0" rtlCol="0" anchor="ctr"/>
+          <a:lstStyle/>
+          <a:p>
+            <a:pPr indent="0" marL="0">
+              <a:buNone/>
+            </a:pPr>
+            <a:r>
+              <a:rPr lang="en-US" sz="900" dirty="0">
+                <a:solidFill>
+                  <a:srgbClr val="6E6558"/>
+                </a:solidFill>
+                <a:latin typeface="Yu Gothic" pitchFamily="34" charset="0"/>
+                <a:ea typeface="Yu Gothic" pitchFamily="34" charset="-122"/>
+                <a:cs typeface="Yu Gothic" pitchFamily="34" charset="-120"/>
+              </a:rPr>
+              <a:t>第3回　文書とコミュニケーションのAI化</a:t>
+            </a:r>
+            <a:endParaRPr lang="en-US" sz="900" dirty="0"/>
+          </a:p>
+        </p:txBody>
+      </p:sp>
+    </p:spTree>
+  </p:cSld>
+  <p:clrMapOvr>
+    <a:masterClrMapping/>
+  </p:clrMapOvr>
+</p:sld>
+</file>
+
 <file path=ppt/slides/slide2.xml><?xml version="1.0" encoding="utf-8"?>
 <p:sld xmlns:a="http://schemas.openxmlformats.org/drawingml/2006/main" xmlns:r="http://schemas.openxmlformats.org/officeDocument/2006/relationships" xmlns:p="http://schemas.openxmlformats.org/presentationml/2006/main">
   <p:cSld name="Slide 2">
@@ -1712,7 +3434,7 @@
         </p:nvSpPr>
         <p:spPr>
           <a:xfrm>
-            <a:off x="777240" y="777240"/>
+            <a:off x="777240" y="566928"/>
             <a:ext cx="10607040" cy="274320"/>
           </a:xfrm>
           <a:prstGeom prst="rect">
@@ -1737,7 +3459,7 @@
                 <a:ea typeface="Yu Gothic" pitchFamily="34" charset="-122"/>
                 <a:cs typeface="Yu Gothic" pitchFamily="34" charset="-120"/>
               </a:rPr>
-              <a:t>今日のゴール</a:t>
+              <a:t>今日の出発点</a:t>
             </a:r>
             <a:endParaRPr lang="en-US" sz="1100" dirty="0"/>
           </a:p>
@@ -1751,27 +3473,24 @@
         </p:nvSpPr>
         <p:spPr>
           <a:xfrm>
-            <a:off x="777240" y="1280160"/>
-            <a:ext cx="9758477" cy="1828800"/>
-          </a:xfrm>
-          <a:prstGeom prst="rect">
-            <a:avLst/>
-          </a:prstGeom>
-          <a:noFill/>
-          <a:ln/>
-        </p:spPr>
-        <p:txBody>
-          <a:bodyPr wrap="square" lIns="0" tIns="0" rIns="0" bIns="0" rtlCol="0" anchor="ctr"/>
-          <a:lstStyle/>
-          <a:p>
-            <a:pPr indent="0" marL="0">
-              <a:lnSpc>
-                <a:spcPct val="145000"/>
-              </a:lnSpc>
-              <a:buNone/>
-            </a:pPr>
-            <a:r>
-              <a:rPr lang="en-US" sz="2800" b="1" dirty="0">
+            <a:off x="777240" y="896112"/>
+            <a:ext cx="10607040" cy="640080"/>
+          </a:xfrm>
+          <a:prstGeom prst="rect">
+            <a:avLst/>
+          </a:prstGeom>
+          <a:noFill/>
+          <a:ln/>
+        </p:spPr>
+        <p:txBody>
+          <a:bodyPr wrap="square" lIns="0" tIns="0" rIns="0" bIns="0" rtlCol="0" anchor="ctr"/>
+          <a:lstStyle/>
+          <a:p>
+            <a:pPr indent="0" marL="0">
+              <a:buNone/>
+            </a:pPr>
+            <a:r>
+              <a:rPr lang="en-US" sz="2600" b="1" dirty="0">
                 <a:solidFill>
                   <a:srgbClr val="23201D"/>
                 </a:solidFill>
@@ -1779,9 +3498,9 @@
                 <a:ea typeface="Yu Gothic" pitchFamily="34" charset="-122"/>
                 <a:cs typeface="Yu Gothic" pitchFamily="34" charset="-120"/>
               </a:rPr>
-              <a:t>週に1回以上やっている文書業務を、1つAI化します。社員の方が使える形にします。</a:t>
-            </a:r>
-            <a:endParaRPr lang="en-US" sz="2800" dirty="0"/>
+              <a:t>社長だけが使えても、会社は変わりません。</a:t>
+            </a:r>
+            <a:endParaRPr lang="en-US" sz="2600" dirty="0"/>
           </a:p>
         </p:txBody>
       </p:sp>
@@ -1793,14 +3512,323 @@
         </p:nvSpPr>
         <p:spPr>
           <a:xfrm>
-            <a:off x="777240" y="3429000"/>
-            <a:ext cx="10607040" cy="18288"/>
+            <a:off x="777240" y="1783080"/>
+            <a:ext cx="10607040" cy="713232"/>
           </a:xfrm>
           <a:prstGeom prst="rect">
             <a:avLst/>
           </a:prstGeom>
           <a:solidFill>
-            <a:srgbClr val="EDE7DB"/>
+            <a:srgbClr val="FFFFFF"/>
+          </a:solidFill>
+          <a:ln w="12700">
+            <a:solidFill>
+              <a:srgbClr val="EDE7DB"/>
+            </a:solidFill>
+            <a:prstDash val="solid"/>
+          </a:ln>
+        </p:spPr>
+      </p:sp>
+      <p:sp>
+        <p:nvSpPr>
+          <p:cNvPr id="5" name="Text 3"/>
+          <p:cNvSpPr txBox="1"/>
+          <p:nvPr/>
+        </p:nvSpPr>
+        <p:spPr>
+          <a:xfrm>
+            <a:off x="1051560" y="1783080"/>
+            <a:ext cx="365760" cy="713232"/>
+          </a:xfrm>
+          <a:prstGeom prst="rect">
+            <a:avLst/>
+          </a:prstGeom>
+          <a:noFill/>
+          <a:ln/>
+        </p:spPr>
+        <p:txBody>
+          <a:bodyPr wrap="square" lIns="0" tIns="0" rIns="0" bIns="0" rtlCol="0" anchor="ctr"/>
+          <a:lstStyle/>
+          <a:p>
+            <a:pPr indent="0" marL="0">
+              <a:buNone/>
+            </a:pPr>
+            <a:r>
+              <a:rPr lang="en-US" sz="1400" dirty="0">
+                <a:solidFill>
+                  <a:srgbClr val="8A8177"/>
+                </a:solidFill>
+                <a:latin typeface="Yu Gothic" pitchFamily="34" charset="0"/>
+                <a:ea typeface="Yu Gothic" pitchFamily="34" charset="-122"/>
+                <a:cs typeface="Yu Gothic" pitchFamily="34" charset="-120"/>
+              </a:rPr>
+              <a:t>―</a:t>
+            </a:r>
+            <a:endParaRPr lang="en-US" sz="1400" dirty="0"/>
+          </a:p>
+        </p:txBody>
+      </p:sp>
+      <p:sp>
+        <p:nvSpPr>
+          <p:cNvPr id="6" name="Text 4"/>
+          <p:cNvSpPr txBox="1"/>
+          <p:nvPr/>
+        </p:nvSpPr>
+        <p:spPr>
+          <a:xfrm>
+            <a:off x="1508760" y="1783080"/>
+            <a:ext cx="9601200" cy="713232"/>
+          </a:xfrm>
+          <a:prstGeom prst="rect">
+            <a:avLst/>
+          </a:prstGeom>
+          <a:noFill/>
+          <a:ln/>
+        </p:spPr>
+        <p:txBody>
+          <a:bodyPr wrap="square" lIns="0" tIns="0" rIns="0" bIns="0" rtlCol="0" anchor="ctr"/>
+          <a:lstStyle/>
+          <a:p>
+            <a:pPr indent="0" marL="0">
+              <a:buNone/>
+            </a:pPr>
+            <a:r>
+              <a:rPr lang="en-US" sz="1500" dirty="0">
+                <a:solidFill>
+                  <a:srgbClr val="23201D"/>
+                </a:solidFill>
+                <a:latin typeface="Yu Gothic" pitchFamily="34" charset="0"/>
+                <a:ea typeface="Yu Gothic" pitchFamily="34" charset="-122"/>
+                <a:cs typeface="Yu Gothic" pitchFamily="34" charset="-120"/>
+              </a:rPr>
+              <a:t>前回までで、社長ご自身は速くなった</a:t>
+            </a:r>
+            <a:endParaRPr lang="en-US" sz="1500" dirty="0"/>
+          </a:p>
+        </p:txBody>
+      </p:sp>
+      <p:sp>
+        <p:nvSpPr>
+          <p:cNvPr id="7" name="Shape 5"/>
+          <p:cNvSpPr/>
+          <p:nvPr/>
+        </p:nvSpPr>
+        <p:spPr>
+          <a:xfrm>
+            <a:off x="777240" y="2624328"/>
+            <a:ext cx="10607040" cy="713232"/>
+          </a:xfrm>
+          <a:prstGeom prst="rect">
+            <a:avLst/>
+          </a:prstGeom>
+          <a:solidFill>
+            <a:srgbClr val="FFFFFF"/>
+          </a:solidFill>
+          <a:ln w="12700">
+            <a:solidFill>
+              <a:srgbClr val="EDE7DB"/>
+            </a:solidFill>
+            <a:prstDash val="solid"/>
+          </a:ln>
+        </p:spPr>
+      </p:sp>
+      <p:sp>
+        <p:nvSpPr>
+          <p:cNvPr id="8" name="Text 6"/>
+          <p:cNvSpPr txBox="1"/>
+          <p:nvPr/>
+        </p:nvSpPr>
+        <p:spPr>
+          <a:xfrm>
+            <a:off x="1051560" y="2624328"/>
+            <a:ext cx="365760" cy="713232"/>
+          </a:xfrm>
+          <a:prstGeom prst="rect">
+            <a:avLst/>
+          </a:prstGeom>
+          <a:noFill/>
+          <a:ln/>
+        </p:spPr>
+        <p:txBody>
+          <a:bodyPr wrap="square" lIns="0" tIns="0" rIns="0" bIns="0" rtlCol="0" anchor="ctr"/>
+          <a:lstStyle/>
+          <a:p>
+            <a:pPr indent="0" marL="0">
+              <a:buNone/>
+            </a:pPr>
+            <a:r>
+              <a:rPr lang="en-US" sz="1400" dirty="0">
+                <a:solidFill>
+                  <a:srgbClr val="8A8177"/>
+                </a:solidFill>
+                <a:latin typeface="Yu Gothic" pitchFamily="34" charset="0"/>
+                <a:ea typeface="Yu Gothic" pitchFamily="34" charset="-122"/>
+                <a:cs typeface="Yu Gothic" pitchFamily="34" charset="-120"/>
+              </a:rPr>
+              <a:t>―</a:t>
+            </a:r>
+            <a:endParaRPr lang="en-US" sz="1400" dirty="0"/>
+          </a:p>
+        </p:txBody>
+      </p:sp>
+      <p:sp>
+        <p:nvSpPr>
+          <p:cNvPr id="9" name="Text 7"/>
+          <p:cNvSpPr txBox="1"/>
+          <p:nvPr/>
+        </p:nvSpPr>
+        <p:spPr>
+          <a:xfrm>
+            <a:off x="1508760" y="2624328"/>
+            <a:ext cx="9601200" cy="713232"/>
+          </a:xfrm>
+          <a:prstGeom prst="rect">
+            <a:avLst/>
+          </a:prstGeom>
+          <a:noFill/>
+          <a:ln/>
+        </p:spPr>
+        <p:txBody>
+          <a:bodyPr wrap="square" lIns="0" tIns="0" rIns="0" bIns="0" rtlCol="0" anchor="ctr"/>
+          <a:lstStyle/>
+          <a:p>
+            <a:pPr indent="0" marL="0">
+              <a:buNone/>
+            </a:pPr>
+            <a:r>
+              <a:rPr lang="en-US" sz="1500" dirty="0">
+                <a:solidFill>
+                  <a:srgbClr val="23201D"/>
+                </a:solidFill>
+                <a:latin typeface="Yu Gothic" pitchFamily="34" charset="0"/>
+                <a:ea typeface="Yu Gothic" pitchFamily="34" charset="-122"/>
+                <a:cs typeface="Yu Gothic" pitchFamily="34" charset="-120"/>
+              </a:rPr>
+              <a:t>ただ、社内で使えるのはまだ社長だけ</a:t>
+            </a:r>
+            <a:endParaRPr lang="en-US" sz="1500" dirty="0"/>
+          </a:p>
+        </p:txBody>
+      </p:sp>
+      <p:sp>
+        <p:nvSpPr>
+          <p:cNvPr id="10" name="Shape 8"/>
+          <p:cNvSpPr/>
+          <p:nvPr/>
+        </p:nvSpPr>
+        <p:spPr>
+          <a:xfrm>
+            <a:off x="777240" y="3465576"/>
+            <a:ext cx="10607040" cy="713232"/>
+          </a:xfrm>
+          <a:prstGeom prst="rect">
+            <a:avLst/>
+          </a:prstGeom>
+          <a:solidFill>
+            <a:srgbClr val="FFFFFF"/>
+          </a:solidFill>
+          <a:ln w="12700">
+            <a:solidFill>
+              <a:srgbClr val="EDE7DB"/>
+            </a:solidFill>
+            <a:prstDash val="solid"/>
+          </a:ln>
+        </p:spPr>
+      </p:sp>
+      <p:sp>
+        <p:nvSpPr>
+          <p:cNvPr id="11" name="Text 9"/>
+          <p:cNvSpPr txBox="1"/>
+          <p:nvPr/>
+        </p:nvSpPr>
+        <p:spPr>
+          <a:xfrm>
+            <a:off x="1051560" y="3465576"/>
+            <a:ext cx="365760" cy="713232"/>
+          </a:xfrm>
+          <a:prstGeom prst="rect">
+            <a:avLst/>
+          </a:prstGeom>
+          <a:noFill/>
+          <a:ln/>
+        </p:spPr>
+        <p:txBody>
+          <a:bodyPr wrap="square" lIns="0" tIns="0" rIns="0" bIns="0" rtlCol="0" anchor="ctr"/>
+          <a:lstStyle/>
+          <a:p>
+            <a:pPr indent="0" marL="0">
+              <a:buNone/>
+            </a:pPr>
+            <a:r>
+              <a:rPr lang="en-US" sz="1400" dirty="0">
+                <a:solidFill>
+                  <a:srgbClr val="8A8177"/>
+                </a:solidFill>
+                <a:latin typeface="Yu Gothic" pitchFamily="34" charset="0"/>
+                <a:ea typeface="Yu Gothic" pitchFamily="34" charset="-122"/>
+                <a:cs typeface="Yu Gothic" pitchFamily="34" charset="-120"/>
+              </a:rPr>
+              <a:t>―</a:t>
+            </a:r>
+            <a:endParaRPr lang="en-US" sz="1400" dirty="0"/>
+          </a:p>
+        </p:txBody>
+      </p:sp>
+      <p:sp>
+        <p:nvSpPr>
+          <p:cNvPr id="12" name="Text 10"/>
+          <p:cNvSpPr txBox="1"/>
+          <p:nvPr/>
+        </p:nvSpPr>
+        <p:spPr>
+          <a:xfrm>
+            <a:off x="1508760" y="3465576"/>
+            <a:ext cx="9601200" cy="713232"/>
+          </a:xfrm>
+          <a:prstGeom prst="rect">
+            <a:avLst/>
+          </a:prstGeom>
+          <a:noFill/>
+          <a:ln/>
+        </p:spPr>
+        <p:txBody>
+          <a:bodyPr wrap="square" lIns="0" tIns="0" rIns="0" bIns="0" rtlCol="0" anchor="ctr"/>
+          <a:lstStyle/>
+          <a:p>
+            <a:pPr indent="0" marL="0">
+              <a:buNone/>
+            </a:pPr>
+            <a:r>
+              <a:rPr lang="en-US" sz="1500" dirty="0">
+                <a:solidFill>
+                  <a:srgbClr val="23201D"/>
+                </a:solidFill>
+                <a:latin typeface="Yu Gothic" pitchFamily="34" charset="0"/>
+                <a:ea typeface="Yu Gothic" pitchFamily="34" charset="-122"/>
+                <a:cs typeface="Yu Gothic" pitchFamily="34" charset="-120"/>
+              </a:rPr>
+              <a:t>文書業務は量が多く、社員に渡しやすい。ここが最初の展開先になります</a:t>
+            </a:r>
+            <a:endParaRPr lang="en-US" sz="1500" dirty="0"/>
+          </a:p>
+        </p:txBody>
+      </p:sp>
+      <p:sp>
+        <p:nvSpPr>
+          <p:cNvPr id="13" name="Shape 11"/>
+          <p:cNvSpPr/>
+          <p:nvPr/>
+        </p:nvSpPr>
+        <p:spPr>
+          <a:xfrm>
+            <a:off x="777240" y="4526280"/>
+            <a:ext cx="10607040" cy="914400"/>
+          </a:xfrm>
+          <a:prstGeom prst="rect">
+            <a:avLst/>
+          </a:prstGeom>
+          <a:solidFill>
+            <a:srgbClr val="B04A2F"/>
           </a:solidFill>
           <a:ln w="12700">
             <a:solidFill>
@@ -1812,14 +3840,14 @@
       </p:sp>
       <p:sp>
         <p:nvSpPr>
-          <p:cNvPr id="5" name="Text 3"/>
-          <p:cNvSpPr txBox="1"/>
-          <p:nvPr/>
-        </p:nvSpPr>
-        <p:spPr>
-          <a:xfrm>
-            <a:off x="777240" y="3657600"/>
-            <a:ext cx="9015984" cy="822960"/>
+          <p:cNvPr id="14" name="Text 12"/>
+          <p:cNvSpPr txBox="1"/>
+          <p:nvPr/>
+        </p:nvSpPr>
+        <p:spPr>
+          <a:xfrm>
+            <a:off x="1143000" y="4526280"/>
+            <a:ext cx="9875520" cy="914400"/>
           </a:xfrm>
           <a:prstGeom prst="rect">
             <a:avLst/>
@@ -1833,84 +3861,59 @@
           <a:p>
             <a:pPr indent="0" marL="0">
               <a:lnSpc>
-                <a:spcPct val="140000"/>
+                <a:spcPct val="130000"/>
               </a:lnSpc>
               <a:buNone/>
             </a:pPr>
             <a:r>
-              <a:rPr lang="en-US" sz="1500" dirty="0">
-                <a:solidFill>
-                  <a:srgbClr val="5A534A"/>
-                </a:solidFill>
-                <a:latin typeface="Yu Gothic" pitchFamily="34" charset="0"/>
-                <a:ea typeface="Yu Gothic" pitchFamily="34" charset="-122"/>
-                <a:cs typeface="Yu Gothic" pitchFamily="34" charset="-120"/>
-              </a:rPr>
-              <a:t>前回つくった型を、社内でいちばん量の多い文書に広げます。</a:t>
-            </a:r>
-            <a:endParaRPr lang="en-US" sz="1500" dirty="0"/>
-          </a:p>
-        </p:txBody>
-      </p:sp>
-      <p:sp>
-        <p:nvSpPr>
-          <p:cNvPr id="6" name="Shape 4"/>
-          <p:cNvSpPr/>
-          <p:nvPr/>
-        </p:nvSpPr>
-        <p:spPr>
-          <a:xfrm>
-            <a:off x="777240" y="4846320"/>
-            <a:ext cx="10607040" cy="777240"/>
-          </a:xfrm>
-          <a:prstGeom prst="rect">
-            <a:avLst/>
-          </a:prstGeom>
-          <a:solidFill>
-            <a:srgbClr val="EDE7DB"/>
-          </a:solidFill>
-          <a:ln w="12700">
-            <a:solidFill>
-              <a:srgbClr val="333333"/>
-            </a:solidFill>
-            <a:prstDash val="solid"/>
-          </a:ln>
-        </p:spPr>
-      </p:sp>
-      <p:sp>
-        <p:nvSpPr>
-          <p:cNvPr id="7" name="Text 5"/>
-          <p:cNvSpPr txBox="1"/>
-          <p:nvPr/>
-        </p:nvSpPr>
-        <p:spPr>
-          <a:xfrm>
-            <a:off x="960120" y="4956048"/>
-            <a:ext cx="1956816" cy="237744"/>
-          </a:xfrm>
-          <a:prstGeom prst="rect">
-            <a:avLst/>
-          </a:prstGeom>
-          <a:noFill/>
-          <a:ln/>
-        </p:spPr>
-        <p:txBody>
-          <a:bodyPr wrap="square" lIns="0" tIns="0" rIns="0" bIns="0" rtlCol="0" anchor="ctr"/>
-          <a:lstStyle/>
-          <a:p>
-            <a:pPr indent="0" marL="0">
-              <a:buNone/>
-            </a:pPr>
-            <a:r>
-              <a:rPr lang="en-US" sz="900" b="1" dirty="0">
-                <a:solidFill>
-                  <a:srgbClr val="B04A2F"/>
-                </a:solidFill>
-                <a:latin typeface="Yu Gothic" pitchFamily="34" charset="0"/>
-                <a:ea typeface="Yu Gothic" pitchFamily="34" charset="-122"/>
-                <a:cs typeface="Yu Gothic" pitchFamily="34" charset="-120"/>
-              </a:rPr>
-              <a:t>0-15分</a:t>
+              <a:rPr lang="en-US" sz="1800" b="1" dirty="0">
+                <a:solidFill>
+                  <a:srgbClr val="FFFFFF"/>
+                </a:solidFill>
+                <a:latin typeface="Yu Gothic" pitchFamily="34" charset="0"/>
+                <a:ea typeface="Yu Gothic" pitchFamily="34" charset="-122"/>
+                <a:cs typeface="Yu Gothic" pitchFamily="34" charset="-120"/>
+              </a:rPr>
+              <a:t>今日つくるのは、社長がいなくても使えるものです。</a:t>
+            </a:r>
+            <a:endParaRPr lang="en-US" sz="1800" dirty="0"/>
+          </a:p>
+        </p:txBody>
+      </p:sp>
+      <p:sp>
+        <p:nvSpPr>
+          <p:cNvPr id="15" name="Text 13"/>
+          <p:cNvSpPr txBox="1"/>
+          <p:nvPr/>
+        </p:nvSpPr>
+        <p:spPr>
+          <a:xfrm>
+            <a:off x="777240" y="6382512"/>
+            <a:ext cx="7424928" cy="256032"/>
+          </a:xfrm>
+          <a:prstGeom prst="rect">
+            <a:avLst/>
+          </a:prstGeom>
+          <a:noFill/>
+          <a:ln/>
+        </p:spPr>
+        <p:txBody>
+          <a:bodyPr wrap="square" lIns="0" tIns="0" rIns="0" bIns="0" rtlCol="0" anchor="ctr"/>
+          <a:lstStyle/>
+          <a:p>
+            <a:pPr indent="0" marL="0">
+              <a:buNone/>
+            </a:pPr>
+            <a:r>
+              <a:rPr lang="en-US" sz="900" dirty="0">
+                <a:solidFill>
+                  <a:srgbClr val="8A8177"/>
+                </a:solidFill>
+                <a:latin typeface="Yu Gothic" pitchFamily="34" charset="0"/>
+                <a:ea typeface="Yu Gothic" pitchFamily="34" charset="-122"/>
+                <a:cs typeface="Yu Gothic" pitchFamily="34" charset="-120"/>
+              </a:rPr>
+              <a:t>第3回　文書とコミュニケーションのAI化</a:t>
             </a:r>
             <a:endParaRPr lang="en-US" sz="900" dirty="0"/>
           </a:p>
@@ -1918,377 +3921,26 @@
       </p:sp>
       <p:sp>
         <p:nvSpPr>
-          <p:cNvPr id="8" name="Text 6"/>
-          <p:cNvSpPr txBox="1"/>
-          <p:nvPr/>
-        </p:nvSpPr>
-        <p:spPr>
-          <a:xfrm>
-            <a:off x="960120" y="5193792"/>
-            <a:ext cx="1956816" cy="365760"/>
-          </a:xfrm>
-          <a:prstGeom prst="rect">
-            <a:avLst/>
-          </a:prstGeom>
-          <a:noFill/>
-          <a:ln/>
-        </p:spPr>
-        <p:txBody>
-          <a:bodyPr wrap="square" lIns="0" tIns="0" rIns="0" bIns="0" rtlCol="0" anchor="ctr"/>
-          <a:lstStyle/>
-          <a:p>
-            <a:pPr indent="0" marL="0">
-              <a:buNone/>
-            </a:pPr>
-            <a:r>
-              <a:rPr lang="en-US" sz="1100" dirty="0">
-                <a:solidFill>
-                  <a:srgbClr val="23201D"/>
-                </a:solidFill>
-                <a:latin typeface="Yu Gothic" pitchFamily="34" charset="0"/>
-                <a:ea typeface="Yu Gothic" pitchFamily="34" charset="-122"/>
-                <a:cs typeface="Yu Gothic" pitchFamily="34" charset="-120"/>
-              </a:rPr>
-              <a:t>前回の宿題を実物で</a:t>
-            </a:r>
-            <a:endParaRPr lang="en-US" sz="1100" dirty="0"/>
-          </a:p>
-        </p:txBody>
-      </p:sp>
-      <p:sp>
-        <p:nvSpPr>
-          <p:cNvPr id="9" name="Text 7"/>
-          <p:cNvSpPr txBox="1"/>
-          <p:nvPr/>
-        </p:nvSpPr>
-        <p:spPr>
-          <a:xfrm>
-            <a:off x="3008376" y="4956048"/>
-            <a:ext cx="1956816" cy="237744"/>
-          </a:xfrm>
-          <a:prstGeom prst="rect">
-            <a:avLst/>
-          </a:prstGeom>
-          <a:noFill/>
-          <a:ln/>
-        </p:spPr>
-        <p:txBody>
-          <a:bodyPr wrap="square" lIns="0" tIns="0" rIns="0" bIns="0" rtlCol="0" anchor="ctr"/>
-          <a:lstStyle/>
-          <a:p>
-            <a:pPr indent="0" marL="0">
-              <a:buNone/>
-            </a:pPr>
-            <a:r>
-              <a:rPr lang="en-US" sz="900" b="1" dirty="0">
-                <a:solidFill>
-                  <a:srgbClr val="B04A2F"/>
-                </a:solidFill>
-                <a:latin typeface="Yu Gothic" pitchFamily="34" charset="0"/>
-                <a:ea typeface="Yu Gothic" pitchFamily="34" charset="-122"/>
-                <a:cs typeface="Yu Gothic" pitchFamily="34" charset="-120"/>
-              </a:rPr>
-              <a:t>15-35分</a:t>
-            </a:r>
-            <a:endParaRPr lang="en-US" sz="900" dirty="0"/>
-          </a:p>
-        </p:txBody>
-      </p:sp>
-      <p:sp>
-        <p:nvSpPr>
-          <p:cNvPr id="10" name="Text 8"/>
-          <p:cNvSpPr txBox="1"/>
-          <p:nvPr/>
-        </p:nvSpPr>
-        <p:spPr>
-          <a:xfrm>
-            <a:off x="3008376" y="5193792"/>
-            <a:ext cx="1956816" cy="365760"/>
-          </a:xfrm>
-          <a:prstGeom prst="rect">
-            <a:avLst/>
-          </a:prstGeom>
-          <a:noFill/>
-          <a:ln/>
-        </p:spPr>
-        <p:txBody>
-          <a:bodyPr wrap="square" lIns="0" tIns="0" rIns="0" bIns="0" rtlCol="0" anchor="ctr"/>
-          <a:lstStyle/>
-          <a:p>
-            <a:pPr indent="0" marL="0">
-              <a:buNone/>
-            </a:pPr>
-            <a:r>
-              <a:rPr lang="en-US" sz="1100" dirty="0">
-                <a:solidFill>
-                  <a:srgbClr val="23201D"/>
-                </a:solidFill>
-                <a:latin typeface="Yu Gothic" pitchFamily="34" charset="0"/>
-                <a:ea typeface="Yu Gothic" pitchFamily="34" charset="-122"/>
-                <a:cs typeface="Yu Gothic" pitchFamily="34" charset="-120"/>
-              </a:rPr>
-              <a:t>テーマとデモ</a:t>
-            </a:r>
-            <a:endParaRPr lang="en-US" sz="1100" dirty="0"/>
-          </a:p>
-        </p:txBody>
-      </p:sp>
-      <p:sp>
-        <p:nvSpPr>
-          <p:cNvPr id="11" name="Text 9"/>
-          <p:cNvSpPr txBox="1"/>
-          <p:nvPr/>
-        </p:nvSpPr>
-        <p:spPr>
-          <a:xfrm>
-            <a:off x="5056632" y="4956048"/>
-            <a:ext cx="1956816" cy="237744"/>
-          </a:xfrm>
-          <a:prstGeom prst="rect">
-            <a:avLst/>
-          </a:prstGeom>
-          <a:noFill/>
-          <a:ln/>
-        </p:spPr>
-        <p:txBody>
-          <a:bodyPr wrap="square" lIns="0" tIns="0" rIns="0" bIns="0" rtlCol="0" anchor="ctr"/>
-          <a:lstStyle/>
-          <a:p>
-            <a:pPr indent="0" marL="0">
-              <a:buNone/>
-            </a:pPr>
-            <a:r>
-              <a:rPr lang="en-US" sz="900" b="1" dirty="0">
-                <a:solidFill>
-                  <a:srgbClr val="B04A2F"/>
-                </a:solidFill>
-                <a:latin typeface="Yu Gothic" pitchFamily="34" charset="0"/>
-                <a:ea typeface="Yu Gothic" pitchFamily="34" charset="-122"/>
-                <a:cs typeface="Yu Gothic" pitchFamily="34" charset="-120"/>
-              </a:rPr>
-              <a:t>35-90分</a:t>
-            </a:r>
-            <a:endParaRPr lang="en-US" sz="900" dirty="0"/>
-          </a:p>
-        </p:txBody>
-      </p:sp>
-      <p:sp>
-        <p:nvSpPr>
-          <p:cNvPr id="12" name="Text 10"/>
-          <p:cNvSpPr txBox="1"/>
-          <p:nvPr/>
-        </p:nvSpPr>
-        <p:spPr>
-          <a:xfrm>
-            <a:off x="5056632" y="5193792"/>
-            <a:ext cx="1956816" cy="365760"/>
-          </a:xfrm>
-          <a:prstGeom prst="rect">
-            <a:avLst/>
-          </a:prstGeom>
-          <a:noFill/>
-          <a:ln/>
-        </p:spPr>
-        <p:txBody>
-          <a:bodyPr wrap="square" lIns="0" tIns="0" rIns="0" bIns="0" rtlCol="0" anchor="ctr"/>
-          <a:lstStyle/>
-          <a:p>
-            <a:pPr indent="0" marL="0">
-              <a:buNone/>
-            </a:pPr>
-            <a:r>
-              <a:rPr lang="en-US" sz="1100" dirty="0">
-                <a:solidFill>
-                  <a:srgbClr val="23201D"/>
-                </a:solidFill>
-                <a:latin typeface="Yu Gothic" pitchFamily="34" charset="0"/>
-                <a:ea typeface="Yu Gothic" pitchFamily="34" charset="-122"/>
-                <a:cs typeface="Yu Gothic" pitchFamily="34" charset="-120"/>
-              </a:rPr>
-              <a:t>一緒に手を動かす</a:t>
-            </a:r>
-            <a:endParaRPr lang="en-US" sz="1100" dirty="0"/>
-          </a:p>
-        </p:txBody>
-      </p:sp>
-      <p:sp>
-        <p:nvSpPr>
-          <p:cNvPr id="13" name="Text 11"/>
-          <p:cNvSpPr txBox="1"/>
-          <p:nvPr/>
-        </p:nvSpPr>
-        <p:spPr>
-          <a:xfrm>
-            <a:off x="7104888" y="4956048"/>
-            <a:ext cx="1956816" cy="237744"/>
-          </a:xfrm>
-          <a:prstGeom prst="rect">
-            <a:avLst/>
-          </a:prstGeom>
-          <a:noFill/>
-          <a:ln/>
-        </p:spPr>
-        <p:txBody>
-          <a:bodyPr wrap="square" lIns="0" tIns="0" rIns="0" bIns="0" rtlCol="0" anchor="ctr"/>
-          <a:lstStyle/>
-          <a:p>
-            <a:pPr indent="0" marL="0">
-              <a:buNone/>
-            </a:pPr>
-            <a:r>
-              <a:rPr lang="en-US" sz="900" b="1" dirty="0">
-                <a:solidFill>
-                  <a:srgbClr val="B04A2F"/>
-                </a:solidFill>
-                <a:latin typeface="Yu Gothic" pitchFamily="34" charset="0"/>
-                <a:ea typeface="Yu Gothic" pitchFamily="34" charset="-122"/>
-                <a:cs typeface="Yu Gothic" pitchFamily="34" charset="-120"/>
-              </a:rPr>
-              <a:t>90-105分</a:t>
-            </a:r>
-            <a:endParaRPr lang="en-US" sz="900" dirty="0"/>
-          </a:p>
-        </p:txBody>
-      </p:sp>
-      <p:sp>
-        <p:nvSpPr>
-          <p:cNvPr id="14" name="Text 12"/>
-          <p:cNvSpPr txBox="1"/>
-          <p:nvPr/>
-        </p:nvSpPr>
-        <p:spPr>
-          <a:xfrm>
-            <a:off x="7104888" y="5193792"/>
-            <a:ext cx="1956816" cy="365760"/>
-          </a:xfrm>
-          <a:prstGeom prst="rect">
-            <a:avLst/>
-          </a:prstGeom>
-          <a:noFill/>
-          <a:ln/>
-        </p:spPr>
-        <p:txBody>
-          <a:bodyPr wrap="square" lIns="0" tIns="0" rIns="0" bIns="0" rtlCol="0" anchor="ctr"/>
-          <a:lstStyle/>
-          <a:p>
-            <a:pPr indent="0" marL="0">
-              <a:buNone/>
-            </a:pPr>
-            <a:r>
-              <a:rPr lang="en-US" sz="1100" dirty="0">
-                <a:solidFill>
-                  <a:srgbClr val="23201D"/>
-                </a:solidFill>
-                <a:latin typeface="Yu Gothic" pitchFamily="34" charset="0"/>
-                <a:ea typeface="Yu Gothic" pitchFamily="34" charset="-122"/>
-                <a:cs typeface="Yu Gothic" pitchFamily="34" charset="-120"/>
-              </a:rPr>
-              <a:t>業務への組み込み</a:t>
-            </a:r>
-            <a:endParaRPr lang="en-US" sz="1100" dirty="0"/>
-          </a:p>
-        </p:txBody>
-      </p:sp>
-      <p:sp>
-        <p:nvSpPr>
-          <p:cNvPr id="15" name="Text 13"/>
-          <p:cNvSpPr txBox="1"/>
-          <p:nvPr/>
-        </p:nvSpPr>
-        <p:spPr>
-          <a:xfrm>
-            <a:off x="9153144" y="4956048"/>
-            <a:ext cx="1956816" cy="237744"/>
-          </a:xfrm>
-          <a:prstGeom prst="rect">
-            <a:avLst/>
-          </a:prstGeom>
-          <a:noFill/>
-          <a:ln/>
-        </p:spPr>
-        <p:txBody>
-          <a:bodyPr wrap="square" lIns="0" tIns="0" rIns="0" bIns="0" rtlCol="0" anchor="ctr"/>
-          <a:lstStyle/>
-          <a:p>
-            <a:pPr indent="0" marL="0">
-              <a:buNone/>
-            </a:pPr>
-            <a:r>
-              <a:rPr lang="en-US" sz="900" b="1" dirty="0">
-                <a:solidFill>
-                  <a:srgbClr val="B04A2F"/>
-                </a:solidFill>
-                <a:latin typeface="Yu Gothic" pitchFamily="34" charset="0"/>
-                <a:ea typeface="Yu Gothic" pitchFamily="34" charset="-122"/>
-                <a:cs typeface="Yu Gothic" pitchFamily="34" charset="-120"/>
-              </a:rPr>
-              <a:t>105-120分</a:t>
-            </a:r>
-            <a:endParaRPr lang="en-US" sz="900" dirty="0"/>
-          </a:p>
-        </p:txBody>
-      </p:sp>
-      <p:sp>
-        <p:nvSpPr>
           <p:cNvPr id="16" name="Text 14"/>
           <p:cNvSpPr txBox="1"/>
           <p:nvPr/>
         </p:nvSpPr>
         <p:spPr>
           <a:xfrm>
-            <a:off x="9153144" y="5193792"/>
-            <a:ext cx="1956816" cy="365760"/>
-          </a:xfrm>
-          <a:prstGeom prst="rect">
-            <a:avLst/>
-          </a:prstGeom>
-          <a:noFill/>
-          <a:ln/>
-        </p:spPr>
-        <p:txBody>
-          <a:bodyPr wrap="square" lIns="0" tIns="0" rIns="0" bIns="0" rtlCol="0" anchor="ctr"/>
-          <a:lstStyle/>
-          <a:p>
-            <a:pPr indent="0" marL="0">
-              <a:buNone/>
-            </a:pPr>
-            <a:r>
-              <a:rPr lang="en-US" sz="1100" dirty="0">
-                <a:solidFill>
-                  <a:srgbClr val="23201D"/>
-                </a:solidFill>
-                <a:latin typeface="Yu Gothic" pitchFamily="34" charset="0"/>
-                <a:ea typeface="Yu Gothic" pitchFamily="34" charset="-122"/>
-                <a:cs typeface="Yu Gothic" pitchFamily="34" charset="-120"/>
-              </a:rPr>
-              <a:t>宿題・記録</a:t>
-            </a:r>
-            <a:endParaRPr lang="en-US" sz="1100" dirty="0"/>
-          </a:p>
-        </p:txBody>
-      </p:sp>
-      <p:sp>
-        <p:nvSpPr>
-          <p:cNvPr id="17" name="Text 15"/>
-          <p:cNvSpPr txBox="1"/>
-          <p:nvPr/>
-        </p:nvSpPr>
-        <p:spPr>
-          <a:xfrm>
-            <a:off x="777240" y="6355080"/>
-            <a:ext cx="7424928" cy="274320"/>
-          </a:xfrm>
-          <a:prstGeom prst="rect">
-            <a:avLst/>
-          </a:prstGeom>
-          <a:noFill/>
-          <a:ln/>
-        </p:spPr>
-        <p:txBody>
-          <a:bodyPr wrap="square" lIns="0" tIns="0" rIns="0" bIns="0" rtlCol="0" anchor="ctr"/>
-          <a:lstStyle/>
-          <a:p>
-            <a:pPr indent="0" marL="0">
+            <a:off x="8202168" y="6382512"/>
+            <a:ext cx="3182112" cy="256032"/>
+          </a:xfrm>
+          <a:prstGeom prst="rect">
+            <a:avLst/>
+          </a:prstGeom>
+          <a:noFill/>
+          <a:ln/>
+        </p:spPr>
+        <p:txBody>
+          <a:bodyPr wrap="square" lIns="0" tIns="0" rIns="0" bIns="0" rtlCol="0" anchor="ctr"/>
+          <a:lstStyle/>
+          <a:p>
+            <a:pPr algn="r" indent="0" marL="0">
               <a:buNone/>
             </a:pPr>
             <a:r>
@@ -2300,46 +3952,7 @@
                 <a:ea typeface="Yu Gothic" pitchFamily="34" charset="-122"/>
                 <a:cs typeface="Yu Gothic" pitchFamily="34" charset="-120"/>
               </a:rPr>
-              <a:t>第3回　文書とコミュニケーションのAI化</a:t>
-            </a:r>
-            <a:endParaRPr lang="en-US" sz="900" dirty="0"/>
-          </a:p>
-        </p:txBody>
-      </p:sp>
-      <p:sp>
-        <p:nvSpPr>
-          <p:cNvPr id="18" name="Text 16"/>
-          <p:cNvSpPr txBox="1"/>
-          <p:nvPr/>
-        </p:nvSpPr>
-        <p:spPr>
-          <a:xfrm>
-            <a:off x="8202168" y="6355080"/>
-            <a:ext cx="3182112" cy="274320"/>
-          </a:xfrm>
-          <a:prstGeom prst="rect">
-            <a:avLst/>
-          </a:prstGeom>
-          <a:noFill/>
-          <a:ln/>
-        </p:spPr>
-        <p:txBody>
-          <a:bodyPr wrap="square" lIns="0" tIns="0" rIns="0" bIns="0" rtlCol="0" anchor="ctr"/>
-          <a:lstStyle/>
-          <a:p>
-            <a:pPr algn="r" indent="0" marL="0">
-              <a:buNone/>
-            </a:pPr>
-            <a:r>
-              <a:rPr lang="en-US" sz="900" dirty="0">
-                <a:solidFill>
-                  <a:srgbClr val="8A8177"/>
-                </a:solidFill>
-                <a:latin typeface="Yu Gothic" pitchFamily="34" charset="0"/>
-                <a:ea typeface="Yu Gothic" pitchFamily="34" charset="-122"/>
-                <a:cs typeface="Yu Gothic" pitchFamily="34" charset="-120"/>
-              </a:rPr>
-              <a:t>今日のゴール</a:t>
+              <a:t>出発点</a:t>
             </a:r>
             <a:endParaRPr lang="en-US" sz="900" dirty="0"/>
           </a:p>
@@ -2385,7 +3998,7 @@
         </p:nvSpPr>
         <p:spPr>
           <a:xfrm>
-            <a:off x="777240" y="640080"/>
+            <a:off x="777240" y="566928"/>
             <a:ext cx="10607040" cy="274320"/>
           </a:xfrm>
           <a:prstGeom prst="rect">
@@ -2410,7 +4023,7 @@
                 <a:ea typeface="Yu Gothic" pitchFamily="34" charset="-122"/>
                 <a:cs typeface="Yu Gothic" pitchFamily="34" charset="-120"/>
               </a:rPr>
-              <a:t>考え方</a:t>
+              <a:t>今日のゴール</a:t>
             </a:r>
             <a:endParaRPr lang="en-US" sz="1100" dirty="0"/>
           </a:p>
@@ -2424,24 +4037,27 @@
         </p:nvSpPr>
         <p:spPr>
           <a:xfrm>
-            <a:off x="777240" y="960120"/>
-            <a:ext cx="10607040" cy="640080"/>
-          </a:xfrm>
-          <a:prstGeom prst="rect">
-            <a:avLst/>
-          </a:prstGeom>
-          <a:noFill/>
-          <a:ln/>
-        </p:spPr>
-        <p:txBody>
-          <a:bodyPr wrap="square" lIns="0" tIns="0" rIns="0" bIns="0" rtlCol="0" anchor="ctr"/>
-          <a:lstStyle/>
-          <a:p>
-            <a:pPr indent="0" marL="0">
-              <a:buNone/>
-            </a:pPr>
-            <a:r>
-              <a:rPr lang="en-US" sz="2700" b="1" dirty="0">
+            <a:off x="777240" y="1143000"/>
+            <a:ext cx="9864547" cy="1645920"/>
+          </a:xfrm>
+          <a:prstGeom prst="rect">
+            <a:avLst/>
+          </a:prstGeom>
+          <a:noFill/>
+          <a:ln/>
+        </p:spPr>
+        <p:txBody>
+          <a:bodyPr wrap="square" lIns="0" tIns="0" rIns="0" bIns="0" rtlCol="0" anchor="ctr"/>
+          <a:lstStyle/>
+          <a:p>
+            <a:pPr indent="0" marL="0">
+              <a:lnSpc>
+                <a:spcPct val="145000"/>
+              </a:lnSpc>
+              <a:buNone/>
+            </a:pPr>
+            <a:r>
+              <a:rPr lang="en-US" sz="2600" b="1" dirty="0">
                 <a:solidFill>
                   <a:srgbClr val="23201D"/>
                 </a:solidFill>
@@ -2449,9 +4065,9 @@
                 <a:ea typeface="Yu Gothic" pitchFamily="34" charset="-122"/>
                 <a:cs typeface="Yu Gothic" pitchFamily="34" charset="-120"/>
               </a:rPr>
-              <a:t>文書は3種類に分かれます</a:t>
-            </a:r>
-            <a:endParaRPr lang="en-US" sz="2700" dirty="0"/>
+              <a:t>週に1回以上やっている文書業務を1つAI化し、社員の方が使える形にします。</a:t>
+            </a:r>
+            <a:endParaRPr lang="en-US" sz="2600" dirty="0"/>
           </a:p>
         </p:txBody>
       </p:sp>
@@ -2463,18 +4079,18 @@
         </p:nvSpPr>
         <p:spPr>
           <a:xfrm>
-            <a:off x="777240" y="1783080"/>
-            <a:ext cx="10607040" cy="1167384"/>
+            <a:off x="777240" y="3063240"/>
+            <a:ext cx="10607040" cy="18288"/>
           </a:xfrm>
           <a:prstGeom prst="rect">
             <a:avLst/>
           </a:prstGeom>
           <a:solidFill>
-            <a:srgbClr val="FFFFFF"/>
+            <a:srgbClr val="EDE7DB"/>
           </a:solidFill>
           <a:ln w="12700">
             <a:solidFill>
-              <a:srgbClr val="EDE7DB"/>
+              <a:srgbClr val="333333"/>
             </a:solidFill>
             <a:prstDash val="solid"/>
           </a:ln>
@@ -2482,24 +4098,66 @@
       </p:sp>
       <p:sp>
         <p:nvSpPr>
-          <p:cNvPr id="5" name="Shape 3"/>
+          <p:cNvPr id="5" name="Text 3"/>
+          <p:cNvSpPr txBox="1"/>
+          <p:nvPr/>
+        </p:nvSpPr>
+        <p:spPr>
+          <a:xfrm>
+            <a:off x="777240" y="3291840"/>
+            <a:ext cx="9334195" cy="1005840"/>
+          </a:xfrm>
+          <a:prstGeom prst="rect">
+            <a:avLst/>
+          </a:prstGeom>
+          <a:noFill/>
+          <a:ln/>
+        </p:spPr>
+        <p:txBody>
+          <a:bodyPr wrap="square" lIns="0" tIns="0" rIns="0" bIns="0" rtlCol="0" anchor="ctr"/>
+          <a:lstStyle/>
+          <a:p>
+            <a:pPr indent="0" marL="0">
+              <a:lnSpc>
+                <a:spcPct val="140000"/>
+              </a:lnSpc>
+              <a:buNone/>
+            </a:pPr>
+            <a:r>
+              <a:rPr lang="en-US" sz="1450" dirty="0">
+                <a:solidFill>
+                  <a:srgbClr val="5A534A"/>
+                </a:solidFill>
+                <a:latin typeface="Yu Gothic" pitchFamily="34" charset="0"/>
+                <a:ea typeface="Yu Gothic" pitchFamily="34" charset="-122"/>
+                <a:cs typeface="Yu Gothic" pitchFamily="34" charset="-120"/>
+              </a:rPr>
+              <a:t>前回つくった型を、社内でいちばん量の多い文書に広げます。今日から成果物の宛先が変わります。</a:t>
+            </a:r>
+            <a:endParaRPr lang="en-US" sz="1450" dirty="0"/>
+          </a:p>
+        </p:txBody>
+      </p:sp>
+      <p:sp>
+        <p:nvSpPr>
+          <p:cNvPr id="6" name="Shape 4"/>
           <p:cNvSpPr/>
           <p:nvPr/>
         </p:nvSpPr>
         <p:spPr>
           <a:xfrm>
-            <a:off x="1033272" y="2174748"/>
-            <a:ext cx="384048" cy="384048"/>
-          </a:xfrm>
-          <a:prstGeom prst="ellipse">
+            <a:off x="777240" y="4754880"/>
+            <a:ext cx="10607040" cy="822960"/>
+          </a:xfrm>
+          <a:prstGeom prst="rect">
             <a:avLst/>
           </a:prstGeom>
           <a:solidFill>
-            <a:srgbClr val="B04A2F"/>
+            <a:srgbClr val="EDE7DB"/>
           </a:solidFill>
           <a:ln w="12700">
             <a:solidFill>
-              <a:srgbClr val="B04A2F"/>
+              <a:srgbClr val="333333"/>
             </a:solidFill>
             <a:prstDash val="solid"/>
           </a:ln>
@@ -2507,69 +4165,69 @@
       </p:sp>
       <p:sp>
         <p:nvSpPr>
-          <p:cNvPr id="6" name="Text 4"/>
-          <p:cNvSpPr txBox="1"/>
-          <p:nvPr/>
-        </p:nvSpPr>
-        <p:spPr>
-          <a:xfrm>
-            <a:off x="1033272" y="2174748"/>
-            <a:ext cx="384048" cy="384048"/>
-          </a:xfrm>
-          <a:prstGeom prst="rect">
-            <a:avLst/>
-          </a:prstGeom>
-          <a:noFill/>
-          <a:ln/>
-        </p:spPr>
-        <p:txBody>
-          <a:bodyPr wrap="square" lIns="0" tIns="0" rIns="0" bIns="0" rtlCol="0" anchor="ctr"/>
-          <a:lstStyle/>
-          <a:p>
-            <a:pPr algn="ctr" indent="0" marL="0">
-              <a:buNone/>
-            </a:pPr>
-            <a:r>
-              <a:rPr lang="en-US" sz="1400" b="1" dirty="0">
-                <a:solidFill>
-                  <a:srgbClr val="FFFFFF"/>
-                </a:solidFill>
-                <a:latin typeface="Yu Gothic" pitchFamily="34" charset="0"/>
-                <a:ea typeface="Yu Gothic" pitchFamily="34" charset="-122"/>
-                <a:cs typeface="Yu Gothic" pitchFamily="34" charset="-120"/>
-              </a:rPr>
-              <a:t>1</a:t>
-            </a:r>
-            <a:endParaRPr lang="en-US" sz="1400" dirty="0"/>
-          </a:p>
-        </p:txBody>
-      </p:sp>
-      <p:sp>
-        <p:nvSpPr>
           <p:cNvPr id="7" name="Text 5"/>
           <p:cNvSpPr txBox="1"/>
           <p:nvPr/>
         </p:nvSpPr>
         <p:spPr>
           <a:xfrm>
-            <a:off x="1645920" y="1874520"/>
-            <a:ext cx="3394253" cy="984504"/>
-          </a:xfrm>
-          <a:prstGeom prst="rect">
-            <a:avLst/>
-          </a:prstGeom>
-          <a:noFill/>
-          <a:ln/>
-        </p:spPr>
-        <p:txBody>
-          <a:bodyPr wrap="square" lIns="0" tIns="0" rIns="0" bIns="0" rtlCol="0" anchor="ctr"/>
-          <a:lstStyle/>
-          <a:p>
-            <a:pPr indent="0" marL="0">
-              <a:buNone/>
-            </a:pPr>
-            <a:r>
-              <a:rPr lang="en-US" sz="1500" b="1" dirty="0">
+            <a:off x="960120" y="4873752"/>
+            <a:ext cx="1956816" cy="237744"/>
+          </a:xfrm>
+          <a:prstGeom prst="rect">
+            <a:avLst/>
+          </a:prstGeom>
+          <a:noFill/>
+          <a:ln/>
+        </p:spPr>
+        <p:txBody>
+          <a:bodyPr wrap="square" lIns="0" tIns="0" rIns="0" bIns="0" rtlCol="0" anchor="ctr"/>
+          <a:lstStyle/>
+          <a:p>
+            <a:pPr indent="0" marL="0">
+              <a:buNone/>
+            </a:pPr>
+            <a:r>
+              <a:rPr lang="en-US" sz="900" b="1" dirty="0">
+                <a:solidFill>
+                  <a:srgbClr val="B04A2F"/>
+                </a:solidFill>
+                <a:latin typeface="Yu Gothic" pitchFamily="34" charset="0"/>
+                <a:ea typeface="Yu Gothic" pitchFamily="34" charset="-122"/>
+                <a:cs typeface="Yu Gothic" pitchFamily="34" charset="-120"/>
+              </a:rPr>
+              <a:t>0-15分</a:t>
+            </a:r>
+            <a:endParaRPr lang="en-US" sz="900" dirty="0"/>
+          </a:p>
+        </p:txBody>
+      </p:sp>
+      <p:sp>
+        <p:nvSpPr>
+          <p:cNvPr id="8" name="Text 6"/>
+          <p:cNvSpPr txBox="1"/>
+          <p:nvPr/>
+        </p:nvSpPr>
+        <p:spPr>
+          <a:xfrm>
+            <a:off x="960120" y="5111496"/>
+            <a:ext cx="1956816" cy="384048"/>
+          </a:xfrm>
+          <a:prstGeom prst="rect">
+            <a:avLst/>
+          </a:prstGeom>
+          <a:noFill/>
+          <a:ln/>
+        </p:spPr>
+        <p:txBody>
+          <a:bodyPr wrap="square" lIns="0" tIns="0" rIns="0" bIns="0" rtlCol="0" anchor="ctr"/>
+          <a:lstStyle/>
+          <a:p>
+            <a:pPr indent="0" marL="0">
+              <a:buNone/>
+            </a:pPr>
+            <a:r>
+              <a:rPr lang="en-US" sz="1100" dirty="0">
                 <a:solidFill>
                   <a:srgbClr val="23201D"/>
                 </a:solidFill>
@@ -2577,103 +4235,89 @@
                 <a:ea typeface="Yu Gothic" pitchFamily="34" charset="-122"/>
                 <a:cs typeface="Yu Gothic" pitchFamily="34" charset="-120"/>
               </a:rPr>
-              <a:t>定型 — ほぼ任せてよい</a:t>
-            </a:r>
-            <a:endParaRPr lang="en-US" sz="1500" dirty="0"/>
-          </a:p>
-        </p:txBody>
-      </p:sp>
-      <p:sp>
-        <p:nvSpPr>
-          <p:cNvPr id="8" name="Text 6"/>
-          <p:cNvSpPr txBox="1"/>
-          <p:nvPr/>
-        </p:nvSpPr>
-        <p:spPr>
-          <a:xfrm>
-            <a:off x="5146243" y="1874520"/>
-            <a:ext cx="5963717" cy="984504"/>
-          </a:xfrm>
-          <a:prstGeom prst="rect">
-            <a:avLst/>
-          </a:prstGeom>
-          <a:noFill/>
-          <a:ln/>
-        </p:spPr>
-        <p:txBody>
-          <a:bodyPr wrap="square" lIns="0" tIns="0" rIns="0" bIns="0" rtlCol="0" anchor="ctr"/>
-          <a:lstStyle/>
-          <a:p>
-            <a:pPr indent="0" marL="0">
-              <a:lnSpc>
-                <a:spcPct val="130000"/>
-              </a:lnSpc>
-              <a:buNone/>
-            </a:pPr>
-            <a:r>
-              <a:rPr lang="en-US" sz="1250" dirty="0">
-                <a:solidFill>
-                  <a:srgbClr val="5A534A"/>
-                </a:solidFill>
-                <a:latin typeface="Yu Gothic" pitchFamily="34" charset="0"/>
-                <a:ea typeface="Yu Gothic" pitchFamily="34" charset="-122"/>
-                <a:cs typeface="Yu Gothic" pitchFamily="34" charset="-120"/>
-              </a:rPr>
-              <a:t>送付状・定例案内・日報。ほぼ丸ごと生成できます</a:t>
-            </a:r>
-            <a:endParaRPr lang="en-US" sz="1250" dirty="0"/>
-          </a:p>
-        </p:txBody>
-      </p:sp>
-      <p:sp>
-        <p:nvSpPr>
-          <p:cNvPr id="9" name="Shape 7"/>
-          <p:cNvSpPr/>
-          <p:nvPr/>
-        </p:nvSpPr>
-        <p:spPr>
-          <a:xfrm>
-            <a:off x="777240" y="3096768"/>
-            <a:ext cx="10607040" cy="1167384"/>
-          </a:xfrm>
-          <a:prstGeom prst="rect">
-            <a:avLst/>
-          </a:prstGeom>
-          <a:solidFill>
-            <a:srgbClr val="FFFFFF"/>
-          </a:solidFill>
-          <a:ln w="12700">
-            <a:solidFill>
-              <a:srgbClr val="EDE7DB"/>
-            </a:solidFill>
-            <a:prstDash val="solid"/>
-          </a:ln>
-        </p:spPr>
-      </p:sp>
-      <p:sp>
-        <p:nvSpPr>
-          <p:cNvPr id="10" name="Shape 8"/>
-          <p:cNvSpPr/>
-          <p:nvPr/>
-        </p:nvSpPr>
-        <p:spPr>
-          <a:xfrm>
-            <a:off x="1033272" y="3488436"/>
-            <a:ext cx="384048" cy="384048"/>
-          </a:xfrm>
-          <a:prstGeom prst="ellipse">
-            <a:avLst/>
-          </a:prstGeom>
-          <a:solidFill>
-            <a:srgbClr val="B04A2F"/>
-          </a:solidFill>
-          <a:ln w="12700">
-            <a:solidFill>
-              <a:srgbClr val="B04A2F"/>
-            </a:solidFill>
-            <a:prstDash val="solid"/>
-          </a:ln>
-        </p:spPr>
+              <a:t>前回の宿題を実物で</a:t>
+            </a:r>
+            <a:endParaRPr lang="en-US" sz="1100" dirty="0"/>
+          </a:p>
+        </p:txBody>
+      </p:sp>
+      <p:sp>
+        <p:nvSpPr>
+          <p:cNvPr id="9" name="Text 7"/>
+          <p:cNvSpPr txBox="1"/>
+          <p:nvPr/>
+        </p:nvSpPr>
+        <p:spPr>
+          <a:xfrm>
+            <a:off x="3008376" y="4873752"/>
+            <a:ext cx="1956816" cy="237744"/>
+          </a:xfrm>
+          <a:prstGeom prst="rect">
+            <a:avLst/>
+          </a:prstGeom>
+          <a:noFill/>
+          <a:ln/>
+        </p:spPr>
+        <p:txBody>
+          <a:bodyPr wrap="square" lIns="0" tIns="0" rIns="0" bIns="0" rtlCol="0" anchor="ctr"/>
+          <a:lstStyle/>
+          <a:p>
+            <a:pPr indent="0" marL="0">
+              <a:buNone/>
+            </a:pPr>
+            <a:r>
+              <a:rPr lang="en-US" sz="900" b="1" dirty="0">
+                <a:solidFill>
+                  <a:srgbClr val="B04A2F"/>
+                </a:solidFill>
+                <a:latin typeface="Yu Gothic" pitchFamily="34" charset="0"/>
+                <a:ea typeface="Yu Gothic" pitchFamily="34" charset="-122"/>
+                <a:cs typeface="Yu Gothic" pitchFamily="34" charset="-120"/>
+              </a:rPr>
+              <a:t>15-35分</a:t>
+            </a:r>
+            <a:endParaRPr lang="en-US" sz="900" dirty="0"/>
+          </a:p>
+        </p:txBody>
+      </p:sp>
+      <p:sp>
+        <p:nvSpPr>
+          <p:cNvPr id="10" name="Text 8"/>
+          <p:cNvSpPr txBox="1"/>
+          <p:nvPr/>
+        </p:nvSpPr>
+        <p:spPr>
+          <a:xfrm>
+            <a:off x="3008376" y="5111496"/>
+            <a:ext cx="1956816" cy="384048"/>
+          </a:xfrm>
+          <a:prstGeom prst="rect">
+            <a:avLst/>
+          </a:prstGeom>
+          <a:noFill/>
+          <a:ln/>
+        </p:spPr>
+        <p:txBody>
+          <a:bodyPr wrap="square" lIns="0" tIns="0" rIns="0" bIns="0" rtlCol="0" anchor="ctr"/>
+          <a:lstStyle/>
+          <a:p>
+            <a:pPr indent="0" marL="0">
+              <a:buNone/>
+            </a:pPr>
+            <a:r>
+              <a:rPr lang="en-US" sz="1100" dirty="0">
+                <a:solidFill>
+                  <a:srgbClr val="23201D"/>
+                </a:solidFill>
+                <a:latin typeface="Yu Gothic" pitchFamily="34" charset="0"/>
+                <a:ea typeface="Yu Gothic" pitchFamily="34" charset="-122"/>
+                <a:cs typeface="Yu Gothic" pitchFamily="34" charset="-120"/>
+              </a:rPr>
+              <a:t>テーマとデモ</a:t>
+            </a:r>
+            <a:endParaRPr lang="en-US" sz="1100" dirty="0"/>
+          </a:p>
+        </p:txBody>
       </p:sp>
       <p:sp>
         <p:nvSpPr>
@@ -2683,34 +4327,34 @@
         </p:nvSpPr>
         <p:spPr>
           <a:xfrm>
-            <a:off x="1033272" y="3488436"/>
-            <a:ext cx="384048" cy="384048"/>
-          </a:xfrm>
-          <a:prstGeom prst="rect">
-            <a:avLst/>
-          </a:prstGeom>
-          <a:noFill/>
-          <a:ln/>
-        </p:spPr>
-        <p:txBody>
-          <a:bodyPr wrap="square" lIns="0" tIns="0" rIns="0" bIns="0" rtlCol="0" anchor="ctr"/>
-          <a:lstStyle/>
-          <a:p>
-            <a:pPr algn="ctr" indent="0" marL="0">
-              <a:buNone/>
-            </a:pPr>
-            <a:r>
-              <a:rPr lang="en-US" sz="1400" b="1" dirty="0">
-                <a:solidFill>
-                  <a:srgbClr val="FFFFFF"/>
-                </a:solidFill>
-                <a:latin typeface="Yu Gothic" pitchFamily="34" charset="0"/>
-                <a:ea typeface="Yu Gothic" pitchFamily="34" charset="-122"/>
-                <a:cs typeface="Yu Gothic" pitchFamily="34" charset="-120"/>
-              </a:rPr>
-              <a:t>2</a:t>
-            </a:r>
-            <a:endParaRPr lang="en-US" sz="1400" dirty="0"/>
+            <a:off x="5056632" y="4873752"/>
+            <a:ext cx="1956816" cy="237744"/>
+          </a:xfrm>
+          <a:prstGeom prst="rect">
+            <a:avLst/>
+          </a:prstGeom>
+          <a:noFill/>
+          <a:ln/>
+        </p:spPr>
+        <p:txBody>
+          <a:bodyPr wrap="square" lIns="0" tIns="0" rIns="0" bIns="0" rtlCol="0" anchor="ctr"/>
+          <a:lstStyle/>
+          <a:p>
+            <a:pPr indent="0" marL="0">
+              <a:buNone/>
+            </a:pPr>
+            <a:r>
+              <a:rPr lang="en-US" sz="900" b="1" dirty="0">
+                <a:solidFill>
+                  <a:srgbClr val="B04A2F"/>
+                </a:solidFill>
+                <a:latin typeface="Yu Gothic" pitchFamily="34" charset="0"/>
+                <a:ea typeface="Yu Gothic" pitchFamily="34" charset="-122"/>
+                <a:cs typeface="Yu Gothic" pitchFamily="34" charset="-120"/>
+              </a:rPr>
+              <a:t>35-90分</a:t>
+            </a:r>
+            <a:endParaRPr lang="en-US" sz="900" dirty="0"/>
           </a:p>
         </p:txBody>
       </p:sp>
@@ -2722,24 +4366,24 @@
         </p:nvSpPr>
         <p:spPr>
           <a:xfrm>
-            <a:off x="1645920" y="3188208"/>
-            <a:ext cx="3394253" cy="984504"/>
-          </a:xfrm>
-          <a:prstGeom prst="rect">
-            <a:avLst/>
-          </a:prstGeom>
-          <a:noFill/>
-          <a:ln/>
-        </p:spPr>
-        <p:txBody>
-          <a:bodyPr wrap="square" lIns="0" tIns="0" rIns="0" bIns="0" rtlCol="0" anchor="ctr"/>
-          <a:lstStyle/>
-          <a:p>
-            <a:pPr indent="0" marL="0">
-              <a:buNone/>
-            </a:pPr>
-            <a:r>
-              <a:rPr lang="en-US" sz="1500" b="1" dirty="0">
+            <a:off x="5056632" y="5111496"/>
+            <a:ext cx="1956816" cy="384048"/>
+          </a:xfrm>
+          <a:prstGeom prst="rect">
+            <a:avLst/>
+          </a:prstGeom>
+          <a:noFill/>
+          <a:ln/>
+        </p:spPr>
+        <p:txBody>
+          <a:bodyPr wrap="square" lIns="0" tIns="0" rIns="0" bIns="0" rtlCol="0" anchor="ctr"/>
+          <a:lstStyle/>
+          <a:p>
+            <a:pPr indent="0" marL="0">
+              <a:buNone/>
+            </a:pPr>
+            <a:r>
+              <a:rPr lang="en-US" sz="1100" dirty="0">
                 <a:solidFill>
                   <a:srgbClr val="23201D"/>
                 </a:solidFill>
@@ -2747,9 +4391,9 @@
                 <a:ea typeface="Yu Gothic" pitchFamily="34" charset="-122"/>
                 <a:cs typeface="Yu Gothic" pitchFamily="34" charset="-120"/>
               </a:rPr>
-              <a:t>半定型 — 下書きまで</a:t>
-            </a:r>
-            <a:endParaRPr lang="en-US" sz="1500" dirty="0"/>
+              <a:t>一緒に手を動かす</a:t>
+            </a:r>
+            <a:endParaRPr lang="en-US" sz="1100" dirty="0"/>
           </a:p>
         </p:txBody>
       </p:sp>
@@ -2761,89 +4405,114 @@
         </p:nvSpPr>
         <p:spPr>
           <a:xfrm>
-            <a:off x="5146243" y="3188208"/>
-            <a:ext cx="5963717" cy="984504"/>
-          </a:xfrm>
-          <a:prstGeom prst="rect">
-            <a:avLst/>
-          </a:prstGeom>
-          <a:noFill/>
-          <a:ln/>
-        </p:spPr>
-        <p:txBody>
-          <a:bodyPr wrap="square" lIns="0" tIns="0" rIns="0" bIns="0" rtlCol="0" anchor="ctr"/>
-          <a:lstStyle/>
-          <a:p>
-            <a:pPr indent="0" marL="0">
-              <a:lnSpc>
-                <a:spcPct val="130000"/>
-              </a:lnSpc>
-              <a:buNone/>
-            </a:pPr>
-            <a:r>
-              <a:rPr lang="en-US" sz="1250" dirty="0">
-                <a:solidFill>
-                  <a:srgbClr val="5A534A"/>
-                </a:solidFill>
-                <a:latin typeface="Yu Gothic" pitchFamily="34" charset="0"/>
-                <a:ea typeface="Yu Gothic" pitchFamily="34" charset="-122"/>
-                <a:cs typeface="Yu Gothic" pitchFamily="34" charset="-120"/>
-              </a:rPr>
-              <a:t>提案書・議事録・顧客への回答。判断は人が入れます</a:t>
-            </a:r>
-            <a:endParaRPr lang="en-US" sz="1250" dirty="0"/>
-          </a:p>
-        </p:txBody>
-      </p:sp>
-      <p:sp>
-        <p:nvSpPr>
-          <p:cNvPr id="14" name="Shape 12"/>
-          <p:cNvSpPr/>
-          <p:nvPr/>
-        </p:nvSpPr>
-        <p:spPr>
-          <a:xfrm>
-            <a:off x="777240" y="4410456"/>
-            <a:ext cx="10607040" cy="1167384"/>
-          </a:xfrm>
-          <a:prstGeom prst="rect">
-            <a:avLst/>
-          </a:prstGeom>
-          <a:solidFill>
-            <a:srgbClr val="FFFFFF"/>
-          </a:solidFill>
-          <a:ln w="12700">
-            <a:solidFill>
-              <a:srgbClr val="EDE7DB"/>
-            </a:solidFill>
-            <a:prstDash val="solid"/>
-          </a:ln>
-        </p:spPr>
-      </p:sp>
-      <p:sp>
-        <p:nvSpPr>
-          <p:cNvPr id="15" name="Shape 13"/>
-          <p:cNvSpPr/>
-          <p:nvPr/>
-        </p:nvSpPr>
-        <p:spPr>
-          <a:xfrm>
-            <a:off x="1033272" y="4802124"/>
-            <a:ext cx="384048" cy="384048"/>
-          </a:xfrm>
-          <a:prstGeom prst="ellipse">
-            <a:avLst/>
-          </a:prstGeom>
-          <a:solidFill>
-            <a:srgbClr val="B04A2F"/>
-          </a:solidFill>
-          <a:ln w="12700">
-            <a:solidFill>
-              <a:srgbClr val="B04A2F"/>
-            </a:solidFill>
-            <a:prstDash val="solid"/>
-          </a:ln>
-        </p:spPr>
+            <a:off x="7104888" y="4873752"/>
+            <a:ext cx="1956816" cy="237744"/>
+          </a:xfrm>
+          <a:prstGeom prst="rect">
+            <a:avLst/>
+          </a:prstGeom>
+          <a:noFill/>
+          <a:ln/>
+        </p:spPr>
+        <p:txBody>
+          <a:bodyPr wrap="square" lIns="0" tIns="0" rIns="0" bIns="0" rtlCol="0" anchor="ctr"/>
+          <a:lstStyle/>
+          <a:p>
+            <a:pPr indent="0" marL="0">
+              <a:buNone/>
+            </a:pPr>
+            <a:r>
+              <a:rPr lang="en-US" sz="900" b="1" dirty="0">
+                <a:solidFill>
+                  <a:srgbClr val="B04A2F"/>
+                </a:solidFill>
+                <a:latin typeface="Yu Gothic" pitchFamily="34" charset="0"/>
+                <a:ea typeface="Yu Gothic" pitchFamily="34" charset="-122"/>
+                <a:cs typeface="Yu Gothic" pitchFamily="34" charset="-120"/>
+              </a:rPr>
+              <a:t>90-105分</a:t>
+            </a:r>
+            <a:endParaRPr lang="en-US" sz="900" dirty="0"/>
+          </a:p>
+        </p:txBody>
+      </p:sp>
+      <p:sp>
+        <p:nvSpPr>
+          <p:cNvPr id="14" name="Text 12"/>
+          <p:cNvSpPr txBox="1"/>
+          <p:nvPr/>
+        </p:nvSpPr>
+        <p:spPr>
+          <a:xfrm>
+            <a:off x="7104888" y="5111496"/>
+            <a:ext cx="1956816" cy="384048"/>
+          </a:xfrm>
+          <a:prstGeom prst="rect">
+            <a:avLst/>
+          </a:prstGeom>
+          <a:noFill/>
+          <a:ln/>
+        </p:spPr>
+        <p:txBody>
+          <a:bodyPr wrap="square" lIns="0" tIns="0" rIns="0" bIns="0" rtlCol="0" anchor="ctr"/>
+          <a:lstStyle/>
+          <a:p>
+            <a:pPr indent="0" marL="0">
+              <a:buNone/>
+            </a:pPr>
+            <a:r>
+              <a:rPr lang="en-US" sz="1100" dirty="0">
+                <a:solidFill>
+                  <a:srgbClr val="23201D"/>
+                </a:solidFill>
+                <a:latin typeface="Yu Gothic" pitchFamily="34" charset="0"/>
+                <a:ea typeface="Yu Gothic" pitchFamily="34" charset="-122"/>
+                <a:cs typeface="Yu Gothic" pitchFamily="34" charset="-120"/>
+              </a:rPr>
+              <a:t>業務への組み込み</a:t>
+            </a:r>
+            <a:endParaRPr lang="en-US" sz="1100" dirty="0"/>
+          </a:p>
+        </p:txBody>
+      </p:sp>
+      <p:sp>
+        <p:nvSpPr>
+          <p:cNvPr id="15" name="Text 13"/>
+          <p:cNvSpPr txBox="1"/>
+          <p:nvPr/>
+        </p:nvSpPr>
+        <p:spPr>
+          <a:xfrm>
+            <a:off x="9153144" y="4873752"/>
+            <a:ext cx="1956816" cy="237744"/>
+          </a:xfrm>
+          <a:prstGeom prst="rect">
+            <a:avLst/>
+          </a:prstGeom>
+          <a:noFill/>
+          <a:ln/>
+        </p:spPr>
+        <p:txBody>
+          <a:bodyPr wrap="square" lIns="0" tIns="0" rIns="0" bIns="0" rtlCol="0" anchor="ctr"/>
+          <a:lstStyle/>
+          <a:p>
+            <a:pPr indent="0" marL="0">
+              <a:buNone/>
+            </a:pPr>
+            <a:r>
+              <a:rPr lang="en-US" sz="900" b="1" dirty="0">
+                <a:solidFill>
+                  <a:srgbClr val="B04A2F"/>
+                </a:solidFill>
+                <a:latin typeface="Yu Gothic" pitchFamily="34" charset="0"/>
+                <a:ea typeface="Yu Gothic" pitchFamily="34" charset="-122"/>
+                <a:cs typeface="Yu Gothic" pitchFamily="34" charset="-120"/>
+              </a:rPr>
+              <a:t>105-120分</a:t>
+            </a:r>
+            <a:endParaRPr lang="en-US" sz="900" dirty="0"/>
+          </a:p>
+        </p:txBody>
       </p:sp>
       <p:sp>
         <p:nvSpPr>
@@ -2853,34 +4522,34 @@
         </p:nvSpPr>
         <p:spPr>
           <a:xfrm>
-            <a:off x="1033272" y="4802124"/>
-            <a:ext cx="384048" cy="384048"/>
-          </a:xfrm>
-          <a:prstGeom prst="rect">
-            <a:avLst/>
-          </a:prstGeom>
-          <a:noFill/>
-          <a:ln/>
-        </p:spPr>
-        <p:txBody>
-          <a:bodyPr wrap="square" lIns="0" tIns="0" rIns="0" bIns="0" rtlCol="0" anchor="ctr"/>
-          <a:lstStyle/>
-          <a:p>
-            <a:pPr algn="ctr" indent="0" marL="0">
-              <a:buNone/>
-            </a:pPr>
-            <a:r>
-              <a:rPr lang="en-US" sz="1400" b="1" dirty="0">
-                <a:solidFill>
-                  <a:srgbClr val="FFFFFF"/>
-                </a:solidFill>
-                <a:latin typeface="Yu Gothic" pitchFamily="34" charset="0"/>
-                <a:ea typeface="Yu Gothic" pitchFamily="34" charset="-122"/>
-                <a:cs typeface="Yu Gothic" pitchFamily="34" charset="-120"/>
-              </a:rPr>
-              <a:t>3</a:t>
-            </a:r>
-            <a:endParaRPr lang="en-US" sz="1400" dirty="0"/>
+            <a:off x="9153144" y="5111496"/>
+            <a:ext cx="1956816" cy="384048"/>
+          </a:xfrm>
+          <a:prstGeom prst="rect">
+            <a:avLst/>
+          </a:prstGeom>
+          <a:noFill/>
+          <a:ln/>
+        </p:spPr>
+        <p:txBody>
+          <a:bodyPr wrap="square" lIns="0" tIns="0" rIns="0" bIns="0" rtlCol="0" anchor="ctr"/>
+          <a:lstStyle/>
+          <a:p>
+            <a:pPr indent="0" marL="0">
+              <a:buNone/>
+            </a:pPr>
+            <a:r>
+              <a:rPr lang="en-US" sz="1100" dirty="0">
+                <a:solidFill>
+                  <a:srgbClr val="23201D"/>
+                </a:solidFill>
+                <a:latin typeface="Yu Gothic" pitchFamily="34" charset="0"/>
+                <a:ea typeface="Yu Gothic" pitchFamily="34" charset="-122"/>
+                <a:cs typeface="Yu Gothic" pitchFamily="34" charset="-120"/>
+              </a:rPr>
+              <a:t>宿題・記録</a:t>
+            </a:r>
+            <a:endParaRPr lang="en-US" sz="1100" dirty="0"/>
           </a:p>
         </p:txBody>
       </p:sp>
@@ -2892,34 +4561,34 @@
         </p:nvSpPr>
         <p:spPr>
           <a:xfrm>
-            <a:off x="1645920" y="4501896"/>
-            <a:ext cx="3394253" cy="984504"/>
-          </a:xfrm>
-          <a:prstGeom prst="rect">
-            <a:avLst/>
-          </a:prstGeom>
-          <a:noFill/>
-          <a:ln/>
-        </p:spPr>
-        <p:txBody>
-          <a:bodyPr wrap="square" lIns="0" tIns="0" rIns="0" bIns="0" rtlCol="0" anchor="ctr"/>
-          <a:lstStyle/>
-          <a:p>
-            <a:pPr indent="0" marL="0">
-              <a:buNone/>
-            </a:pPr>
-            <a:r>
-              <a:rPr lang="en-US" sz="1500" b="1" dirty="0">
-                <a:solidFill>
-                  <a:srgbClr val="23201D"/>
-                </a:solidFill>
-                <a:latin typeface="Yu Gothic" pitchFamily="34" charset="0"/>
-                <a:ea typeface="Yu Gothic" pitchFamily="34" charset="-122"/>
-                <a:cs typeface="Yu Gothic" pitchFamily="34" charset="-120"/>
-              </a:rPr>
-              <a:t>非定型 — 構成案だけ</a:t>
-            </a:r>
-            <a:endParaRPr lang="en-US" sz="1500" dirty="0"/>
+            <a:off x="777240" y="6382512"/>
+            <a:ext cx="7424928" cy="256032"/>
+          </a:xfrm>
+          <a:prstGeom prst="rect">
+            <a:avLst/>
+          </a:prstGeom>
+          <a:noFill/>
+          <a:ln/>
+        </p:spPr>
+        <p:txBody>
+          <a:bodyPr wrap="square" lIns="0" tIns="0" rIns="0" bIns="0" rtlCol="0" anchor="ctr"/>
+          <a:lstStyle/>
+          <a:p>
+            <a:pPr indent="0" marL="0">
+              <a:buNone/>
+            </a:pPr>
+            <a:r>
+              <a:rPr lang="en-US" sz="900" dirty="0">
+                <a:solidFill>
+                  <a:srgbClr val="8A8177"/>
+                </a:solidFill>
+                <a:latin typeface="Yu Gothic" pitchFamily="34" charset="0"/>
+                <a:ea typeface="Yu Gothic" pitchFamily="34" charset="-122"/>
+                <a:cs typeface="Yu Gothic" pitchFamily="34" charset="-120"/>
+              </a:rPr>
+              <a:t>第3回　文書とコミュニケーションのAI化</a:t>
+            </a:r>
+            <a:endParaRPr lang="en-US" sz="900" dirty="0"/>
           </a:p>
         </p:txBody>
       </p:sp>
@@ -2931,101 +4600,20 @@
         </p:nvSpPr>
         <p:spPr>
           <a:xfrm>
-            <a:off x="5146243" y="4501896"/>
-            <a:ext cx="5963717" cy="984504"/>
-          </a:xfrm>
-          <a:prstGeom prst="rect">
-            <a:avLst/>
-          </a:prstGeom>
-          <a:noFill/>
-          <a:ln/>
-        </p:spPr>
-        <p:txBody>
-          <a:bodyPr wrap="square" lIns="0" tIns="0" rIns="0" bIns="0" rtlCol="0" anchor="ctr"/>
-          <a:lstStyle/>
-          <a:p>
-            <a:pPr indent="0" marL="0">
-              <a:lnSpc>
-                <a:spcPct val="130000"/>
-              </a:lnSpc>
-              <a:buNone/>
-            </a:pPr>
-            <a:r>
-              <a:rPr lang="en-US" sz="1250" dirty="0">
-                <a:solidFill>
-                  <a:srgbClr val="5A534A"/>
-                </a:solidFill>
-                <a:latin typeface="Yu Gothic" pitchFamily="34" charset="0"/>
-                <a:ea typeface="Yu Gothic" pitchFamily="34" charset="-122"/>
-                <a:cs typeface="Yu Gothic" pitchFamily="34" charset="-120"/>
-              </a:rPr>
-              <a:t>謝罪・条件交渉・人事の通知。本文は人が書きます</a:t>
-            </a:r>
-            <a:endParaRPr lang="en-US" sz="1250" dirty="0"/>
-          </a:p>
-        </p:txBody>
-      </p:sp>
-      <p:sp>
-        <p:nvSpPr>
-          <p:cNvPr id="19" name="Text 17"/>
-          <p:cNvSpPr txBox="1"/>
-          <p:nvPr/>
-        </p:nvSpPr>
-        <p:spPr>
-          <a:xfrm>
-            <a:off x="777240" y="5715000"/>
-            <a:ext cx="10607040" cy="457200"/>
-          </a:xfrm>
-          <a:prstGeom prst="rect">
-            <a:avLst/>
-          </a:prstGeom>
-          <a:noFill/>
-          <a:ln/>
-        </p:spPr>
-        <p:txBody>
-          <a:bodyPr wrap="square" lIns="0" tIns="0" rIns="0" bIns="0" rtlCol="0" anchor="ctr"/>
-          <a:lstStyle/>
-          <a:p>
-            <a:pPr indent="0" marL="0">
-              <a:buNone/>
-            </a:pPr>
-            <a:r>
-              <a:rPr lang="en-US" sz="1200" b="1" dirty="0">
-                <a:solidFill>
-                  <a:srgbClr val="B04A2F"/>
-                </a:solidFill>
-                <a:latin typeface="Yu Gothic" pitchFamily="34" charset="0"/>
-                <a:ea typeface="Yu Gothic" pitchFamily="34" charset="-122"/>
-                <a:cs typeface="Yu Gothic" pitchFamily="34" charset="-120"/>
-              </a:rPr>
-              <a:t>非定型を丸ごと任せて事故るのが、社内でAI不信が生まれる最短ルートです。</a:t>
-            </a:r>
-            <a:endParaRPr lang="en-US" sz="1200" dirty="0"/>
-          </a:p>
-        </p:txBody>
-      </p:sp>
-      <p:sp>
-        <p:nvSpPr>
-          <p:cNvPr id="20" name="Text 18"/>
-          <p:cNvSpPr txBox="1"/>
-          <p:nvPr/>
-        </p:nvSpPr>
-        <p:spPr>
-          <a:xfrm>
-            <a:off x="777240" y="6355080"/>
-            <a:ext cx="7424928" cy="274320"/>
-          </a:xfrm>
-          <a:prstGeom prst="rect">
-            <a:avLst/>
-          </a:prstGeom>
-          <a:noFill/>
-          <a:ln/>
-        </p:spPr>
-        <p:txBody>
-          <a:bodyPr wrap="square" lIns="0" tIns="0" rIns="0" bIns="0" rtlCol="0" anchor="ctr"/>
-          <a:lstStyle/>
-          <a:p>
-            <a:pPr indent="0" marL="0">
+            <a:off x="8202168" y="6382512"/>
+            <a:ext cx="3182112" cy="256032"/>
+          </a:xfrm>
+          <a:prstGeom prst="rect">
+            <a:avLst/>
+          </a:prstGeom>
+          <a:noFill/>
+          <a:ln/>
+        </p:spPr>
+        <p:txBody>
+          <a:bodyPr wrap="square" lIns="0" tIns="0" rIns="0" bIns="0" rtlCol="0" anchor="ctr"/>
+          <a:lstStyle/>
+          <a:p>
+            <a:pPr algn="r" indent="0" marL="0">
               <a:buNone/>
             </a:pPr>
             <a:r>
@@ -3037,46 +4625,7 @@
                 <a:ea typeface="Yu Gothic" pitchFamily="34" charset="-122"/>
                 <a:cs typeface="Yu Gothic" pitchFamily="34" charset="-120"/>
               </a:rPr>
-              <a:t>第3回　文書とコミュニケーションのAI化</a:t>
-            </a:r>
-            <a:endParaRPr lang="en-US" sz="900" dirty="0"/>
-          </a:p>
-        </p:txBody>
-      </p:sp>
-      <p:sp>
-        <p:nvSpPr>
-          <p:cNvPr id="21" name="Text 19"/>
-          <p:cNvSpPr txBox="1"/>
-          <p:nvPr/>
-        </p:nvSpPr>
-        <p:spPr>
-          <a:xfrm>
-            <a:off x="8202168" y="6355080"/>
-            <a:ext cx="3182112" cy="274320"/>
-          </a:xfrm>
-          <a:prstGeom prst="rect">
-            <a:avLst/>
-          </a:prstGeom>
-          <a:noFill/>
-          <a:ln/>
-        </p:spPr>
-        <p:txBody>
-          <a:bodyPr wrap="square" lIns="0" tIns="0" rIns="0" bIns="0" rtlCol="0" anchor="ctr"/>
-          <a:lstStyle/>
-          <a:p>
-            <a:pPr algn="r" indent="0" marL="0">
-              <a:buNone/>
-            </a:pPr>
-            <a:r>
-              <a:rPr lang="en-US" sz="900" dirty="0">
-                <a:solidFill>
-                  <a:srgbClr val="8A8177"/>
-                </a:solidFill>
-                <a:latin typeface="Yu Gothic" pitchFamily="34" charset="0"/>
-                <a:ea typeface="Yu Gothic" pitchFamily="34" charset="-122"/>
-                <a:cs typeface="Yu Gothic" pitchFamily="34" charset="-120"/>
-              </a:rPr>
-              <a:t>考え方</a:t>
+              <a:t>ゴール</a:t>
             </a:r>
             <a:endParaRPr lang="en-US" sz="900" dirty="0"/>
           </a:p>
@@ -3122,7 +4671,7 @@
         </p:nvSpPr>
         <p:spPr>
           <a:xfrm>
-            <a:off x="777240" y="640080"/>
+            <a:off x="777240" y="566928"/>
             <a:ext cx="10607040" cy="274320"/>
           </a:xfrm>
           <a:prstGeom prst="rect">
@@ -3147,7 +4696,7 @@
                 <a:ea typeface="Yu Gothic" pitchFamily="34" charset="-122"/>
                 <a:cs typeface="Yu Gothic" pitchFamily="34" charset="-120"/>
               </a:rPr>
-              <a:t>実演</a:t>
+              <a:t>考え方</a:t>
             </a:r>
             <a:endParaRPr lang="en-US" sz="1100" dirty="0"/>
           </a:p>
@@ -3161,7 +4710,7 @@
         </p:nvSpPr>
         <p:spPr>
           <a:xfrm>
-            <a:off x="777240" y="960120"/>
+            <a:off x="777240" y="896112"/>
             <a:ext cx="10607040" cy="640080"/>
           </a:xfrm>
           <a:prstGeom prst="rect">
@@ -3178,7 +4727,7 @@
               <a:buNone/>
             </a:pPr>
             <a:r>
-              <a:rPr lang="en-US" sz="2700" b="1" dirty="0">
+              <a:rPr lang="en-US" sz="2600" b="1" dirty="0">
                 <a:solidFill>
                   <a:srgbClr val="23201D"/>
                 </a:solidFill>
@@ -3186,9 +4735,9 @@
                 <a:ea typeface="Yu Gothic" pitchFamily="34" charset="-122"/>
                 <a:cs typeface="Yu Gothic" pitchFamily="34" charset="-120"/>
               </a:rPr>
-              <a:t>自社らしくないと感じたら</a:t>
-            </a:r>
-            <a:endParaRPr lang="en-US" sz="2700" dirty="0"/>
+              <a:t>文書は3種類に分かれます</a:t>
+            </a:r>
+            <a:endParaRPr lang="en-US" sz="2600" dirty="0"/>
           </a:p>
         </p:txBody>
       </p:sp>
@@ -3200,18 +4749,18 @@
         </p:nvSpPr>
         <p:spPr>
           <a:xfrm>
-            <a:off x="777240" y="1828800"/>
-            <a:ext cx="4983480" cy="3566160"/>
+            <a:off x="777240" y="1700784"/>
+            <a:ext cx="10607040" cy="1188720"/>
           </a:xfrm>
           <a:prstGeom prst="rect">
             <a:avLst/>
           </a:prstGeom>
           <a:solidFill>
-            <a:srgbClr val="EDE7DB"/>
+            <a:srgbClr val="FFFFFF"/>
           </a:solidFill>
-          <a:ln w="15875">
+          <a:ln w="12700">
             <a:solidFill>
-              <a:srgbClr val="8A8177"/>
+              <a:srgbClr val="EDE7DB"/>
             </a:solidFill>
             <a:prstDash val="solid"/>
           </a:ln>
@@ -3225,413 +4774,8 @@
         </p:nvSpPr>
         <p:spPr>
           <a:xfrm>
-            <a:off x="777240" y="1828800"/>
-            <a:ext cx="4983480" cy="566928"/>
-          </a:xfrm>
-          <a:prstGeom prst="rect">
-            <a:avLst/>
-          </a:prstGeom>
-          <a:solidFill>
-            <a:srgbClr val="8A8177"/>
-          </a:solidFill>
-          <a:ln w="12700">
-            <a:solidFill>
-              <a:srgbClr val="333333"/>
-            </a:solidFill>
-            <a:prstDash val="solid"/>
-          </a:ln>
-        </p:spPr>
-      </p:sp>
-      <p:sp>
-        <p:nvSpPr>
-          <p:cNvPr id="6" name="Text 4"/>
-          <p:cNvSpPr txBox="1"/>
-          <p:nvPr/>
-        </p:nvSpPr>
-        <p:spPr>
-          <a:xfrm>
-            <a:off x="1005840" y="1883664"/>
-            <a:ext cx="4526280" cy="457200"/>
-          </a:xfrm>
-          <a:prstGeom prst="rect">
-            <a:avLst/>
-          </a:prstGeom>
-          <a:noFill/>
-          <a:ln/>
-        </p:spPr>
-        <p:txBody>
-          <a:bodyPr wrap="square" lIns="0" tIns="0" rIns="0" bIns="0" rtlCol="0" anchor="ctr"/>
-          <a:lstStyle/>
-          <a:p>
-            <a:pPr indent="0" marL="0">
-              <a:buNone/>
-            </a:pPr>
-            <a:r>
-              <a:rPr lang="en-US" sz="1400" b="1" dirty="0">
-                <a:solidFill>
-                  <a:srgbClr val="FFFFFF"/>
-                </a:solidFill>
-                <a:latin typeface="Yu Gothic" pitchFamily="34" charset="0"/>
-                <a:ea typeface="Yu Gothic" pitchFamily="34" charset="-122"/>
-                <a:cs typeface="Yu Gothic" pitchFamily="34" charset="-120"/>
-              </a:rPr>
-              <a:t>よくある状態</a:t>
-            </a:r>
-            <a:endParaRPr lang="en-US" sz="1400" dirty="0"/>
-          </a:p>
-        </p:txBody>
-      </p:sp>
-      <p:sp>
-        <p:nvSpPr>
-          <p:cNvPr id="7" name="Text 5"/>
-          <p:cNvSpPr txBox="1"/>
-          <p:nvPr/>
-        </p:nvSpPr>
-        <p:spPr>
-          <a:xfrm>
-            <a:off x="1097280" y="2606040"/>
-            <a:ext cx="4343400" cy="548640"/>
-          </a:xfrm>
-          <a:prstGeom prst="rect">
-            <a:avLst/>
-          </a:prstGeom>
-          <a:noFill/>
-          <a:ln/>
-        </p:spPr>
-        <p:txBody>
-          <a:bodyPr wrap="square" lIns="0" tIns="0" rIns="0" bIns="0" rtlCol="0" anchor="ctr"/>
-          <a:lstStyle/>
-          <a:p>
-            <a:pPr indent="0" marL="0">
-              <a:lnSpc>
-                <a:spcPct val="125000"/>
-              </a:lnSpc>
-              <a:buNone/>
-            </a:pPr>
-            <a:r>
-              <a:rPr lang="en-US" sz="1300" dirty="0">
-                <a:solidFill>
-                  <a:srgbClr val="23201D"/>
-                </a:solidFill>
-                <a:latin typeface="Yu Gothic" pitchFamily="34" charset="0"/>
-                <a:ea typeface="Yu Gothic" pitchFamily="34" charset="-122"/>
-                <a:cs typeface="Yu Gothic" pitchFamily="34" charset="-120"/>
-              </a:rPr>
-              <a:t>文章は正しいが、うちの言い方ではない</a:t>
-            </a:r>
-            <a:endParaRPr lang="en-US" sz="1300" dirty="0"/>
-          </a:p>
-        </p:txBody>
-      </p:sp>
-      <p:sp>
-        <p:nvSpPr>
-          <p:cNvPr id="8" name="Text 6"/>
-          <p:cNvSpPr txBox="1"/>
-          <p:nvPr/>
-        </p:nvSpPr>
-        <p:spPr>
-          <a:xfrm>
-            <a:off x="1097280" y="3172968"/>
-            <a:ext cx="4343400" cy="548640"/>
-          </a:xfrm>
-          <a:prstGeom prst="rect">
-            <a:avLst/>
-          </a:prstGeom>
-          <a:noFill/>
-          <a:ln/>
-        </p:spPr>
-        <p:txBody>
-          <a:bodyPr wrap="square" lIns="0" tIns="0" rIns="0" bIns="0" rtlCol="0" anchor="ctr"/>
-          <a:lstStyle/>
-          <a:p>
-            <a:pPr indent="0" marL="0">
-              <a:lnSpc>
-                <a:spcPct val="125000"/>
-              </a:lnSpc>
-              <a:buNone/>
-            </a:pPr>
-            <a:r>
-              <a:rPr lang="en-US" sz="1300" dirty="0">
-                <a:solidFill>
-                  <a:srgbClr val="23201D"/>
-                </a:solidFill>
-                <a:latin typeface="Yu Gothic" pitchFamily="34" charset="0"/>
-                <a:ea typeface="Yu Gothic" pitchFamily="34" charset="-122"/>
-                <a:cs typeface="Yu Gothic" pitchFamily="34" charset="-120"/>
-              </a:rPr>
-              <a:t>毎回、語尾と言い回しを直している</a:t>
-            </a:r>
-            <a:endParaRPr lang="en-US" sz="1300" dirty="0"/>
-          </a:p>
-        </p:txBody>
-      </p:sp>
-      <p:sp>
-        <p:nvSpPr>
-          <p:cNvPr id="9" name="Text 7"/>
-          <p:cNvSpPr txBox="1"/>
-          <p:nvPr/>
-        </p:nvSpPr>
-        <p:spPr>
-          <a:xfrm>
-            <a:off x="1097280" y="3739896"/>
-            <a:ext cx="4343400" cy="548640"/>
-          </a:xfrm>
-          <a:prstGeom prst="rect">
-            <a:avLst/>
-          </a:prstGeom>
-          <a:noFill/>
-          <a:ln/>
-        </p:spPr>
-        <p:txBody>
-          <a:bodyPr wrap="square" lIns="0" tIns="0" rIns="0" bIns="0" rtlCol="0" anchor="ctr"/>
-          <a:lstStyle/>
-          <a:p>
-            <a:pPr indent="0" marL="0">
-              <a:lnSpc>
-                <a:spcPct val="125000"/>
-              </a:lnSpc>
-              <a:buNone/>
-            </a:pPr>
-            <a:r>
-              <a:rPr lang="en-US" sz="1300" dirty="0">
-                <a:solidFill>
-                  <a:srgbClr val="23201D"/>
-                </a:solidFill>
-                <a:latin typeface="Yu Gothic" pitchFamily="34" charset="0"/>
-                <a:ea typeface="Yu Gothic" pitchFamily="34" charset="-122"/>
-                <a:cs typeface="Yu Gothic" pitchFamily="34" charset="-120"/>
-              </a:rPr>
-              <a:t>直す時間のほうが長くなる</a:t>
-            </a:r>
-            <a:endParaRPr lang="en-US" sz="1300" dirty="0"/>
-          </a:p>
-        </p:txBody>
-      </p:sp>
-      <p:sp>
-        <p:nvSpPr>
-          <p:cNvPr id="10" name="Shape 8"/>
-          <p:cNvSpPr/>
-          <p:nvPr/>
-        </p:nvSpPr>
-        <p:spPr>
-          <a:xfrm>
-            <a:off x="6400800" y="1828800"/>
-            <a:ext cx="4983480" cy="3566160"/>
-          </a:xfrm>
-          <a:prstGeom prst="rect">
-            <a:avLst/>
-          </a:prstGeom>
-          <a:solidFill>
-            <a:srgbClr val="FFFFFF"/>
-          </a:solidFill>
-          <a:ln w="15875">
-            <a:solidFill>
-              <a:srgbClr val="3B6B4A"/>
-            </a:solidFill>
-            <a:prstDash val="solid"/>
-          </a:ln>
-        </p:spPr>
-      </p:sp>
-      <p:sp>
-        <p:nvSpPr>
-          <p:cNvPr id="11" name="Shape 9"/>
-          <p:cNvSpPr/>
-          <p:nvPr/>
-        </p:nvSpPr>
-        <p:spPr>
-          <a:xfrm>
-            <a:off x="6400800" y="1828800"/>
-            <a:ext cx="4983480" cy="566928"/>
-          </a:xfrm>
-          <a:prstGeom prst="rect">
-            <a:avLst/>
-          </a:prstGeom>
-          <a:solidFill>
-            <a:srgbClr val="3B6B4A"/>
-          </a:solidFill>
-          <a:ln w="12700">
-            <a:solidFill>
-              <a:srgbClr val="333333"/>
-            </a:solidFill>
-            <a:prstDash val="solid"/>
-          </a:ln>
-        </p:spPr>
-      </p:sp>
-      <p:sp>
-        <p:nvSpPr>
-          <p:cNvPr id="12" name="Text 10"/>
-          <p:cNvSpPr txBox="1"/>
-          <p:nvPr/>
-        </p:nvSpPr>
-        <p:spPr>
-          <a:xfrm>
-            <a:off x="6629400" y="1883664"/>
-            <a:ext cx="4526280" cy="457200"/>
-          </a:xfrm>
-          <a:prstGeom prst="rect">
-            <a:avLst/>
-          </a:prstGeom>
-          <a:noFill/>
-          <a:ln/>
-        </p:spPr>
-        <p:txBody>
-          <a:bodyPr wrap="square" lIns="0" tIns="0" rIns="0" bIns="0" rtlCol="0" anchor="ctr"/>
-          <a:lstStyle/>
-          <a:p>
-            <a:pPr indent="0" marL="0">
-              <a:buNone/>
-            </a:pPr>
-            <a:r>
-              <a:rPr lang="en-US" sz="1400" b="1" dirty="0">
-                <a:solidFill>
-                  <a:srgbClr val="FFFFFF"/>
-                </a:solidFill>
-                <a:latin typeface="Yu Gothic" pitchFamily="34" charset="0"/>
-                <a:ea typeface="Yu Gothic" pitchFamily="34" charset="-122"/>
-                <a:cs typeface="Yu Gothic" pitchFamily="34" charset="-120"/>
-              </a:rPr>
-              <a:t>過去の文書を3本読ませる</a:t>
-            </a:r>
-            <a:endParaRPr lang="en-US" sz="1400" dirty="0"/>
-          </a:p>
-        </p:txBody>
-      </p:sp>
-      <p:sp>
-        <p:nvSpPr>
-          <p:cNvPr id="13" name="Text 11"/>
-          <p:cNvSpPr txBox="1"/>
-          <p:nvPr/>
-        </p:nvSpPr>
-        <p:spPr>
-          <a:xfrm>
-            <a:off x="6720840" y="2606040"/>
-            <a:ext cx="4343400" cy="548640"/>
-          </a:xfrm>
-          <a:prstGeom prst="rect">
-            <a:avLst/>
-          </a:prstGeom>
-          <a:noFill/>
-          <a:ln/>
-        </p:spPr>
-        <p:txBody>
-          <a:bodyPr wrap="square" lIns="0" tIns="0" rIns="0" bIns="0" rtlCol="0" anchor="ctr"/>
-          <a:lstStyle/>
-          <a:p>
-            <a:pPr indent="0" marL="0">
-              <a:lnSpc>
-                <a:spcPct val="125000"/>
-              </a:lnSpc>
-              <a:buNone/>
-            </a:pPr>
-            <a:r>
-              <a:rPr lang="en-US" sz="1300" dirty="0">
-                <a:solidFill>
-                  <a:srgbClr val="23201D"/>
-                </a:solidFill>
-                <a:latin typeface="Yu Gothic" pitchFamily="34" charset="0"/>
-                <a:ea typeface="Yu Gothic" pitchFamily="34" charset="-122"/>
-                <a:cs typeface="Yu Gothic" pitchFamily="34" charset="-120"/>
-              </a:rPr>
-              <a:t>「この文体に合わせて」と指示する</a:t>
-            </a:r>
-            <a:endParaRPr lang="en-US" sz="1300" dirty="0"/>
-          </a:p>
-        </p:txBody>
-      </p:sp>
-      <p:sp>
-        <p:nvSpPr>
-          <p:cNvPr id="14" name="Text 12"/>
-          <p:cNvSpPr txBox="1"/>
-          <p:nvPr/>
-        </p:nvSpPr>
-        <p:spPr>
-          <a:xfrm>
-            <a:off x="6720840" y="3172968"/>
-            <a:ext cx="4343400" cy="548640"/>
-          </a:xfrm>
-          <a:prstGeom prst="rect">
-            <a:avLst/>
-          </a:prstGeom>
-          <a:noFill/>
-          <a:ln/>
-        </p:spPr>
-        <p:txBody>
-          <a:bodyPr wrap="square" lIns="0" tIns="0" rIns="0" bIns="0" rtlCol="0" anchor="ctr"/>
-          <a:lstStyle/>
-          <a:p>
-            <a:pPr indent="0" marL="0">
-              <a:lnSpc>
-                <a:spcPct val="125000"/>
-              </a:lnSpc>
-              <a:buNone/>
-            </a:pPr>
-            <a:r>
-              <a:rPr lang="en-US" sz="1300" dirty="0">
-                <a:solidFill>
-                  <a:srgbClr val="23201D"/>
-                </a:solidFill>
-                <a:latin typeface="Yu Gothic" pitchFamily="34" charset="0"/>
-                <a:ea typeface="Yu Gothic" pitchFamily="34" charset="-122"/>
-                <a:cs typeface="Yu Gothic" pitchFamily="34" charset="-120"/>
-              </a:rPr>
-              <a:t>自社の言葉づかいを覚えさせる</a:t>
-            </a:r>
-            <a:endParaRPr lang="en-US" sz="1300" dirty="0"/>
-          </a:p>
-        </p:txBody>
-      </p:sp>
-      <p:sp>
-        <p:nvSpPr>
-          <p:cNvPr id="15" name="Text 13"/>
-          <p:cNvSpPr txBox="1"/>
-          <p:nvPr/>
-        </p:nvSpPr>
-        <p:spPr>
-          <a:xfrm>
-            <a:off x="6720840" y="3739896"/>
-            <a:ext cx="4343400" cy="548640"/>
-          </a:xfrm>
-          <a:prstGeom prst="rect">
-            <a:avLst/>
-          </a:prstGeom>
-          <a:noFill/>
-          <a:ln/>
-        </p:spPr>
-        <p:txBody>
-          <a:bodyPr wrap="square" lIns="0" tIns="0" rIns="0" bIns="0" rtlCol="0" anchor="ctr"/>
-          <a:lstStyle/>
-          <a:p>
-            <a:pPr indent="0" marL="0">
-              <a:lnSpc>
-                <a:spcPct val="125000"/>
-              </a:lnSpc>
-              <a:buNone/>
-            </a:pPr>
-            <a:r>
-              <a:rPr lang="en-US" sz="1300" dirty="0">
-                <a:solidFill>
-                  <a:srgbClr val="23201D"/>
-                </a:solidFill>
-                <a:latin typeface="Yu Gothic" pitchFamily="34" charset="0"/>
-                <a:ea typeface="Yu Gothic" pitchFamily="34" charset="-122"/>
-                <a:cs typeface="Yu Gothic" pitchFamily="34" charset="-120"/>
-              </a:rPr>
-              <a:t>直すのは中身だけになる</a:t>
-            </a:r>
-            <a:endParaRPr lang="en-US" sz="1300" dirty="0"/>
-          </a:p>
-        </p:txBody>
-      </p:sp>
-      <p:sp>
-        <p:nvSpPr>
-          <p:cNvPr id="16" name="Shape 14"/>
-          <p:cNvSpPr/>
-          <p:nvPr/>
-        </p:nvSpPr>
-        <p:spPr>
-          <a:xfrm>
-            <a:off x="5815584" y="3337560"/>
-            <a:ext cx="512064" cy="512064"/>
+            <a:off x="1014984" y="2112264"/>
+            <a:ext cx="365760" cy="365760"/>
           </a:xfrm>
           <a:prstGeom prst="ellipse">
             <a:avLst/>
@@ -3649,40 +4793,419 @@
       </p:sp>
       <p:sp>
         <p:nvSpPr>
+          <p:cNvPr id="6" name="Text 4"/>
+          <p:cNvSpPr txBox="1"/>
+          <p:nvPr/>
+        </p:nvSpPr>
+        <p:spPr>
+          <a:xfrm>
+            <a:off x="1014984" y="2112264"/>
+            <a:ext cx="365760" cy="365760"/>
+          </a:xfrm>
+          <a:prstGeom prst="rect">
+            <a:avLst/>
+          </a:prstGeom>
+          <a:noFill/>
+          <a:ln/>
+        </p:spPr>
+        <p:txBody>
+          <a:bodyPr wrap="square" lIns="0" tIns="0" rIns="0" bIns="0" rtlCol="0" anchor="ctr"/>
+          <a:lstStyle/>
+          <a:p>
+            <a:pPr algn="ctr" indent="0" marL="0">
+              <a:buNone/>
+            </a:pPr>
+            <a:r>
+              <a:rPr lang="en-US" sz="1300" b="1" dirty="0">
+                <a:solidFill>
+                  <a:srgbClr val="FFFFFF"/>
+                </a:solidFill>
+                <a:latin typeface="Yu Gothic" pitchFamily="34" charset="0"/>
+                <a:ea typeface="Yu Gothic" pitchFamily="34" charset="-122"/>
+                <a:cs typeface="Yu Gothic" pitchFamily="34" charset="-120"/>
+              </a:rPr>
+              <a:t>1</a:t>
+            </a:r>
+            <a:endParaRPr lang="en-US" sz="1300" dirty="0"/>
+          </a:p>
+        </p:txBody>
+      </p:sp>
+      <p:sp>
+        <p:nvSpPr>
+          <p:cNvPr id="7" name="Text 5"/>
+          <p:cNvSpPr txBox="1"/>
+          <p:nvPr/>
+        </p:nvSpPr>
+        <p:spPr>
+          <a:xfrm>
+            <a:off x="1600200" y="1773936"/>
+            <a:ext cx="3182112" cy="1042416"/>
+          </a:xfrm>
+          <a:prstGeom prst="rect">
+            <a:avLst/>
+          </a:prstGeom>
+          <a:noFill/>
+          <a:ln/>
+        </p:spPr>
+        <p:txBody>
+          <a:bodyPr wrap="square" lIns="0" tIns="0" rIns="0" bIns="0" rtlCol="0" anchor="ctr"/>
+          <a:lstStyle/>
+          <a:p>
+            <a:pPr indent="0" marL="0">
+              <a:buNone/>
+            </a:pPr>
+            <a:r>
+              <a:rPr lang="en-US" sz="1450" b="1" dirty="0">
+                <a:solidFill>
+                  <a:srgbClr val="23201D"/>
+                </a:solidFill>
+                <a:latin typeface="Yu Gothic" pitchFamily="34" charset="0"/>
+                <a:ea typeface="Yu Gothic" pitchFamily="34" charset="-122"/>
+                <a:cs typeface="Yu Gothic" pitchFamily="34" charset="-120"/>
+              </a:rPr>
+              <a:t>定型 — ほぼ任せてよい</a:t>
+            </a:r>
+            <a:endParaRPr lang="en-US" sz="1450" dirty="0"/>
+          </a:p>
+        </p:txBody>
+      </p:sp>
+      <p:sp>
+        <p:nvSpPr>
+          <p:cNvPr id="8" name="Text 6"/>
+          <p:cNvSpPr txBox="1"/>
+          <p:nvPr/>
+        </p:nvSpPr>
+        <p:spPr>
+          <a:xfrm>
+            <a:off x="4888382" y="1773936"/>
+            <a:ext cx="6267298" cy="1042416"/>
+          </a:xfrm>
+          <a:prstGeom prst="rect">
+            <a:avLst/>
+          </a:prstGeom>
+          <a:noFill/>
+          <a:ln/>
+        </p:spPr>
+        <p:txBody>
+          <a:bodyPr wrap="square" lIns="0" tIns="0" rIns="0" bIns="0" rtlCol="0" anchor="ctr"/>
+          <a:lstStyle/>
+          <a:p>
+            <a:pPr indent="0" marL="0">
+              <a:lnSpc>
+                <a:spcPct val="130000"/>
+              </a:lnSpc>
+              <a:buNone/>
+            </a:pPr>
+            <a:r>
+              <a:rPr lang="en-US" sz="1200" dirty="0">
+                <a:solidFill>
+                  <a:srgbClr val="5A534A"/>
+                </a:solidFill>
+                <a:latin typeface="Yu Gothic" pitchFamily="34" charset="0"/>
+                <a:ea typeface="Yu Gothic" pitchFamily="34" charset="-122"/>
+                <a:cs typeface="Yu Gothic" pitchFamily="34" charset="-120"/>
+              </a:rPr>
+              <a:t>送付状・定例案内・日報。ほぼ丸ごと生成できます</a:t>
+            </a:r>
+            <a:endParaRPr lang="en-US" sz="1200" dirty="0"/>
+          </a:p>
+        </p:txBody>
+      </p:sp>
+      <p:sp>
+        <p:nvSpPr>
+          <p:cNvPr id="9" name="Shape 7"/>
+          <p:cNvSpPr/>
+          <p:nvPr/>
+        </p:nvSpPr>
+        <p:spPr>
+          <a:xfrm>
+            <a:off x="777240" y="3017520"/>
+            <a:ext cx="10607040" cy="1188720"/>
+          </a:xfrm>
+          <a:prstGeom prst="rect">
+            <a:avLst/>
+          </a:prstGeom>
+          <a:solidFill>
+            <a:srgbClr val="FFFFFF"/>
+          </a:solidFill>
+          <a:ln w="12700">
+            <a:solidFill>
+              <a:srgbClr val="EDE7DB"/>
+            </a:solidFill>
+            <a:prstDash val="solid"/>
+          </a:ln>
+        </p:spPr>
+      </p:sp>
+      <p:sp>
+        <p:nvSpPr>
+          <p:cNvPr id="10" name="Shape 8"/>
+          <p:cNvSpPr/>
+          <p:nvPr/>
+        </p:nvSpPr>
+        <p:spPr>
+          <a:xfrm>
+            <a:off x="1014984" y="3429000"/>
+            <a:ext cx="365760" cy="365760"/>
+          </a:xfrm>
+          <a:prstGeom prst="ellipse">
+            <a:avLst/>
+          </a:prstGeom>
+          <a:solidFill>
+            <a:srgbClr val="B04A2F"/>
+          </a:solidFill>
+          <a:ln w="12700">
+            <a:solidFill>
+              <a:srgbClr val="333333"/>
+            </a:solidFill>
+            <a:prstDash val="solid"/>
+          </a:ln>
+        </p:spPr>
+      </p:sp>
+      <p:sp>
+        <p:nvSpPr>
+          <p:cNvPr id="11" name="Text 9"/>
+          <p:cNvSpPr txBox="1"/>
+          <p:nvPr/>
+        </p:nvSpPr>
+        <p:spPr>
+          <a:xfrm>
+            <a:off x="1014984" y="3429000"/>
+            <a:ext cx="365760" cy="365760"/>
+          </a:xfrm>
+          <a:prstGeom prst="rect">
+            <a:avLst/>
+          </a:prstGeom>
+          <a:noFill/>
+          <a:ln/>
+        </p:spPr>
+        <p:txBody>
+          <a:bodyPr wrap="square" lIns="0" tIns="0" rIns="0" bIns="0" rtlCol="0" anchor="ctr"/>
+          <a:lstStyle/>
+          <a:p>
+            <a:pPr algn="ctr" indent="0" marL="0">
+              <a:buNone/>
+            </a:pPr>
+            <a:r>
+              <a:rPr lang="en-US" sz="1300" b="1" dirty="0">
+                <a:solidFill>
+                  <a:srgbClr val="FFFFFF"/>
+                </a:solidFill>
+                <a:latin typeface="Yu Gothic" pitchFamily="34" charset="0"/>
+                <a:ea typeface="Yu Gothic" pitchFamily="34" charset="-122"/>
+                <a:cs typeface="Yu Gothic" pitchFamily="34" charset="-120"/>
+              </a:rPr>
+              <a:t>2</a:t>
+            </a:r>
+            <a:endParaRPr lang="en-US" sz="1300" dirty="0"/>
+          </a:p>
+        </p:txBody>
+      </p:sp>
+      <p:sp>
+        <p:nvSpPr>
+          <p:cNvPr id="12" name="Text 10"/>
+          <p:cNvSpPr txBox="1"/>
+          <p:nvPr/>
+        </p:nvSpPr>
+        <p:spPr>
+          <a:xfrm>
+            <a:off x="1600200" y="3090672"/>
+            <a:ext cx="3182112" cy="1042416"/>
+          </a:xfrm>
+          <a:prstGeom prst="rect">
+            <a:avLst/>
+          </a:prstGeom>
+          <a:noFill/>
+          <a:ln/>
+        </p:spPr>
+        <p:txBody>
+          <a:bodyPr wrap="square" lIns="0" tIns="0" rIns="0" bIns="0" rtlCol="0" anchor="ctr"/>
+          <a:lstStyle/>
+          <a:p>
+            <a:pPr indent="0" marL="0">
+              <a:buNone/>
+            </a:pPr>
+            <a:r>
+              <a:rPr lang="en-US" sz="1450" b="1" dirty="0">
+                <a:solidFill>
+                  <a:srgbClr val="23201D"/>
+                </a:solidFill>
+                <a:latin typeface="Yu Gothic" pitchFamily="34" charset="0"/>
+                <a:ea typeface="Yu Gothic" pitchFamily="34" charset="-122"/>
+                <a:cs typeface="Yu Gothic" pitchFamily="34" charset="-120"/>
+              </a:rPr>
+              <a:t>半定型 — 下書きまで</a:t>
+            </a:r>
+            <a:endParaRPr lang="en-US" sz="1450" dirty="0"/>
+          </a:p>
+        </p:txBody>
+      </p:sp>
+      <p:sp>
+        <p:nvSpPr>
+          <p:cNvPr id="13" name="Text 11"/>
+          <p:cNvSpPr txBox="1"/>
+          <p:nvPr/>
+        </p:nvSpPr>
+        <p:spPr>
+          <a:xfrm>
+            <a:off x="4888382" y="3090672"/>
+            <a:ext cx="6267298" cy="1042416"/>
+          </a:xfrm>
+          <a:prstGeom prst="rect">
+            <a:avLst/>
+          </a:prstGeom>
+          <a:noFill/>
+          <a:ln/>
+        </p:spPr>
+        <p:txBody>
+          <a:bodyPr wrap="square" lIns="0" tIns="0" rIns="0" bIns="0" rtlCol="0" anchor="ctr"/>
+          <a:lstStyle/>
+          <a:p>
+            <a:pPr indent="0" marL="0">
+              <a:lnSpc>
+                <a:spcPct val="130000"/>
+              </a:lnSpc>
+              <a:buNone/>
+            </a:pPr>
+            <a:r>
+              <a:rPr lang="en-US" sz="1200" dirty="0">
+                <a:solidFill>
+                  <a:srgbClr val="5A534A"/>
+                </a:solidFill>
+                <a:latin typeface="Yu Gothic" pitchFamily="34" charset="0"/>
+                <a:ea typeface="Yu Gothic" pitchFamily="34" charset="-122"/>
+                <a:cs typeface="Yu Gothic" pitchFamily="34" charset="-120"/>
+              </a:rPr>
+              <a:t>提案書・議事録・顧客への回答。判断は人が入れます</a:t>
+            </a:r>
+            <a:endParaRPr lang="en-US" sz="1200" dirty="0"/>
+          </a:p>
+        </p:txBody>
+      </p:sp>
+      <p:sp>
+        <p:nvSpPr>
+          <p:cNvPr id="14" name="Shape 12"/>
+          <p:cNvSpPr/>
+          <p:nvPr/>
+        </p:nvSpPr>
+        <p:spPr>
+          <a:xfrm>
+            <a:off x="777240" y="4334256"/>
+            <a:ext cx="10607040" cy="1188720"/>
+          </a:xfrm>
+          <a:prstGeom prst="rect">
+            <a:avLst/>
+          </a:prstGeom>
+          <a:solidFill>
+            <a:srgbClr val="FFFFFF"/>
+          </a:solidFill>
+          <a:ln w="12700">
+            <a:solidFill>
+              <a:srgbClr val="EDE7DB"/>
+            </a:solidFill>
+            <a:prstDash val="solid"/>
+          </a:ln>
+        </p:spPr>
+      </p:sp>
+      <p:sp>
+        <p:nvSpPr>
+          <p:cNvPr id="15" name="Shape 13"/>
+          <p:cNvSpPr/>
+          <p:nvPr/>
+        </p:nvSpPr>
+        <p:spPr>
+          <a:xfrm>
+            <a:off x="1014984" y="4745736"/>
+            <a:ext cx="365760" cy="365760"/>
+          </a:xfrm>
+          <a:prstGeom prst="ellipse">
+            <a:avLst/>
+          </a:prstGeom>
+          <a:solidFill>
+            <a:srgbClr val="B04A2F"/>
+          </a:solidFill>
+          <a:ln w="12700">
+            <a:solidFill>
+              <a:srgbClr val="333333"/>
+            </a:solidFill>
+            <a:prstDash val="solid"/>
+          </a:ln>
+        </p:spPr>
+      </p:sp>
+      <p:sp>
+        <p:nvSpPr>
+          <p:cNvPr id="16" name="Text 14"/>
+          <p:cNvSpPr txBox="1"/>
+          <p:nvPr/>
+        </p:nvSpPr>
+        <p:spPr>
+          <a:xfrm>
+            <a:off x="1014984" y="4745736"/>
+            <a:ext cx="365760" cy="365760"/>
+          </a:xfrm>
+          <a:prstGeom prst="rect">
+            <a:avLst/>
+          </a:prstGeom>
+          <a:noFill/>
+          <a:ln/>
+        </p:spPr>
+        <p:txBody>
+          <a:bodyPr wrap="square" lIns="0" tIns="0" rIns="0" bIns="0" rtlCol="0" anchor="ctr"/>
+          <a:lstStyle/>
+          <a:p>
+            <a:pPr algn="ctr" indent="0" marL="0">
+              <a:buNone/>
+            </a:pPr>
+            <a:r>
+              <a:rPr lang="en-US" sz="1300" b="1" dirty="0">
+                <a:solidFill>
+                  <a:srgbClr val="FFFFFF"/>
+                </a:solidFill>
+                <a:latin typeface="Yu Gothic" pitchFamily="34" charset="0"/>
+                <a:ea typeface="Yu Gothic" pitchFamily="34" charset="-122"/>
+                <a:cs typeface="Yu Gothic" pitchFamily="34" charset="-120"/>
+              </a:rPr>
+              <a:t>3</a:t>
+            </a:r>
+            <a:endParaRPr lang="en-US" sz="1300" dirty="0"/>
+          </a:p>
+        </p:txBody>
+      </p:sp>
+      <p:sp>
+        <p:nvSpPr>
           <p:cNvPr id="17" name="Text 15"/>
           <p:cNvSpPr txBox="1"/>
           <p:nvPr/>
         </p:nvSpPr>
         <p:spPr>
           <a:xfrm>
-            <a:off x="5815584" y="3337560"/>
-            <a:ext cx="512064" cy="512064"/>
-          </a:xfrm>
-          <a:prstGeom prst="rect">
-            <a:avLst/>
-          </a:prstGeom>
-          <a:noFill/>
-          <a:ln/>
-        </p:spPr>
-        <p:txBody>
-          <a:bodyPr wrap="square" lIns="0" tIns="0" rIns="0" bIns="0" rtlCol="0" anchor="ctr"/>
-          <a:lstStyle/>
-          <a:p>
-            <a:pPr algn="ctr" indent="0" marL="0">
-              <a:buNone/>
-            </a:pPr>
-            <a:r>
-              <a:rPr lang="en-US" sz="1800" b="1" dirty="0">
-                <a:solidFill>
-                  <a:srgbClr val="FFFFFF"/>
-                </a:solidFill>
-                <a:latin typeface="Yu Gothic" pitchFamily="34" charset="0"/>
-                <a:ea typeface="Yu Gothic" pitchFamily="34" charset="-122"/>
-                <a:cs typeface="Yu Gothic" pitchFamily="34" charset="-120"/>
-              </a:rPr>
-              <a:t>→</a:t>
-            </a:r>
-            <a:endParaRPr lang="en-US" sz="1800" dirty="0"/>
+            <a:off x="1600200" y="4407408"/>
+            <a:ext cx="3182112" cy="1042416"/>
+          </a:xfrm>
+          <a:prstGeom prst="rect">
+            <a:avLst/>
+          </a:prstGeom>
+          <a:noFill/>
+          <a:ln/>
+        </p:spPr>
+        <p:txBody>
+          <a:bodyPr wrap="square" lIns="0" tIns="0" rIns="0" bIns="0" rtlCol="0" anchor="ctr"/>
+          <a:lstStyle/>
+          <a:p>
+            <a:pPr indent="0" marL="0">
+              <a:buNone/>
+            </a:pPr>
+            <a:r>
+              <a:rPr lang="en-US" sz="1450" b="1" dirty="0">
+                <a:solidFill>
+                  <a:srgbClr val="23201D"/>
+                </a:solidFill>
+                <a:latin typeface="Yu Gothic" pitchFamily="34" charset="0"/>
+                <a:ea typeface="Yu Gothic" pitchFamily="34" charset="-122"/>
+                <a:cs typeface="Yu Gothic" pitchFamily="34" charset="-120"/>
+              </a:rPr>
+              <a:t>非定型 — 構成案だけ</a:t>
+            </a:r>
+            <a:endParaRPr lang="en-US" sz="1450" dirty="0"/>
           </a:p>
         </p:txBody>
       </p:sp>
@@ -3694,8 +5217,89 @@
         </p:nvSpPr>
         <p:spPr>
           <a:xfrm>
-            <a:off x="777240" y="6355080"/>
-            <a:ext cx="7424928" cy="274320"/>
+            <a:off x="4888382" y="4407408"/>
+            <a:ext cx="6267298" cy="1042416"/>
+          </a:xfrm>
+          <a:prstGeom prst="rect">
+            <a:avLst/>
+          </a:prstGeom>
+          <a:noFill/>
+          <a:ln/>
+        </p:spPr>
+        <p:txBody>
+          <a:bodyPr wrap="square" lIns="0" tIns="0" rIns="0" bIns="0" rtlCol="0" anchor="ctr"/>
+          <a:lstStyle/>
+          <a:p>
+            <a:pPr indent="0" marL="0">
+              <a:lnSpc>
+                <a:spcPct val="130000"/>
+              </a:lnSpc>
+              <a:buNone/>
+            </a:pPr>
+            <a:r>
+              <a:rPr lang="en-US" sz="1200" dirty="0">
+                <a:solidFill>
+                  <a:srgbClr val="5A534A"/>
+                </a:solidFill>
+                <a:latin typeface="Yu Gothic" pitchFamily="34" charset="0"/>
+                <a:ea typeface="Yu Gothic" pitchFamily="34" charset="-122"/>
+                <a:cs typeface="Yu Gothic" pitchFamily="34" charset="-120"/>
+              </a:rPr>
+              <a:t>謝罪・条件交渉・人事の通知。本文は人が書きます</a:t>
+            </a:r>
+            <a:endParaRPr lang="en-US" sz="1200" dirty="0"/>
+          </a:p>
+        </p:txBody>
+      </p:sp>
+      <p:sp>
+        <p:nvSpPr>
+          <p:cNvPr id="19" name="Text 17"/>
+          <p:cNvSpPr txBox="1"/>
+          <p:nvPr/>
+        </p:nvSpPr>
+        <p:spPr>
+          <a:xfrm>
+            <a:off x="777240" y="5669280"/>
+            <a:ext cx="10607040" cy="411480"/>
+          </a:xfrm>
+          <a:prstGeom prst="rect">
+            <a:avLst/>
+          </a:prstGeom>
+          <a:noFill/>
+          <a:ln/>
+        </p:spPr>
+        <p:txBody>
+          <a:bodyPr wrap="square" lIns="0" tIns="0" rIns="0" bIns="0" rtlCol="0" anchor="ctr"/>
+          <a:lstStyle/>
+          <a:p>
+            <a:pPr indent="0" marL="0">
+              <a:buNone/>
+            </a:pPr>
+            <a:r>
+              <a:rPr lang="en-US" sz="1200" b="1" dirty="0">
+                <a:solidFill>
+                  <a:srgbClr val="B04A2F"/>
+                </a:solidFill>
+                <a:latin typeface="Yu Gothic" pitchFamily="34" charset="0"/>
+                <a:ea typeface="Yu Gothic" pitchFamily="34" charset="-122"/>
+                <a:cs typeface="Yu Gothic" pitchFamily="34" charset="-120"/>
+              </a:rPr>
+              <a:t>非定型を丸ごと任せて事故るのが、社内でAI不信が生まれる最短ルートです。</a:t>
+            </a:r>
+            <a:endParaRPr lang="en-US" sz="1200" dirty="0"/>
+          </a:p>
+        </p:txBody>
+      </p:sp>
+      <p:sp>
+        <p:nvSpPr>
+          <p:cNvPr id="20" name="Text 18"/>
+          <p:cNvSpPr txBox="1"/>
+          <p:nvPr/>
+        </p:nvSpPr>
+        <p:spPr>
+          <a:xfrm>
+            <a:off x="777240" y="6382512"/>
+            <a:ext cx="7424928" cy="256032"/>
           </a:xfrm>
           <a:prstGeom prst="rect">
             <a:avLst/>
@@ -3727,14 +5331,14 @@
       </p:sp>
       <p:sp>
         <p:nvSpPr>
-          <p:cNvPr id="19" name="Text 17"/>
-          <p:cNvSpPr txBox="1"/>
-          <p:nvPr/>
-        </p:nvSpPr>
-        <p:spPr>
-          <a:xfrm>
-            <a:off x="8202168" y="6355080"/>
-            <a:ext cx="3182112" cy="274320"/>
+          <p:cNvPr id="21" name="Text 19"/>
+          <p:cNvSpPr txBox="1"/>
+          <p:nvPr/>
+        </p:nvSpPr>
+        <p:spPr>
+          <a:xfrm>
+            <a:off x="8202168" y="6382512"/>
+            <a:ext cx="3182112" cy="256032"/>
           </a:xfrm>
           <a:prstGeom prst="rect">
             <a:avLst/>
@@ -3758,7 +5362,7 @@
                 <a:ea typeface="Yu Gothic" pitchFamily="34" charset="-122"/>
                 <a:cs typeface="Yu Gothic" pitchFamily="34" charset="-120"/>
               </a:rPr>
-              <a:t>実演</a:t>
+              <a:t>考え方</a:t>
             </a:r>
             <a:endParaRPr lang="en-US" sz="900" dirty="0"/>
           </a:p>
@@ -3804,7 +5408,7 @@
         </p:nvSpPr>
         <p:spPr>
           <a:xfrm>
-            <a:off x="777240" y="640080"/>
+            <a:off x="777240" y="566928"/>
             <a:ext cx="10607040" cy="274320"/>
           </a:xfrm>
           <a:prstGeom prst="rect">
@@ -3829,7 +5433,7 @@
                 <a:ea typeface="Yu Gothic" pitchFamily="34" charset="-122"/>
                 <a:cs typeface="Yu Gothic" pitchFamily="34" charset="-120"/>
               </a:rPr>
-              <a:t>演習</a:t>
+              <a:t>あてはめ</a:t>
             </a:r>
             <a:endParaRPr lang="en-US" sz="1100" dirty="0"/>
           </a:p>
@@ -3843,7 +5447,7 @@
         </p:nvSpPr>
         <p:spPr>
           <a:xfrm>
-            <a:off x="777240" y="960120"/>
+            <a:off x="777240" y="896112"/>
             <a:ext cx="10607040" cy="640080"/>
           </a:xfrm>
           <a:prstGeom prst="rect">
@@ -3860,7 +5464,7 @@
               <a:buNone/>
             </a:pPr>
             <a:r>
-              <a:rPr lang="en-US" sz="2700" b="1" dirty="0">
+              <a:rPr lang="en-US" sz="2600" b="1" dirty="0">
                 <a:solidFill>
                   <a:srgbClr val="23201D"/>
                 </a:solidFill>
@@ -3868,61 +5472,22 @@
                 <a:ea typeface="Yu Gothic" pitchFamily="34" charset="-122"/>
                 <a:cs typeface="Yu Gothic" pitchFamily="34" charset="-120"/>
               </a:rPr>
-              <a:t>今日、一緒にやること</a:t>
-            </a:r>
-            <a:endParaRPr lang="en-US" sz="2700" dirty="0"/>
-          </a:p>
-        </p:txBody>
-      </p:sp>
-      <p:sp>
-        <p:nvSpPr>
-          <p:cNvPr id="4" name="Text 2"/>
-          <p:cNvSpPr txBox="1"/>
-          <p:nvPr/>
-        </p:nvSpPr>
-        <p:spPr>
-          <a:xfrm>
-            <a:off x="777240" y="1627632"/>
-            <a:ext cx="10607040" cy="320040"/>
-          </a:xfrm>
-          <a:prstGeom prst="rect">
-            <a:avLst/>
-          </a:prstGeom>
-          <a:noFill/>
-          <a:ln/>
-        </p:spPr>
-        <p:txBody>
-          <a:bodyPr wrap="square" lIns="0" tIns="0" rIns="0" bIns="0" rtlCol="0" anchor="ctr"/>
-          <a:lstStyle/>
-          <a:p>
-            <a:pPr indent="0" marL="0">
-              <a:buNone/>
-            </a:pPr>
-            <a:r>
-              <a:rPr lang="en-US" sz="1250" b="1" dirty="0">
-                <a:solidFill>
-                  <a:srgbClr val="2F4F6B"/>
-                </a:solidFill>
-                <a:latin typeface="Yu Gothic" pitchFamily="34" charset="0"/>
-                <a:ea typeface="Yu Gothic" pitchFamily="34" charset="-122"/>
-                <a:cs typeface="Yu Gothic" pitchFamily="34" charset="-120"/>
-              </a:rPr>
-              <a:t>55分。操作するのはご自身です。</a:t>
-            </a:r>
-            <a:endParaRPr lang="en-US" sz="1250" dirty="0"/>
-          </a:p>
-        </p:txBody>
-      </p:sp>
-      <p:sp>
-        <p:nvSpPr>
-          <p:cNvPr id="5" name="Shape 3"/>
+              <a:t>他人が使えるテンプレートの条件</a:t>
+            </a:r>
+            <a:endParaRPr lang="en-US" sz="2600" dirty="0"/>
+          </a:p>
+        </p:txBody>
+      </p:sp>
+      <p:sp>
+        <p:nvSpPr>
+          <p:cNvPr id="4" name="Shape 2"/>
           <p:cNvSpPr/>
           <p:nvPr/>
         </p:nvSpPr>
         <p:spPr>
           <a:xfrm>
-            <a:off x="777240" y="2240280"/>
-            <a:ext cx="3383280" cy="2697480"/>
+            <a:off x="777240" y="1691640"/>
+            <a:ext cx="10607040" cy="3401568"/>
           </a:xfrm>
           <a:prstGeom prst="rect">
             <a:avLst/>
@@ -3930,9 +5495,9 @@
           <a:solidFill>
             <a:srgbClr val="FFFFFF"/>
           </a:solidFill>
-          <a:ln w="12700">
+          <a:ln w="15875">
             <a:solidFill>
-              <a:srgbClr val="EDE7DB"/>
+              <a:srgbClr val="2F4F6B"/>
             </a:solidFill>
             <a:prstDash val="solid"/>
           </a:ln>
@@ -3940,16 +5505,16 @@
       </p:sp>
       <p:sp>
         <p:nvSpPr>
-          <p:cNvPr id="6" name="Shape 4"/>
+          <p:cNvPr id="5" name="Shape 3"/>
           <p:cNvSpPr/>
           <p:nvPr/>
         </p:nvSpPr>
         <p:spPr>
           <a:xfrm>
-            <a:off x="1051560" y="2487168"/>
-            <a:ext cx="438912" cy="438912"/>
-          </a:xfrm>
-          <a:prstGeom prst="ellipse">
+            <a:off x="777240" y="1691640"/>
+            <a:ext cx="10607040" cy="457200"/>
+          </a:xfrm>
+          <a:prstGeom prst="rect">
             <a:avLst/>
           </a:prstGeom>
           <a:solidFill>
@@ -3957,7 +5522,7 @@
           </a:solidFill>
           <a:ln w="12700">
             <a:solidFill>
-              <a:srgbClr val="2F4F6B"/>
+              <a:srgbClr val="333333"/>
             </a:solidFill>
             <a:prstDash val="solid"/>
           </a:ln>
@@ -3965,40 +5530,82 @@
       </p:sp>
       <p:sp>
         <p:nvSpPr>
+          <p:cNvPr id="6" name="Text 4"/>
+          <p:cNvSpPr txBox="1"/>
+          <p:nvPr/>
+        </p:nvSpPr>
+        <p:spPr>
+          <a:xfrm>
+            <a:off x="1051560" y="1709928"/>
+            <a:ext cx="10058400" cy="420624"/>
+          </a:xfrm>
+          <a:prstGeom prst="rect">
+            <a:avLst/>
+          </a:prstGeom>
+          <a:noFill/>
+          <a:ln/>
+        </p:spPr>
+        <p:txBody>
+          <a:bodyPr wrap="square" lIns="0" tIns="0" rIns="0" bIns="0" rtlCol="0" anchor="ctr"/>
+          <a:lstStyle/>
+          <a:p>
+            <a:pPr indent="0" marL="0">
+              <a:buNone/>
+            </a:pPr>
+            <a:r>
+              <a:rPr lang="en-US" sz="1200" b="1" dirty="0">
+                <a:solidFill>
+                  <a:srgbClr val="FFFFFF"/>
+                </a:solidFill>
+                <a:latin typeface="Yu Gothic" pitchFamily="34" charset="0"/>
+                <a:ea typeface="Yu Gothic" pitchFamily="34" charset="-122"/>
+                <a:cs typeface="Yu Gothic" pitchFamily="34" charset="-120"/>
+              </a:rPr>
+              <a:t>社内文書テンプレート（記入例：問い合わせへの一次回答）</a:t>
+            </a:r>
+            <a:endParaRPr lang="en-US" sz="1200" dirty="0"/>
+          </a:p>
+        </p:txBody>
+      </p:sp>
+      <p:sp>
+        <p:nvSpPr>
           <p:cNvPr id="7" name="Text 5"/>
           <p:cNvSpPr txBox="1"/>
           <p:nvPr/>
         </p:nvSpPr>
         <p:spPr>
           <a:xfrm>
-            <a:off x="1051560" y="2487168"/>
-            <a:ext cx="438912" cy="438912"/>
-          </a:xfrm>
-          <a:prstGeom prst="rect">
-            <a:avLst/>
-          </a:prstGeom>
-          <a:noFill/>
-          <a:ln/>
-        </p:spPr>
-        <p:txBody>
-          <a:bodyPr wrap="square" lIns="0" tIns="0" rIns="0" bIns="0" rtlCol="0" anchor="ctr"/>
-          <a:lstStyle/>
-          <a:p>
-            <a:pPr algn="ctr" indent="0" marL="0">
-              <a:buNone/>
-            </a:pPr>
-            <a:r>
-              <a:rPr lang="en-US" sz="1400" b="1" dirty="0">
-                <a:solidFill>
-                  <a:srgbClr val="FFFFFF"/>
-                </a:solidFill>
-                <a:latin typeface="Yu Gothic" pitchFamily="34" charset="0"/>
-                <a:ea typeface="Yu Gothic" pitchFamily="34" charset="-122"/>
-                <a:cs typeface="Yu Gothic" pitchFamily="34" charset="-120"/>
-              </a:rPr>
-              <a:t>1</a:t>
-            </a:r>
-            <a:endParaRPr lang="en-US" sz="1400" dirty="0"/>
+            <a:off x="1097280" y="2331720"/>
+            <a:ext cx="2057400" cy="530352"/>
+          </a:xfrm>
+          <a:prstGeom prst="rect">
+            <a:avLst/>
+          </a:prstGeom>
+          <a:noFill/>
+          <a:ln/>
+        </p:spPr>
+        <p:txBody>
+          <a:bodyPr wrap="square" lIns="0" tIns="0" rIns="0" bIns="0" rtlCol="0" anchor="ctr"/>
+          <a:lstStyle/>
+          <a:p>
+            <a:pPr indent="0" marL="0">
+              <a:lnSpc>
+                <a:spcPct val="110000"/>
+              </a:lnSpc>
+              <a:buNone/>
+            </a:pPr>
+            <a:r>
+              <a:rPr lang="en-US" sz="1100" b="1" dirty="0">
+                <a:solidFill>
+                  <a:srgbClr val="2F4F6B"/>
+                </a:solidFill>
+                <a:latin typeface="Yu Gothic" pitchFamily="34" charset="0"/>
+                <a:ea typeface="Yu Gothic" pitchFamily="34" charset="-122"/>
+                <a:cs typeface="Yu Gothic" pitchFamily="34" charset="-120"/>
+              </a:rPr>
+              <a:t>用途の1行</a:t>
+            </a:r>
+            <a:endParaRPr lang="en-US" sz="1100" dirty="0"/>
           </a:p>
         </p:txBody>
       </p:sp>
@@ -4010,8 +5617,8 @@
         </p:nvSpPr>
         <p:spPr>
           <a:xfrm>
-            <a:off x="1051560" y="3035808"/>
-            <a:ext cx="2834640" cy="777240"/>
+            <a:off x="3291840" y="2331720"/>
+            <a:ext cx="7772400" cy="530352"/>
           </a:xfrm>
           <a:prstGeom prst="rect">
             <a:avLst/>
@@ -4025,22 +5632,22 @@
           <a:p>
             <a:pPr indent="0" marL="0">
               <a:lnSpc>
-                <a:spcPct val="125000"/>
+                <a:spcPct val="115000"/>
               </a:lnSpc>
               <a:buNone/>
             </a:pPr>
             <a:r>
-              <a:rPr lang="en-US" sz="1500" b="1" dirty="0">
+              <a:rPr lang="en-US" sz="1150" dirty="0">
                 <a:solidFill>
                   <a:srgbClr val="23201D"/>
                 </a:solidFill>
-                <a:latin typeface="Yu Gothic" pitchFamily="34" charset="0"/>
-                <a:ea typeface="Yu Gothic" pitchFamily="34" charset="-122"/>
-                <a:cs typeface="Yu Gothic" pitchFamily="34" charset="-120"/>
-              </a:rPr>
-              <a:t>実物を3種、テンプレート化する</a:t>
-            </a:r>
-            <a:endParaRPr lang="en-US" sz="1500" dirty="0"/>
+                <a:latin typeface="Consolas" pitchFamily="34" charset="0"/>
+                <a:ea typeface="Consolas" pitchFamily="34" charset="-122"/>
+                <a:cs typeface="Consolas" pitchFamily="34" charset="-120"/>
+              </a:rPr>
+              <a:t>初回問い合わせに、24時間以内に返す一次回答をつくる</a:t>
+            </a:r>
+            <a:endParaRPr lang="en-US" sz="1150" dirty="0"/>
           </a:p>
         </p:txBody>
       </p:sp>
@@ -4052,8 +5659,8 @@
         </p:nvSpPr>
         <p:spPr>
           <a:xfrm>
-            <a:off x="1051560" y="3822192"/>
-            <a:ext cx="2834640" cy="960120"/>
+            <a:off x="1097280" y="2862072"/>
+            <a:ext cx="2057400" cy="530352"/>
           </a:xfrm>
           <a:prstGeom prst="rect">
             <a:avLst/>
@@ -4067,12 +5674,348 @@
           <a:p>
             <a:pPr indent="0" marL="0">
               <a:lnSpc>
-                <a:spcPct val="130000"/>
+                <a:spcPct val="110000"/>
               </a:lnSpc>
               <a:buNone/>
             </a:pPr>
             <a:r>
-              <a:rPr lang="en-US" sz="1200" dirty="0">
+              <a:rPr lang="en-US" sz="1100" b="1" dirty="0">
+                <a:solidFill>
+                  <a:srgbClr val="2F4F6B"/>
+                </a:solidFill>
+                <a:latin typeface="Yu Gothic" pitchFamily="34" charset="0"/>
+                <a:ea typeface="Yu Gothic" pitchFamily="34" charset="-122"/>
+                <a:cs typeface="Yu Gothic" pitchFamily="34" charset="-120"/>
+              </a:rPr>
+              <a:t>差し替える箇所</a:t>
+            </a:r>
+            <a:endParaRPr lang="en-US" sz="1100" dirty="0"/>
+          </a:p>
+        </p:txBody>
+      </p:sp>
+      <p:sp>
+        <p:nvSpPr>
+          <p:cNvPr id="10" name="Text 8"/>
+          <p:cNvSpPr txBox="1"/>
+          <p:nvPr/>
+        </p:nvSpPr>
+        <p:spPr>
+          <a:xfrm>
+            <a:off x="3291840" y="2862072"/>
+            <a:ext cx="7772400" cy="530352"/>
+          </a:xfrm>
+          <a:prstGeom prst="rect">
+            <a:avLst/>
+          </a:prstGeom>
+          <a:noFill/>
+          <a:ln/>
+        </p:spPr>
+        <p:txBody>
+          <a:bodyPr wrap="square" lIns="0" tIns="0" rIns="0" bIns="0" rtlCol="0" anchor="ctr"/>
+          <a:lstStyle/>
+          <a:p>
+            <a:pPr indent="0" marL="0">
+              <a:lnSpc>
+                <a:spcPct val="115000"/>
+              </a:lnSpc>
+              <a:buNone/>
+            </a:pPr>
+            <a:r>
+              <a:rPr lang="en-US" sz="1150" dirty="0">
+                <a:solidFill>
+                  <a:srgbClr val="23201D"/>
+                </a:solidFill>
+                <a:latin typeface="Consolas" pitchFamily="34" charset="0"/>
+                <a:ea typeface="Consolas" pitchFamily="34" charset="-122"/>
+                <a:cs typeface="Consolas" pitchFamily="34" charset="-120"/>
+              </a:rPr>
+              <a:t>【会社名】【担当者名】【問い合わせ内容の要約】【回答期日】</a:t>
+            </a:r>
+            <a:endParaRPr lang="en-US" sz="1150" dirty="0"/>
+          </a:p>
+        </p:txBody>
+      </p:sp>
+      <p:sp>
+        <p:nvSpPr>
+          <p:cNvPr id="11" name="Text 9"/>
+          <p:cNvSpPr txBox="1"/>
+          <p:nvPr/>
+        </p:nvSpPr>
+        <p:spPr>
+          <a:xfrm>
+            <a:off x="1097280" y="3392424"/>
+            <a:ext cx="2057400" cy="530352"/>
+          </a:xfrm>
+          <a:prstGeom prst="rect">
+            <a:avLst/>
+          </a:prstGeom>
+          <a:noFill/>
+          <a:ln/>
+        </p:spPr>
+        <p:txBody>
+          <a:bodyPr wrap="square" lIns="0" tIns="0" rIns="0" bIns="0" rtlCol="0" anchor="ctr"/>
+          <a:lstStyle/>
+          <a:p>
+            <a:pPr indent="0" marL="0">
+              <a:lnSpc>
+                <a:spcPct val="110000"/>
+              </a:lnSpc>
+              <a:buNone/>
+            </a:pPr>
+            <a:r>
+              <a:rPr lang="en-US" sz="1100" b="1" dirty="0">
+                <a:solidFill>
+                  <a:srgbClr val="2F4F6B"/>
+                </a:solidFill>
+                <a:latin typeface="Yu Gothic" pitchFamily="34" charset="0"/>
+                <a:ea typeface="Yu Gothic" pitchFamily="34" charset="-122"/>
+                <a:cs typeface="Yu Gothic" pitchFamily="34" charset="-120"/>
+              </a:rPr>
+              <a:t>必ず人が見る</a:t>
+            </a:r>
+            <a:endParaRPr lang="en-US" sz="1100" dirty="0"/>
+          </a:p>
+        </p:txBody>
+      </p:sp>
+      <p:sp>
+        <p:nvSpPr>
+          <p:cNvPr id="12" name="Text 10"/>
+          <p:cNvSpPr txBox="1"/>
+          <p:nvPr/>
+        </p:nvSpPr>
+        <p:spPr>
+          <a:xfrm>
+            <a:off x="3291840" y="3392424"/>
+            <a:ext cx="7772400" cy="530352"/>
+          </a:xfrm>
+          <a:prstGeom prst="rect">
+            <a:avLst/>
+          </a:prstGeom>
+          <a:noFill/>
+          <a:ln/>
+        </p:spPr>
+        <p:txBody>
+          <a:bodyPr wrap="square" lIns="0" tIns="0" rIns="0" bIns="0" rtlCol="0" anchor="ctr"/>
+          <a:lstStyle/>
+          <a:p>
+            <a:pPr indent="0" marL="0">
+              <a:lnSpc>
+                <a:spcPct val="115000"/>
+              </a:lnSpc>
+              <a:buNone/>
+            </a:pPr>
+            <a:r>
+              <a:rPr lang="en-US" sz="1150" dirty="0">
+                <a:solidFill>
+                  <a:srgbClr val="23201D"/>
+                </a:solidFill>
+                <a:latin typeface="Consolas" pitchFamily="34" charset="0"/>
+                <a:ea typeface="Consolas" pitchFamily="34" charset="-122"/>
+                <a:cs typeface="Consolas" pitchFamily="34" charset="-120"/>
+              </a:rPr>
+              <a:t>金額に触れる場合は、送信前に社長が確認</a:t>
+            </a:r>
+            <a:endParaRPr lang="en-US" sz="1150" dirty="0"/>
+          </a:p>
+        </p:txBody>
+      </p:sp>
+      <p:sp>
+        <p:nvSpPr>
+          <p:cNvPr id="13" name="Text 11"/>
+          <p:cNvSpPr txBox="1"/>
+          <p:nvPr/>
+        </p:nvSpPr>
+        <p:spPr>
+          <a:xfrm>
+            <a:off x="1097280" y="3922776"/>
+            <a:ext cx="2057400" cy="530352"/>
+          </a:xfrm>
+          <a:prstGeom prst="rect">
+            <a:avLst/>
+          </a:prstGeom>
+          <a:noFill/>
+          <a:ln/>
+        </p:spPr>
+        <p:txBody>
+          <a:bodyPr wrap="square" lIns="0" tIns="0" rIns="0" bIns="0" rtlCol="0" anchor="ctr"/>
+          <a:lstStyle/>
+          <a:p>
+            <a:pPr indent="0" marL="0">
+              <a:lnSpc>
+                <a:spcPct val="110000"/>
+              </a:lnSpc>
+              <a:buNone/>
+            </a:pPr>
+            <a:r>
+              <a:rPr lang="en-US" sz="1100" b="1" dirty="0">
+                <a:solidFill>
+                  <a:srgbClr val="2F4F6B"/>
+                </a:solidFill>
+                <a:latin typeface="Yu Gothic" pitchFamily="34" charset="0"/>
+                <a:ea typeface="Yu Gothic" pitchFamily="34" charset="-122"/>
+                <a:cs typeface="Yu Gothic" pitchFamily="34" charset="-120"/>
+              </a:rPr>
+              <a:t>使う人</a:t>
+            </a:r>
+            <a:endParaRPr lang="en-US" sz="1100" dirty="0"/>
+          </a:p>
+        </p:txBody>
+      </p:sp>
+      <p:sp>
+        <p:nvSpPr>
+          <p:cNvPr id="14" name="Text 12"/>
+          <p:cNvSpPr txBox="1"/>
+          <p:nvPr/>
+        </p:nvSpPr>
+        <p:spPr>
+          <a:xfrm>
+            <a:off x="3291840" y="3922776"/>
+            <a:ext cx="7772400" cy="530352"/>
+          </a:xfrm>
+          <a:prstGeom prst="rect">
+            <a:avLst/>
+          </a:prstGeom>
+          <a:noFill/>
+          <a:ln/>
+        </p:spPr>
+        <p:txBody>
+          <a:bodyPr wrap="square" lIns="0" tIns="0" rIns="0" bIns="0" rtlCol="0" anchor="ctr"/>
+          <a:lstStyle/>
+          <a:p>
+            <a:pPr indent="0" marL="0">
+              <a:lnSpc>
+                <a:spcPct val="115000"/>
+              </a:lnSpc>
+              <a:buNone/>
+            </a:pPr>
+            <a:r>
+              <a:rPr lang="en-US" sz="1150" dirty="0">
+                <a:solidFill>
+                  <a:srgbClr val="23201D"/>
+                </a:solidFill>
+                <a:latin typeface="Consolas" pitchFamily="34" charset="0"/>
+                <a:ea typeface="Consolas" pitchFamily="34" charset="-122"/>
+                <a:cs typeface="Consolas" pitchFamily="34" charset="-120"/>
+              </a:rPr>
+              <a:t>事務1名（不在時は営業）</a:t>
+            </a:r>
+            <a:endParaRPr lang="en-US" sz="1150" dirty="0"/>
+          </a:p>
+        </p:txBody>
+      </p:sp>
+      <p:sp>
+        <p:nvSpPr>
+          <p:cNvPr id="15" name="Text 13"/>
+          <p:cNvSpPr txBox="1"/>
+          <p:nvPr/>
+        </p:nvSpPr>
+        <p:spPr>
+          <a:xfrm>
+            <a:off x="1097280" y="4453128"/>
+            <a:ext cx="2057400" cy="530352"/>
+          </a:xfrm>
+          <a:prstGeom prst="rect">
+            <a:avLst/>
+          </a:prstGeom>
+          <a:noFill/>
+          <a:ln/>
+        </p:spPr>
+        <p:txBody>
+          <a:bodyPr wrap="square" lIns="0" tIns="0" rIns="0" bIns="0" rtlCol="0" anchor="ctr"/>
+          <a:lstStyle/>
+          <a:p>
+            <a:pPr indent="0" marL="0">
+              <a:lnSpc>
+                <a:spcPct val="110000"/>
+              </a:lnSpc>
+              <a:buNone/>
+            </a:pPr>
+            <a:r>
+              <a:rPr lang="en-US" sz="1100" b="1" dirty="0">
+                <a:solidFill>
+                  <a:srgbClr val="2F4F6B"/>
+                </a:solidFill>
+                <a:latin typeface="Yu Gothic" pitchFamily="34" charset="0"/>
+                <a:ea typeface="Yu Gothic" pitchFamily="34" charset="-122"/>
+                <a:cs typeface="Yu Gothic" pitchFamily="34" charset="-120"/>
+              </a:rPr>
+              <a:t>置き場所</a:t>
+            </a:r>
+            <a:endParaRPr lang="en-US" sz="1100" dirty="0"/>
+          </a:p>
+        </p:txBody>
+      </p:sp>
+      <p:sp>
+        <p:nvSpPr>
+          <p:cNvPr id="16" name="Text 14"/>
+          <p:cNvSpPr txBox="1"/>
+          <p:nvPr/>
+        </p:nvSpPr>
+        <p:spPr>
+          <a:xfrm>
+            <a:off x="3291840" y="4453128"/>
+            <a:ext cx="7772400" cy="530352"/>
+          </a:xfrm>
+          <a:prstGeom prst="rect">
+            <a:avLst/>
+          </a:prstGeom>
+          <a:noFill/>
+          <a:ln/>
+        </p:spPr>
+        <p:txBody>
+          <a:bodyPr wrap="square" lIns="0" tIns="0" rIns="0" bIns="0" rtlCol="0" anchor="ctr"/>
+          <a:lstStyle/>
+          <a:p>
+            <a:pPr indent="0" marL="0">
+              <a:lnSpc>
+                <a:spcPct val="115000"/>
+              </a:lnSpc>
+              <a:buNone/>
+            </a:pPr>
+            <a:r>
+              <a:rPr lang="en-US" sz="1150" dirty="0">
+                <a:solidFill>
+                  <a:srgbClr val="23201D"/>
+                </a:solidFill>
+                <a:latin typeface="Consolas" pitchFamily="34" charset="0"/>
+                <a:ea typeface="Consolas" pitchFamily="34" charset="-122"/>
+                <a:cs typeface="Consolas" pitchFamily="34" charset="-120"/>
+              </a:rPr>
+              <a:t>共有フォルダ ＞ 定型文 ＞ 01_一次回答</a:t>
+            </a:r>
+            <a:endParaRPr lang="en-US" sz="1150" dirty="0"/>
+          </a:p>
+        </p:txBody>
+      </p:sp>
+      <p:sp>
+        <p:nvSpPr>
+          <p:cNvPr id="17" name="Text 15"/>
+          <p:cNvSpPr txBox="1"/>
+          <p:nvPr/>
+        </p:nvSpPr>
+        <p:spPr>
+          <a:xfrm>
+            <a:off x="777240" y="5239512"/>
+            <a:ext cx="10607040" cy="548640"/>
+          </a:xfrm>
+          <a:prstGeom prst="rect">
+            <a:avLst/>
+          </a:prstGeom>
+          <a:noFill/>
+          <a:ln/>
+        </p:spPr>
+        <p:txBody>
+          <a:bodyPr wrap="square" lIns="0" tIns="0" rIns="0" bIns="0" rtlCol="0" anchor="ctr"/>
+          <a:lstStyle/>
+          <a:p>
+            <a:pPr indent="0" marL="0">
+              <a:lnSpc>
+                <a:spcPct val="135000"/>
+              </a:lnSpc>
+              <a:buNone/>
+            </a:pPr>
+            <a:r>
+              <a:rPr lang="en-US" sz="1250" dirty="0">
                 <a:solidFill>
                   <a:srgbClr val="5A534A"/>
                 </a:solidFill>
@@ -4080,271 +6023,9 @@
                 <a:ea typeface="Yu Gothic" pitchFamily="34" charset="-122"/>
                 <a:cs typeface="Yu Gothic" pitchFamily="34" charset="-120"/>
               </a:rPr>
-              <a:t>お持ちいただいた文書をそのまま使います</a:t>
-            </a:r>
-            <a:endParaRPr lang="en-US" sz="1200" dirty="0"/>
-          </a:p>
-        </p:txBody>
-      </p:sp>
-      <p:sp>
-        <p:nvSpPr>
-          <p:cNvPr id="10" name="Shape 8"/>
-          <p:cNvSpPr/>
-          <p:nvPr/>
-        </p:nvSpPr>
-        <p:spPr>
-          <a:xfrm>
-            <a:off x="4389120" y="2240280"/>
-            <a:ext cx="3383280" cy="2697480"/>
-          </a:xfrm>
-          <a:prstGeom prst="rect">
-            <a:avLst/>
-          </a:prstGeom>
-          <a:solidFill>
-            <a:srgbClr val="FFFFFF"/>
-          </a:solidFill>
-          <a:ln w="12700">
-            <a:solidFill>
-              <a:srgbClr val="EDE7DB"/>
-            </a:solidFill>
-            <a:prstDash val="solid"/>
-          </a:ln>
-        </p:spPr>
-      </p:sp>
-      <p:sp>
-        <p:nvSpPr>
-          <p:cNvPr id="11" name="Shape 9"/>
-          <p:cNvSpPr/>
-          <p:nvPr/>
-        </p:nvSpPr>
-        <p:spPr>
-          <a:xfrm>
-            <a:off x="4663440" y="2487168"/>
-            <a:ext cx="438912" cy="438912"/>
-          </a:xfrm>
-          <a:prstGeom prst="ellipse">
-            <a:avLst/>
-          </a:prstGeom>
-          <a:solidFill>
-            <a:srgbClr val="2F4F6B"/>
-          </a:solidFill>
-          <a:ln w="12700">
-            <a:solidFill>
-              <a:srgbClr val="2F4F6B"/>
-            </a:solidFill>
-            <a:prstDash val="solid"/>
-          </a:ln>
-        </p:spPr>
-      </p:sp>
-      <p:sp>
-        <p:nvSpPr>
-          <p:cNvPr id="12" name="Text 10"/>
-          <p:cNvSpPr txBox="1"/>
-          <p:nvPr/>
-        </p:nvSpPr>
-        <p:spPr>
-          <a:xfrm>
-            <a:off x="4663440" y="2487168"/>
-            <a:ext cx="438912" cy="438912"/>
-          </a:xfrm>
-          <a:prstGeom prst="rect">
-            <a:avLst/>
-          </a:prstGeom>
-          <a:noFill/>
-          <a:ln/>
-        </p:spPr>
-        <p:txBody>
-          <a:bodyPr wrap="square" lIns="0" tIns="0" rIns="0" bIns="0" rtlCol="0" anchor="ctr"/>
-          <a:lstStyle/>
-          <a:p>
-            <a:pPr algn="ctr" indent="0" marL="0">
-              <a:buNone/>
-            </a:pPr>
-            <a:r>
-              <a:rPr lang="en-US" sz="1400" b="1" dirty="0">
-                <a:solidFill>
-                  <a:srgbClr val="FFFFFF"/>
-                </a:solidFill>
-                <a:latin typeface="Yu Gothic" pitchFamily="34" charset="0"/>
-                <a:ea typeface="Yu Gothic" pitchFamily="34" charset="-122"/>
-                <a:cs typeface="Yu Gothic" pitchFamily="34" charset="-120"/>
-              </a:rPr>
-              <a:t>2</a:t>
-            </a:r>
-            <a:endParaRPr lang="en-US" sz="1400" dirty="0"/>
-          </a:p>
-        </p:txBody>
-      </p:sp>
-      <p:sp>
-        <p:nvSpPr>
-          <p:cNvPr id="13" name="Text 11"/>
-          <p:cNvSpPr txBox="1"/>
-          <p:nvPr/>
-        </p:nvSpPr>
-        <p:spPr>
-          <a:xfrm>
-            <a:off x="4663440" y="3035808"/>
-            <a:ext cx="2834640" cy="777240"/>
-          </a:xfrm>
-          <a:prstGeom prst="rect">
-            <a:avLst/>
-          </a:prstGeom>
-          <a:noFill/>
-          <a:ln/>
-        </p:spPr>
-        <p:txBody>
-          <a:bodyPr wrap="square" lIns="0" tIns="0" rIns="0" bIns="0" rtlCol="0" anchor="ctr"/>
-          <a:lstStyle/>
-          <a:p>
-            <a:pPr indent="0" marL="0">
-              <a:lnSpc>
-                <a:spcPct val="125000"/>
-              </a:lnSpc>
-              <a:buNone/>
-            </a:pPr>
-            <a:r>
-              <a:rPr lang="en-US" sz="1500" b="1" dirty="0">
-                <a:solidFill>
-                  <a:srgbClr val="23201D"/>
-                </a:solidFill>
-                <a:latin typeface="Yu Gothic" pitchFamily="34" charset="0"/>
-                <a:ea typeface="Yu Gothic" pitchFamily="34" charset="-122"/>
-                <a:cs typeface="Yu Gothic" pitchFamily="34" charset="-120"/>
-              </a:rPr>
-              <a:t>1つは、社員に渡す前提で作る</a:t>
-            </a:r>
-            <a:endParaRPr lang="en-US" sz="1500" dirty="0"/>
-          </a:p>
-        </p:txBody>
-      </p:sp>
-      <p:sp>
-        <p:nvSpPr>
-          <p:cNvPr id="14" name="Text 12"/>
-          <p:cNvSpPr txBox="1"/>
-          <p:nvPr/>
-        </p:nvSpPr>
-        <p:spPr>
-          <a:xfrm>
-            <a:off x="4663440" y="3822192"/>
-            <a:ext cx="2834640" cy="960120"/>
-          </a:xfrm>
-          <a:prstGeom prst="rect">
-            <a:avLst/>
-          </a:prstGeom>
-          <a:noFill/>
-          <a:ln/>
-        </p:spPr>
-        <p:txBody>
-          <a:bodyPr wrap="square" lIns="0" tIns="0" rIns="0" bIns="0" rtlCol="0" anchor="ctr"/>
-          <a:lstStyle/>
-          <a:p>
-            <a:pPr indent="0" marL="0">
-              <a:lnSpc>
-                <a:spcPct val="130000"/>
-              </a:lnSpc>
-              <a:buNone/>
-            </a:pPr>
-            <a:r>
-              <a:rPr lang="en-US" sz="1200" dirty="0">
-                <a:solidFill>
-                  <a:srgbClr val="5A534A"/>
-                </a:solidFill>
-                <a:latin typeface="Yu Gothic" pitchFamily="34" charset="0"/>
-                <a:ea typeface="Yu Gothic" pitchFamily="34" charset="-122"/>
-                <a:cs typeface="Yu Gothic" pitchFamily="34" charset="-120"/>
-              </a:rPr>
-              <a:t>用途の1行・差し替え箇所【　】・確認事項の注意書きを必ず入れます</a:t>
-            </a:r>
-            <a:endParaRPr lang="en-US" sz="1200" dirty="0"/>
-          </a:p>
-        </p:txBody>
-      </p:sp>
-      <p:sp>
-        <p:nvSpPr>
-          <p:cNvPr id="15" name="Shape 13"/>
-          <p:cNvSpPr/>
-          <p:nvPr/>
-        </p:nvSpPr>
-        <p:spPr>
-          <a:xfrm>
-            <a:off x="8001000" y="2240280"/>
-            <a:ext cx="3383280" cy="2697480"/>
-          </a:xfrm>
-          <a:prstGeom prst="rect">
-            <a:avLst/>
-          </a:prstGeom>
-          <a:solidFill>
-            <a:srgbClr val="FFFFFF"/>
-          </a:solidFill>
-          <a:ln w="12700">
-            <a:solidFill>
-              <a:srgbClr val="EDE7DB"/>
-            </a:solidFill>
-            <a:prstDash val="solid"/>
-          </a:ln>
-        </p:spPr>
-      </p:sp>
-      <p:sp>
-        <p:nvSpPr>
-          <p:cNvPr id="16" name="Shape 14"/>
-          <p:cNvSpPr/>
-          <p:nvPr/>
-        </p:nvSpPr>
-        <p:spPr>
-          <a:xfrm>
-            <a:off x="8275320" y="2487168"/>
-            <a:ext cx="438912" cy="438912"/>
-          </a:xfrm>
-          <a:prstGeom prst="ellipse">
-            <a:avLst/>
-          </a:prstGeom>
-          <a:solidFill>
-            <a:srgbClr val="2F4F6B"/>
-          </a:solidFill>
-          <a:ln w="12700">
-            <a:solidFill>
-              <a:srgbClr val="2F4F6B"/>
-            </a:solidFill>
-            <a:prstDash val="solid"/>
-          </a:ln>
-        </p:spPr>
-      </p:sp>
-      <p:sp>
-        <p:nvSpPr>
-          <p:cNvPr id="17" name="Text 15"/>
-          <p:cNvSpPr txBox="1"/>
-          <p:nvPr/>
-        </p:nvSpPr>
-        <p:spPr>
-          <a:xfrm>
-            <a:off x="8275320" y="2487168"/>
-            <a:ext cx="438912" cy="438912"/>
-          </a:xfrm>
-          <a:prstGeom prst="rect">
-            <a:avLst/>
-          </a:prstGeom>
-          <a:noFill/>
-          <a:ln/>
-        </p:spPr>
-        <p:txBody>
-          <a:bodyPr wrap="square" lIns="0" tIns="0" rIns="0" bIns="0" rtlCol="0" anchor="ctr"/>
-          <a:lstStyle/>
-          <a:p>
-            <a:pPr algn="ctr" indent="0" marL="0">
-              <a:buNone/>
-            </a:pPr>
-            <a:r>
-              <a:rPr lang="en-US" sz="1400" b="1" dirty="0">
-                <a:solidFill>
-                  <a:srgbClr val="FFFFFF"/>
-                </a:solidFill>
-                <a:latin typeface="Yu Gothic" pitchFamily="34" charset="0"/>
-                <a:ea typeface="Yu Gothic" pitchFamily="34" charset="-122"/>
-                <a:cs typeface="Yu Gothic" pitchFamily="34" charset="-120"/>
-              </a:rPr>
-              <a:t>3</a:t>
-            </a:r>
-            <a:endParaRPr lang="en-US" sz="1400" dirty="0"/>
+              <a:t>この5行がないテンプレートは、渡しても使われません。指示文の出来より、渡し方の設計のほうが定着を決めます。</a:t>
+            </a:r>
+            <a:endParaRPr lang="en-US" sz="1250" dirty="0"/>
           </a:p>
         </p:txBody>
       </p:sp>
@@ -4356,37 +6037,34 @@
         </p:nvSpPr>
         <p:spPr>
           <a:xfrm>
-            <a:off x="8275320" y="3035808"/>
-            <a:ext cx="2834640" cy="777240"/>
-          </a:xfrm>
-          <a:prstGeom prst="rect">
-            <a:avLst/>
-          </a:prstGeom>
-          <a:noFill/>
-          <a:ln/>
-        </p:spPr>
-        <p:txBody>
-          <a:bodyPr wrap="square" lIns="0" tIns="0" rIns="0" bIns="0" rtlCol="0" anchor="ctr"/>
-          <a:lstStyle/>
-          <a:p>
-            <a:pPr indent="0" marL="0">
-              <a:lnSpc>
-                <a:spcPct val="125000"/>
-              </a:lnSpc>
-              <a:buNone/>
-            </a:pPr>
-            <a:r>
-              <a:rPr lang="en-US" sz="1500" b="1" dirty="0">
-                <a:solidFill>
-                  <a:srgbClr val="23201D"/>
-                </a:solidFill>
-                <a:latin typeface="Yu Gothic" pitchFamily="34" charset="0"/>
-                <a:ea typeface="Yu Gothic" pitchFamily="34" charset="-122"/>
-                <a:cs typeface="Yu Gothic" pitchFamily="34" charset="-120"/>
-              </a:rPr>
-              <a:t>渡し方の一言まで決める</a:t>
-            </a:r>
-            <a:endParaRPr lang="en-US" sz="1500" dirty="0"/>
+            <a:off x="777240" y="6382512"/>
+            <a:ext cx="7424928" cy="256032"/>
+          </a:xfrm>
+          <a:prstGeom prst="rect">
+            <a:avLst/>
+          </a:prstGeom>
+          <a:noFill/>
+          <a:ln/>
+        </p:spPr>
+        <p:txBody>
+          <a:bodyPr wrap="square" lIns="0" tIns="0" rIns="0" bIns="0" rtlCol="0" anchor="ctr"/>
+          <a:lstStyle/>
+          <a:p>
+            <a:pPr indent="0" marL="0">
+              <a:buNone/>
+            </a:pPr>
+            <a:r>
+              <a:rPr lang="en-US" sz="900" dirty="0">
+                <a:solidFill>
+                  <a:srgbClr val="8A8177"/>
+                </a:solidFill>
+                <a:latin typeface="Yu Gothic" pitchFamily="34" charset="0"/>
+                <a:ea typeface="Yu Gothic" pitchFamily="34" charset="-122"/>
+                <a:cs typeface="Yu Gothic" pitchFamily="34" charset="-120"/>
+              </a:rPr>
+              <a:t>第3回　文書とコミュニケーションのAI化</a:t>
+            </a:r>
+            <a:endParaRPr lang="en-US" sz="900" dirty="0"/>
           </a:p>
         </p:txBody>
       </p:sp>
@@ -4398,62 +6076,20 @@
         </p:nvSpPr>
         <p:spPr>
           <a:xfrm>
-            <a:off x="8275320" y="3822192"/>
-            <a:ext cx="2834640" cy="960120"/>
-          </a:xfrm>
-          <a:prstGeom prst="rect">
-            <a:avLst/>
-          </a:prstGeom>
-          <a:noFill/>
-          <a:ln/>
-        </p:spPr>
-        <p:txBody>
-          <a:bodyPr wrap="square" lIns="0" tIns="0" rIns="0" bIns="0" rtlCol="0" anchor="ctr"/>
-          <a:lstStyle/>
-          <a:p>
-            <a:pPr indent="0" marL="0">
-              <a:lnSpc>
-                <a:spcPct val="130000"/>
-              </a:lnSpc>
-              <a:buNone/>
-            </a:pPr>
-            <a:r>
-              <a:rPr lang="en-US" sz="1200" dirty="0">
-                <a:solidFill>
-                  <a:srgbClr val="5A534A"/>
-                </a:solidFill>
-                <a:latin typeface="Yu Gothic" pitchFamily="34" charset="0"/>
-                <a:ea typeface="Yu Gothic" pitchFamily="34" charset="-122"/>
-                <a:cs typeface="Yu Gothic" pitchFamily="34" charset="-120"/>
-              </a:rPr>
-              <a:t>誰に、どう説明して渡すか。ここまで決めないと使われません</a:t>
-            </a:r>
-            <a:endParaRPr lang="en-US" sz="1200" dirty="0"/>
-          </a:p>
-        </p:txBody>
-      </p:sp>
-      <p:sp>
-        <p:nvSpPr>
-          <p:cNvPr id="20" name="Text 18"/>
-          <p:cNvSpPr txBox="1"/>
-          <p:nvPr/>
-        </p:nvSpPr>
-        <p:spPr>
-          <a:xfrm>
-            <a:off x="777240" y="6355080"/>
-            <a:ext cx="7424928" cy="274320"/>
-          </a:xfrm>
-          <a:prstGeom prst="rect">
-            <a:avLst/>
-          </a:prstGeom>
-          <a:noFill/>
-          <a:ln/>
-        </p:spPr>
-        <p:txBody>
-          <a:bodyPr wrap="square" lIns="0" tIns="0" rIns="0" bIns="0" rtlCol="0" anchor="ctr"/>
-          <a:lstStyle/>
-          <a:p>
-            <a:pPr indent="0" marL="0">
+            <a:off x="8202168" y="6382512"/>
+            <a:ext cx="3182112" cy="256032"/>
+          </a:xfrm>
+          <a:prstGeom prst="rect">
+            <a:avLst/>
+          </a:prstGeom>
+          <a:noFill/>
+          <a:ln/>
+        </p:spPr>
+        <p:txBody>
+          <a:bodyPr wrap="square" lIns="0" tIns="0" rIns="0" bIns="0" rtlCol="0" anchor="ctr"/>
+          <a:lstStyle/>
+          <a:p>
+            <a:pPr algn="r" indent="0" marL="0">
               <a:buNone/>
             </a:pPr>
             <a:r>
@@ -4465,46 +6101,7 @@
                 <a:ea typeface="Yu Gothic" pitchFamily="34" charset="-122"/>
                 <a:cs typeface="Yu Gothic" pitchFamily="34" charset="-120"/>
               </a:rPr>
-              <a:t>第3回　文書とコミュニケーションのAI化</a:t>
-            </a:r>
-            <a:endParaRPr lang="en-US" sz="900" dirty="0"/>
-          </a:p>
-        </p:txBody>
-      </p:sp>
-      <p:sp>
-        <p:nvSpPr>
-          <p:cNvPr id="21" name="Text 19"/>
-          <p:cNvSpPr txBox="1"/>
-          <p:nvPr/>
-        </p:nvSpPr>
-        <p:spPr>
-          <a:xfrm>
-            <a:off x="8202168" y="6355080"/>
-            <a:ext cx="3182112" cy="274320"/>
-          </a:xfrm>
-          <a:prstGeom prst="rect">
-            <a:avLst/>
-          </a:prstGeom>
-          <a:noFill/>
-          <a:ln/>
-        </p:spPr>
-        <p:txBody>
-          <a:bodyPr wrap="square" lIns="0" tIns="0" rIns="0" bIns="0" rtlCol="0" anchor="ctr"/>
-          <a:lstStyle/>
-          <a:p>
-            <a:pPr algn="r" indent="0" marL="0">
-              <a:buNone/>
-            </a:pPr>
-            <a:r>
-              <a:rPr lang="en-US" sz="900" dirty="0">
-                <a:solidFill>
-                  <a:srgbClr val="8A8177"/>
-                </a:solidFill>
-                <a:latin typeface="Yu Gothic" pitchFamily="34" charset="0"/>
-                <a:ea typeface="Yu Gothic" pitchFamily="34" charset="-122"/>
-                <a:cs typeface="Yu Gothic" pitchFamily="34" charset="-120"/>
-              </a:rPr>
-              <a:t>演習</a:t>
+              <a:t>あてはめ</a:t>
             </a:r>
             <a:endParaRPr lang="en-US" sz="900" dirty="0"/>
           </a:p>
@@ -4550,7 +6147,7 @@
         </p:nvSpPr>
         <p:spPr>
           <a:xfrm>
-            <a:off x="777240" y="822960"/>
+            <a:off x="777240" y="566928"/>
             <a:ext cx="10607040" cy="274320"/>
           </a:xfrm>
           <a:prstGeom prst="rect">
@@ -4569,13 +6166,13 @@
             <a:r>
               <a:rPr lang="en-US" sz="1100" b="1" spc="250" kern="0" dirty="0">
                 <a:solidFill>
-                  <a:srgbClr val="B04A2F"/>
-                </a:solidFill>
-                <a:latin typeface="Yu Gothic" pitchFamily="34" charset="0"/>
-                <a:ea typeface="Yu Gothic" pitchFamily="34" charset="-122"/>
-                <a:cs typeface="Yu Gothic" pitchFamily="34" charset="-120"/>
-              </a:rPr>
-              <a:t>ここだけは</a:t>
+                  <a:srgbClr val="8A8177"/>
+                </a:solidFill>
+                <a:latin typeface="Yu Gothic" pitchFamily="34" charset="0"/>
+                <a:ea typeface="Yu Gothic" pitchFamily="34" charset="-122"/>
+                <a:cs typeface="Yu Gothic" pitchFamily="34" charset="-120"/>
+              </a:rPr>
+              <a:t>実演 ①</a:t>
             </a:r>
             <a:endParaRPr lang="en-US" sz="1100" dirty="0"/>
           </a:p>
@@ -4589,24 +6186,24 @@
         </p:nvSpPr>
         <p:spPr>
           <a:xfrm>
-            <a:off x="777240" y="1188720"/>
-            <a:ext cx="9546336" cy="822960"/>
-          </a:xfrm>
-          <a:prstGeom prst="rect">
-            <a:avLst/>
-          </a:prstGeom>
-          <a:noFill/>
-          <a:ln/>
-        </p:spPr>
-        <p:txBody>
-          <a:bodyPr wrap="square" lIns="0" tIns="0" rIns="0" bIns="0" rtlCol="0" anchor="ctr"/>
-          <a:lstStyle/>
-          <a:p>
-            <a:pPr indent="0" marL="0">
-              <a:buNone/>
-            </a:pPr>
-            <a:r>
-              <a:rPr lang="en-US" sz="3000" b="1" dirty="0">
+            <a:off x="777240" y="896112"/>
+            <a:ext cx="10607040" cy="640080"/>
+          </a:xfrm>
+          <a:prstGeom prst="rect">
+            <a:avLst/>
+          </a:prstGeom>
+          <a:noFill/>
+          <a:ln/>
+        </p:spPr>
+        <p:txBody>
+          <a:bodyPr wrap="square" lIns="0" tIns="0" rIns="0" bIns="0" rtlCol="0" anchor="ctr"/>
+          <a:lstStyle/>
+          <a:p>
+            <a:pPr indent="0" marL="0">
+              <a:buNone/>
+            </a:pPr>
+            <a:r>
+              <a:rPr lang="en-US" sz="2600" b="1" dirty="0">
                 <a:solidFill>
                   <a:srgbClr val="23201D"/>
                 </a:solidFill>
@@ -4614,9 +6211,9 @@
                 <a:ea typeface="Yu Gothic" pitchFamily="34" charset="-122"/>
                 <a:cs typeface="Yu Gothic" pitchFamily="34" charset="-120"/>
               </a:rPr>
-              <a:t>渡す相手は1名に絞ります</a:t>
-            </a:r>
-            <a:endParaRPr lang="en-US" sz="3000" dirty="0"/>
+              <a:t>文体が自社らしくならない</a:t>
+            </a:r>
+            <a:endParaRPr lang="en-US" sz="2600" dirty="0"/>
           </a:p>
         </p:txBody>
       </p:sp>
@@ -4628,14 +6225,352 @@
         </p:nvSpPr>
         <p:spPr>
           <a:xfrm>
-            <a:off x="777240" y="2331720"/>
-            <a:ext cx="64008" cy="2011680"/>
+            <a:off x="777240" y="1691640"/>
+            <a:ext cx="4879238" cy="1371600"/>
           </a:xfrm>
           <a:prstGeom prst="rect">
             <a:avLst/>
           </a:prstGeom>
           <a:solidFill>
-            <a:srgbClr val="B04A2F"/>
+            <a:srgbClr val="EDE7DB"/>
+          </a:solidFill>
+          <a:ln w="15875">
+            <a:solidFill>
+              <a:srgbClr val="8A8177"/>
+            </a:solidFill>
+            <a:prstDash val="solid"/>
+          </a:ln>
+        </p:spPr>
+      </p:sp>
+      <p:sp>
+        <p:nvSpPr>
+          <p:cNvPr id="5" name="Text 3"/>
+          <p:cNvSpPr txBox="1"/>
+          <p:nvPr/>
+        </p:nvSpPr>
+        <p:spPr>
+          <a:xfrm>
+            <a:off x="1005840" y="1783080"/>
+            <a:ext cx="1828800" cy="274320"/>
+          </a:xfrm>
+          <a:prstGeom prst="rect">
+            <a:avLst/>
+          </a:prstGeom>
+          <a:noFill/>
+          <a:ln/>
+        </p:spPr>
+        <p:txBody>
+          <a:bodyPr wrap="square" lIns="0" tIns="0" rIns="0" bIns="0" rtlCol="0" anchor="ctr"/>
+          <a:lstStyle/>
+          <a:p>
+            <a:pPr indent="0" marL="0">
+              <a:buNone/>
+            </a:pPr>
+            <a:r>
+              <a:rPr lang="en-US" sz="1000" b="1" spc="200" kern="0" dirty="0">
+                <a:solidFill>
+                  <a:srgbClr val="8A8177"/>
+                </a:solidFill>
+                <a:latin typeface="Yu Gothic" pitchFamily="34" charset="0"/>
+                <a:ea typeface="Yu Gothic" pitchFamily="34" charset="-122"/>
+                <a:cs typeface="Yu Gothic" pitchFamily="34" charset="-120"/>
+              </a:rPr>
+              <a:t>入力</a:t>
+            </a:r>
+            <a:endParaRPr lang="en-US" sz="1000" dirty="0"/>
+          </a:p>
+        </p:txBody>
+      </p:sp>
+      <p:sp>
+        <p:nvSpPr>
+          <p:cNvPr id="6" name="Text 4"/>
+          <p:cNvSpPr txBox="1"/>
+          <p:nvPr/>
+        </p:nvSpPr>
+        <p:spPr>
+          <a:xfrm>
+            <a:off x="1005840" y="2084832"/>
+            <a:ext cx="4422038" cy="868680"/>
+          </a:xfrm>
+          <a:prstGeom prst="rect">
+            <a:avLst/>
+          </a:prstGeom>
+          <a:noFill/>
+          <a:ln/>
+        </p:spPr>
+        <p:txBody>
+          <a:bodyPr wrap="square" lIns="0" tIns="0" rIns="0" bIns="0" rtlCol="0" anchor="ctr"/>
+          <a:lstStyle/>
+          <a:p>
+            <a:pPr indent="0" marL="0">
+              <a:lnSpc>
+                <a:spcPct val="125000"/>
+              </a:lnSpc>
+              <a:buNone/>
+            </a:pPr>
+            <a:r>
+              <a:rPr lang="en-US" sz="1200" dirty="0">
+                <a:solidFill>
+                  <a:srgbClr val="23201D"/>
+                </a:solidFill>
+                <a:latin typeface="Consolas" pitchFamily="34" charset="0"/>
+                <a:ea typeface="Consolas" pitchFamily="34" charset="-122"/>
+                <a:cs typeface="Consolas" pitchFamily="34" charset="-120"/>
+              </a:rPr>
+              <a:t>「丁寧なお断りのメールを書いて」</a:t>
+            </a:r>
+            <a:endParaRPr lang="en-US" sz="1200" dirty="0"/>
+          </a:p>
+        </p:txBody>
+      </p:sp>
+      <p:sp>
+        <p:nvSpPr>
+          <p:cNvPr id="7" name="Shape 5"/>
+          <p:cNvSpPr/>
+          <p:nvPr/>
+        </p:nvSpPr>
+        <p:spPr>
+          <a:xfrm>
+            <a:off x="6080760" y="1691640"/>
+            <a:ext cx="5303520" cy="3017520"/>
+          </a:xfrm>
+          <a:prstGeom prst="rect">
+            <a:avLst/>
+          </a:prstGeom>
+          <a:solidFill>
+            <a:srgbClr val="FFFFFF"/>
+          </a:solidFill>
+          <a:ln w="12700">
+            <a:solidFill>
+              <a:srgbClr val="EDE7DB"/>
+            </a:solidFill>
+            <a:prstDash val="solid"/>
+          </a:ln>
+        </p:spPr>
+      </p:sp>
+      <p:sp>
+        <p:nvSpPr>
+          <p:cNvPr id="8" name="Text 6"/>
+          <p:cNvSpPr txBox="1"/>
+          <p:nvPr/>
+        </p:nvSpPr>
+        <p:spPr>
+          <a:xfrm>
+            <a:off x="6309360" y="1783080"/>
+            <a:ext cx="2743200" cy="274320"/>
+          </a:xfrm>
+          <a:prstGeom prst="rect">
+            <a:avLst/>
+          </a:prstGeom>
+          <a:noFill/>
+          <a:ln/>
+        </p:spPr>
+        <p:txBody>
+          <a:bodyPr wrap="square" lIns="0" tIns="0" rIns="0" bIns="0" rtlCol="0" anchor="ctr"/>
+          <a:lstStyle/>
+          <a:p>
+            <a:pPr indent="0" marL="0">
+              <a:buNone/>
+            </a:pPr>
+            <a:r>
+              <a:rPr lang="en-US" sz="1000" b="1" spc="200" kern="0" dirty="0">
+                <a:solidFill>
+                  <a:srgbClr val="8A8177"/>
+                </a:solidFill>
+                <a:latin typeface="Yu Gothic" pitchFamily="34" charset="0"/>
+                <a:ea typeface="Yu Gothic" pitchFamily="34" charset="-122"/>
+                <a:cs typeface="Yu Gothic" pitchFamily="34" charset="-120"/>
+              </a:rPr>
+              <a:t>出てくるもの</a:t>
+            </a:r>
+            <a:endParaRPr lang="en-US" sz="1000" dirty="0"/>
+          </a:p>
+        </p:txBody>
+      </p:sp>
+      <p:sp>
+        <p:nvSpPr>
+          <p:cNvPr id="9" name="Text 7"/>
+          <p:cNvSpPr txBox="1"/>
+          <p:nvPr/>
+        </p:nvSpPr>
+        <p:spPr>
+          <a:xfrm>
+            <a:off x="6309360" y="2148840"/>
+            <a:ext cx="4846320" cy="566928"/>
+          </a:xfrm>
+          <a:prstGeom prst="rect">
+            <a:avLst/>
+          </a:prstGeom>
+          <a:noFill/>
+          <a:ln/>
+        </p:spPr>
+        <p:txBody>
+          <a:bodyPr wrap="square" lIns="0" tIns="0" rIns="0" bIns="0" rtlCol="0" anchor="ctr"/>
+          <a:lstStyle/>
+          <a:p>
+            <a:pPr indent="0" marL="0">
+              <a:lnSpc>
+                <a:spcPct val="125000"/>
+              </a:lnSpc>
+              <a:buNone/>
+            </a:pPr>
+            <a:r>
+              <a:rPr lang="en-US" sz="1250" dirty="0">
+                <a:solidFill>
+                  <a:srgbClr val="23201D"/>
+                </a:solidFill>
+                <a:latin typeface="Yu Gothic" pitchFamily="34" charset="0"/>
+                <a:ea typeface="Yu Gothic" pitchFamily="34" charset="-122"/>
+                <a:cs typeface="Yu Gothic" pitchFamily="34" charset="-120"/>
+              </a:rPr>
+              <a:t>・文法的には正しい</a:t>
+            </a:r>
+            <a:endParaRPr lang="en-US" sz="1250" dirty="0"/>
+          </a:p>
+        </p:txBody>
+      </p:sp>
+      <p:sp>
+        <p:nvSpPr>
+          <p:cNvPr id="10" name="Text 8"/>
+          <p:cNvSpPr txBox="1"/>
+          <p:nvPr/>
+        </p:nvSpPr>
+        <p:spPr>
+          <a:xfrm>
+            <a:off x="6309360" y="2752344"/>
+            <a:ext cx="4846320" cy="566928"/>
+          </a:xfrm>
+          <a:prstGeom prst="rect">
+            <a:avLst/>
+          </a:prstGeom>
+          <a:noFill/>
+          <a:ln/>
+        </p:spPr>
+        <p:txBody>
+          <a:bodyPr wrap="square" lIns="0" tIns="0" rIns="0" bIns="0" rtlCol="0" anchor="ctr"/>
+          <a:lstStyle/>
+          <a:p>
+            <a:pPr indent="0" marL="0">
+              <a:lnSpc>
+                <a:spcPct val="125000"/>
+              </a:lnSpc>
+              <a:buNone/>
+            </a:pPr>
+            <a:r>
+              <a:rPr lang="en-US" sz="1250" dirty="0">
+                <a:solidFill>
+                  <a:srgbClr val="23201D"/>
+                </a:solidFill>
+                <a:latin typeface="Yu Gothic" pitchFamily="34" charset="0"/>
+                <a:ea typeface="Yu Gothic" pitchFamily="34" charset="-122"/>
+                <a:cs typeface="Yu Gothic" pitchFamily="34" charset="-120"/>
+              </a:rPr>
+              <a:t>・ただ、うちの言い方ではない</a:t>
+            </a:r>
+            <a:endParaRPr lang="en-US" sz="1250" dirty="0"/>
+          </a:p>
+        </p:txBody>
+      </p:sp>
+      <p:sp>
+        <p:nvSpPr>
+          <p:cNvPr id="11" name="Text 9"/>
+          <p:cNvSpPr txBox="1"/>
+          <p:nvPr/>
+        </p:nvSpPr>
+        <p:spPr>
+          <a:xfrm>
+            <a:off x="6309360" y="3355848"/>
+            <a:ext cx="4846320" cy="566928"/>
+          </a:xfrm>
+          <a:prstGeom prst="rect">
+            <a:avLst/>
+          </a:prstGeom>
+          <a:noFill/>
+          <a:ln/>
+        </p:spPr>
+        <p:txBody>
+          <a:bodyPr wrap="square" lIns="0" tIns="0" rIns="0" bIns="0" rtlCol="0" anchor="ctr"/>
+          <a:lstStyle/>
+          <a:p>
+            <a:pPr indent="0" marL="0">
+              <a:lnSpc>
+                <a:spcPct val="125000"/>
+              </a:lnSpc>
+              <a:buNone/>
+            </a:pPr>
+            <a:r>
+              <a:rPr lang="en-US" sz="1250" dirty="0">
+                <a:solidFill>
+                  <a:srgbClr val="23201D"/>
+                </a:solidFill>
+                <a:latin typeface="Yu Gothic" pitchFamily="34" charset="0"/>
+                <a:ea typeface="Yu Gothic" pitchFamily="34" charset="-122"/>
+                <a:cs typeface="Yu Gothic" pitchFamily="34" charset="-120"/>
+              </a:rPr>
+              <a:t>・毎回、語尾と言い回しを直している</a:t>
+            </a:r>
+            <a:endParaRPr lang="en-US" sz="1250" dirty="0"/>
+          </a:p>
+        </p:txBody>
+      </p:sp>
+      <p:sp>
+        <p:nvSpPr>
+          <p:cNvPr id="12" name="Text 10"/>
+          <p:cNvSpPr txBox="1"/>
+          <p:nvPr/>
+        </p:nvSpPr>
+        <p:spPr>
+          <a:xfrm>
+            <a:off x="6309360" y="3959352"/>
+            <a:ext cx="4846320" cy="566928"/>
+          </a:xfrm>
+          <a:prstGeom prst="rect">
+            <a:avLst/>
+          </a:prstGeom>
+          <a:noFill/>
+          <a:ln/>
+        </p:spPr>
+        <p:txBody>
+          <a:bodyPr wrap="square" lIns="0" tIns="0" rIns="0" bIns="0" rtlCol="0" anchor="ctr"/>
+          <a:lstStyle/>
+          <a:p>
+            <a:pPr indent="0" marL="0">
+              <a:lnSpc>
+                <a:spcPct val="125000"/>
+              </a:lnSpc>
+              <a:buNone/>
+            </a:pPr>
+            <a:r>
+              <a:rPr lang="en-US" sz="1250" dirty="0">
+                <a:solidFill>
+                  <a:srgbClr val="23201D"/>
+                </a:solidFill>
+                <a:latin typeface="Yu Gothic" pitchFamily="34" charset="0"/>
+                <a:ea typeface="Yu Gothic" pitchFamily="34" charset="-122"/>
+                <a:cs typeface="Yu Gothic" pitchFamily="34" charset="-120"/>
+              </a:rPr>
+              <a:t>・直す時間のほうが長くなる</a:t>
+            </a:r>
+            <a:endParaRPr lang="en-US" sz="1250" dirty="0"/>
+          </a:p>
+        </p:txBody>
+      </p:sp>
+      <p:sp>
+        <p:nvSpPr>
+          <p:cNvPr id="13" name="Shape 11"/>
+          <p:cNvSpPr/>
+          <p:nvPr/>
+        </p:nvSpPr>
+        <p:spPr>
+          <a:xfrm>
+            <a:off x="777240" y="3291840"/>
+            <a:ext cx="4879238" cy="1417320"/>
+          </a:xfrm>
+          <a:prstGeom prst="rect">
+            <a:avLst/>
+          </a:prstGeom>
+          <a:solidFill>
+            <a:srgbClr val="E4DFD5"/>
           </a:solidFill>
           <a:ln w="12700">
             <a:solidFill>
@@ -4647,14 +6582,14 @@
       </p:sp>
       <p:sp>
         <p:nvSpPr>
-          <p:cNvPr id="5" name="Text 3"/>
-          <p:cNvSpPr txBox="1"/>
-          <p:nvPr/>
-        </p:nvSpPr>
-        <p:spPr>
-          <a:xfrm>
-            <a:off x="1188720" y="2331720"/>
-            <a:ext cx="9966960" cy="2011680"/>
+          <p:cNvPr id="14" name="Text 12"/>
+          <p:cNvSpPr txBox="1"/>
+          <p:nvPr/>
+        </p:nvSpPr>
+        <p:spPr>
+          <a:xfrm>
+            <a:off x="1005840" y="3383280"/>
+            <a:ext cx="4422038" cy="1234440"/>
           </a:xfrm>
           <a:prstGeom prst="rect">
             <a:avLst/>
@@ -4668,12 +6603,12 @@
           <a:p>
             <a:pPr indent="0" marL="0">
               <a:lnSpc>
-                <a:spcPct val="160000"/>
+                <a:spcPct val="135000"/>
               </a:lnSpc>
               <a:buNone/>
             </a:pPr>
             <a:r>
-              <a:rPr lang="en-US" sz="1700" dirty="0">
+              <a:rPr lang="en-US" sz="1250" dirty="0">
                 <a:solidFill>
                   <a:srgbClr val="3F3933"/>
                 </a:solidFill>
@@ -4681,22 +6616,86 @@
                 <a:ea typeface="Yu Gothic" pitchFamily="34" charset="-122"/>
                 <a:cs typeface="Yu Gothic" pitchFamily="34" charset="-120"/>
               </a:rPr>
-              <a:t>全社一斉は、ほぼ失敗します。前向きな方を1名だけ選んで、その方が楽になった事実を社内に見せるのが最短です。</a:t>
-            </a:r>
-            <a:endParaRPr lang="en-US" sz="1700" dirty="0"/>
-          </a:p>
-        </p:txBody>
-      </p:sp>
-      <p:sp>
-        <p:nvSpPr>
-          <p:cNvPr id="6" name="Text 4"/>
-          <p:cNvSpPr txBox="1"/>
-          <p:nvPr/>
-        </p:nvSpPr>
-        <p:spPr>
-          <a:xfrm>
-            <a:off x="777240" y="6355080"/>
-            <a:ext cx="7424928" cy="274320"/>
+              <a:t>AIは平均的な日本語を出します。自社の言葉づかいは、渡していないので再現できません。</a:t>
+            </a:r>
+            <a:endParaRPr lang="en-US" sz="1250" dirty="0"/>
+          </a:p>
+        </p:txBody>
+      </p:sp>
+      <p:sp>
+        <p:nvSpPr>
+          <p:cNvPr id="15" name="Shape 13"/>
+          <p:cNvSpPr/>
+          <p:nvPr/>
+        </p:nvSpPr>
+        <p:spPr>
+          <a:xfrm>
+            <a:off x="777240" y="4983480"/>
+            <a:ext cx="10607040" cy="685800"/>
+          </a:xfrm>
+          <a:prstGeom prst="rect">
+            <a:avLst/>
+          </a:prstGeom>
+          <a:solidFill>
+            <a:srgbClr val="8A8177"/>
+          </a:solidFill>
+          <a:ln w="12700">
+            <a:solidFill>
+              <a:srgbClr val="333333"/>
+            </a:solidFill>
+            <a:prstDash val="solid"/>
+          </a:ln>
+        </p:spPr>
+      </p:sp>
+      <p:sp>
+        <p:nvSpPr>
+          <p:cNvPr id="16" name="Text 14"/>
+          <p:cNvSpPr txBox="1"/>
+          <p:nvPr/>
+        </p:nvSpPr>
+        <p:spPr>
+          <a:xfrm>
+            <a:off x="1097280" y="4983480"/>
+            <a:ext cx="9966960" cy="685800"/>
+          </a:xfrm>
+          <a:prstGeom prst="rect">
+            <a:avLst/>
+          </a:prstGeom>
+          <a:noFill/>
+          <a:ln/>
+        </p:spPr>
+        <p:txBody>
+          <a:bodyPr wrap="square" lIns="0" tIns="0" rIns="0" bIns="0" rtlCol="0" anchor="ctr"/>
+          <a:lstStyle/>
+          <a:p>
+            <a:pPr indent="0" marL="0">
+              <a:buNone/>
+            </a:pPr>
+            <a:r>
+              <a:rPr lang="en-US" sz="1450" b="1" dirty="0">
+                <a:solidFill>
+                  <a:srgbClr val="FFFFFF"/>
+                </a:solidFill>
+                <a:latin typeface="Yu Gothic" pitchFamily="34" charset="0"/>
+                <a:ea typeface="Yu Gothic" pitchFamily="34" charset="-122"/>
+                <a:cs typeface="Yu Gothic" pitchFamily="34" charset="-120"/>
+              </a:rPr>
+              <a:t>「自社らしくない」の正体は、見本を渡していないこと</a:t>
+            </a:r>
+            <a:endParaRPr lang="en-US" sz="1450" dirty="0"/>
+          </a:p>
+        </p:txBody>
+      </p:sp>
+      <p:sp>
+        <p:nvSpPr>
+          <p:cNvPr id="17" name="Text 15"/>
+          <p:cNvSpPr txBox="1"/>
+          <p:nvPr/>
+        </p:nvSpPr>
+        <p:spPr>
+          <a:xfrm>
+            <a:off x="777240" y="6382512"/>
+            <a:ext cx="7424928" cy="256032"/>
           </a:xfrm>
           <a:prstGeom prst="rect">
             <a:avLst/>
@@ -4728,14 +6727,14 @@
       </p:sp>
       <p:sp>
         <p:nvSpPr>
-          <p:cNvPr id="7" name="Text 5"/>
-          <p:cNvSpPr txBox="1"/>
-          <p:nvPr/>
-        </p:nvSpPr>
-        <p:spPr>
-          <a:xfrm>
-            <a:off x="8202168" y="6355080"/>
-            <a:ext cx="3182112" cy="274320"/>
+          <p:cNvPr id="18" name="Text 16"/>
+          <p:cNvSpPr txBox="1"/>
+          <p:nvPr/>
+        </p:nvSpPr>
+        <p:spPr>
+          <a:xfrm>
+            <a:off x="8202168" y="6382512"/>
+            <a:ext cx="3182112" cy="256032"/>
           </a:xfrm>
           <a:prstGeom prst="rect">
             <a:avLst/>
@@ -4759,7 +6758,7 @@
                 <a:ea typeface="Yu Gothic" pitchFamily="34" charset="-122"/>
                 <a:cs typeface="Yu Gothic" pitchFamily="34" charset="-120"/>
               </a:rPr>
-              <a:t>ここだけは</a:t>
+              <a:t>実演 ①</a:t>
             </a:r>
             <a:endParaRPr lang="en-US" sz="900" dirty="0"/>
           </a:p>
@@ -4779,7 +6778,7 @@
     <p:bg>
       <p:bgPr>
         <a:solidFill>
-          <a:srgbClr val="23201D"/>
+          <a:srgbClr val="F6F2EA"/>
         </a:solidFill>
       </p:bgPr>
     </p:bg>
@@ -4805,34 +6804,34 @@
         </p:nvSpPr>
         <p:spPr>
           <a:xfrm>
-            <a:off x="777240" y="1371600"/>
-            <a:ext cx="10607040" cy="365760"/>
-          </a:xfrm>
-          <a:prstGeom prst="rect">
-            <a:avLst/>
-          </a:prstGeom>
-          <a:noFill/>
-          <a:ln/>
-        </p:spPr>
-        <p:txBody>
-          <a:bodyPr wrap="square" lIns="0" tIns="0" rIns="0" bIns="0" rtlCol="0" anchor="ctr"/>
-          <a:lstStyle/>
-          <a:p>
-            <a:pPr indent="0" marL="0">
-              <a:buNone/>
-            </a:pPr>
-            <a:r>
-              <a:rPr lang="en-US" sz="1200" b="1" spc="300" kern="0" dirty="0">
-                <a:solidFill>
-                  <a:srgbClr val="B04A2F"/>
-                </a:solidFill>
-                <a:latin typeface="Yu Gothic" pitchFamily="34" charset="0"/>
-                <a:ea typeface="Yu Gothic" pitchFamily="34" charset="-122"/>
-                <a:cs typeface="Yu Gothic" pitchFamily="34" charset="-120"/>
-              </a:rPr>
-              <a:t>今日の宿題</a:t>
-            </a:r>
-            <a:endParaRPr lang="en-US" sz="1200" dirty="0"/>
+            <a:off x="777240" y="566928"/>
+            <a:ext cx="10607040" cy="274320"/>
+          </a:xfrm>
+          <a:prstGeom prst="rect">
+            <a:avLst/>
+          </a:prstGeom>
+          <a:noFill/>
+          <a:ln/>
+        </p:spPr>
+        <p:txBody>
+          <a:bodyPr wrap="square" lIns="0" tIns="0" rIns="0" bIns="0" rtlCol="0" anchor="ctr"/>
+          <a:lstStyle/>
+          <a:p>
+            <a:pPr indent="0" marL="0">
+              <a:buNone/>
+            </a:pPr>
+            <a:r>
+              <a:rPr lang="en-US" sz="1100" b="1" spc="250" kern="0" dirty="0">
+                <a:solidFill>
+                  <a:srgbClr val="3B6B4A"/>
+                </a:solidFill>
+                <a:latin typeface="Yu Gothic" pitchFamily="34" charset="0"/>
+                <a:ea typeface="Yu Gothic" pitchFamily="34" charset="-122"/>
+                <a:cs typeface="Yu Gothic" pitchFamily="34" charset="-120"/>
+              </a:rPr>
+              <a:t>実演 ②</a:t>
+            </a:r>
+            <a:endParaRPr lang="en-US" sz="1100" dirty="0"/>
           </a:p>
         </p:txBody>
       </p:sp>
@@ -4844,7 +6843,7 @@
         </p:nvSpPr>
         <p:spPr>
           <a:xfrm>
-            <a:off x="777240" y="1783080"/>
+            <a:off x="777240" y="896112"/>
             <a:ext cx="10607040" cy="640080"/>
           </a:xfrm>
           <a:prstGeom prst="rect">
@@ -4861,17 +6860,17 @@
               <a:buNone/>
             </a:pPr>
             <a:r>
-              <a:rPr lang="en-US" sz="3200" b="1" dirty="0">
-                <a:solidFill>
-                  <a:srgbClr val="FFFFFF"/>
-                </a:solidFill>
-                <a:latin typeface="Yu Gothic" pitchFamily="34" charset="0"/>
-                <a:ea typeface="Yu Gothic" pitchFamily="34" charset="-122"/>
-                <a:cs typeface="Yu Gothic" pitchFamily="34" charset="-120"/>
-              </a:rPr>
-              <a:t>ひとつだけ</a:t>
-            </a:r>
-            <a:endParaRPr lang="en-US" sz="3200" dirty="0"/>
+              <a:rPr lang="en-US" sz="2600" b="1" dirty="0">
+                <a:solidFill>
+                  <a:srgbClr val="23201D"/>
+                </a:solidFill>
+                <a:latin typeface="Yu Gothic" pitchFamily="34" charset="0"/>
+                <a:ea typeface="Yu Gothic" pitchFamily="34" charset="-122"/>
+                <a:cs typeface="Yu Gothic" pitchFamily="34" charset="-120"/>
+              </a:rPr>
+              <a:t>過去の文書を3本読ませる</a:t>
+            </a:r>
+            <a:endParaRPr lang="en-US" sz="2600" dirty="0"/>
           </a:p>
         </p:txBody>
       </p:sp>
@@ -4883,18 +6882,124 @@
         </p:nvSpPr>
         <p:spPr>
           <a:xfrm>
-            <a:off x="777240" y="2743200"/>
-            <a:ext cx="10607040" cy="1463040"/>
+            <a:off x="777240" y="1691640"/>
+            <a:ext cx="4879238" cy="1371600"/>
           </a:xfrm>
           <a:prstGeom prst="rect">
             <a:avLst/>
           </a:prstGeom>
           <a:solidFill>
-            <a:srgbClr val="2E2A26"/>
+            <a:srgbClr val="FFFFFF"/>
+          </a:solidFill>
+          <a:ln w="15875">
+            <a:solidFill>
+              <a:srgbClr val="3B6B4A"/>
+            </a:solidFill>
+            <a:prstDash val="solid"/>
+          </a:ln>
+        </p:spPr>
+      </p:sp>
+      <p:sp>
+        <p:nvSpPr>
+          <p:cNvPr id="5" name="Text 3"/>
+          <p:cNvSpPr txBox="1"/>
+          <p:nvPr/>
+        </p:nvSpPr>
+        <p:spPr>
+          <a:xfrm>
+            <a:off x="1005840" y="1783080"/>
+            <a:ext cx="1828800" cy="274320"/>
+          </a:xfrm>
+          <a:prstGeom prst="rect">
+            <a:avLst/>
+          </a:prstGeom>
+          <a:noFill/>
+          <a:ln/>
+        </p:spPr>
+        <p:txBody>
+          <a:bodyPr wrap="square" lIns="0" tIns="0" rIns="0" bIns="0" rtlCol="0" anchor="ctr"/>
+          <a:lstStyle/>
+          <a:p>
+            <a:pPr indent="0" marL="0">
+              <a:buNone/>
+            </a:pPr>
+            <a:r>
+              <a:rPr lang="en-US" sz="1000" b="1" spc="200" kern="0" dirty="0">
+                <a:solidFill>
+                  <a:srgbClr val="3B6B4A"/>
+                </a:solidFill>
+                <a:latin typeface="Yu Gothic" pitchFamily="34" charset="0"/>
+                <a:ea typeface="Yu Gothic" pitchFamily="34" charset="-122"/>
+                <a:cs typeface="Yu Gothic" pitchFamily="34" charset="-120"/>
+              </a:rPr>
+              <a:t>入力</a:t>
+            </a:r>
+            <a:endParaRPr lang="en-US" sz="1000" dirty="0"/>
+          </a:p>
+        </p:txBody>
+      </p:sp>
+      <p:sp>
+        <p:nvSpPr>
+          <p:cNvPr id="6" name="Text 4"/>
+          <p:cNvSpPr txBox="1"/>
+          <p:nvPr/>
+        </p:nvSpPr>
+        <p:spPr>
+          <a:xfrm>
+            <a:off x="1005840" y="2084832"/>
+            <a:ext cx="4422038" cy="868680"/>
+          </a:xfrm>
+          <a:prstGeom prst="rect">
+            <a:avLst/>
+          </a:prstGeom>
+          <a:noFill/>
+          <a:ln/>
+        </p:spPr>
+        <p:txBody>
+          <a:bodyPr wrap="square" lIns="0" tIns="0" rIns="0" bIns="0" rtlCol="0" anchor="ctr"/>
+          <a:lstStyle/>
+          <a:p>
+            <a:pPr indent="0" marL="0">
+              <a:lnSpc>
+                <a:spcPct val="125000"/>
+              </a:lnSpc>
+              <a:buNone/>
+            </a:pPr>
+            <a:r>
+              <a:rPr lang="en-US" sz="1200" dirty="0">
+                <a:solidFill>
+                  <a:srgbClr val="23201D"/>
+                </a:solidFill>
+                <a:latin typeface="Consolas" pitchFamily="34" charset="0"/>
+                <a:ea typeface="Consolas" pitchFamily="34" charset="-122"/>
+                <a:cs typeface="Consolas" pitchFamily="34" charset="-120"/>
+              </a:rPr>
+              <a:t>「この3通の文体に合わせて、お断りの返信を書いて」</a:t>
+            </a:r>
+            <a:endParaRPr lang="en-US" sz="1200" dirty="0"/>
+          </a:p>
+        </p:txBody>
+      </p:sp>
+      <p:sp>
+        <p:nvSpPr>
+          <p:cNvPr id="7" name="Shape 5"/>
+          <p:cNvSpPr/>
+          <p:nvPr/>
+        </p:nvSpPr>
+        <p:spPr>
+          <a:xfrm>
+            <a:off x="6080760" y="1691640"/>
+            <a:ext cx="5303520" cy="3017520"/>
+          </a:xfrm>
+          <a:prstGeom prst="rect">
+            <a:avLst/>
+          </a:prstGeom>
+          <a:solidFill>
+            <a:srgbClr val="FFFFFF"/>
           </a:solidFill>
           <a:ln w="12700">
             <a:solidFill>
-              <a:srgbClr val="B04A2F"/>
+              <a:srgbClr val="EDE7DB"/>
             </a:solidFill>
             <a:prstDash val="solid"/>
           </a:ln>
@@ -4902,14 +7007,604 @@
       </p:sp>
       <p:sp>
         <p:nvSpPr>
+          <p:cNvPr id="8" name="Text 6"/>
+          <p:cNvSpPr txBox="1"/>
+          <p:nvPr/>
+        </p:nvSpPr>
+        <p:spPr>
+          <a:xfrm>
+            <a:off x="6309360" y="1783080"/>
+            <a:ext cx="2743200" cy="274320"/>
+          </a:xfrm>
+          <a:prstGeom prst="rect">
+            <a:avLst/>
+          </a:prstGeom>
+          <a:noFill/>
+          <a:ln/>
+        </p:spPr>
+        <p:txBody>
+          <a:bodyPr wrap="square" lIns="0" tIns="0" rIns="0" bIns="0" rtlCol="0" anchor="ctr"/>
+          <a:lstStyle/>
+          <a:p>
+            <a:pPr indent="0" marL="0">
+              <a:buNone/>
+            </a:pPr>
+            <a:r>
+              <a:rPr lang="en-US" sz="1000" b="1" spc="200" kern="0" dirty="0">
+                <a:solidFill>
+                  <a:srgbClr val="8A8177"/>
+                </a:solidFill>
+                <a:latin typeface="Yu Gothic" pitchFamily="34" charset="0"/>
+                <a:ea typeface="Yu Gothic" pitchFamily="34" charset="-122"/>
+                <a:cs typeface="Yu Gothic" pitchFamily="34" charset="-120"/>
+              </a:rPr>
+              <a:t>出てくるもの</a:t>
+            </a:r>
+            <a:endParaRPr lang="en-US" sz="1000" dirty="0"/>
+          </a:p>
+        </p:txBody>
+      </p:sp>
+      <p:sp>
+        <p:nvSpPr>
+          <p:cNvPr id="9" name="Text 7"/>
+          <p:cNvSpPr txBox="1"/>
+          <p:nvPr/>
+        </p:nvSpPr>
+        <p:spPr>
+          <a:xfrm>
+            <a:off x="6309360" y="2148840"/>
+            <a:ext cx="4846320" cy="566928"/>
+          </a:xfrm>
+          <a:prstGeom prst="rect">
+            <a:avLst/>
+          </a:prstGeom>
+          <a:noFill/>
+          <a:ln/>
+        </p:spPr>
+        <p:txBody>
+          <a:bodyPr wrap="square" lIns="0" tIns="0" rIns="0" bIns="0" rtlCol="0" anchor="ctr"/>
+          <a:lstStyle/>
+          <a:p>
+            <a:pPr indent="0" marL="0">
+              <a:lnSpc>
+                <a:spcPct val="125000"/>
+              </a:lnSpc>
+              <a:buNone/>
+            </a:pPr>
+            <a:r>
+              <a:rPr lang="en-US" sz="1250" dirty="0">
+                <a:solidFill>
+                  <a:srgbClr val="23201D"/>
+                </a:solidFill>
+                <a:latin typeface="Yu Gothic" pitchFamily="34" charset="0"/>
+                <a:ea typeface="Yu Gothic" pitchFamily="34" charset="-122"/>
+                <a:cs typeface="Yu Gothic" pitchFamily="34" charset="-120"/>
+              </a:rPr>
+              <a:t>・語尾と距離感が自社のものになる</a:t>
+            </a:r>
+            <a:endParaRPr lang="en-US" sz="1250" dirty="0"/>
+          </a:p>
+        </p:txBody>
+      </p:sp>
+      <p:sp>
+        <p:nvSpPr>
+          <p:cNvPr id="10" name="Text 8"/>
+          <p:cNvSpPr txBox="1"/>
+          <p:nvPr/>
+        </p:nvSpPr>
+        <p:spPr>
+          <a:xfrm>
+            <a:off x="6309360" y="2752344"/>
+            <a:ext cx="4846320" cy="566928"/>
+          </a:xfrm>
+          <a:prstGeom prst="rect">
+            <a:avLst/>
+          </a:prstGeom>
+          <a:noFill/>
+          <a:ln/>
+        </p:spPr>
+        <p:txBody>
+          <a:bodyPr wrap="square" lIns="0" tIns="0" rIns="0" bIns="0" rtlCol="0" anchor="ctr"/>
+          <a:lstStyle/>
+          <a:p>
+            <a:pPr indent="0" marL="0">
+              <a:lnSpc>
+                <a:spcPct val="125000"/>
+              </a:lnSpc>
+              <a:buNone/>
+            </a:pPr>
+            <a:r>
+              <a:rPr lang="en-US" sz="1250" dirty="0">
+                <a:solidFill>
+                  <a:srgbClr val="23201D"/>
+                </a:solidFill>
+                <a:latin typeface="Yu Gothic" pitchFamily="34" charset="0"/>
+                <a:ea typeface="Yu Gothic" pitchFamily="34" charset="-122"/>
+                <a:cs typeface="Yu Gothic" pitchFamily="34" charset="-120"/>
+              </a:rPr>
+              <a:t>・直すのは中身だけになる</a:t>
+            </a:r>
+            <a:endParaRPr lang="en-US" sz="1250" dirty="0"/>
+          </a:p>
+        </p:txBody>
+      </p:sp>
+      <p:sp>
+        <p:nvSpPr>
+          <p:cNvPr id="11" name="Text 9"/>
+          <p:cNvSpPr txBox="1"/>
+          <p:nvPr/>
+        </p:nvSpPr>
+        <p:spPr>
+          <a:xfrm>
+            <a:off x="6309360" y="3355848"/>
+            <a:ext cx="4846320" cy="566928"/>
+          </a:xfrm>
+          <a:prstGeom prst="rect">
+            <a:avLst/>
+          </a:prstGeom>
+          <a:noFill/>
+          <a:ln/>
+        </p:spPr>
+        <p:txBody>
+          <a:bodyPr wrap="square" lIns="0" tIns="0" rIns="0" bIns="0" rtlCol="0" anchor="ctr"/>
+          <a:lstStyle/>
+          <a:p>
+            <a:pPr indent="0" marL="0">
+              <a:lnSpc>
+                <a:spcPct val="125000"/>
+              </a:lnSpc>
+              <a:buNone/>
+            </a:pPr>
+            <a:r>
+              <a:rPr lang="en-US" sz="1250" dirty="0">
+                <a:solidFill>
+                  <a:srgbClr val="23201D"/>
+                </a:solidFill>
+                <a:latin typeface="Yu Gothic" pitchFamily="34" charset="0"/>
+                <a:ea typeface="Yu Gothic" pitchFamily="34" charset="-122"/>
+                <a:cs typeface="Yu Gothic" pitchFamily="34" charset="-120"/>
+              </a:rPr>
+              <a:t>・社員が書いても、同じ文体で出せる</a:t>
+            </a:r>
+            <a:endParaRPr lang="en-US" sz="1250" dirty="0"/>
+          </a:p>
+        </p:txBody>
+      </p:sp>
+      <p:sp>
+        <p:nvSpPr>
+          <p:cNvPr id="12" name="Text 10"/>
+          <p:cNvSpPr txBox="1"/>
+          <p:nvPr/>
+        </p:nvSpPr>
+        <p:spPr>
+          <a:xfrm>
+            <a:off x="6309360" y="3959352"/>
+            <a:ext cx="4846320" cy="566928"/>
+          </a:xfrm>
+          <a:prstGeom prst="rect">
+            <a:avLst/>
+          </a:prstGeom>
+          <a:noFill/>
+          <a:ln/>
+        </p:spPr>
+        <p:txBody>
+          <a:bodyPr wrap="square" lIns="0" tIns="0" rIns="0" bIns="0" rtlCol="0" anchor="ctr"/>
+          <a:lstStyle/>
+          <a:p>
+            <a:pPr indent="0" marL="0">
+              <a:lnSpc>
+                <a:spcPct val="125000"/>
+              </a:lnSpc>
+              <a:buNone/>
+            </a:pPr>
+            <a:r>
+              <a:rPr lang="en-US" sz="1250" dirty="0">
+                <a:solidFill>
+                  <a:srgbClr val="23201D"/>
+                </a:solidFill>
+                <a:latin typeface="Yu Gothic" pitchFamily="34" charset="0"/>
+                <a:ea typeface="Yu Gothic" pitchFamily="34" charset="-122"/>
+                <a:cs typeface="Yu Gothic" pitchFamily="34" charset="-120"/>
+              </a:rPr>
+              <a:t>・結果として、会社の文書が揃う</a:t>
+            </a:r>
+            <a:endParaRPr lang="en-US" sz="1250" dirty="0"/>
+          </a:p>
+        </p:txBody>
+      </p:sp>
+      <p:sp>
+        <p:nvSpPr>
+          <p:cNvPr id="13" name="Shape 11"/>
+          <p:cNvSpPr/>
+          <p:nvPr/>
+        </p:nvSpPr>
+        <p:spPr>
+          <a:xfrm>
+            <a:off x="777240" y="3291840"/>
+            <a:ext cx="4879238" cy="1417320"/>
+          </a:xfrm>
+          <a:prstGeom prst="rect">
+            <a:avLst/>
+          </a:prstGeom>
+          <a:solidFill>
+            <a:srgbClr val="E7F0E9"/>
+          </a:solidFill>
+          <a:ln w="12700">
+            <a:solidFill>
+              <a:srgbClr val="333333"/>
+            </a:solidFill>
+            <a:prstDash val="solid"/>
+          </a:ln>
+        </p:spPr>
+      </p:sp>
+      <p:sp>
+        <p:nvSpPr>
+          <p:cNvPr id="14" name="Text 12"/>
+          <p:cNvSpPr txBox="1"/>
+          <p:nvPr/>
+        </p:nvSpPr>
+        <p:spPr>
+          <a:xfrm>
+            <a:off x="1005840" y="3383280"/>
+            <a:ext cx="4422038" cy="1234440"/>
+          </a:xfrm>
+          <a:prstGeom prst="rect">
+            <a:avLst/>
+          </a:prstGeom>
+          <a:noFill/>
+          <a:ln/>
+        </p:spPr>
+        <p:txBody>
+          <a:bodyPr wrap="square" lIns="0" tIns="0" rIns="0" bIns="0" rtlCol="0" anchor="ctr"/>
+          <a:lstStyle/>
+          <a:p>
+            <a:pPr indent="0" marL="0">
+              <a:lnSpc>
+                <a:spcPct val="135000"/>
+              </a:lnSpc>
+              <a:buNone/>
+            </a:pPr>
+            <a:r>
+              <a:rPr lang="en-US" sz="1250" dirty="0">
+                <a:solidFill>
+                  <a:srgbClr val="3F3933"/>
+                </a:solidFill>
+                <a:latin typeface="Yu Gothic" pitchFamily="34" charset="0"/>
+                <a:ea typeface="Yu Gothic" pitchFamily="34" charset="-122"/>
+                <a:cs typeface="Yu Gothic" pitchFamily="34" charset="-120"/>
+              </a:rPr>
+              <a:t>受講者がいちばん手応えを感じる場面です。3本でよいので、実際に送った文書を使ってください。</a:t>
+            </a:r>
+            <a:endParaRPr lang="en-US" sz="1250" dirty="0"/>
+          </a:p>
+        </p:txBody>
+      </p:sp>
+      <p:sp>
+        <p:nvSpPr>
+          <p:cNvPr id="15" name="Shape 13"/>
+          <p:cNvSpPr/>
+          <p:nvPr/>
+        </p:nvSpPr>
+        <p:spPr>
+          <a:xfrm>
+            <a:off x="777240" y="4983480"/>
+            <a:ext cx="10607040" cy="685800"/>
+          </a:xfrm>
+          <a:prstGeom prst="rect">
+            <a:avLst/>
+          </a:prstGeom>
+          <a:solidFill>
+            <a:srgbClr val="3B6B4A"/>
+          </a:solidFill>
+          <a:ln w="12700">
+            <a:solidFill>
+              <a:srgbClr val="333333"/>
+            </a:solidFill>
+            <a:prstDash val="solid"/>
+          </a:ln>
+        </p:spPr>
+      </p:sp>
+      <p:sp>
+        <p:nvSpPr>
+          <p:cNvPr id="16" name="Text 14"/>
+          <p:cNvSpPr txBox="1"/>
+          <p:nvPr/>
+        </p:nvSpPr>
+        <p:spPr>
+          <a:xfrm>
+            <a:off x="1097280" y="4983480"/>
+            <a:ext cx="9966960" cy="685800"/>
+          </a:xfrm>
+          <a:prstGeom prst="rect">
+            <a:avLst/>
+          </a:prstGeom>
+          <a:noFill/>
+          <a:ln/>
+        </p:spPr>
+        <p:txBody>
+          <a:bodyPr wrap="square" lIns="0" tIns="0" rIns="0" bIns="0" rtlCol="0" anchor="ctr"/>
+          <a:lstStyle/>
+          <a:p>
+            <a:pPr indent="0" marL="0">
+              <a:buNone/>
+            </a:pPr>
+            <a:r>
+              <a:rPr lang="en-US" sz="1450" b="1" dirty="0">
+                <a:solidFill>
+                  <a:srgbClr val="FFFFFF"/>
+                </a:solidFill>
+                <a:latin typeface="Yu Gothic" pitchFamily="34" charset="0"/>
+                <a:ea typeface="Yu Gothic" pitchFamily="34" charset="-122"/>
+                <a:cs typeface="Yu Gothic" pitchFamily="34" charset="-120"/>
+              </a:rPr>
+              <a:t>文体は説明するものではなく、見本で渡すもの</a:t>
+            </a:r>
+            <a:endParaRPr lang="en-US" sz="1450" dirty="0"/>
+          </a:p>
+        </p:txBody>
+      </p:sp>
+      <p:sp>
+        <p:nvSpPr>
+          <p:cNvPr id="17" name="Text 15"/>
+          <p:cNvSpPr txBox="1"/>
+          <p:nvPr/>
+        </p:nvSpPr>
+        <p:spPr>
+          <a:xfrm>
+            <a:off x="777240" y="6382512"/>
+            <a:ext cx="7424928" cy="256032"/>
+          </a:xfrm>
+          <a:prstGeom prst="rect">
+            <a:avLst/>
+          </a:prstGeom>
+          <a:noFill/>
+          <a:ln/>
+        </p:spPr>
+        <p:txBody>
+          <a:bodyPr wrap="square" lIns="0" tIns="0" rIns="0" bIns="0" rtlCol="0" anchor="ctr"/>
+          <a:lstStyle/>
+          <a:p>
+            <a:pPr indent="0" marL="0">
+              <a:buNone/>
+            </a:pPr>
+            <a:r>
+              <a:rPr lang="en-US" sz="900" dirty="0">
+                <a:solidFill>
+                  <a:srgbClr val="8A8177"/>
+                </a:solidFill>
+                <a:latin typeface="Yu Gothic" pitchFamily="34" charset="0"/>
+                <a:ea typeface="Yu Gothic" pitchFamily="34" charset="-122"/>
+                <a:cs typeface="Yu Gothic" pitchFamily="34" charset="-120"/>
+              </a:rPr>
+              <a:t>第3回　文書とコミュニケーションのAI化</a:t>
+            </a:r>
+            <a:endParaRPr lang="en-US" sz="900" dirty="0"/>
+          </a:p>
+        </p:txBody>
+      </p:sp>
+      <p:sp>
+        <p:nvSpPr>
+          <p:cNvPr id="18" name="Text 16"/>
+          <p:cNvSpPr txBox="1"/>
+          <p:nvPr/>
+        </p:nvSpPr>
+        <p:spPr>
+          <a:xfrm>
+            <a:off x="8202168" y="6382512"/>
+            <a:ext cx="3182112" cy="256032"/>
+          </a:xfrm>
+          <a:prstGeom prst="rect">
+            <a:avLst/>
+          </a:prstGeom>
+          <a:noFill/>
+          <a:ln/>
+        </p:spPr>
+        <p:txBody>
+          <a:bodyPr wrap="square" lIns="0" tIns="0" rIns="0" bIns="0" rtlCol="0" anchor="ctr"/>
+          <a:lstStyle/>
+          <a:p>
+            <a:pPr algn="r" indent="0" marL="0">
+              <a:buNone/>
+            </a:pPr>
+            <a:r>
+              <a:rPr lang="en-US" sz="900" dirty="0">
+                <a:solidFill>
+                  <a:srgbClr val="8A8177"/>
+                </a:solidFill>
+                <a:latin typeface="Yu Gothic" pitchFamily="34" charset="0"/>
+                <a:ea typeface="Yu Gothic" pitchFamily="34" charset="-122"/>
+                <a:cs typeface="Yu Gothic" pitchFamily="34" charset="-120"/>
+              </a:rPr>
+              <a:t>実演 ②</a:t>
+            </a:r>
+            <a:endParaRPr lang="en-US" sz="900" dirty="0"/>
+          </a:p>
+        </p:txBody>
+      </p:sp>
+    </p:spTree>
+  </p:cSld>
+  <p:clrMapOvr>
+    <a:masterClrMapping/>
+  </p:clrMapOvr>
+</p:sld>
+</file>
+
+<file path=ppt/slides/slide8.xml><?xml version="1.0" encoding="utf-8"?>
+<p:sld xmlns:a="http://schemas.openxmlformats.org/drawingml/2006/main" xmlns:r="http://schemas.openxmlformats.org/officeDocument/2006/relationships" xmlns:p="http://schemas.openxmlformats.org/presentationml/2006/main">
+  <p:cSld name="Slide 8">
+    <p:bg>
+      <p:bgPr>
+        <a:solidFill>
+          <a:srgbClr val="F6F2EA"/>
+        </a:solidFill>
+      </p:bgPr>
+    </p:bg>
+    <p:spTree>
+      <p:nvGrpSpPr>
+        <p:cNvPr id="1" name=""/>
+        <p:cNvGrpSpPr/>
+        <p:nvPr/>
+      </p:nvGrpSpPr>
+      <p:grpSpPr>
+        <a:xfrm>
+          <a:off x="0" y="0"/>
+          <a:ext cx="0" cy="0"/>
+          <a:chOff x="0" y="0"/>
+          <a:chExt cx="0" cy="0"/>
+        </a:xfrm>
+      </p:grpSpPr>
+      <p:sp>
+        <p:nvSpPr>
+          <p:cNvPr id="2" name="Text 0"/>
+          <p:cNvSpPr txBox="1"/>
+          <p:nvPr/>
+        </p:nvSpPr>
+        <p:spPr>
+          <a:xfrm>
+            <a:off x="777240" y="566928"/>
+            <a:ext cx="10607040" cy="274320"/>
+          </a:xfrm>
+          <a:prstGeom prst="rect">
+            <a:avLst/>
+          </a:prstGeom>
+          <a:noFill/>
+          <a:ln/>
+        </p:spPr>
+        <p:txBody>
+          <a:bodyPr wrap="square" lIns="0" tIns="0" rIns="0" bIns="0" rtlCol="0" anchor="ctr"/>
+          <a:lstStyle/>
+          <a:p>
+            <a:pPr indent="0" marL="0">
+              <a:buNone/>
+            </a:pPr>
+            <a:r>
+              <a:rPr lang="en-US" sz="1100" b="1" spc="250" kern="0" dirty="0">
+                <a:solidFill>
+                  <a:srgbClr val="B04A2F"/>
+                </a:solidFill>
+                <a:latin typeface="Yu Gothic" pitchFamily="34" charset="0"/>
+                <a:ea typeface="Yu Gothic" pitchFamily="34" charset="-122"/>
+                <a:cs typeface="Yu Gothic" pitchFamily="34" charset="-120"/>
+              </a:rPr>
+              <a:t>つまずきやすいところ</a:t>
+            </a:r>
+            <a:endParaRPr lang="en-US" sz="1100" dirty="0"/>
+          </a:p>
+        </p:txBody>
+      </p:sp>
+      <p:sp>
+        <p:nvSpPr>
+          <p:cNvPr id="3" name="Text 1"/>
+          <p:cNvSpPr txBox="1"/>
+          <p:nvPr/>
+        </p:nvSpPr>
+        <p:spPr>
+          <a:xfrm>
+            <a:off x="777240" y="896112"/>
+            <a:ext cx="10607040" cy="640080"/>
+          </a:xfrm>
+          <a:prstGeom prst="rect">
+            <a:avLst/>
+          </a:prstGeom>
+          <a:noFill/>
+          <a:ln/>
+        </p:spPr>
+        <p:txBody>
+          <a:bodyPr wrap="square" lIns="0" tIns="0" rIns="0" bIns="0" rtlCol="0" anchor="ctr"/>
+          <a:lstStyle/>
+          <a:p>
+            <a:pPr indent="0" marL="0">
+              <a:buNone/>
+            </a:pPr>
+            <a:r>
+              <a:rPr lang="en-US" sz="2600" b="1" dirty="0">
+                <a:solidFill>
+                  <a:srgbClr val="23201D"/>
+                </a:solidFill>
+                <a:latin typeface="Yu Gothic" pitchFamily="34" charset="0"/>
+                <a:ea typeface="Yu Gothic" pitchFamily="34" charset="-122"/>
+                <a:cs typeface="Yu Gothic" pitchFamily="34" charset="-120"/>
+              </a:rPr>
+              <a:t>この回で、よく起きること</a:t>
+            </a:r>
+            <a:endParaRPr lang="en-US" sz="2600" dirty="0"/>
+          </a:p>
+        </p:txBody>
+      </p:sp>
+      <p:sp>
+        <p:nvSpPr>
+          <p:cNvPr id="4" name="Shape 2"/>
+          <p:cNvSpPr/>
+          <p:nvPr/>
+        </p:nvSpPr>
+        <p:spPr>
+          <a:xfrm>
+            <a:off x="777240" y="1737360"/>
+            <a:ext cx="10607040" cy="1078992"/>
+          </a:xfrm>
+          <a:prstGeom prst="rect">
+            <a:avLst/>
+          </a:prstGeom>
+          <a:solidFill>
+            <a:srgbClr val="FFFFFF"/>
+          </a:solidFill>
+          <a:ln w="12700">
+            <a:solidFill>
+              <a:srgbClr val="EDE7DB"/>
+            </a:solidFill>
+            <a:prstDash val="solid"/>
+          </a:ln>
+        </p:spPr>
+      </p:sp>
+      <p:sp>
+        <p:nvSpPr>
           <p:cNvPr id="5" name="Text 3"/>
           <p:cNvSpPr txBox="1"/>
           <p:nvPr/>
         </p:nvSpPr>
         <p:spPr>
           <a:xfrm>
-            <a:off x="1234440" y="2880360"/>
-            <a:ext cx="9692640" cy="1188720"/>
+            <a:off x="1051560" y="1856232"/>
+            <a:ext cx="1463040" cy="256032"/>
+          </a:xfrm>
+          <a:prstGeom prst="rect">
+            <a:avLst/>
+          </a:prstGeom>
+          <a:noFill/>
+          <a:ln/>
+        </p:spPr>
+        <p:txBody>
+          <a:bodyPr wrap="square" lIns="0" tIns="0" rIns="0" bIns="0" rtlCol="0" anchor="ctr"/>
+          <a:lstStyle/>
+          <a:p>
+            <a:pPr indent="0" marL="0">
+              <a:buNone/>
+            </a:pPr>
+            <a:r>
+              <a:rPr lang="en-US" sz="900" b="1" spc="150" kern="0" dirty="0">
+                <a:solidFill>
+                  <a:srgbClr val="8A8177"/>
+                </a:solidFill>
+                <a:latin typeface="Yu Gothic" pitchFamily="34" charset="0"/>
+                <a:ea typeface="Yu Gothic" pitchFamily="34" charset="-122"/>
+                <a:cs typeface="Yu Gothic" pitchFamily="34" charset="-120"/>
+              </a:rPr>
+              <a:t>こうなったら</a:t>
+            </a:r>
+            <a:endParaRPr lang="en-US" sz="900" dirty="0"/>
+          </a:p>
+        </p:txBody>
+      </p:sp>
+      <p:sp>
+        <p:nvSpPr>
+          <p:cNvPr id="6" name="Text 4"/>
+          <p:cNvSpPr txBox="1"/>
+          <p:nvPr/>
+        </p:nvSpPr>
+        <p:spPr>
+          <a:xfrm>
+            <a:off x="1051560" y="2121408"/>
+            <a:ext cx="4454957" cy="566928"/>
           </a:xfrm>
           <a:prstGeom prst="rect">
             <a:avLst/>
@@ -4923,12 +7618,858 @@
           <a:p>
             <a:pPr indent="0" marL="0">
               <a:lnSpc>
-                <a:spcPct val="140000"/>
+                <a:spcPct val="120000"/>
               </a:lnSpc>
               <a:buNone/>
             </a:pPr>
             <a:r>
-              <a:rPr lang="en-US" sz="1900" b="1" dirty="0">
+              <a:rPr lang="en-US" sz="1350" b="1" dirty="0">
+                <a:solidFill>
+                  <a:srgbClr val="23201D"/>
+                </a:solidFill>
+                <a:latin typeface="Yu Gothic" pitchFamily="34" charset="0"/>
+                <a:ea typeface="Yu Gothic" pitchFamily="34" charset="-122"/>
+                <a:cs typeface="Yu Gothic" pitchFamily="34" charset="-120"/>
+              </a:rPr>
+              <a:t>社員に渡すのをためらう（まだ早い、と言われる）</a:t>
+            </a:r>
+            <a:endParaRPr lang="en-US" sz="1350" dirty="0"/>
+          </a:p>
+        </p:txBody>
+      </p:sp>
+      <p:sp>
+        <p:nvSpPr>
+          <p:cNvPr id="7" name="Shape 5"/>
+          <p:cNvSpPr/>
+          <p:nvPr/>
+        </p:nvSpPr>
+        <p:spPr>
+          <a:xfrm>
+            <a:off x="5762549" y="1847088"/>
+            <a:ext cx="18288" cy="859536"/>
+          </a:xfrm>
+          <a:prstGeom prst="rect">
+            <a:avLst/>
+          </a:prstGeom>
+          <a:solidFill>
+            <a:srgbClr val="EDE7DB"/>
+          </a:solidFill>
+          <a:ln w="12700">
+            <a:solidFill>
+              <a:srgbClr val="333333"/>
+            </a:solidFill>
+            <a:prstDash val="solid"/>
+          </a:ln>
+        </p:spPr>
+      </p:sp>
+      <p:sp>
+        <p:nvSpPr>
+          <p:cNvPr id="8" name="Text 6"/>
+          <p:cNvSpPr txBox="1"/>
+          <p:nvPr/>
+        </p:nvSpPr>
+        <p:spPr>
+          <a:xfrm>
+            <a:off x="6080760" y="1856232"/>
+            <a:ext cx="1463040" cy="256032"/>
+          </a:xfrm>
+          <a:prstGeom prst="rect">
+            <a:avLst/>
+          </a:prstGeom>
+          <a:noFill/>
+          <a:ln/>
+        </p:spPr>
+        <p:txBody>
+          <a:bodyPr wrap="square" lIns="0" tIns="0" rIns="0" bIns="0" rtlCol="0" anchor="ctr"/>
+          <a:lstStyle/>
+          <a:p>
+            <a:pPr indent="0" marL="0">
+              <a:buNone/>
+            </a:pPr>
+            <a:r>
+              <a:rPr lang="en-US" sz="900" b="1" spc="150" kern="0" dirty="0">
+                <a:solidFill>
+                  <a:srgbClr val="B04A2F"/>
+                </a:solidFill>
+                <a:latin typeface="Yu Gothic" pitchFamily="34" charset="0"/>
+                <a:ea typeface="Yu Gothic" pitchFamily="34" charset="-122"/>
+                <a:cs typeface="Yu Gothic" pitchFamily="34" charset="-120"/>
+              </a:rPr>
+              <a:t>こうする</a:t>
+            </a:r>
+            <a:endParaRPr lang="en-US" sz="900" dirty="0"/>
+          </a:p>
+        </p:txBody>
+      </p:sp>
+      <p:sp>
+        <p:nvSpPr>
+          <p:cNvPr id="9" name="Text 7"/>
+          <p:cNvSpPr txBox="1"/>
+          <p:nvPr/>
+        </p:nvSpPr>
+        <p:spPr>
+          <a:xfrm>
+            <a:off x="6080760" y="2121408"/>
+            <a:ext cx="5091379" cy="566928"/>
+          </a:xfrm>
+          <a:prstGeom prst="rect">
+            <a:avLst/>
+          </a:prstGeom>
+          <a:noFill/>
+          <a:ln/>
+        </p:spPr>
+        <p:txBody>
+          <a:bodyPr wrap="square" lIns="0" tIns="0" rIns="0" bIns="0" rtlCol="0" anchor="ctr"/>
+          <a:lstStyle/>
+          <a:p>
+            <a:pPr indent="0" marL="0">
+              <a:lnSpc>
+                <a:spcPct val="125000"/>
+              </a:lnSpc>
+              <a:buNone/>
+            </a:pPr>
+            <a:r>
+              <a:rPr lang="en-US" sz="1250" dirty="0">
+                <a:solidFill>
+                  <a:srgbClr val="3F3933"/>
+                </a:solidFill>
+                <a:latin typeface="Yu Gothic" pitchFamily="34" charset="0"/>
+                <a:ea typeface="Yu Gothic" pitchFamily="34" charset="-122"/>
+                <a:cs typeface="Yu Gothic" pitchFamily="34" charset="-120"/>
+              </a:rPr>
+              <a:t>1名だけ、しかも前向きな方に絞ります。第1回で聞き取った推進候補者の出番です</a:t>
+            </a:r>
+            <a:endParaRPr lang="en-US" sz="1250" dirty="0"/>
+          </a:p>
+        </p:txBody>
+      </p:sp>
+      <p:sp>
+        <p:nvSpPr>
+          <p:cNvPr id="10" name="Shape 8"/>
+          <p:cNvSpPr/>
+          <p:nvPr/>
+        </p:nvSpPr>
+        <p:spPr>
+          <a:xfrm>
+            <a:off x="777240" y="2944368"/>
+            <a:ext cx="10607040" cy="1078992"/>
+          </a:xfrm>
+          <a:prstGeom prst="rect">
+            <a:avLst/>
+          </a:prstGeom>
+          <a:solidFill>
+            <a:srgbClr val="FFFFFF"/>
+          </a:solidFill>
+          <a:ln w="12700">
+            <a:solidFill>
+              <a:srgbClr val="EDE7DB"/>
+            </a:solidFill>
+            <a:prstDash val="solid"/>
+          </a:ln>
+        </p:spPr>
+      </p:sp>
+      <p:sp>
+        <p:nvSpPr>
+          <p:cNvPr id="11" name="Text 9"/>
+          <p:cNvSpPr txBox="1"/>
+          <p:nvPr/>
+        </p:nvSpPr>
+        <p:spPr>
+          <a:xfrm>
+            <a:off x="1051560" y="3063240"/>
+            <a:ext cx="1463040" cy="256032"/>
+          </a:xfrm>
+          <a:prstGeom prst="rect">
+            <a:avLst/>
+          </a:prstGeom>
+          <a:noFill/>
+          <a:ln/>
+        </p:spPr>
+        <p:txBody>
+          <a:bodyPr wrap="square" lIns="0" tIns="0" rIns="0" bIns="0" rtlCol="0" anchor="ctr"/>
+          <a:lstStyle/>
+          <a:p>
+            <a:pPr indent="0" marL="0">
+              <a:buNone/>
+            </a:pPr>
+            <a:r>
+              <a:rPr lang="en-US" sz="900" b="1" spc="150" kern="0" dirty="0">
+                <a:solidFill>
+                  <a:srgbClr val="8A8177"/>
+                </a:solidFill>
+                <a:latin typeface="Yu Gothic" pitchFamily="34" charset="0"/>
+                <a:ea typeface="Yu Gothic" pitchFamily="34" charset="-122"/>
+                <a:cs typeface="Yu Gothic" pitchFamily="34" charset="-120"/>
+              </a:rPr>
+              <a:t>こうなったら</a:t>
+            </a:r>
+            <a:endParaRPr lang="en-US" sz="900" dirty="0"/>
+          </a:p>
+        </p:txBody>
+      </p:sp>
+      <p:sp>
+        <p:nvSpPr>
+          <p:cNvPr id="12" name="Text 10"/>
+          <p:cNvSpPr txBox="1"/>
+          <p:nvPr/>
+        </p:nvSpPr>
+        <p:spPr>
+          <a:xfrm>
+            <a:off x="1051560" y="3328416"/>
+            <a:ext cx="4454957" cy="566928"/>
+          </a:xfrm>
+          <a:prstGeom prst="rect">
+            <a:avLst/>
+          </a:prstGeom>
+          <a:noFill/>
+          <a:ln/>
+        </p:spPr>
+        <p:txBody>
+          <a:bodyPr wrap="square" lIns="0" tIns="0" rIns="0" bIns="0" rtlCol="0" anchor="ctr"/>
+          <a:lstStyle/>
+          <a:p>
+            <a:pPr indent="0" marL="0">
+              <a:lnSpc>
+                <a:spcPct val="120000"/>
+              </a:lnSpc>
+              <a:buNone/>
+            </a:pPr>
+            <a:r>
+              <a:rPr lang="en-US" sz="1350" b="1" dirty="0">
+                <a:solidFill>
+                  <a:srgbClr val="23201D"/>
+                </a:solidFill>
+                <a:latin typeface="Yu Gothic" pitchFamily="34" charset="0"/>
+                <a:ea typeface="Yu Gothic" pitchFamily="34" charset="-122"/>
+                <a:cs typeface="Yu Gothic" pitchFamily="34" charset="-120"/>
+              </a:rPr>
+              <a:t>議事録の精度が低い</a:t>
+            </a:r>
+            <a:endParaRPr lang="en-US" sz="1350" dirty="0"/>
+          </a:p>
+        </p:txBody>
+      </p:sp>
+      <p:sp>
+        <p:nvSpPr>
+          <p:cNvPr id="13" name="Shape 11"/>
+          <p:cNvSpPr/>
+          <p:nvPr/>
+        </p:nvSpPr>
+        <p:spPr>
+          <a:xfrm>
+            <a:off x="5762549" y="3054096"/>
+            <a:ext cx="18288" cy="859536"/>
+          </a:xfrm>
+          <a:prstGeom prst="rect">
+            <a:avLst/>
+          </a:prstGeom>
+          <a:solidFill>
+            <a:srgbClr val="EDE7DB"/>
+          </a:solidFill>
+          <a:ln w="12700">
+            <a:solidFill>
+              <a:srgbClr val="333333"/>
+            </a:solidFill>
+            <a:prstDash val="solid"/>
+          </a:ln>
+        </p:spPr>
+      </p:sp>
+      <p:sp>
+        <p:nvSpPr>
+          <p:cNvPr id="14" name="Text 12"/>
+          <p:cNvSpPr txBox="1"/>
+          <p:nvPr/>
+        </p:nvSpPr>
+        <p:spPr>
+          <a:xfrm>
+            <a:off x="6080760" y="3063240"/>
+            <a:ext cx="1463040" cy="256032"/>
+          </a:xfrm>
+          <a:prstGeom prst="rect">
+            <a:avLst/>
+          </a:prstGeom>
+          <a:noFill/>
+          <a:ln/>
+        </p:spPr>
+        <p:txBody>
+          <a:bodyPr wrap="square" lIns="0" tIns="0" rIns="0" bIns="0" rtlCol="0" anchor="ctr"/>
+          <a:lstStyle/>
+          <a:p>
+            <a:pPr indent="0" marL="0">
+              <a:buNone/>
+            </a:pPr>
+            <a:r>
+              <a:rPr lang="en-US" sz="900" b="1" spc="150" kern="0" dirty="0">
+                <a:solidFill>
+                  <a:srgbClr val="B04A2F"/>
+                </a:solidFill>
+                <a:latin typeface="Yu Gothic" pitchFamily="34" charset="0"/>
+                <a:ea typeface="Yu Gothic" pitchFamily="34" charset="-122"/>
+                <a:cs typeface="Yu Gothic" pitchFamily="34" charset="-120"/>
+              </a:rPr>
+              <a:t>こうする</a:t>
+            </a:r>
+            <a:endParaRPr lang="en-US" sz="900" dirty="0"/>
+          </a:p>
+        </p:txBody>
+      </p:sp>
+      <p:sp>
+        <p:nvSpPr>
+          <p:cNvPr id="15" name="Text 13"/>
+          <p:cNvSpPr txBox="1"/>
+          <p:nvPr/>
+        </p:nvSpPr>
+        <p:spPr>
+          <a:xfrm>
+            <a:off x="6080760" y="3328416"/>
+            <a:ext cx="5091379" cy="566928"/>
+          </a:xfrm>
+          <a:prstGeom prst="rect">
+            <a:avLst/>
+          </a:prstGeom>
+          <a:noFill/>
+          <a:ln/>
+        </p:spPr>
+        <p:txBody>
+          <a:bodyPr wrap="square" lIns="0" tIns="0" rIns="0" bIns="0" rtlCol="0" anchor="ctr"/>
+          <a:lstStyle/>
+          <a:p>
+            <a:pPr indent="0" marL="0">
+              <a:lnSpc>
+                <a:spcPct val="125000"/>
+              </a:lnSpc>
+              <a:buNone/>
+            </a:pPr>
+            <a:r>
+              <a:rPr lang="en-US" sz="1250" dirty="0">
+                <a:solidFill>
+                  <a:srgbClr val="3F3933"/>
+                </a:solidFill>
+                <a:latin typeface="Yu Gothic" pitchFamily="34" charset="0"/>
+                <a:ea typeface="Yu Gothic" pitchFamily="34" charset="-122"/>
+                <a:cs typeface="Yu Gothic" pitchFamily="34" charset="-120"/>
+              </a:rPr>
+              <a:t>録音の質と話者の重なりが原因。要約の前に「登場人物と議題」を先に伝えるだけで大きく変わります</a:t>
+            </a:r>
+            <a:endParaRPr lang="en-US" sz="1250" dirty="0"/>
+          </a:p>
+        </p:txBody>
+      </p:sp>
+      <p:sp>
+        <p:nvSpPr>
+          <p:cNvPr id="16" name="Shape 14"/>
+          <p:cNvSpPr/>
+          <p:nvPr/>
+        </p:nvSpPr>
+        <p:spPr>
+          <a:xfrm>
+            <a:off x="777240" y="4151376"/>
+            <a:ext cx="10607040" cy="1078992"/>
+          </a:xfrm>
+          <a:prstGeom prst="rect">
+            <a:avLst/>
+          </a:prstGeom>
+          <a:solidFill>
+            <a:srgbClr val="FFFFFF"/>
+          </a:solidFill>
+          <a:ln w="12700">
+            <a:solidFill>
+              <a:srgbClr val="EDE7DB"/>
+            </a:solidFill>
+            <a:prstDash val="solid"/>
+          </a:ln>
+        </p:spPr>
+      </p:sp>
+      <p:sp>
+        <p:nvSpPr>
+          <p:cNvPr id="17" name="Text 15"/>
+          <p:cNvSpPr txBox="1"/>
+          <p:nvPr/>
+        </p:nvSpPr>
+        <p:spPr>
+          <a:xfrm>
+            <a:off x="1051560" y="4270248"/>
+            <a:ext cx="1463040" cy="256032"/>
+          </a:xfrm>
+          <a:prstGeom prst="rect">
+            <a:avLst/>
+          </a:prstGeom>
+          <a:noFill/>
+          <a:ln/>
+        </p:spPr>
+        <p:txBody>
+          <a:bodyPr wrap="square" lIns="0" tIns="0" rIns="0" bIns="0" rtlCol="0" anchor="ctr"/>
+          <a:lstStyle/>
+          <a:p>
+            <a:pPr indent="0" marL="0">
+              <a:buNone/>
+            </a:pPr>
+            <a:r>
+              <a:rPr lang="en-US" sz="900" b="1" spc="150" kern="0" dirty="0">
+                <a:solidFill>
+                  <a:srgbClr val="8A8177"/>
+                </a:solidFill>
+                <a:latin typeface="Yu Gothic" pitchFamily="34" charset="0"/>
+                <a:ea typeface="Yu Gothic" pitchFamily="34" charset="-122"/>
+                <a:cs typeface="Yu Gothic" pitchFamily="34" charset="-120"/>
+              </a:rPr>
+              <a:t>こうなったら</a:t>
+            </a:r>
+            <a:endParaRPr lang="en-US" sz="900" dirty="0"/>
+          </a:p>
+        </p:txBody>
+      </p:sp>
+      <p:sp>
+        <p:nvSpPr>
+          <p:cNvPr id="18" name="Text 16"/>
+          <p:cNvSpPr txBox="1"/>
+          <p:nvPr/>
+        </p:nvSpPr>
+        <p:spPr>
+          <a:xfrm>
+            <a:off x="1051560" y="4535424"/>
+            <a:ext cx="4454957" cy="566928"/>
+          </a:xfrm>
+          <a:prstGeom prst="rect">
+            <a:avLst/>
+          </a:prstGeom>
+          <a:noFill/>
+          <a:ln/>
+        </p:spPr>
+        <p:txBody>
+          <a:bodyPr wrap="square" lIns="0" tIns="0" rIns="0" bIns="0" rtlCol="0" anchor="ctr"/>
+          <a:lstStyle/>
+          <a:p>
+            <a:pPr indent="0" marL="0">
+              <a:lnSpc>
+                <a:spcPct val="120000"/>
+              </a:lnSpc>
+              <a:buNone/>
+            </a:pPr>
+            <a:r>
+              <a:rPr lang="en-US" sz="1350" b="1" dirty="0">
+                <a:solidFill>
+                  <a:srgbClr val="23201D"/>
+                </a:solidFill>
+                <a:latin typeface="Yu Gothic" pitchFamily="34" charset="0"/>
+                <a:ea typeface="Yu Gothic" pitchFamily="34" charset="-122"/>
+                <a:cs typeface="Yu Gothic" pitchFamily="34" charset="-120"/>
+              </a:rPr>
+              <a:t>テンプレートが増えすぎる</a:t>
+            </a:r>
+            <a:endParaRPr lang="en-US" sz="1350" dirty="0"/>
+          </a:p>
+        </p:txBody>
+      </p:sp>
+      <p:sp>
+        <p:nvSpPr>
+          <p:cNvPr id="19" name="Shape 17"/>
+          <p:cNvSpPr/>
+          <p:nvPr/>
+        </p:nvSpPr>
+        <p:spPr>
+          <a:xfrm>
+            <a:off x="5762549" y="4261104"/>
+            <a:ext cx="18288" cy="859536"/>
+          </a:xfrm>
+          <a:prstGeom prst="rect">
+            <a:avLst/>
+          </a:prstGeom>
+          <a:solidFill>
+            <a:srgbClr val="EDE7DB"/>
+          </a:solidFill>
+          <a:ln w="12700">
+            <a:solidFill>
+              <a:srgbClr val="333333"/>
+            </a:solidFill>
+            <a:prstDash val="solid"/>
+          </a:ln>
+        </p:spPr>
+      </p:sp>
+      <p:sp>
+        <p:nvSpPr>
+          <p:cNvPr id="20" name="Text 18"/>
+          <p:cNvSpPr txBox="1"/>
+          <p:nvPr/>
+        </p:nvSpPr>
+        <p:spPr>
+          <a:xfrm>
+            <a:off x="6080760" y="4270248"/>
+            <a:ext cx="1463040" cy="256032"/>
+          </a:xfrm>
+          <a:prstGeom prst="rect">
+            <a:avLst/>
+          </a:prstGeom>
+          <a:noFill/>
+          <a:ln/>
+        </p:spPr>
+        <p:txBody>
+          <a:bodyPr wrap="square" lIns="0" tIns="0" rIns="0" bIns="0" rtlCol="0" anchor="ctr"/>
+          <a:lstStyle/>
+          <a:p>
+            <a:pPr indent="0" marL="0">
+              <a:buNone/>
+            </a:pPr>
+            <a:r>
+              <a:rPr lang="en-US" sz="900" b="1" spc="150" kern="0" dirty="0">
+                <a:solidFill>
+                  <a:srgbClr val="B04A2F"/>
+                </a:solidFill>
+                <a:latin typeface="Yu Gothic" pitchFamily="34" charset="0"/>
+                <a:ea typeface="Yu Gothic" pitchFamily="34" charset="-122"/>
+                <a:cs typeface="Yu Gothic" pitchFamily="34" charset="-120"/>
+              </a:rPr>
+              <a:t>こうする</a:t>
+            </a:r>
+            <a:endParaRPr lang="en-US" sz="900" dirty="0"/>
+          </a:p>
+        </p:txBody>
+      </p:sp>
+      <p:sp>
+        <p:nvSpPr>
+          <p:cNvPr id="21" name="Text 19"/>
+          <p:cNvSpPr txBox="1"/>
+          <p:nvPr/>
+        </p:nvSpPr>
+        <p:spPr>
+          <a:xfrm>
+            <a:off x="6080760" y="4535424"/>
+            <a:ext cx="5091379" cy="566928"/>
+          </a:xfrm>
+          <a:prstGeom prst="rect">
+            <a:avLst/>
+          </a:prstGeom>
+          <a:noFill/>
+          <a:ln/>
+        </p:spPr>
+        <p:txBody>
+          <a:bodyPr wrap="square" lIns="0" tIns="0" rIns="0" bIns="0" rtlCol="0" anchor="ctr"/>
+          <a:lstStyle/>
+          <a:p>
+            <a:pPr indent="0" marL="0">
+              <a:lnSpc>
+                <a:spcPct val="125000"/>
+              </a:lnSpc>
+              <a:buNone/>
+            </a:pPr>
+            <a:r>
+              <a:rPr lang="en-US" sz="1250" dirty="0">
+                <a:solidFill>
+                  <a:srgbClr val="3F3933"/>
+                </a:solidFill>
+                <a:latin typeface="Yu Gothic" pitchFamily="34" charset="0"/>
+                <a:ea typeface="Yu Gothic" pitchFamily="34" charset="-122"/>
+                <a:cs typeface="Yu Gothic" pitchFamily="34" charset="-120"/>
+              </a:rPr>
+              <a:t>3種で止めます。10種作っても、使われるのは結局2〜3種です</a:t>
+            </a:r>
+            <a:endParaRPr lang="en-US" sz="1250" dirty="0"/>
+          </a:p>
+        </p:txBody>
+      </p:sp>
+      <p:sp>
+        <p:nvSpPr>
+          <p:cNvPr id="22" name="Text 20"/>
+          <p:cNvSpPr txBox="1"/>
+          <p:nvPr/>
+        </p:nvSpPr>
+        <p:spPr>
+          <a:xfrm>
+            <a:off x="777240" y="6382512"/>
+            <a:ext cx="7424928" cy="256032"/>
+          </a:xfrm>
+          <a:prstGeom prst="rect">
+            <a:avLst/>
+          </a:prstGeom>
+          <a:noFill/>
+          <a:ln/>
+        </p:spPr>
+        <p:txBody>
+          <a:bodyPr wrap="square" lIns="0" tIns="0" rIns="0" bIns="0" rtlCol="0" anchor="ctr"/>
+          <a:lstStyle/>
+          <a:p>
+            <a:pPr indent="0" marL="0">
+              <a:buNone/>
+            </a:pPr>
+            <a:r>
+              <a:rPr lang="en-US" sz="900" dirty="0">
+                <a:solidFill>
+                  <a:srgbClr val="8A8177"/>
+                </a:solidFill>
+                <a:latin typeface="Yu Gothic" pitchFamily="34" charset="0"/>
+                <a:ea typeface="Yu Gothic" pitchFamily="34" charset="-122"/>
+                <a:cs typeface="Yu Gothic" pitchFamily="34" charset="-120"/>
+              </a:rPr>
+              <a:t>第3回　文書とコミュニケーションのAI化</a:t>
+            </a:r>
+            <a:endParaRPr lang="en-US" sz="900" dirty="0"/>
+          </a:p>
+        </p:txBody>
+      </p:sp>
+      <p:sp>
+        <p:nvSpPr>
+          <p:cNvPr id="23" name="Text 21"/>
+          <p:cNvSpPr txBox="1"/>
+          <p:nvPr/>
+        </p:nvSpPr>
+        <p:spPr>
+          <a:xfrm>
+            <a:off x="8202168" y="6382512"/>
+            <a:ext cx="3182112" cy="256032"/>
+          </a:xfrm>
+          <a:prstGeom prst="rect">
+            <a:avLst/>
+          </a:prstGeom>
+          <a:noFill/>
+          <a:ln/>
+        </p:spPr>
+        <p:txBody>
+          <a:bodyPr wrap="square" lIns="0" tIns="0" rIns="0" bIns="0" rtlCol="0" anchor="ctr"/>
+          <a:lstStyle/>
+          <a:p>
+            <a:pPr algn="r" indent="0" marL="0">
+              <a:buNone/>
+            </a:pPr>
+            <a:r>
+              <a:rPr lang="en-US" sz="900" dirty="0">
+                <a:solidFill>
+                  <a:srgbClr val="8A8177"/>
+                </a:solidFill>
+                <a:latin typeface="Yu Gothic" pitchFamily="34" charset="0"/>
+                <a:ea typeface="Yu Gothic" pitchFamily="34" charset="-122"/>
+                <a:cs typeface="Yu Gothic" pitchFamily="34" charset="-120"/>
+              </a:rPr>
+              <a:t>つまずき</a:t>
+            </a:r>
+            <a:endParaRPr lang="en-US" sz="900" dirty="0"/>
+          </a:p>
+        </p:txBody>
+      </p:sp>
+    </p:spTree>
+  </p:cSld>
+  <p:clrMapOvr>
+    <a:masterClrMapping/>
+  </p:clrMapOvr>
+</p:sld>
+</file>
+
+<file path=ppt/slides/slide9.xml><?xml version="1.0" encoding="utf-8"?>
+<p:sld xmlns:a="http://schemas.openxmlformats.org/drawingml/2006/main" xmlns:r="http://schemas.openxmlformats.org/officeDocument/2006/relationships" xmlns:p="http://schemas.openxmlformats.org/presentationml/2006/main">
+  <p:cSld name="Slide 9">
+    <p:bg>
+      <p:bgPr>
+        <a:solidFill>
+          <a:srgbClr val="F6F2EA"/>
+        </a:solidFill>
+      </p:bgPr>
+    </p:bg>
+    <p:spTree>
+      <p:nvGrpSpPr>
+        <p:cNvPr id="1" name=""/>
+        <p:cNvGrpSpPr/>
+        <p:nvPr/>
+      </p:nvGrpSpPr>
+      <p:grpSpPr>
+        <a:xfrm>
+          <a:off x="0" y="0"/>
+          <a:ext cx="0" cy="0"/>
+          <a:chOff x="0" y="0"/>
+          <a:chExt cx="0" cy="0"/>
+        </a:xfrm>
+      </p:grpSpPr>
+      <p:sp>
+        <p:nvSpPr>
+          <p:cNvPr id="2" name="Text 0"/>
+          <p:cNvSpPr txBox="1"/>
+          <p:nvPr/>
+        </p:nvSpPr>
+        <p:spPr>
+          <a:xfrm>
+            <a:off x="777240" y="566928"/>
+            <a:ext cx="10607040" cy="274320"/>
+          </a:xfrm>
+          <a:prstGeom prst="rect">
+            <a:avLst/>
+          </a:prstGeom>
+          <a:noFill/>
+          <a:ln/>
+        </p:spPr>
+        <p:txBody>
+          <a:bodyPr wrap="square" lIns="0" tIns="0" rIns="0" bIns="0" rtlCol="0" anchor="ctr"/>
+          <a:lstStyle/>
+          <a:p>
+            <a:pPr indent="0" marL="0">
+              <a:buNone/>
+            </a:pPr>
+            <a:r>
+              <a:rPr lang="en-US" sz="1100" b="1" spc="250" kern="0" dirty="0">
+                <a:solidFill>
+                  <a:srgbClr val="2F4F6B"/>
+                </a:solidFill>
+                <a:latin typeface="Yu Gothic" pitchFamily="34" charset="0"/>
+                <a:ea typeface="Yu Gothic" pitchFamily="34" charset="-122"/>
+                <a:cs typeface="Yu Gothic" pitchFamily="34" charset="-120"/>
+              </a:rPr>
+              <a:t>演習</a:t>
+            </a:r>
+            <a:endParaRPr lang="en-US" sz="1100" dirty="0"/>
+          </a:p>
+        </p:txBody>
+      </p:sp>
+      <p:sp>
+        <p:nvSpPr>
+          <p:cNvPr id="3" name="Text 1"/>
+          <p:cNvSpPr txBox="1"/>
+          <p:nvPr/>
+        </p:nvSpPr>
+        <p:spPr>
+          <a:xfrm>
+            <a:off x="777240" y="896112"/>
+            <a:ext cx="10607040" cy="640080"/>
+          </a:xfrm>
+          <a:prstGeom prst="rect">
+            <a:avLst/>
+          </a:prstGeom>
+          <a:noFill/>
+          <a:ln/>
+        </p:spPr>
+        <p:txBody>
+          <a:bodyPr wrap="square" lIns="0" tIns="0" rIns="0" bIns="0" rtlCol="0" anchor="ctr"/>
+          <a:lstStyle/>
+          <a:p>
+            <a:pPr indent="0" marL="0">
+              <a:buNone/>
+            </a:pPr>
+            <a:r>
+              <a:rPr lang="en-US" sz="2600" b="1" dirty="0">
+                <a:solidFill>
+                  <a:srgbClr val="23201D"/>
+                </a:solidFill>
+                <a:latin typeface="Yu Gothic" pitchFamily="34" charset="0"/>
+                <a:ea typeface="Yu Gothic" pitchFamily="34" charset="-122"/>
+                <a:cs typeface="Yu Gothic" pitchFamily="34" charset="-120"/>
+              </a:rPr>
+              <a:t>今日、一緒にやること</a:t>
+            </a:r>
+            <a:endParaRPr lang="en-US" sz="2600" dirty="0"/>
+          </a:p>
+        </p:txBody>
+      </p:sp>
+      <p:sp>
+        <p:nvSpPr>
+          <p:cNvPr id="4" name="Text 2"/>
+          <p:cNvSpPr txBox="1"/>
+          <p:nvPr/>
+        </p:nvSpPr>
+        <p:spPr>
+          <a:xfrm>
+            <a:off x="777240" y="1572768"/>
+            <a:ext cx="10607040" cy="320040"/>
+          </a:xfrm>
+          <a:prstGeom prst="rect">
+            <a:avLst/>
+          </a:prstGeom>
+          <a:noFill/>
+          <a:ln/>
+        </p:spPr>
+        <p:txBody>
+          <a:bodyPr wrap="square" lIns="0" tIns="0" rIns="0" bIns="0" rtlCol="0" anchor="ctr"/>
+          <a:lstStyle/>
+          <a:p>
+            <a:pPr indent="0" marL="0">
+              <a:buNone/>
+            </a:pPr>
+            <a:r>
+              <a:rPr lang="en-US" sz="1250" b="1" dirty="0">
+                <a:solidFill>
+                  <a:srgbClr val="2F4F6B"/>
+                </a:solidFill>
+                <a:latin typeface="Yu Gothic" pitchFamily="34" charset="0"/>
+                <a:ea typeface="Yu Gothic" pitchFamily="34" charset="-122"/>
+                <a:cs typeface="Yu Gothic" pitchFamily="34" charset="-120"/>
+              </a:rPr>
+              <a:t>55分。操作するのはご自身です。</a:t>
+            </a:r>
+            <a:endParaRPr lang="en-US" sz="1250" dirty="0"/>
+          </a:p>
+        </p:txBody>
+      </p:sp>
+      <p:sp>
+        <p:nvSpPr>
+          <p:cNvPr id="5" name="Shape 3"/>
+          <p:cNvSpPr/>
+          <p:nvPr/>
+        </p:nvSpPr>
+        <p:spPr>
+          <a:xfrm>
+            <a:off x="777240" y="2148840"/>
+            <a:ext cx="3383280" cy="2880360"/>
+          </a:xfrm>
+          <a:prstGeom prst="rect">
+            <a:avLst/>
+          </a:prstGeom>
+          <a:solidFill>
+            <a:srgbClr val="FFFFFF"/>
+          </a:solidFill>
+          <a:ln w="12700">
+            <a:solidFill>
+              <a:srgbClr val="EDE7DB"/>
+            </a:solidFill>
+            <a:prstDash val="solid"/>
+          </a:ln>
+        </p:spPr>
+      </p:sp>
+      <p:sp>
+        <p:nvSpPr>
+          <p:cNvPr id="6" name="Shape 4"/>
+          <p:cNvSpPr/>
+          <p:nvPr/>
+        </p:nvSpPr>
+        <p:spPr>
+          <a:xfrm>
+            <a:off x="1051560" y="2395728"/>
+            <a:ext cx="438912" cy="438912"/>
+          </a:xfrm>
+          <a:prstGeom prst="ellipse">
+            <a:avLst/>
+          </a:prstGeom>
+          <a:solidFill>
+            <a:srgbClr val="2F4F6B"/>
+          </a:solidFill>
+          <a:ln w="12700">
+            <a:solidFill>
+              <a:srgbClr val="333333"/>
+            </a:solidFill>
+            <a:prstDash val="solid"/>
+          </a:ln>
+        </p:spPr>
+      </p:sp>
+      <p:sp>
+        <p:nvSpPr>
+          <p:cNvPr id="7" name="Text 5"/>
+          <p:cNvSpPr txBox="1"/>
+          <p:nvPr/>
+        </p:nvSpPr>
+        <p:spPr>
+          <a:xfrm>
+            <a:off x="1051560" y="2395728"/>
+            <a:ext cx="438912" cy="438912"/>
+          </a:xfrm>
+          <a:prstGeom prst="rect">
+            <a:avLst/>
+          </a:prstGeom>
+          <a:noFill/>
+          <a:ln/>
+        </p:spPr>
+        <p:txBody>
+          <a:bodyPr wrap="square" lIns="0" tIns="0" rIns="0" bIns="0" rtlCol="0" anchor="ctr"/>
+          <a:lstStyle/>
+          <a:p>
+            <a:pPr algn="ctr" indent="0" marL="0">
+              <a:buNone/>
+            </a:pPr>
+            <a:r>
+              <a:rPr lang="en-US" sz="1300" b="1" dirty="0">
                 <a:solidFill>
                   <a:srgbClr val="FFFFFF"/>
                 </a:solidFill>
@@ -4936,22 +8477,22 @@
                 <a:ea typeface="Yu Gothic" pitchFamily="34" charset="-122"/>
                 <a:cs typeface="Yu Gothic" pitchFamily="34" charset="-120"/>
               </a:rPr>
-              <a:t>テンプレート1本を社員1名に渡し、実際に使ってもらって感想を聞いてくる。</a:t>
-            </a:r>
-            <a:endParaRPr lang="en-US" sz="1900" dirty="0"/>
-          </a:p>
-        </p:txBody>
-      </p:sp>
-      <p:sp>
-        <p:nvSpPr>
-          <p:cNvPr id="6" name="Text 4"/>
-          <p:cNvSpPr txBox="1"/>
-          <p:nvPr/>
-        </p:nvSpPr>
-        <p:spPr>
-          <a:xfrm>
-            <a:off x="777240" y="4572000"/>
-            <a:ext cx="10607040" cy="822960"/>
+              <a:t>1</a:t>
+            </a:r>
+            <a:endParaRPr lang="en-US" sz="1300" dirty="0"/>
+          </a:p>
+        </p:txBody>
+      </p:sp>
+      <p:sp>
+        <p:nvSpPr>
+          <p:cNvPr id="8" name="Text 6"/>
+          <p:cNvSpPr txBox="1"/>
+          <p:nvPr/>
+        </p:nvSpPr>
+        <p:spPr>
+          <a:xfrm>
+            <a:off x="1051560" y="2944368"/>
+            <a:ext cx="2834640" cy="731520"/>
           </a:xfrm>
           <a:prstGeom prst="rect">
             <a:avLst/>
@@ -4965,40 +8506,324 @@
           <a:p>
             <a:pPr indent="0" marL="0">
               <a:lnSpc>
-                <a:spcPct val="145000"/>
+                <a:spcPct val="125000"/>
               </a:lnSpc>
               <a:buNone/>
             </a:pPr>
             <a:r>
-              <a:rPr lang="en-US" sz="1300" dirty="0">
-                <a:solidFill>
-                  <a:srgbClr val="B9B0A4"/>
-                </a:solidFill>
-                <a:latin typeface="Yu Gothic" pitchFamily="34" charset="0"/>
-                <a:ea typeface="Yu Gothic" pitchFamily="34" charset="-122"/>
-                <a:cs typeface="Yu Gothic" pitchFamily="34" charset="-120"/>
-              </a:rPr>
-              <a:t>15分で終わる大きさにしてあります。できなかった回があっても構いません。</a:t>
+              <a:rPr lang="en-US" sz="1450" b="1" dirty="0">
+                <a:solidFill>
+                  <a:srgbClr val="23201D"/>
+                </a:solidFill>
+                <a:latin typeface="Yu Gothic" pitchFamily="34" charset="0"/>
+                <a:ea typeface="Yu Gothic" pitchFamily="34" charset="-122"/>
+                <a:cs typeface="Yu Gothic" pitchFamily="34" charset="-120"/>
+              </a:rPr>
+              <a:t>実物を3種、テンプレート化する</a:t>
+            </a:r>
+            <a:endParaRPr lang="en-US" sz="1450" dirty="0"/>
+          </a:p>
+        </p:txBody>
+      </p:sp>
+      <p:sp>
+        <p:nvSpPr>
+          <p:cNvPr id="9" name="Text 7"/>
+          <p:cNvSpPr txBox="1"/>
+          <p:nvPr/>
+        </p:nvSpPr>
+        <p:spPr>
+          <a:xfrm>
+            <a:off x="1051560" y="3703320"/>
+            <a:ext cx="2834640" cy="1188720"/>
+          </a:xfrm>
+          <a:prstGeom prst="rect">
+            <a:avLst/>
+          </a:prstGeom>
+          <a:noFill/>
+          <a:ln/>
+        </p:spPr>
+        <p:txBody>
+          <a:bodyPr wrap="square" lIns="0" tIns="0" rIns="0" bIns="0" rtlCol="0" anchor="ctr"/>
+          <a:lstStyle/>
+          <a:p>
+            <a:pPr indent="0" marL="0">
+              <a:lnSpc>
+                <a:spcPct val="130000"/>
+              </a:lnSpc>
+              <a:buNone/>
+            </a:pPr>
+            <a:r>
+              <a:rPr lang="en-US" sz="1150" dirty="0">
+                <a:solidFill>
+                  <a:srgbClr val="5A534A"/>
+                </a:solidFill>
+                <a:latin typeface="Yu Gothic" pitchFamily="34" charset="0"/>
+                <a:ea typeface="Yu Gothic" pitchFamily="34" charset="-122"/>
+                <a:cs typeface="Yu Gothic" pitchFamily="34" charset="-120"/>
+              </a:rPr>
+              <a:t>お持ちいただいた文書をそのまま使います</a:t>
+            </a:r>
+            <a:endParaRPr lang="en-US" sz="1150" dirty="0"/>
+          </a:p>
+        </p:txBody>
+      </p:sp>
+      <p:sp>
+        <p:nvSpPr>
+          <p:cNvPr id="10" name="Shape 8"/>
+          <p:cNvSpPr/>
+          <p:nvPr/>
+        </p:nvSpPr>
+        <p:spPr>
+          <a:xfrm>
+            <a:off x="4389120" y="2148840"/>
+            <a:ext cx="3383280" cy="2880360"/>
+          </a:xfrm>
+          <a:prstGeom prst="rect">
+            <a:avLst/>
+          </a:prstGeom>
+          <a:solidFill>
+            <a:srgbClr val="FFFFFF"/>
+          </a:solidFill>
+          <a:ln w="12700">
+            <a:solidFill>
+              <a:srgbClr val="EDE7DB"/>
+            </a:solidFill>
+            <a:prstDash val="solid"/>
+          </a:ln>
+        </p:spPr>
+      </p:sp>
+      <p:sp>
+        <p:nvSpPr>
+          <p:cNvPr id="11" name="Shape 9"/>
+          <p:cNvSpPr/>
+          <p:nvPr/>
+        </p:nvSpPr>
+        <p:spPr>
+          <a:xfrm>
+            <a:off x="4663440" y="2395728"/>
+            <a:ext cx="438912" cy="438912"/>
+          </a:xfrm>
+          <a:prstGeom prst="ellipse">
+            <a:avLst/>
+          </a:prstGeom>
+          <a:solidFill>
+            <a:srgbClr val="2F4F6B"/>
+          </a:solidFill>
+          <a:ln w="12700">
+            <a:solidFill>
+              <a:srgbClr val="333333"/>
+            </a:solidFill>
+            <a:prstDash val="solid"/>
+          </a:ln>
+        </p:spPr>
+      </p:sp>
+      <p:sp>
+        <p:nvSpPr>
+          <p:cNvPr id="12" name="Text 10"/>
+          <p:cNvSpPr txBox="1"/>
+          <p:nvPr/>
+        </p:nvSpPr>
+        <p:spPr>
+          <a:xfrm>
+            <a:off x="4663440" y="2395728"/>
+            <a:ext cx="438912" cy="438912"/>
+          </a:xfrm>
+          <a:prstGeom prst="rect">
+            <a:avLst/>
+          </a:prstGeom>
+          <a:noFill/>
+          <a:ln/>
+        </p:spPr>
+        <p:txBody>
+          <a:bodyPr wrap="square" lIns="0" tIns="0" rIns="0" bIns="0" rtlCol="0" anchor="ctr"/>
+          <a:lstStyle/>
+          <a:p>
+            <a:pPr algn="ctr" indent="0" marL="0">
+              <a:buNone/>
+            </a:pPr>
+            <a:r>
+              <a:rPr lang="en-US" sz="1300" b="1" dirty="0">
+                <a:solidFill>
+                  <a:srgbClr val="FFFFFF"/>
+                </a:solidFill>
+                <a:latin typeface="Yu Gothic" pitchFamily="34" charset="0"/>
+                <a:ea typeface="Yu Gothic" pitchFamily="34" charset="-122"/>
+                <a:cs typeface="Yu Gothic" pitchFamily="34" charset="-120"/>
+              </a:rPr>
+              <a:t>2</a:t>
             </a:r>
             <a:endParaRPr lang="en-US" sz="1300" dirty="0"/>
           </a:p>
+        </p:txBody>
+      </p:sp>
+      <p:sp>
+        <p:nvSpPr>
+          <p:cNvPr id="13" name="Text 11"/>
+          <p:cNvSpPr txBox="1"/>
+          <p:nvPr/>
+        </p:nvSpPr>
+        <p:spPr>
+          <a:xfrm>
+            <a:off x="4663440" y="2944368"/>
+            <a:ext cx="2834640" cy="731520"/>
+          </a:xfrm>
+          <a:prstGeom prst="rect">
+            <a:avLst/>
+          </a:prstGeom>
+          <a:noFill/>
+          <a:ln/>
+        </p:spPr>
+        <p:txBody>
+          <a:bodyPr wrap="square" lIns="0" tIns="0" rIns="0" bIns="0" rtlCol="0" anchor="ctr"/>
+          <a:lstStyle/>
           <a:p>
             <a:pPr indent="0" marL="0">
               <a:lnSpc>
-                <a:spcPct val="145000"/>
+                <a:spcPct val="125000"/>
               </a:lnSpc>
               <a:buNone/>
             </a:pPr>
             <a:r>
-              <a:rPr lang="en-US" sz="1300" dirty="0">
-                <a:solidFill>
-                  <a:srgbClr val="B9B0A4"/>
-                </a:solidFill>
-                <a:latin typeface="Yu Gothic" pitchFamily="34" charset="0"/>
-                <a:ea typeface="Yu Gothic" pitchFamily="34" charset="-122"/>
-                <a:cs typeface="Yu Gothic" pitchFamily="34" charset="-120"/>
-              </a:rPr>
-              <a:t>2回続いたら、宿題の出し方を見直します。</a:t>
+              <a:rPr lang="en-US" sz="1450" b="1" dirty="0">
+                <a:solidFill>
+                  <a:srgbClr val="23201D"/>
+                </a:solidFill>
+                <a:latin typeface="Yu Gothic" pitchFamily="34" charset="0"/>
+                <a:ea typeface="Yu Gothic" pitchFamily="34" charset="-122"/>
+                <a:cs typeface="Yu Gothic" pitchFamily="34" charset="-120"/>
+              </a:rPr>
+              <a:t>1つは、社員に渡す前提で作る</a:t>
+            </a:r>
+            <a:endParaRPr lang="en-US" sz="1450" dirty="0"/>
+          </a:p>
+        </p:txBody>
+      </p:sp>
+      <p:sp>
+        <p:nvSpPr>
+          <p:cNvPr id="14" name="Text 12"/>
+          <p:cNvSpPr txBox="1"/>
+          <p:nvPr/>
+        </p:nvSpPr>
+        <p:spPr>
+          <a:xfrm>
+            <a:off x="4663440" y="3703320"/>
+            <a:ext cx="2834640" cy="1188720"/>
+          </a:xfrm>
+          <a:prstGeom prst="rect">
+            <a:avLst/>
+          </a:prstGeom>
+          <a:noFill/>
+          <a:ln/>
+        </p:spPr>
+        <p:txBody>
+          <a:bodyPr wrap="square" lIns="0" tIns="0" rIns="0" bIns="0" rtlCol="0" anchor="ctr"/>
+          <a:lstStyle/>
+          <a:p>
+            <a:pPr indent="0" marL="0">
+              <a:lnSpc>
+                <a:spcPct val="130000"/>
+              </a:lnSpc>
+              <a:buNone/>
+            </a:pPr>
+            <a:r>
+              <a:rPr lang="en-US" sz="1150" dirty="0">
+                <a:solidFill>
+                  <a:srgbClr val="5A534A"/>
+                </a:solidFill>
+                <a:latin typeface="Yu Gothic" pitchFamily="34" charset="0"/>
+                <a:ea typeface="Yu Gothic" pitchFamily="34" charset="-122"/>
+                <a:cs typeface="Yu Gothic" pitchFamily="34" charset="-120"/>
+              </a:rPr>
+              <a:t>用途の1行・差し替え箇所・確認事項の5行を必ず入れます</a:t>
+            </a:r>
+            <a:endParaRPr lang="en-US" sz="1150" dirty="0"/>
+          </a:p>
+        </p:txBody>
+      </p:sp>
+      <p:sp>
+        <p:nvSpPr>
+          <p:cNvPr id="15" name="Shape 13"/>
+          <p:cNvSpPr/>
+          <p:nvPr/>
+        </p:nvSpPr>
+        <p:spPr>
+          <a:xfrm>
+            <a:off x="8001000" y="2148840"/>
+            <a:ext cx="3383280" cy="2880360"/>
+          </a:xfrm>
+          <a:prstGeom prst="rect">
+            <a:avLst/>
+          </a:prstGeom>
+          <a:solidFill>
+            <a:srgbClr val="FFFFFF"/>
+          </a:solidFill>
+          <a:ln w="12700">
+            <a:solidFill>
+              <a:srgbClr val="EDE7DB"/>
+            </a:solidFill>
+            <a:prstDash val="solid"/>
+          </a:ln>
+        </p:spPr>
+      </p:sp>
+      <p:sp>
+        <p:nvSpPr>
+          <p:cNvPr id="16" name="Shape 14"/>
+          <p:cNvSpPr/>
+          <p:nvPr/>
+        </p:nvSpPr>
+        <p:spPr>
+          <a:xfrm>
+            <a:off x="8275320" y="2395728"/>
+            <a:ext cx="438912" cy="438912"/>
+          </a:xfrm>
+          <a:prstGeom prst="ellipse">
+            <a:avLst/>
+          </a:prstGeom>
+          <a:solidFill>
+            <a:srgbClr val="2F4F6B"/>
+          </a:solidFill>
+          <a:ln w="12700">
+            <a:solidFill>
+              <a:srgbClr val="333333"/>
+            </a:solidFill>
+            <a:prstDash val="solid"/>
+          </a:ln>
+        </p:spPr>
+      </p:sp>
+      <p:sp>
+        <p:nvSpPr>
+          <p:cNvPr id="17" name="Text 15"/>
+          <p:cNvSpPr txBox="1"/>
+          <p:nvPr/>
+        </p:nvSpPr>
+        <p:spPr>
+          <a:xfrm>
+            <a:off x="8275320" y="2395728"/>
+            <a:ext cx="438912" cy="438912"/>
+          </a:xfrm>
+          <a:prstGeom prst="rect">
+            <a:avLst/>
+          </a:prstGeom>
+          <a:noFill/>
+          <a:ln/>
+        </p:spPr>
+        <p:txBody>
+          <a:bodyPr wrap="square" lIns="0" tIns="0" rIns="0" bIns="0" rtlCol="0" anchor="ctr"/>
+          <a:lstStyle/>
+          <a:p>
+            <a:pPr algn="ctr" indent="0" marL="0">
+              <a:buNone/>
+            </a:pPr>
+            <a:r>
+              <a:rPr lang="en-US" sz="1300" b="1" dirty="0">
+                <a:solidFill>
+                  <a:srgbClr val="FFFFFF"/>
+                </a:solidFill>
+                <a:latin typeface="Yu Gothic" pitchFamily="34" charset="0"/>
+                <a:ea typeface="Yu Gothic" pitchFamily="34" charset="-122"/>
+                <a:cs typeface="Yu Gothic" pitchFamily="34" charset="-120"/>
+              </a:rPr>
+              <a:t>3</a:t>
             </a:r>
             <a:endParaRPr lang="en-US" sz="1300" dirty="0"/>
           </a:p>
@@ -5006,14 +8831,98 @@
       </p:sp>
       <p:sp>
         <p:nvSpPr>
-          <p:cNvPr id="7" name="Text 5"/>
-          <p:cNvSpPr txBox="1"/>
-          <p:nvPr/>
-        </p:nvSpPr>
-        <p:spPr>
-          <a:xfrm>
-            <a:off x="777240" y="6355080"/>
-            <a:ext cx="10607040" cy="274320"/>
+          <p:cNvPr id="18" name="Text 16"/>
+          <p:cNvSpPr txBox="1"/>
+          <p:nvPr/>
+        </p:nvSpPr>
+        <p:spPr>
+          <a:xfrm>
+            <a:off x="8275320" y="2944368"/>
+            <a:ext cx="2834640" cy="731520"/>
+          </a:xfrm>
+          <a:prstGeom prst="rect">
+            <a:avLst/>
+          </a:prstGeom>
+          <a:noFill/>
+          <a:ln/>
+        </p:spPr>
+        <p:txBody>
+          <a:bodyPr wrap="square" lIns="0" tIns="0" rIns="0" bIns="0" rtlCol="0" anchor="ctr"/>
+          <a:lstStyle/>
+          <a:p>
+            <a:pPr indent="0" marL="0">
+              <a:lnSpc>
+                <a:spcPct val="125000"/>
+              </a:lnSpc>
+              <a:buNone/>
+            </a:pPr>
+            <a:r>
+              <a:rPr lang="en-US" sz="1450" b="1" dirty="0">
+                <a:solidFill>
+                  <a:srgbClr val="23201D"/>
+                </a:solidFill>
+                <a:latin typeface="Yu Gothic" pitchFamily="34" charset="0"/>
+                <a:ea typeface="Yu Gothic" pitchFamily="34" charset="-122"/>
+                <a:cs typeface="Yu Gothic" pitchFamily="34" charset="-120"/>
+              </a:rPr>
+              <a:t>渡し方の一言まで決める</a:t>
+            </a:r>
+            <a:endParaRPr lang="en-US" sz="1450" dirty="0"/>
+          </a:p>
+        </p:txBody>
+      </p:sp>
+      <p:sp>
+        <p:nvSpPr>
+          <p:cNvPr id="19" name="Text 17"/>
+          <p:cNvSpPr txBox="1"/>
+          <p:nvPr/>
+        </p:nvSpPr>
+        <p:spPr>
+          <a:xfrm>
+            <a:off x="8275320" y="3703320"/>
+            <a:ext cx="2834640" cy="1188720"/>
+          </a:xfrm>
+          <a:prstGeom prst="rect">
+            <a:avLst/>
+          </a:prstGeom>
+          <a:noFill/>
+          <a:ln/>
+        </p:spPr>
+        <p:txBody>
+          <a:bodyPr wrap="square" lIns="0" tIns="0" rIns="0" bIns="0" rtlCol="0" anchor="ctr"/>
+          <a:lstStyle/>
+          <a:p>
+            <a:pPr indent="0" marL="0">
+              <a:lnSpc>
+                <a:spcPct val="130000"/>
+              </a:lnSpc>
+              <a:buNone/>
+            </a:pPr>
+            <a:r>
+              <a:rPr lang="en-US" sz="1150" dirty="0">
+                <a:solidFill>
+                  <a:srgbClr val="5A534A"/>
+                </a:solidFill>
+                <a:latin typeface="Yu Gothic" pitchFamily="34" charset="0"/>
+                <a:ea typeface="Yu Gothic" pitchFamily="34" charset="-122"/>
+                <a:cs typeface="Yu Gothic" pitchFamily="34" charset="-120"/>
+              </a:rPr>
+              <a:t>誰に、どう説明して渡すか。ここまで決めないと使われません</a:t>
+            </a:r>
+            <a:endParaRPr lang="en-US" sz="1150" dirty="0"/>
+          </a:p>
+        </p:txBody>
+      </p:sp>
+      <p:sp>
+        <p:nvSpPr>
+          <p:cNvPr id="20" name="Text 18"/>
+          <p:cNvSpPr txBox="1"/>
+          <p:nvPr/>
+        </p:nvSpPr>
+        <p:spPr>
+          <a:xfrm>
+            <a:off x="777240" y="6382512"/>
+            <a:ext cx="7424928" cy="256032"/>
           </a:xfrm>
           <a:prstGeom prst="rect">
             <a:avLst/>
@@ -5031,13 +8940,52 @@
             <a:r>
               <a:rPr lang="en-US" sz="900" dirty="0">
                 <a:solidFill>
-                  <a:srgbClr val="6E6558"/>
+                  <a:srgbClr val="8A8177"/>
                 </a:solidFill>
                 <a:latin typeface="Yu Gothic" pitchFamily="34" charset="0"/>
                 <a:ea typeface="Yu Gothic" pitchFamily="34" charset="-122"/>
                 <a:cs typeface="Yu Gothic" pitchFamily="34" charset="-120"/>
               </a:rPr>
               <a:t>第3回　文書とコミュニケーションのAI化</a:t>
+            </a:r>
+            <a:endParaRPr lang="en-US" sz="900" dirty="0"/>
+          </a:p>
+        </p:txBody>
+      </p:sp>
+      <p:sp>
+        <p:nvSpPr>
+          <p:cNvPr id="21" name="Text 19"/>
+          <p:cNvSpPr txBox="1"/>
+          <p:nvPr/>
+        </p:nvSpPr>
+        <p:spPr>
+          <a:xfrm>
+            <a:off x="8202168" y="6382512"/>
+            <a:ext cx="3182112" cy="256032"/>
+          </a:xfrm>
+          <a:prstGeom prst="rect">
+            <a:avLst/>
+          </a:prstGeom>
+          <a:noFill/>
+          <a:ln/>
+        </p:spPr>
+        <p:txBody>
+          <a:bodyPr wrap="square" lIns="0" tIns="0" rIns="0" bIns="0" rtlCol="0" anchor="ctr"/>
+          <a:lstStyle/>
+          <a:p>
+            <a:pPr algn="r" indent="0" marL="0">
+              <a:buNone/>
+            </a:pPr>
+            <a:r>
+              <a:rPr lang="en-US" sz="900" dirty="0">
+                <a:solidFill>
+                  <a:srgbClr val="8A8177"/>
+                </a:solidFill>
+                <a:latin typeface="Yu Gothic" pitchFamily="34" charset="0"/>
+                <a:ea typeface="Yu Gothic" pitchFamily="34" charset="-122"/>
+                <a:cs typeface="Yu Gothic" pitchFamily="34" charset="-120"/>
+              </a:rPr>
+              <a:t>演習</a:t>
             </a:r>
             <a:endParaRPr lang="en-US" sz="900" dirty="0"/>
           </a:p>

--- a/slides/pptx/第03回_文書とコミュニケーションのAI化.pptx
+++ b/slides/pptx/第03回_文書とコミュニケーションのAI化.pptx
@@ -17,9 +17,12 @@
     <p:sldId id="265" r:id="rId11"/>
     <p:sldId id="266" r:id="rId12"/>
     <p:sldId id="267" r:id="rId13"/>
+    <p:sldId id="268" r:id="rId14"/>
+    <p:sldId id="269" r:id="rId15"/>
+    <p:sldId id="270" r:id="rId16"/>
   </p:sldIdLst>
   <p:notesMasterIdLst>
-    <p:notesMasterId r:id="rId14"/>
+    <p:notesMasterId r:id="rId17"/>
   </p:notesMasterIdLst>
   <p:sldSz cx="12192000" cy="6858000"/>
   <p:notesSz cx="6858000" cy="12192000"/>
@@ -601,7 +604,7 @@
           <a:p>
             <a:r>
               <a:rPr lang="en-US" dirty="0"/>
-              <a:t>渡す相手を実名で決めさせる。「事務の誰か」では渡らない。その場で名前を書いてもらう。</a:t>
+              <a:t>3分類は、この先ずっと使う共通言語になる。ここで名前を付けておくと、第5回・第9回で参照できる。</a:t>
             </a:r>
             <a:endParaRPr lang="en-US" dirty="0"/>
           </a:p>
@@ -689,7 +692,7 @@
           <a:p>
             <a:r>
               <a:rPr lang="en-US" dirty="0"/>
-              <a:t>録画を止める運用は、この回で必ず提案する。安心して実物を出せる状態を作れるかどうかが、第5回以降の質を決める。</a:t>
+              <a:t>3つ目（渡し方の一言）を飛ばさない。ここを飛ばすと、テンプレートは共有フォルダに置かれたまま誰にも使われない。</a:t>
             </a:r>
             <a:endParaRPr lang="en-US" dirty="0"/>
           </a:p>
@@ -777,7 +780,7 @@
           <a:p>
             <a:r>
               <a:rPr lang="en-US" dirty="0"/>
-              <a:t>感想は「よかった」で終わらせず、使いにくかった点を1つ持ち帰ってもらうよう頼む。それが第4回の冒頭15分の材料になる。</a:t>
+              <a:t>渡す相手を実名で決めさせる。「事務の誰か」では渡らない。その場で名前を書いてもらう。</a:t>
             </a:r>
             <a:endParaRPr lang="en-US" dirty="0"/>
           </a:p>
@@ -801,6 +804,270 @@
             <a:fld id="{F7021451-1387-4CA6-816F-3879F97B5CBC}" type="slidenum">
               <a:rPr lang="en-US"/>
               <a:t>12</a:t>
+            </a:fld>
+            <a:endParaRPr lang="en-US"/>
+          </a:p>
+        </p:txBody>
+      </p:sp>
+    </p:spTree>
+    <p:extLst>
+      <p:ext uri="{BB962C8B-B14F-4D97-AF65-F5344CB8AC3E}">
+        <p14:creationId xmlns:p14="http://schemas.microsoft.com/office/powerpoint/2010/main" val="1024086991"/>
+      </p:ext>
+    </p:extLst>
+  </p:cSld>
+  <p:clrMapOvr>
+    <a:masterClrMapping/>
+  </p:clrMapOvr>
+</p:notes>
+</file>
+
+<file path=ppt/notesSlides/notesSlide13.xml><?xml version="1.0" encoding="utf-8"?>
+<p:notes xmlns:a="http://schemas.openxmlformats.org/drawingml/2006/main" xmlns:r="http://schemas.openxmlformats.org/officeDocument/2006/relationships" xmlns:p="http://schemas.openxmlformats.org/presentationml/2006/main">
+  <p:cSld>
+    <p:spTree>
+      <p:nvGrpSpPr>
+        <p:cNvPr id="1" name=""/>
+        <p:cNvGrpSpPr/>
+        <p:nvPr/>
+      </p:nvGrpSpPr>
+      <p:grpSpPr>
+        <a:xfrm>
+          <a:off x="0" y="0"/>
+          <a:ext cx="0" cy="0"/>
+          <a:chOff x="0" y="0"/>
+          <a:chExt cx="0" cy="0"/>
+        </a:xfrm>
+      </p:grpSpPr>
+      <p:sp>
+        <p:nvSpPr>
+          <p:cNvPr id="2" name="Slide Image Placeholder 1"/>
+          <p:cNvSpPr>
+            <a:spLocks noGrp="1" noRot="1" noChangeAspect="1"/>
+          </p:cNvSpPr>
+          <p:nvPr>
+            <p:ph type="sldImg"/>
+          </p:nvPr>
+        </p:nvSpPr>
+        <p:spPr/>
+      </p:sp>
+      <p:sp>
+        <p:nvSpPr>
+          <p:cNvPr id="3" name="Notes Placeholder 2"/>
+          <p:cNvSpPr>
+            <a:spLocks noGrp="1"/>
+          </p:cNvSpPr>
+          <p:nvPr>
+            <p:ph type="body" idx="1"/>
+          </p:nvPr>
+        </p:nvSpPr>
+        <p:spPr/>
+        <p:txBody>
+          <a:bodyPr/>
+          <a:lstStyle/>
+          <a:p>
+            <a:r>
+              <a:rPr lang="en-US" dirty="0"/>
+              <a:t>録画を止める運用は、この回で必ず提案する。安心して実物を出せる状態を作れるかどうかが、第5回以降の質を決める。</a:t>
+            </a:r>
+            <a:endParaRPr lang="en-US" dirty="0"/>
+          </a:p>
+        </p:txBody>
+      </p:sp>
+      <p:sp>
+        <p:nvSpPr>
+          <p:cNvPr id="4" name="Slide Number Placeholder 3"/>
+          <p:cNvSpPr>
+            <a:spLocks noGrp="1"/>
+          </p:cNvSpPr>
+          <p:nvPr>
+            <p:ph type="sldNum" sz="quarter" idx="10"/>
+          </p:nvPr>
+        </p:nvSpPr>
+        <p:spPr/>
+        <p:txBody>
+          <a:bodyPr/>
+          <a:lstStyle/>
+          <a:p>
+            <a:fld id="{F7021451-1387-4CA6-816F-3879F97B5CBC}" type="slidenum">
+              <a:rPr lang="en-US"/>
+              <a:t>13</a:t>
+            </a:fld>
+            <a:endParaRPr lang="en-US"/>
+          </a:p>
+        </p:txBody>
+      </p:sp>
+    </p:spTree>
+    <p:extLst>
+      <p:ext uri="{BB962C8B-B14F-4D97-AF65-F5344CB8AC3E}">
+        <p14:creationId xmlns:p14="http://schemas.microsoft.com/office/powerpoint/2010/main" val="1024086991"/>
+      </p:ext>
+    </p:extLst>
+  </p:cSld>
+  <p:clrMapOvr>
+    <a:masterClrMapping/>
+  </p:clrMapOvr>
+</p:notes>
+</file>
+
+<file path=ppt/notesSlides/notesSlide14.xml><?xml version="1.0" encoding="utf-8"?>
+<p:notes xmlns:a="http://schemas.openxmlformats.org/drawingml/2006/main" xmlns:r="http://schemas.openxmlformats.org/officeDocument/2006/relationships" xmlns:p="http://schemas.openxmlformats.org/presentationml/2006/main">
+  <p:cSld>
+    <p:spTree>
+      <p:nvGrpSpPr>
+        <p:cNvPr id="1" name=""/>
+        <p:cNvGrpSpPr/>
+        <p:nvPr/>
+      </p:nvGrpSpPr>
+      <p:grpSpPr>
+        <a:xfrm>
+          <a:off x="0" y="0"/>
+          <a:ext cx="0" cy="0"/>
+          <a:chOff x="0" y="0"/>
+          <a:chExt cx="0" cy="0"/>
+        </a:xfrm>
+      </p:grpSpPr>
+      <p:sp>
+        <p:nvSpPr>
+          <p:cNvPr id="2" name="Slide Image Placeholder 1"/>
+          <p:cNvSpPr>
+            <a:spLocks noGrp="1" noRot="1" noChangeAspect="1"/>
+          </p:cNvSpPr>
+          <p:nvPr>
+            <p:ph type="sldImg"/>
+          </p:nvPr>
+        </p:nvSpPr>
+        <p:spPr/>
+      </p:sp>
+      <p:sp>
+        <p:nvSpPr>
+          <p:cNvPr id="3" name="Notes Placeholder 2"/>
+          <p:cNvSpPr>
+            <a:spLocks noGrp="1"/>
+          </p:cNvSpPr>
+          <p:nvPr>
+            <p:ph type="body" idx="1"/>
+          </p:nvPr>
+        </p:nvSpPr>
+        <p:spPr/>
+        <p:txBody>
+          <a:bodyPr/>
+          <a:lstStyle/>
+          <a:p>
+            <a:r>
+              <a:rPr lang="en-US" dirty="0"/>
+              <a:t>数字の表を忘れてくる受講者が多い。3日前のリマインドで、ファイル名まで指定して依頼する。</a:t>
+            </a:r>
+            <a:endParaRPr lang="en-US" dirty="0"/>
+          </a:p>
+        </p:txBody>
+      </p:sp>
+      <p:sp>
+        <p:nvSpPr>
+          <p:cNvPr id="4" name="Slide Number Placeholder 3"/>
+          <p:cNvSpPr>
+            <a:spLocks noGrp="1"/>
+          </p:cNvSpPr>
+          <p:nvPr>
+            <p:ph type="sldNum" sz="quarter" idx="10"/>
+          </p:nvPr>
+        </p:nvSpPr>
+        <p:spPr/>
+        <p:txBody>
+          <a:bodyPr/>
+          <a:lstStyle/>
+          <a:p>
+            <a:fld id="{F7021451-1387-4CA6-816F-3879F97B5CBC}" type="slidenum">
+              <a:rPr lang="en-US"/>
+              <a:t>14</a:t>
+            </a:fld>
+            <a:endParaRPr lang="en-US"/>
+          </a:p>
+        </p:txBody>
+      </p:sp>
+    </p:spTree>
+    <p:extLst>
+      <p:ext uri="{BB962C8B-B14F-4D97-AF65-F5344CB8AC3E}">
+        <p14:creationId xmlns:p14="http://schemas.microsoft.com/office/powerpoint/2010/main" val="1024086991"/>
+      </p:ext>
+    </p:extLst>
+  </p:cSld>
+  <p:clrMapOvr>
+    <a:masterClrMapping/>
+  </p:clrMapOvr>
+</p:notes>
+</file>
+
+<file path=ppt/notesSlides/notesSlide15.xml><?xml version="1.0" encoding="utf-8"?>
+<p:notes xmlns:a="http://schemas.openxmlformats.org/drawingml/2006/main" xmlns:r="http://schemas.openxmlformats.org/officeDocument/2006/relationships" xmlns:p="http://schemas.openxmlformats.org/presentationml/2006/main">
+  <p:cSld>
+    <p:spTree>
+      <p:nvGrpSpPr>
+        <p:cNvPr id="1" name=""/>
+        <p:cNvGrpSpPr/>
+        <p:nvPr/>
+      </p:nvGrpSpPr>
+      <p:grpSpPr>
+        <a:xfrm>
+          <a:off x="0" y="0"/>
+          <a:ext cx="0" cy="0"/>
+          <a:chOff x="0" y="0"/>
+          <a:chExt cx="0" cy="0"/>
+        </a:xfrm>
+      </p:grpSpPr>
+      <p:sp>
+        <p:nvSpPr>
+          <p:cNvPr id="2" name="Slide Image Placeholder 1"/>
+          <p:cNvSpPr>
+            <a:spLocks noGrp="1" noRot="1" noChangeAspect="1"/>
+          </p:cNvSpPr>
+          <p:nvPr>
+            <p:ph type="sldImg"/>
+          </p:nvPr>
+        </p:nvSpPr>
+        <p:spPr/>
+      </p:sp>
+      <p:sp>
+        <p:nvSpPr>
+          <p:cNvPr id="3" name="Notes Placeholder 2"/>
+          <p:cNvSpPr>
+            <a:spLocks noGrp="1"/>
+          </p:cNvSpPr>
+          <p:nvPr>
+            <p:ph type="body" idx="1"/>
+          </p:nvPr>
+        </p:nvSpPr>
+        <p:spPr/>
+        <p:txBody>
+          <a:bodyPr/>
+          <a:lstStyle/>
+          <a:p>
+            <a:r>
+              <a:rPr lang="en-US" dirty="0"/>
+              <a:t>感想は「よかった」で終わらせず、使いにくかった点を1つ持ち帰ってもらうよう頼む。それが第4回の冒頭15分の材料になる。</a:t>
+            </a:r>
+            <a:endParaRPr lang="en-US" dirty="0"/>
+          </a:p>
+        </p:txBody>
+      </p:sp>
+      <p:sp>
+        <p:nvSpPr>
+          <p:cNvPr id="4" name="Slide Number Placeholder 3"/>
+          <p:cNvSpPr>
+            <a:spLocks noGrp="1"/>
+          </p:cNvSpPr>
+          <p:nvPr>
+            <p:ph type="sldNum" sz="quarter" idx="10"/>
+          </p:nvPr>
+        </p:nvSpPr>
+        <p:spPr/>
+        <p:txBody>
+          <a:bodyPr/>
+          <a:lstStyle/>
+          <a:p>
+            <a:fld id="{F7021451-1387-4CA6-816F-3879F97B5CBC}" type="slidenum">
+              <a:rPr lang="en-US"/>
+              <a:t>15</a:t>
             </a:fld>
             <a:endParaRPr lang="en-US"/>
           </a:p>
@@ -1481,7 +1748,7 @@
           <a:p>
             <a:r>
               <a:rPr lang="en-US" dirty="0"/>
-              <a:t>3つ目（渡し方の一言）を飛ばさない。ここを飛ばすと、テンプレートは共有フォルダに置かれたまま誰にも使われない。</a:t>
+              <a:t>1つ目が最頻。『使ってくれない』を社員のせいにしないで、渡し方の設計に戻す。2つ目は意外に気にされる。文体を合わせる実演を思い出してもらう。</a:t>
             </a:r>
             <a:endParaRPr lang="en-US" dirty="0"/>
           </a:p>
@@ -2175,13 +2442,13 @@
             <a:r>
               <a:rPr lang="en-US" sz="1100" b="1" spc="250" kern="0" dirty="0">
                 <a:solidFill>
-                  <a:srgbClr val="3B6B4A"/>
-                </a:solidFill>
-                <a:latin typeface="Yu Gothic" pitchFamily="34" charset="0"/>
-                <a:ea typeface="Yu Gothic" pitchFamily="34" charset="-122"/>
-                <a:cs typeface="Yu Gothic" pitchFamily="34" charset="-120"/>
-              </a:rPr>
-              <a:t>業務への組み込み</a:t>
+                  <a:srgbClr val="8A8177"/>
+                </a:solidFill>
+                <a:latin typeface="Yu Gothic" pitchFamily="34" charset="0"/>
+                <a:ea typeface="Yu Gothic" pitchFamily="34" charset="-122"/>
+                <a:cs typeface="Yu Gothic" pitchFamily="34" charset="-120"/>
+              </a:rPr>
+              <a:t>用語</a:t>
             </a:r>
             <a:endParaRPr lang="en-US" sz="1100" dirty="0"/>
           </a:p>
@@ -2220,7 +2487,7 @@
                 <a:ea typeface="Yu Gothic" pitchFamily="34" charset="-122"/>
                 <a:cs typeface="Yu Gothic" pitchFamily="34" charset="-120"/>
               </a:rPr>
-              <a:t>帰る前に決めること</a:t>
+              <a:t>今日出てきた言葉</a:t>
             </a:r>
             <a:endParaRPr lang="en-US" sz="2600" dirty="0"/>
           </a:p>
@@ -2228,53 +2495,14 @@
       </p:sp>
       <p:sp>
         <p:nvSpPr>
-          <p:cNvPr id="4" name="Text 2"/>
-          <p:cNvSpPr txBox="1"/>
-          <p:nvPr/>
-        </p:nvSpPr>
-        <p:spPr>
-          <a:xfrm>
-            <a:off x="777240" y="1572768"/>
-            <a:ext cx="10607040" cy="320040"/>
-          </a:xfrm>
-          <a:prstGeom prst="rect">
-            <a:avLst/>
-          </a:prstGeom>
-          <a:noFill/>
-          <a:ln/>
-        </p:spPr>
-        <p:txBody>
-          <a:bodyPr wrap="square" lIns="0" tIns="0" rIns="0" bIns="0" rtlCol="0" anchor="ctr"/>
-          <a:lstStyle/>
-          <a:p>
-            <a:pPr indent="0" marL="0">
-              <a:buNone/>
-            </a:pPr>
-            <a:r>
-              <a:rPr lang="en-US" sz="1250" b="1" dirty="0">
-                <a:solidFill>
-                  <a:srgbClr val="3B6B4A"/>
-                </a:solidFill>
-                <a:latin typeface="Yu Gothic" pitchFamily="34" charset="0"/>
-                <a:ea typeface="Yu Gothic" pitchFamily="34" charset="-122"/>
-                <a:cs typeface="Yu Gothic" pitchFamily="34" charset="-120"/>
-              </a:rPr>
-              <a:t>ここを決めないと、持ち帰っても使われません。紙に書きます。</a:t>
-            </a:r>
-            <a:endParaRPr lang="en-US" sz="1250" dirty="0"/>
-          </a:p>
-        </p:txBody>
-      </p:sp>
-      <p:sp>
-        <p:nvSpPr>
-          <p:cNvPr id="5" name="Shape 3"/>
+          <p:cNvPr id="4" name="Shape 2"/>
           <p:cNvSpPr/>
           <p:nvPr/>
         </p:nvSpPr>
         <p:spPr>
           <a:xfrm>
-            <a:off x="777240" y="2103120"/>
-            <a:ext cx="10607040" cy="914400"/>
+            <a:off x="777240" y="1828800"/>
+            <a:ext cx="10607040" cy="1078992"/>
           </a:xfrm>
           <a:prstGeom prst="rect">
             <a:avLst/>
@@ -2292,20 +2520,59 @@
       </p:sp>
       <p:sp>
         <p:nvSpPr>
+          <p:cNvPr id="5" name="Text 3"/>
+          <p:cNvSpPr txBox="1"/>
+          <p:nvPr/>
+        </p:nvSpPr>
+        <p:spPr>
+          <a:xfrm>
+            <a:off x="1097280" y="1920240"/>
+            <a:ext cx="2969971" cy="896112"/>
+          </a:xfrm>
+          <a:prstGeom prst="rect">
+            <a:avLst/>
+          </a:prstGeom>
+          <a:noFill/>
+          <a:ln/>
+        </p:spPr>
+        <p:txBody>
+          <a:bodyPr wrap="square" lIns="0" tIns="0" rIns="0" bIns="0" rtlCol="0" anchor="ctr"/>
+          <a:lstStyle/>
+          <a:p>
+            <a:pPr indent="0" marL="0">
+              <a:buNone/>
+            </a:pPr>
+            <a:r>
+              <a:rPr lang="en-US" sz="1500" b="1" dirty="0">
+                <a:solidFill>
+                  <a:srgbClr val="23201D"/>
+                </a:solidFill>
+                <a:latin typeface="Yu Gothic" pitchFamily="34" charset="0"/>
+                <a:ea typeface="Yu Gothic" pitchFamily="34" charset="-122"/>
+                <a:cs typeface="Yu Gothic" pitchFamily="34" charset="-120"/>
+              </a:rPr>
+              <a:t>定型／半定型／非定型</a:t>
+            </a:r>
+            <a:endParaRPr lang="en-US" sz="1500" dirty="0"/>
+          </a:p>
+        </p:txBody>
+      </p:sp>
+      <p:sp>
+        <p:nvSpPr>
           <p:cNvPr id="6" name="Shape 4"/>
           <p:cNvSpPr/>
           <p:nvPr/>
         </p:nvSpPr>
         <p:spPr>
           <a:xfrm>
-            <a:off x="777240" y="2103120"/>
-            <a:ext cx="54864" cy="914400"/>
+            <a:off x="4065422" y="1956816"/>
+            <a:ext cx="18288" cy="822960"/>
           </a:xfrm>
           <a:prstGeom prst="rect">
             <a:avLst/>
           </a:prstGeom>
           <a:solidFill>
-            <a:srgbClr val="3B6B4A"/>
+            <a:srgbClr val="EDE7DB"/>
           </a:solidFill>
           <a:ln w="12700">
             <a:solidFill>
@@ -2323,47 +2590,8 @@
         </p:nvSpPr>
         <p:spPr>
           <a:xfrm>
-            <a:off x="1143000" y="2176272"/>
-            <a:ext cx="2757830" cy="768096"/>
-          </a:xfrm>
-          <a:prstGeom prst="rect">
-            <a:avLst/>
-          </a:prstGeom>
-          <a:noFill/>
-          <a:ln/>
-        </p:spPr>
-        <p:txBody>
-          <a:bodyPr wrap="square" lIns="0" tIns="0" rIns="0" bIns="0" rtlCol="0" anchor="ctr"/>
-          <a:lstStyle/>
-          <a:p>
-            <a:pPr indent="0" marL="0">
-              <a:buNone/>
-            </a:pPr>
-            <a:r>
-              <a:rPr lang="en-US" sz="1400" b="1" dirty="0">
-                <a:solidFill>
-                  <a:srgbClr val="3B6B4A"/>
-                </a:solidFill>
-                <a:latin typeface="Yu Gothic" pitchFamily="34" charset="0"/>
-                <a:ea typeface="Yu Gothic" pitchFamily="34" charset="-122"/>
-                <a:cs typeface="Yu Gothic" pitchFamily="34" charset="-120"/>
-              </a:rPr>
-              <a:t>誰に渡すか</a:t>
-            </a:r>
-            <a:endParaRPr lang="en-US" sz="1400" dirty="0"/>
-          </a:p>
-        </p:txBody>
-      </p:sp>
-      <p:sp>
-        <p:nvSpPr>
-          <p:cNvPr id="8" name="Text 6"/>
-          <p:cNvSpPr txBox="1"/>
-          <p:nvPr/>
-        </p:nvSpPr>
-        <p:spPr>
-          <a:xfrm>
-            <a:off x="4006901" y="2176272"/>
-            <a:ext cx="7011619" cy="768096"/>
+            <a:off x="4383634" y="1920240"/>
+            <a:ext cx="6682435" cy="896112"/>
           </a:xfrm>
           <a:prstGeom prst="rect">
             <a:avLst/>
@@ -2384,13 +2612,13 @@
             <a:r>
               <a:rPr lang="en-US" sz="1250" dirty="0">
                 <a:solidFill>
-                  <a:srgbClr val="3F3933"/>
-                </a:solidFill>
-                <a:latin typeface="Yu Gothic" pitchFamily="34" charset="0"/>
-                <a:ea typeface="Yu Gothic" pitchFamily="34" charset="-122"/>
-                <a:cs typeface="Yu Gothic" pitchFamily="34" charset="-120"/>
-              </a:rPr>
-              <a:t>実名で決めます。前向きな方1名から</a:t>
+                  <a:srgbClr val="5A534A"/>
+                </a:solidFill>
+                <a:latin typeface="Yu Gothic" pitchFamily="34" charset="0"/>
+                <a:ea typeface="Yu Gothic" pitchFamily="34" charset="-122"/>
+                <a:cs typeface="Yu Gothic" pitchFamily="34" charset="-120"/>
+              </a:rPr>
+              <a:t>任せてよい度の3分類。非定型を丸ごと任せると事故ります</a:t>
             </a:r>
             <a:endParaRPr lang="en-US" sz="1250" dirty="0"/>
           </a:p>
@@ -2398,14 +2626,14 @@
       </p:sp>
       <p:sp>
         <p:nvSpPr>
-          <p:cNvPr id="9" name="Shape 7"/>
+          <p:cNvPr id="8" name="Shape 6"/>
           <p:cNvSpPr/>
           <p:nvPr/>
         </p:nvSpPr>
         <p:spPr>
           <a:xfrm>
-            <a:off x="777240" y="3154680"/>
-            <a:ext cx="10607040" cy="914400"/>
+            <a:off x="777240" y="3063240"/>
+            <a:ext cx="10607040" cy="1078992"/>
           </a:xfrm>
           <a:prstGeom prst="rect">
             <a:avLst/>
@@ -2423,20 +2651,59 @@
       </p:sp>
       <p:sp>
         <p:nvSpPr>
+          <p:cNvPr id="9" name="Text 7"/>
+          <p:cNvSpPr txBox="1"/>
+          <p:nvPr/>
+        </p:nvSpPr>
+        <p:spPr>
+          <a:xfrm>
+            <a:off x="1097280" y="3154680"/>
+            <a:ext cx="2969971" cy="896112"/>
+          </a:xfrm>
+          <a:prstGeom prst="rect">
+            <a:avLst/>
+          </a:prstGeom>
+          <a:noFill/>
+          <a:ln/>
+        </p:spPr>
+        <p:txBody>
+          <a:bodyPr wrap="square" lIns="0" tIns="0" rIns="0" bIns="0" rtlCol="0" anchor="ctr"/>
+          <a:lstStyle/>
+          <a:p>
+            <a:pPr indent="0" marL="0">
+              <a:buNone/>
+            </a:pPr>
+            <a:r>
+              <a:rPr lang="en-US" sz="1500" b="1" dirty="0">
+                <a:solidFill>
+                  <a:srgbClr val="23201D"/>
+                </a:solidFill>
+                <a:latin typeface="Yu Gothic" pitchFamily="34" charset="0"/>
+                <a:ea typeface="Yu Gothic" pitchFamily="34" charset="-122"/>
+                <a:cs typeface="Yu Gothic" pitchFamily="34" charset="-120"/>
+              </a:rPr>
+              <a:t>テンプレート化</a:t>
+            </a:r>
+            <a:endParaRPr lang="en-US" sz="1500" dirty="0"/>
+          </a:p>
+        </p:txBody>
+      </p:sp>
+      <p:sp>
+        <p:nvSpPr>
           <p:cNvPr id="10" name="Shape 8"/>
           <p:cNvSpPr/>
           <p:nvPr/>
         </p:nvSpPr>
         <p:spPr>
           <a:xfrm>
-            <a:off x="777240" y="3154680"/>
-            <a:ext cx="54864" cy="914400"/>
+            <a:off x="4065422" y="3191256"/>
+            <a:ext cx="18288" cy="822960"/>
           </a:xfrm>
           <a:prstGeom prst="rect">
             <a:avLst/>
           </a:prstGeom>
           <a:solidFill>
-            <a:srgbClr val="3B6B4A"/>
+            <a:srgbClr val="EDE7DB"/>
           </a:solidFill>
           <a:ln w="12700">
             <a:solidFill>
@@ -2454,47 +2721,8 @@
         </p:nvSpPr>
         <p:spPr>
           <a:xfrm>
-            <a:off x="1143000" y="3227832"/>
-            <a:ext cx="2757830" cy="768096"/>
-          </a:xfrm>
-          <a:prstGeom prst="rect">
-            <a:avLst/>
-          </a:prstGeom>
-          <a:noFill/>
-          <a:ln/>
-        </p:spPr>
-        <p:txBody>
-          <a:bodyPr wrap="square" lIns="0" tIns="0" rIns="0" bIns="0" rtlCol="0" anchor="ctr"/>
-          <a:lstStyle/>
-          <a:p>
-            <a:pPr indent="0" marL="0">
-              <a:buNone/>
-            </a:pPr>
-            <a:r>
-              <a:rPr lang="en-US" sz="1400" b="1" dirty="0">
-                <a:solidFill>
-                  <a:srgbClr val="3B6B4A"/>
-                </a:solidFill>
-                <a:latin typeface="Yu Gothic" pitchFamily="34" charset="0"/>
-                <a:ea typeface="Yu Gothic" pitchFamily="34" charset="-122"/>
-                <a:cs typeface="Yu Gothic" pitchFamily="34" charset="-120"/>
-              </a:rPr>
-              <a:t>いつ渡すか</a:t>
-            </a:r>
-            <a:endParaRPr lang="en-US" sz="1400" dirty="0"/>
-          </a:p>
-        </p:txBody>
-      </p:sp>
-      <p:sp>
-        <p:nvSpPr>
-          <p:cNvPr id="12" name="Text 10"/>
-          <p:cNvSpPr txBox="1"/>
-          <p:nvPr/>
-        </p:nvSpPr>
-        <p:spPr>
-          <a:xfrm>
-            <a:off x="4006901" y="3227832"/>
-            <a:ext cx="7011619" cy="768096"/>
+            <a:off x="4383634" y="3154680"/>
+            <a:ext cx="6682435" cy="896112"/>
           </a:xfrm>
           <a:prstGeom prst="rect">
             <a:avLst/>
@@ -2515,13 +2743,13 @@
             <a:r>
               <a:rPr lang="en-US" sz="1250" dirty="0">
                 <a:solidFill>
-                  <a:srgbClr val="3F3933"/>
-                </a:solidFill>
-                <a:latin typeface="Yu Gothic" pitchFamily="34" charset="0"/>
-                <a:ea typeface="Yu Gothic" pitchFamily="34" charset="-122"/>
-                <a:cs typeface="Yu Gothic" pitchFamily="34" charset="-120"/>
-              </a:rPr>
-              <a:t>来週中。渡すときの一言も、その場で決めます</a:t>
+                  <a:srgbClr val="5A534A"/>
+                </a:solidFill>
+                <a:latin typeface="Yu Gothic" pitchFamily="34" charset="0"/>
+                <a:ea typeface="Yu Gothic" pitchFamily="34" charset="-122"/>
+                <a:cs typeface="Yu Gothic" pitchFamily="34" charset="-120"/>
+              </a:rPr>
+              <a:t>他人が使える形にすること。指示文の出来より、渡し方の設計が定着を決めます</a:t>
             </a:r>
             <a:endParaRPr lang="en-US" sz="1250" dirty="0"/>
           </a:p>
@@ -2529,14 +2757,14 @@
       </p:sp>
       <p:sp>
         <p:nvSpPr>
-          <p:cNvPr id="13" name="Shape 11"/>
+          <p:cNvPr id="12" name="Shape 10"/>
           <p:cNvSpPr/>
           <p:nvPr/>
         </p:nvSpPr>
         <p:spPr>
           <a:xfrm>
-            <a:off x="777240" y="4206240"/>
-            <a:ext cx="10607040" cy="914400"/>
+            <a:off x="777240" y="4297680"/>
+            <a:ext cx="10607040" cy="1078992"/>
           </a:xfrm>
           <a:prstGeom prst="rect">
             <a:avLst/>
@@ -2554,20 +2782,59 @@
       </p:sp>
       <p:sp>
         <p:nvSpPr>
+          <p:cNvPr id="13" name="Text 11"/>
+          <p:cNvSpPr txBox="1"/>
+          <p:nvPr/>
+        </p:nvSpPr>
+        <p:spPr>
+          <a:xfrm>
+            <a:off x="1097280" y="4389120"/>
+            <a:ext cx="2969971" cy="896112"/>
+          </a:xfrm>
+          <a:prstGeom prst="rect">
+            <a:avLst/>
+          </a:prstGeom>
+          <a:noFill/>
+          <a:ln/>
+        </p:spPr>
+        <p:txBody>
+          <a:bodyPr wrap="square" lIns="0" tIns="0" rIns="0" bIns="0" rtlCol="0" anchor="ctr"/>
+          <a:lstStyle/>
+          <a:p>
+            <a:pPr indent="0" marL="0">
+              <a:buNone/>
+            </a:pPr>
+            <a:r>
+              <a:rPr lang="en-US" sz="1500" b="1" dirty="0">
+                <a:solidFill>
+                  <a:srgbClr val="23201D"/>
+                </a:solidFill>
+                <a:latin typeface="Yu Gothic" pitchFamily="34" charset="0"/>
+                <a:ea typeface="Yu Gothic" pitchFamily="34" charset="-122"/>
+                <a:cs typeface="Yu Gothic" pitchFamily="34" charset="-120"/>
+              </a:rPr>
+              <a:t>文体の見本</a:t>
+            </a:r>
+            <a:endParaRPr lang="en-US" sz="1500" dirty="0"/>
+          </a:p>
+        </p:txBody>
+      </p:sp>
+      <p:sp>
+        <p:nvSpPr>
           <p:cNvPr id="14" name="Shape 12"/>
           <p:cNvSpPr/>
           <p:nvPr/>
         </p:nvSpPr>
         <p:spPr>
           <a:xfrm>
-            <a:off x="777240" y="4206240"/>
-            <a:ext cx="54864" cy="914400"/>
+            <a:off x="4065422" y="4425696"/>
+            <a:ext cx="18288" cy="822960"/>
           </a:xfrm>
           <a:prstGeom prst="rect">
             <a:avLst/>
           </a:prstGeom>
           <a:solidFill>
-            <a:srgbClr val="3B6B4A"/>
+            <a:srgbClr val="EDE7DB"/>
           </a:solidFill>
           <a:ln w="12700">
             <a:solidFill>
@@ -2585,47 +2852,8 @@
         </p:nvSpPr>
         <p:spPr>
           <a:xfrm>
-            <a:off x="1143000" y="4279392"/>
-            <a:ext cx="2757830" cy="768096"/>
-          </a:xfrm>
-          <a:prstGeom prst="rect">
-            <a:avLst/>
-          </a:prstGeom>
-          <a:noFill/>
-          <a:ln/>
-        </p:spPr>
-        <p:txBody>
-          <a:bodyPr wrap="square" lIns="0" tIns="0" rIns="0" bIns="0" rtlCol="0" anchor="ctr"/>
-          <a:lstStyle/>
-          <a:p>
-            <a:pPr indent="0" marL="0">
-              <a:buNone/>
-            </a:pPr>
-            <a:r>
-              <a:rPr lang="en-US" sz="1400" b="1" dirty="0">
-                <a:solidFill>
-                  <a:srgbClr val="3B6B4A"/>
-                </a:solidFill>
-                <a:latin typeface="Yu Gothic" pitchFamily="34" charset="0"/>
-                <a:ea typeface="Yu Gothic" pitchFamily="34" charset="-122"/>
-                <a:cs typeface="Yu Gothic" pitchFamily="34" charset="-120"/>
-              </a:rPr>
-              <a:t>どう聞き返すか</a:t>
-            </a:r>
-            <a:endParaRPr lang="en-US" sz="1400" dirty="0"/>
-          </a:p>
-        </p:txBody>
-      </p:sp>
-      <p:sp>
-        <p:nvSpPr>
-          <p:cNvPr id="16" name="Text 14"/>
-          <p:cNvSpPr txBox="1"/>
-          <p:nvPr/>
-        </p:nvSpPr>
-        <p:spPr>
-          <a:xfrm>
-            <a:off x="4006901" y="4279392"/>
-            <a:ext cx="7011619" cy="768096"/>
+            <a:off x="4383634" y="4389120"/>
+            <a:ext cx="6682435" cy="896112"/>
           </a:xfrm>
           <a:prstGeom prst="rect">
             <a:avLst/>
@@ -2646,15 +2874,54 @@
             <a:r>
               <a:rPr lang="en-US" sz="1250" dirty="0">
                 <a:solidFill>
-                  <a:srgbClr val="3F3933"/>
-                </a:solidFill>
-                <a:latin typeface="Yu Gothic" pitchFamily="34" charset="0"/>
-                <a:ea typeface="Yu Gothic" pitchFamily="34" charset="-122"/>
-                <a:cs typeface="Yu Gothic" pitchFamily="34" charset="-120"/>
-              </a:rPr>
-              <a:t>「使ってみてどうだった」を1週間後に聞く。感想を第4回に持ってきていただきます</a:t>
+                  <a:srgbClr val="5A534A"/>
+                </a:solidFill>
+                <a:latin typeface="Yu Gothic" pitchFamily="34" charset="0"/>
+                <a:ea typeface="Yu Gothic" pitchFamily="34" charset="-122"/>
+                <a:cs typeface="Yu Gothic" pitchFamily="34" charset="-120"/>
+              </a:rPr>
+              <a:t>過去の自社文書3本。説明するより、見せるほうが速く伝わります</a:t>
             </a:r>
             <a:endParaRPr lang="en-US" sz="1250" dirty="0"/>
+          </a:p>
+        </p:txBody>
+      </p:sp>
+      <p:sp>
+        <p:nvSpPr>
+          <p:cNvPr id="16" name="Text 14"/>
+          <p:cNvSpPr txBox="1"/>
+          <p:nvPr/>
+        </p:nvSpPr>
+        <p:spPr>
+          <a:xfrm>
+            <a:off x="777240" y="5623560"/>
+            <a:ext cx="10607040" cy="411480"/>
+          </a:xfrm>
+          <a:prstGeom prst="rect">
+            <a:avLst/>
+          </a:prstGeom>
+          <a:noFill/>
+          <a:ln/>
+        </p:spPr>
+        <p:txBody>
+          <a:bodyPr wrap="square" lIns="0" tIns="0" rIns="0" bIns="0" rtlCol="0" anchor="ctr"/>
+          <a:lstStyle/>
+          <a:p>
+            <a:pPr indent="0" marL="0">
+              <a:buNone/>
+            </a:pPr>
+            <a:r>
+              <a:rPr lang="en-US" sz="1150" dirty="0">
+                <a:solidFill>
+                  <a:srgbClr val="8A8177"/>
+                </a:solidFill>
+                <a:latin typeface="Yu Gothic" pitchFamily="34" charset="0"/>
+                <a:ea typeface="Yu Gothic" pitchFamily="34" charset="-122"/>
+                <a:cs typeface="Yu Gothic" pitchFamily="34" charset="-120"/>
+              </a:rPr>
+              <a:t>配布した用語辞典にも同じものが載っています。覚える必要はありません。</a:t>
+            </a:r>
+            <a:endParaRPr lang="en-US" sz="1150" dirty="0"/>
           </a:p>
         </p:txBody>
       </p:sp>
@@ -2730,7 +2997,7 @@
                 <a:ea typeface="Yu Gothic" pitchFamily="34" charset="-122"/>
                 <a:cs typeface="Yu Gothic" pitchFamily="34" charset="-120"/>
               </a:rPr>
-              <a:t>組み込み</a:t>
+              <a:t>用語</a:t>
             </a:r>
             <a:endParaRPr lang="en-US" sz="900" dirty="0"/>
           </a:p>
@@ -2795,13 +3062,13 @@
             <a:r>
               <a:rPr lang="en-US" sz="1100" b="1" spc="250" kern="0" dirty="0">
                 <a:solidFill>
-                  <a:srgbClr val="B04A2F"/>
-                </a:solidFill>
-                <a:latin typeface="Yu Gothic" pitchFamily="34" charset="0"/>
-                <a:ea typeface="Yu Gothic" pitchFamily="34" charset="-122"/>
-                <a:cs typeface="Yu Gothic" pitchFamily="34" charset="-120"/>
-              </a:rPr>
-              <a:t>ここだけは</a:t>
+                  <a:srgbClr val="2F4F6B"/>
+                </a:solidFill>
+                <a:latin typeface="Yu Gothic" pitchFamily="34" charset="0"/>
+                <a:ea typeface="Yu Gothic" pitchFamily="34" charset="-122"/>
+                <a:cs typeface="Yu Gothic" pitchFamily="34" charset="-120"/>
+              </a:rPr>
+              <a:t>演習</a:t>
             </a:r>
             <a:endParaRPr lang="en-US" sz="1100" dirty="0"/>
           </a:p>
@@ -2815,7 +3082,7 @@
         </p:nvSpPr>
         <p:spPr>
           <a:xfrm>
-            <a:off x="777240" y="1097280"/>
+            <a:off x="777240" y="896112"/>
             <a:ext cx="10607040" cy="640080"/>
           </a:xfrm>
           <a:prstGeom prst="rect">
@@ -2840,7 +3107,7 @@
                 <a:ea typeface="Yu Gothic" pitchFamily="34" charset="-122"/>
                 <a:cs typeface="Yu Gothic" pitchFamily="34" charset="-120"/>
               </a:rPr>
-              <a:t>この回から、機密資料が出てきます</a:t>
+              <a:t>今日、一緒にやること</a:t>
             </a:r>
             <a:endParaRPr lang="en-US" sz="2600" dirty="0"/>
           </a:p>
@@ -2848,20 +3115,84 @@
       </p:sp>
       <p:sp>
         <p:nvSpPr>
-          <p:cNvPr id="4" name="Shape 2"/>
+          <p:cNvPr id="4" name="Text 2"/>
+          <p:cNvSpPr txBox="1"/>
+          <p:nvPr/>
+        </p:nvSpPr>
+        <p:spPr>
+          <a:xfrm>
+            <a:off x="777240" y="1572768"/>
+            <a:ext cx="10607040" cy="320040"/>
+          </a:xfrm>
+          <a:prstGeom prst="rect">
+            <a:avLst/>
+          </a:prstGeom>
+          <a:noFill/>
+          <a:ln/>
+        </p:spPr>
+        <p:txBody>
+          <a:bodyPr wrap="square" lIns="0" tIns="0" rIns="0" bIns="0" rtlCol="0" anchor="ctr"/>
+          <a:lstStyle/>
+          <a:p>
+            <a:pPr indent="0" marL="0">
+              <a:buNone/>
+            </a:pPr>
+            <a:r>
+              <a:rPr lang="en-US" sz="1250" b="1" dirty="0">
+                <a:solidFill>
+                  <a:srgbClr val="2F4F6B"/>
+                </a:solidFill>
+                <a:latin typeface="Yu Gothic" pitchFamily="34" charset="0"/>
+                <a:ea typeface="Yu Gothic" pitchFamily="34" charset="-122"/>
+                <a:cs typeface="Yu Gothic" pitchFamily="34" charset="-120"/>
+              </a:rPr>
+              <a:t>55分。操作するのはご自身です。</a:t>
+            </a:r>
+            <a:endParaRPr lang="en-US" sz="1250" dirty="0"/>
+          </a:p>
+        </p:txBody>
+      </p:sp>
+      <p:sp>
+        <p:nvSpPr>
+          <p:cNvPr id="5" name="Shape 3"/>
           <p:cNvSpPr/>
           <p:nvPr/>
         </p:nvSpPr>
         <p:spPr>
           <a:xfrm>
             <a:off x="777240" y="2148840"/>
-            <a:ext cx="64008" cy="2194560"/>
+            <a:ext cx="3383280" cy="2880360"/>
           </a:xfrm>
           <a:prstGeom prst="rect">
             <a:avLst/>
           </a:prstGeom>
           <a:solidFill>
-            <a:srgbClr val="B04A2F"/>
+            <a:srgbClr val="FFFFFF"/>
+          </a:solidFill>
+          <a:ln w="12700">
+            <a:solidFill>
+              <a:srgbClr val="EDE7DB"/>
+            </a:solidFill>
+            <a:prstDash val="solid"/>
+          </a:ln>
+        </p:spPr>
+      </p:sp>
+      <p:sp>
+        <p:nvSpPr>
+          <p:cNvPr id="6" name="Shape 4"/>
+          <p:cNvSpPr/>
+          <p:nvPr/>
+        </p:nvSpPr>
+        <p:spPr>
+          <a:xfrm>
+            <a:off x="1051560" y="2395728"/>
+            <a:ext cx="438912" cy="438912"/>
+          </a:xfrm>
+          <a:prstGeom prst="ellipse">
+            <a:avLst/>
+          </a:prstGeom>
+          <a:solidFill>
+            <a:srgbClr val="2F4F6B"/>
           </a:solidFill>
           <a:ln w="12700">
             <a:solidFill>
@@ -2873,14 +3204,53 @@
       </p:sp>
       <p:sp>
         <p:nvSpPr>
-          <p:cNvPr id="5" name="Text 3"/>
-          <p:cNvSpPr txBox="1"/>
-          <p:nvPr/>
-        </p:nvSpPr>
-        <p:spPr>
-          <a:xfrm>
-            <a:off x="1188720" y="2148840"/>
-            <a:ext cx="9966960" cy="2194560"/>
+          <p:cNvPr id="7" name="Text 5"/>
+          <p:cNvSpPr txBox="1"/>
+          <p:nvPr/>
+        </p:nvSpPr>
+        <p:spPr>
+          <a:xfrm>
+            <a:off x="1051560" y="2395728"/>
+            <a:ext cx="438912" cy="438912"/>
+          </a:xfrm>
+          <a:prstGeom prst="rect">
+            <a:avLst/>
+          </a:prstGeom>
+          <a:noFill/>
+          <a:ln/>
+        </p:spPr>
+        <p:txBody>
+          <a:bodyPr wrap="square" lIns="0" tIns="0" rIns="0" bIns="0" rtlCol="0" anchor="ctr"/>
+          <a:lstStyle/>
+          <a:p>
+            <a:pPr algn="ctr" indent="0" marL="0">
+              <a:buNone/>
+            </a:pPr>
+            <a:r>
+              <a:rPr lang="en-US" sz="1300" b="1" dirty="0">
+                <a:solidFill>
+                  <a:srgbClr val="FFFFFF"/>
+                </a:solidFill>
+                <a:latin typeface="Yu Gothic" pitchFamily="34" charset="0"/>
+                <a:ea typeface="Yu Gothic" pitchFamily="34" charset="-122"/>
+                <a:cs typeface="Yu Gothic" pitchFamily="34" charset="-120"/>
+              </a:rPr>
+              <a:t>1</a:t>
+            </a:r>
+            <a:endParaRPr lang="en-US" sz="1300" dirty="0"/>
+          </a:p>
+        </p:txBody>
+      </p:sp>
+      <p:sp>
+        <p:nvSpPr>
+          <p:cNvPr id="8" name="Text 6"/>
+          <p:cNvSpPr txBox="1"/>
+          <p:nvPr/>
+        </p:nvSpPr>
+        <p:spPr>
+          <a:xfrm>
+            <a:off x="1051560" y="2944368"/>
+            <a:ext cx="2834640" cy="731520"/>
           </a:xfrm>
           <a:prstGeom prst="rect">
             <a:avLst/>
@@ -2894,41 +3264,108 @@
           <a:p>
             <a:pPr indent="0" marL="0">
               <a:lnSpc>
-                <a:spcPct val="160000"/>
+                <a:spcPct val="125000"/>
               </a:lnSpc>
               <a:buNone/>
             </a:pPr>
             <a:r>
-              <a:rPr lang="en-US" sz="1650" dirty="0">
-                <a:solidFill>
-                  <a:srgbClr val="3F3933"/>
-                </a:solidFill>
-                <a:latin typeface="Yu Gothic" pitchFamily="34" charset="0"/>
-                <a:ea typeface="Yu Gothic" pitchFamily="34" charset="-122"/>
-                <a:cs typeface="Yu Gothic" pitchFamily="34" charset="-120"/>
-              </a:rPr>
-              <a:t>録画にどこまで映してよいか、事前に確認してください。「この区間は録画を止めます」という運用にしておくと、受講者は安心して実物を出せます。実物が出るかどうかで、この講座の価値は倍変わります。</a:t>
-            </a:r>
-            <a:endParaRPr lang="en-US" sz="1650" dirty="0"/>
-          </a:p>
-        </p:txBody>
-      </p:sp>
-      <p:sp>
-        <p:nvSpPr>
-          <p:cNvPr id="6" name="Shape 4"/>
+              <a:rPr lang="en-US" sz="1450" b="1" dirty="0">
+                <a:solidFill>
+                  <a:srgbClr val="23201D"/>
+                </a:solidFill>
+                <a:latin typeface="Yu Gothic" pitchFamily="34" charset="0"/>
+                <a:ea typeface="Yu Gothic" pitchFamily="34" charset="-122"/>
+                <a:cs typeface="Yu Gothic" pitchFamily="34" charset="-120"/>
+              </a:rPr>
+              <a:t>実物を3種、テンプレート化する</a:t>
+            </a:r>
+            <a:endParaRPr lang="en-US" sz="1450" dirty="0"/>
+          </a:p>
+        </p:txBody>
+      </p:sp>
+      <p:sp>
+        <p:nvSpPr>
+          <p:cNvPr id="9" name="Text 7"/>
+          <p:cNvSpPr txBox="1"/>
+          <p:nvPr/>
+        </p:nvSpPr>
+        <p:spPr>
+          <a:xfrm>
+            <a:off x="1051560" y="3703320"/>
+            <a:ext cx="2834640" cy="1188720"/>
+          </a:xfrm>
+          <a:prstGeom prst="rect">
+            <a:avLst/>
+          </a:prstGeom>
+          <a:noFill/>
+          <a:ln/>
+        </p:spPr>
+        <p:txBody>
+          <a:bodyPr wrap="square" lIns="0" tIns="0" rIns="0" bIns="0" rtlCol="0" anchor="ctr"/>
+          <a:lstStyle/>
+          <a:p>
+            <a:pPr indent="0" marL="0">
+              <a:lnSpc>
+                <a:spcPct val="130000"/>
+              </a:lnSpc>
+              <a:buNone/>
+            </a:pPr>
+            <a:r>
+              <a:rPr lang="en-US" sz="1150" dirty="0">
+                <a:solidFill>
+                  <a:srgbClr val="5A534A"/>
+                </a:solidFill>
+                <a:latin typeface="Yu Gothic" pitchFamily="34" charset="0"/>
+                <a:ea typeface="Yu Gothic" pitchFamily="34" charset="-122"/>
+                <a:cs typeface="Yu Gothic" pitchFamily="34" charset="-120"/>
+              </a:rPr>
+              <a:t>お持ちいただいた文書をそのまま使います</a:t>
+            </a:r>
+            <a:endParaRPr lang="en-US" sz="1150" dirty="0"/>
+          </a:p>
+        </p:txBody>
+      </p:sp>
+      <p:sp>
+        <p:nvSpPr>
+          <p:cNvPr id="10" name="Shape 8"/>
           <p:cNvSpPr/>
           <p:nvPr/>
         </p:nvSpPr>
         <p:spPr>
           <a:xfrm>
-            <a:off x="777240" y="4709160"/>
-            <a:ext cx="10607040" cy="960120"/>
+            <a:off x="4389120" y="2148840"/>
+            <a:ext cx="3383280" cy="2880360"/>
           </a:xfrm>
           <a:prstGeom prst="rect">
             <a:avLst/>
           </a:prstGeom>
           <a:solidFill>
-            <a:srgbClr val="EDE7DB"/>
+            <a:srgbClr val="FFFFFF"/>
+          </a:solidFill>
+          <a:ln w="12700">
+            <a:solidFill>
+              <a:srgbClr val="EDE7DB"/>
+            </a:solidFill>
+            <a:prstDash val="solid"/>
+          </a:ln>
+        </p:spPr>
+      </p:sp>
+      <p:sp>
+        <p:nvSpPr>
+          <p:cNvPr id="11" name="Shape 9"/>
+          <p:cNvSpPr/>
+          <p:nvPr/>
+        </p:nvSpPr>
+        <p:spPr>
+          <a:xfrm>
+            <a:off x="4663440" y="2395728"/>
+            <a:ext cx="438912" cy="438912"/>
+          </a:xfrm>
+          <a:prstGeom prst="ellipse">
+            <a:avLst/>
+          </a:prstGeom>
+          <a:solidFill>
+            <a:srgbClr val="2F4F6B"/>
           </a:solidFill>
           <a:ln w="12700">
             <a:solidFill>
@@ -2940,53 +3377,95 @@
       </p:sp>
       <p:sp>
         <p:nvSpPr>
-          <p:cNvPr id="7" name="Text 5"/>
-          <p:cNvSpPr txBox="1"/>
-          <p:nvPr/>
-        </p:nvSpPr>
-        <p:spPr>
-          <a:xfrm>
-            <a:off x="1051560" y="4800600"/>
-            <a:ext cx="1463040" cy="256032"/>
-          </a:xfrm>
-          <a:prstGeom prst="rect">
-            <a:avLst/>
-          </a:prstGeom>
-          <a:noFill/>
-          <a:ln/>
-        </p:spPr>
-        <p:txBody>
-          <a:bodyPr wrap="square" lIns="0" tIns="0" rIns="0" bIns="0" rtlCol="0" anchor="ctr"/>
-          <a:lstStyle/>
-          <a:p>
-            <a:pPr indent="0" marL="0">
-              <a:buNone/>
-            </a:pPr>
-            <a:r>
-              <a:rPr lang="en-US" sz="900" b="1" spc="150" kern="0" dirty="0">
-                <a:solidFill>
-                  <a:srgbClr val="B04A2F"/>
-                </a:solidFill>
-                <a:latin typeface="Yu Gothic" pitchFamily="34" charset="0"/>
-                <a:ea typeface="Yu Gothic" pitchFamily="34" charset="-122"/>
-                <a:cs typeface="Yu Gothic" pitchFamily="34" charset="-120"/>
-              </a:rPr>
-              <a:t>他社では</a:t>
-            </a:r>
-            <a:endParaRPr lang="en-US" sz="900" dirty="0"/>
-          </a:p>
-        </p:txBody>
-      </p:sp>
-      <p:sp>
-        <p:nvSpPr>
-          <p:cNvPr id="8" name="Text 6"/>
-          <p:cNvSpPr txBox="1"/>
-          <p:nvPr/>
-        </p:nvSpPr>
-        <p:spPr>
-          <a:xfrm>
-            <a:off x="1051560" y="5029200"/>
-            <a:ext cx="10058400" cy="566928"/>
+          <p:cNvPr id="12" name="Text 10"/>
+          <p:cNvSpPr txBox="1"/>
+          <p:nvPr/>
+        </p:nvSpPr>
+        <p:spPr>
+          <a:xfrm>
+            <a:off x="4663440" y="2395728"/>
+            <a:ext cx="438912" cy="438912"/>
+          </a:xfrm>
+          <a:prstGeom prst="rect">
+            <a:avLst/>
+          </a:prstGeom>
+          <a:noFill/>
+          <a:ln/>
+        </p:spPr>
+        <p:txBody>
+          <a:bodyPr wrap="square" lIns="0" tIns="0" rIns="0" bIns="0" rtlCol="0" anchor="ctr"/>
+          <a:lstStyle/>
+          <a:p>
+            <a:pPr algn="ctr" indent="0" marL="0">
+              <a:buNone/>
+            </a:pPr>
+            <a:r>
+              <a:rPr lang="en-US" sz="1300" b="1" dirty="0">
+                <a:solidFill>
+                  <a:srgbClr val="FFFFFF"/>
+                </a:solidFill>
+                <a:latin typeface="Yu Gothic" pitchFamily="34" charset="0"/>
+                <a:ea typeface="Yu Gothic" pitchFamily="34" charset="-122"/>
+                <a:cs typeface="Yu Gothic" pitchFamily="34" charset="-120"/>
+              </a:rPr>
+              <a:t>2</a:t>
+            </a:r>
+            <a:endParaRPr lang="en-US" sz="1300" dirty="0"/>
+          </a:p>
+        </p:txBody>
+      </p:sp>
+      <p:sp>
+        <p:nvSpPr>
+          <p:cNvPr id="13" name="Text 11"/>
+          <p:cNvSpPr txBox="1"/>
+          <p:nvPr/>
+        </p:nvSpPr>
+        <p:spPr>
+          <a:xfrm>
+            <a:off x="4663440" y="2944368"/>
+            <a:ext cx="2834640" cy="731520"/>
+          </a:xfrm>
+          <a:prstGeom prst="rect">
+            <a:avLst/>
+          </a:prstGeom>
+          <a:noFill/>
+          <a:ln/>
+        </p:spPr>
+        <p:txBody>
+          <a:bodyPr wrap="square" lIns="0" tIns="0" rIns="0" bIns="0" rtlCol="0" anchor="ctr"/>
+          <a:lstStyle/>
+          <a:p>
+            <a:pPr indent="0" marL="0">
+              <a:lnSpc>
+                <a:spcPct val="125000"/>
+              </a:lnSpc>
+              <a:buNone/>
+            </a:pPr>
+            <a:r>
+              <a:rPr lang="en-US" sz="1450" b="1" dirty="0">
+                <a:solidFill>
+                  <a:srgbClr val="23201D"/>
+                </a:solidFill>
+                <a:latin typeface="Yu Gothic" pitchFamily="34" charset="0"/>
+                <a:ea typeface="Yu Gothic" pitchFamily="34" charset="-122"/>
+                <a:cs typeface="Yu Gothic" pitchFamily="34" charset="-120"/>
+              </a:rPr>
+              <a:t>1つは、社員に渡す前提で作る</a:t>
+            </a:r>
+            <a:endParaRPr lang="en-US" sz="1450" dirty="0"/>
+          </a:p>
+        </p:txBody>
+      </p:sp>
+      <p:sp>
+        <p:nvSpPr>
+          <p:cNvPr id="14" name="Text 12"/>
+          <p:cNvSpPr txBox="1"/>
+          <p:nvPr/>
+        </p:nvSpPr>
+        <p:spPr>
+          <a:xfrm>
+            <a:off x="4663440" y="3703320"/>
+            <a:ext cx="2834640" cy="1188720"/>
           </a:xfrm>
           <a:prstGeom prst="rect">
             <a:avLst/>
@@ -3005,23 +3484,196 @@
               <a:buNone/>
             </a:pPr>
             <a:r>
-              <a:rPr lang="en-US" sz="1250" dirty="0">
-                <a:solidFill>
-                  <a:srgbClr val="3F3933"/>
-                </a:solidFill>
-                <a:latin typeface="Yu Gothic" pitchFamily="34" charset="0"/>
-                <a:ea typeface="Yu Gothic" pitchFamily="34" charset="-122"/>
-                <a:cs typeface="Yu Gothic" pitchFamily="34" charset="-120"/>
-              </a:rPr>
-              <a:t>ある会社では、議事録を全文書き起こしからではなく、箇条書きメモ＋AIで整形する形に変えました。効果は会議後30分が5分に。ただ、それより大きかったのは「議事録が必ず当日中に出る」ようになったことでした。</a:t>
-            </a:r>
-            <a:endParaRPr lang="en-US" sz="1250" dirty="0"/>
-          </a:p>
-        </p:txBody>
-      </p:sp>
-      <p:sp>
-        <p:nvSpPr>
-          <p:cNvPr id="9" name="Text 7"/>
+              <a:rPr lang="en-US" sz="1150" dirty="0">
+                <a:solidFill>
+                  <a:srgbClr val="5A534A"/>
+                </a:solidFill>
+                <a:latin typeface="Yu Gothic" pitchFamily="34" charset="0"/>
+                <a:ea typeface="Yu Gothic" pitchFamily="34" charset="-122"/>
+                <a:cs typeface="Yu Gothic" pitchFamily="34" charset="-120"/>
+              </a:rPr>
+              <a:t>用途の1行・差し替え箇所・確認事項の5行を必ず入れます</a:t>
+            </a:r>
+            <a:endParaRPr lang="en-US" sz="1150" dirty="0"/>
+          </a:p>
+        </p:txBody>
+      </p:sp>
+      <p:sp>
+        <p:nvSpPr>
+          <p:cNvPr id="15" name="Shape 13"/>
+          <p:cNvSpPr/>
+          <p:nvPr/>
+        </p:nvSpPr>
+        <p:spPr>
+          <a:xfrm>
+            <a:off x="8001000" y="2148840"/>
+            <a:ext cx="3383280" cy="2880360"/>
+          </a:xfrm>
+          <a:prstGeom prst="rect">
+            <a:avLst/>
+          </a:prstGeom>
+          <a:solidFill>
+            <a:srgbClr val="FFFFFF"/>
+          </a:solidFill>
+          <a:ln w="12700">
+            <a:solidFill>
+              <a:srgbClr val="EDE7DB"/>
+            </a:solidFill>
+            <a:prstDash val="solid"/>
+          </a:ln>
+        </p:spPr>
+      </p:sp>
+      <p:sp>
+        <p:nvSpPr>
+          <p:cNvPr id="16" name="Shape 14"/>
+          <p:cNvSpPr/>
+          <p:nvPr/>
+        </p:nvSpPr>
+        <p:spPr>
+          <a:xfrm>
+            <a:off x="8275320" y="2395728"/>
+            <a:ext cx="438912" cy="438912"/>
+          </a:xfrm>
+          <a:prstGeom prst="ellipse">
+            <a:avLst/>
+          </a:prstGeom>
+          <a:solidFill>
+            <a:srgbClr val="2F4F6B"/>
+          </a:solidFill>
+          <a:ln w="12700">
+            <a:solidFill>
+              <a:srgbClr val="333333"/>
+            </a:solidFill>
+            <a:prstDash val="solid"/>
+          </a:ln>
+        </p:spPr>
+      </p:sp>
+      <p:sp>
+        <p:nvSpPr>
+          <p:cNvPr id="17" name="Text 15"/>
+          <p:cNvSpPr txBox="1"/>
+          <p:nvPr/>
+        </p:nvSpPr>
+        <p:spPr>
+          <a:xfrm>
+            <a:off x="8275320" y="2395728"/>
+            <a:ext cx="438912" cy="438912"/>
+          </a:xfrm>
+          <a:prstGeom prst="rect">
+            <a:avLst/>
+          </a:prstGeom>
+          <a:noFill/>
+          <a:ln/>
+        </p:spPr>
+        <p:txBody>
+          <a:bodyPr wrap="square" lIns="0" tIns="0" rIns="0" bIns="0" rtlCol="0" anchor="ctr"/>
+          <a:lstStyle/>
+          <a:p>
+            <a:pPr algn="ctr" indent="0" marL="0">
+              <a:buNone/>
+            </a:pPr>
+            <a:r>
+              <a:rPr lang="en-US" sz="1300" b="1" dirty="0">
+                <a:solidFill>
+                  <a:srgbClr val="FFFFFF"/>
+                </a:solidFill>
+                <a:latin typeface="Yu Gothic" pitchFamily="34" charset="0"/>
+                <a:ea typeface="Yu Gothic" pitchFamily="34" charset="-122"/>
+                <a:cs typeface="Yu Gothic" pitchFamily="34" charset="-120"/>
+              </a:rPr>
+              <a:t>3</a:t>
+            </a:r>
+            <a:endParaRPr lang="en-US" sz="1300" dirty="0"/>
+          </a:p>
+        </p:txBody>
+      </p:sp>
+      <p:sp>
+        <p:nvSpPr>
+          <p:cNvPr id="18" name="Text 16"/>
+          <p:cNvSpPr txBox="1"/>
+          <p:nvPr/>
+        </p:nvSpPr>
+        <p:spPr>
+          <a:xfrm>
+            <a:off x="8275320" y="2944368"/>
+            <a:ext cx="2834640" cy="731520"/>
+          </a:xfrm>
+          <a:prstGeom prst="rect">
+            <a:avLst/>
+          </a:prstGeom>
+          <a:noFill/>
+          <a:ln/>
+        </p:spPr>
+        <p:txBody>
+          <a:bodyPr wrap="square" lIns="0" tIns="0" rIns="0" bIns="0" rtlCol="0" anchor="ctr"/>
+          <a:lstStyle/>
+          <a:p>
+            <a:pPr indent="0" marL="0">
+              <a:lnSpc>
+                <a:spcPct val="125000"/>
+              </a:lnSpc>
+              <a:buNone/>
+            </a:pPr>
+            <a:r>
+              <a:rPr lang="en-US" sz="1450" b="1" dirty="0">
+                <a:solidFill>
+                  <a:srgbClr val="23201D"/>
+                </a:solidFill>
+                <a:latin typeface="Yu Gothic" pitchFamily="34" charset="0"/>
+                <a:ea typeface="Yu Gothic" pitchFamily="34" charset="-122"/>
+                <a:cs typeface="Yu Gothic" pitchFamily="34" charset="-120"/>
+              </a:rPr>
+              <a:t>渡し方の一言まで決める</a:t>
+            </a:r>
+            <a:endParaRPr lang="en-US" sz="1450" dirty="0"/>
+          </a:p>
+        </p:txBody>
+      </p:sp>
+      <p:sp>
+        <p:nvSpPr>
+          <p:cNvPr id="19" name="Text 17"/>
+          <p:cNvSpPr txBox="1"/>
+          <p:nvPr/>
+        </p:nvSpPr>
+        <p:spPr>
+          <a:xfrm>
+            <a:off x="8275320" y="3703320"/>
+            <a:ext cx="2834640" cy="1188720"/>
+          </a:xfrm>
+          <a:prstGeom prst="rect">
+            <a:avLst/>
+          </a:prstGeom>
+          <a:noFill/>
+          <a:ln/>
+        </p:spPr>
+        <p:txBody>
+          <a:bodyPr wrap="square" lIns="0" tIns="0" rIns="0" bIns="0" rtlCol="0" anchor="ctr"/>
+          <a:lstStyle/>
+          <a:p>
+            <a:pPr indent="0" marL="0">
+              <a:lnSpc>
+                <a:spcPct val="130000"/>
+              </a:lnSpc>
+              <a:buNone/>
+            </a:pPr>
+            <a:r>
+              <a:rPr lang="en-US" sz="1150" dirty="0">
+                <a:solidFill>
+                  <a:srgbClr val="5A534A"/>
+                </a:solidFill>
+                <a:latin typeface="Yu Gothic" pitchFamily="34" charset="0"/>
+                <a:ea typeface="Yu Gothic" pitchFamily="34" charset="-122"/>
+                <a:cs typeface="Yu Gothic" pitchFamily="34" charset="-120"/>
+              </a:rPr>
+              <a:t>誰に、どう説明して渡すか。ここまで決めないと使われません</a:t>
+            </a:r>
+            <a:endParaRPr lang="en-US" sz="1150" dirty="0"/>
+          </a:p>
+        </p:txBody>
+      </p:sp>
+      <p:sp>
+        <p:nvSpPr>
+          <p:cNvPr id="20" name="Text 18"/>
           <p:cNvSpPr txBox="1"/>
           <p:nvPr/>
         </p:nvSpPr>
@@ -3060,7 +3712,7 @@
       </p:sp>
       <p:sp>
         <p:nvSpPr>
-          <p:cNvPr id="10" name="Text 8"/>
+          <p:cNvPr id="21" name="Text 19"/>
           <p:cNvSpPr txBox="1"/>
           <p:nvPr/>
         </p:nvSpPr>
@@ -3091,7 +3743,7 @@
                 <a:ea typeface="Yu Gothic" pitchFamily="34" charset="-122"/>
                 <a:cs typeface="Yu Gothic" pitchFamily="34" charset="-120"/>
               </a:rPr>
-              <a:t>ここだけは</a:t>
+              <a:t>演習</a:t>
             </a:r>
             <a:endParaRPr lang="en-US" sz="900" dirty="0"/>
           </a:p>
@@ -3108,6 +3760,1532 @@
 <file path=ppt/slides/slide12.xml><?xml version="1.0" encoding="utf-8"?>
 <p:sld xmlns:a="http://schemas.openxmlformats.org/drawingml/2006/main" xmlns:r="http://schemas.openxmlformats.org/officeDocument/2006/relationships" xmlns:p="http://schemas.openxmlformats.org/presentationml/2006/main">
   <p:cSld name="Slide 12">
+    <p:bg>
+      <p:bgPr>
+        <a:solidFill>
+          <a:srgbClr val="F6F2EA"/>
+        </a:solidFill>
+      </p:bgPr>
+    </p:bg>
+    <p:spTree>
+      <p:nvGrpSpPr>
+        <p:cNvPr id="1" name=""/>
+        <p:cNvGrpSpPr/>
+        <p:nvPr/>
+      </p:nvGrpSpPr>
+      <p:grpSpPr>
+        <a:xfrm>
+          <a:off x="0" y="0"/>
+          <a:ext cx="0" cy="0"/>
+          <a:chOff x="0" y="0"/>
+          <a:chExt cx="0" cy="0"/>
+        </a:xfrm>
+      </p:grpSpPr>
+      <p:sp>
+        <p:nvSpPr>
+          <p:cNvPr id="2" name="Text 0"/>
+          <p:cNvSpPr txBox="1"/>
+          <p:nvPr/>
+        </p:nvSpPr>
+        <p:spPr>
+          <a:xfrm>
+            <a:off x="777240" y="566928"/>
+            <a:ext cx="10607040" cy="274320"/>
+          </a:xfrm>
+          <a:prstGeom prst="rect">
+            <a:avLst/>
+          </a:prstGeom>
+          <a:noFill/>
+          <a:ln/>
+        </p:spPr>
+        <p:txBody>
+          <a:bodyPr wrap="square" lIns="0" tIns="0" rIns="0" bIns="0" rtlCol="0" anchor="ctr"/>
+          <a:lstStyle/>
+          <a:p>
+            <a:pPr indent="0" marL="0">
+              <a:buNone/>
+            </a:pPr>
+            <a:r>
+              <a:rPr lang="en-US" sz="1100" b="1" spc="250" kern="0" dirty="0">
+                <a:solidFill>
+                  <a:srgbClr val="3B6B4A"/>
+                </a:solidFill>
+                <a:latin typeface="Yu Gothic" pitchFamily="34" charset="0"/>
+                <a:ea typeface="Yu Gothic" pitchFamily="34" charset="-122"/>
+                <a:cs typeface="Yu Gothic" pitchFamily="34" charset="-120"/>
+              </a:rPr>
+              <a:t>業務への組み込み</a:t>
+            </a:r>
+            <a:endParaRPr lang="en-US" sz="1100" dirty="0"/>
+          </a:p>
+        </p:txBody>
+      </p:sp>
+      <p:sp>
+        <p:nvSpPr>
+          <p:cNvPr id="3" name="Text 1"/>
+          <p:cNvSpPr txBox="1"/>
+          <p:nvPr/>
+        </p:nvSpPr>
+        <p:spPr>
+          <a:xfrm>
+            <a:off x="777240" y="896112"/>
+            <a:ext cx="10607040" cy="640080"/>
+          </a:xfrm>
+          <a:prstGeom prst="rect">
+            <a:avLst/>
+          </a:prstGeom>
+          <a:noFill/>
+          <a:ln/>
+        </p:spPr>
+        <p:txBody>
+          <a:bodyPr wrap="square" lIns="0" tIns="0" rIns="0" bIns="0" rtlCol="0" anchor="ctr"/>
+          <a:lstStyle/>
+          <a:p>
+            <a:pPr indent="0" marL="0">
+              <a:buNone/>
+            </a:pPr>
+            <a:r>
+              <a:rPr lang="en-US" sz="2600" b="1" dirty="0">
+                <a:solidFill>
+                  <a:srgbClr val="23201D"/>
+                </a:solidFill>
+                <a:latin typeface="Yu Gothic" pitchFamily="34" charset="0"/>
+                <a:ea typeface="Yu Gothic" pitchFamily="34" charset="-122"/>
+                <a:cs typeface="Yu Gothic" pitchFamily="34" charset="-120"/>
+              </a:rPr>
+              <a:t>帰る前に決めること</a:t>
+            </a:r>
+            <a:endParaRPr lang="en-US" sz="2600" dirty="0"/>
+          </a:p>
+        </p:txBody>
+      </p:sp>
+      <p:sp>
+        <p:nvSpPr>
+          <p:cNvPr id="4" name="Text 2"/>
+          <p:cNvSpPr txBox="1"/>
+          <p:nvPr/>
+        </p:nvSpPr>
+        <p:spPr>
+          <a:xfrm>
+            <a:off x="777240" y="1572768"/>
+            <a:ext cx="10607040" cy="320040"/>
+          </a:xfrm>
+          <a:prstGeom prst="rect">
+            <a:avLst/>
+          </a:prstGeom>
+          <a:noFill/>
+          <a:ln/>
+        </p:spPr>
+        <p:txBody>
+          <a:bodyPr wrap="square" lIns="0" tIns="0" rIns="0" bIns="0" rtlCol="0" anchor="ctr"/>
+          <a:lstStyle/>
+          <a:p>
+            <a:pPr indent="0" marL="0">
+              <a:buNone/>
+            </a:pPr>
+            <a:r>
+              <a:rPr lang="en-US" sz="1250" b="1" dirty="0">
+                <a:solidFill>
+                  <a:srgbClr val="3B6B4A"/>
+                </a:solidFill>
+                <a:latin typeface="Yu Gothic" pitchFamily="34" charset="0"/>
+                <a:ea typeface="Yu Gothic" pitchFamily="34" charset="-122"/>
+                <a:cs typeface="Yu Gothic" pitchFamily="34" charset="-120"/>
+              </a:rPr>
+              <a:t>ここを決めないと、持ち帰っても使われません。紙に書きます。</a:t>
+            </a:r>
+            <a:endParaRPr lang="en-US" sz="1250" dirty="0"/>
+          </a:p>
+        </p:txBody>
+      </p:sp>
+      <p:sp>
+        <p:nvSpPr>
+          <p:cNvPr id="5" name="Shape 3"/>
+          <p:cNvSpPr/>
+          <p:nvPr/>
+        </p:nvSpPr>
+        <p:spPr>
+          <a:xfrm>
+            <a:off x="777240" y="2103120"/>
+            <a:ext cx="10607040" cy="914400"/>
+          </a:xfrm>
+          <a:prstGeom prst="rect">
+            <a:avLst/>
+          </a:prstGeom>
+          <a:solidFill>
+            <a:srgbClr val="FFFFFF"/>
+          </a:solidFill>
+          <a:ln w="12700">
+            <a:solidFill>
+              <a:srgbClr val="EDE7DB"/>
+            </a:solidFill>
+            <a:prstDash val="solid"/>
+          </a:ln>
+        </p:spPr>
+      </p:sp>
+      <p:sp>
+        <p:nvSpPr>
+          <p:cNvPr id="6" name="Shape 4"/>
+          <p:cNvSpPr/>
+          <p:nvPr/>
+        </p:nvSpPr>
+        <p:spPr>
+          <a:xfrm>
+            <a:off x="777240" y="2103120"/>
+            <a:ext cx="54864" cy="914400"/>
+          </a:xfrm>
+          <a:prstGeom prst="rect">
+            <a:avLst/>
+          </a:prstGeom>
+          <a:solidFill>
+            <a:srgbClr val="3B6B4A"/>
+          </a:solidFill>
+          <a:ln w="12700">
+            <a:solidFill>
+              <a:srgbClr val="333333"/>
+            </a:solidFill>
+            <a:prstDash val="solid"/>
+          </a:ln>
+        </p:spPr>
+      </p:sp>
+      <p:sp>
+        <p:nvSpPr>
+          <p:cNvPr id="7" name="Text 5"/>
+          <p:cNvSpPr txBox="1"/>
+          <p:nvPr/>
+        </p:nvSpPr>
+        <p:spPr>
+          <a:xfrm>
+            <a:off x="1143000" y="2176272"/>
+            <a:ext cx="2757830" cy="768096"/>
+          </a:xfrm>
+          <a:prstGeom prst="rect">
+            <a:avLst/>
+          </a:prstGeom>
+          <a:noFill/>
+          <a:ln/>
+        </p:spPr>
+        <p:txBody>
+          <a:bodyPr wrap="square" lIns="0" tIns="0" rIns="0" bIns="0" rtlCol="0" anchor="ctr"/>
+          <a:lstStyle/>
+          <a:p>
+            <a:pPr indent="0" marL="0">
+              <a:buNone/>
+            </a:pPr>
+            <a:r>
+              <a:rPr lang="en-US" sz="1400" b="1" dirty="0">
+                <a:solidFill>
+                  <a:srgbClr val="3B6B4A"/>
+                </a:solidFill>
+                <a:latin typeface="Yu Gothic" pitchFamily="34" charset="0"/>
+                <a:ea typeface="Yu Gothic" pitchFamily="34" charset="-122"/>
+                <a:cs typeface="Yu Gothic" pitchFamily="34" charset="-120"/>
+              </a:rPr>
+              <a:t>誰に渡すか</a:t>
+            </a:r>
+            <a:endParaRPr lang="en-US" sz="1400" dirty="0"/>
+          </a:p>
+        </p:txBody>
+      </p:sp>
+      <p:sp>
+        <p:nvSpPr>
+          <p:cNvPr id="8" name="Text 6"/>
+          <p:cNvSpPr txBox="1"/>
+          <p:nvPr/>
+        </p:nvSpPr>
+        <p:spPr>
+          <a:xfrm>
+            <a:off x="4006901" y="2176272"/>
+            <a:ext cx="7011619" cy="768096"/>
+          </a:xfrm>
+          <a:prstGeom prst="rect">
+            <a:avLst/>
+          </a:prstGeom>
+          <a:noFill/>
+          <a:ln/>
+        </p:spPr>
+        <p:txBody>
+          <a:bodyPr wrap="square" lIns="0" tIns="0" rIns="0" bIns="0" rtlCol="0" anchor="ctr"/>
+          <a:lstStyle/>
+          <a:p>
+            <a:pPr indent="0" marL="0">
+              <a:lnSpc>
+                <a:spcPct val="130000"/>
+              </a:lnSpc>
+              <a:buNone/>
+            </a:pPr>
+            <a:r>
+              <a:rPr lang="en-US" sz="1250" dirty="0">
+                <a:solidFill>
+                  <a:srgbClr val="3F3933"/>
+                </a:solidFill>
+                <a:latin typeface="Yu Gothic" pitchFamily="34" charset="0"/>
+                <a:ea typeface="Yu Gothic" pitchFamily="34" charset="-122"/>
+                <a:cs typeface="Yu Gothic" pitchFamily="34" charset="-120"/>
+              </a:rPr>
+              <a:t>実名で決めます。前向きな方1名から</a:t>
+            </a:r>
+            <a:endParaRPr lang="en-US" sz="1250" dirty="0"/>
+          </a:p>
+        </p:txBody>
+      </p:sp>
+      <p:sp>
+        <p:nvSpPr>
+          <p:cNvPr id="9" name="Shape 7"/>
+          <p:cNvSpPr/>
+          <p:nvPr/>
+        </p:nvSpPr>
+        <p:spPr>
+          <a:xfrm>
+            <a:off x="777240" y="3154680"/>
+            <a:ext cx="10607040" cy="914400"/>
+          </a:xfrm>
+          <a:prstGeom prst="rect">
+            <a:avLst/>
+          </a:prstGeom>
+          <a:solidFill>
+            <a:srgbClr val="FFFFFF"/>
+          </a:solidFill>
+          <a:ln w="12700">
+            <a:solidFill>
+              <a:srgbClr val="EDE7DB"/>
+            </a:solidFill>
+            <a:prstDash val="solid"/>
+          </a:ln>
+        </p:spPr>
+      </p:sp>
+      <p:sp>
+        <p:nvSpPr>
+          <p:cNvPr id="10" name="Shape 8"/>
+          <p:cNvSpPr/>
+          <p:nvPr/>
+        </p:nvSpPr>
+        <p:spPr>
+          <a:xfrm>
+            <a:off x="777240" y="3154680"/>
+            <a:ext cx="54864" cy="914400"/>
+          </a:xfrm>
+          <a:prstGeom prst="rect">
+            <a:avLst/>
+          </a:prstGeom>
+          <a:solidFill>
+            <a:srgbClr val="3B6B4A"/>
+          </a:solidFill>
+          <a:ln w="12700">
+            <a:solidFill>
+              <a:srgbClr val="333333"/>
+            </a:solidFill>
+            <a:prstDash val="solid"/>
+          </a:ln>
+        </p:spPr>
+      </p:sp>
+      <p:sp>
+        <p:nvSpPr>
+          <p:cNvPr id="11" name="Text 9"/>
+          <p:cNvSpPr txBox="1"/>
+          <p:nvPr/>
+        </p:nvSpPr>
+        <p:spPr>
+          <a:xfrm>
+            <a:off x="1143000" y="3227832"/>
+            <a:ext cx="2757830" cy="768096"/>
+          </a:xfrm>
+          <a:prstGeom prst="rect">
+            <a:avLst/>
+          </a:prstGeom>
+          <a:noFill/>
+          <a:ln/>
+        </p:spPr>
+        <p:txBody>
+          <a:bodyPr wrap="square" lIns="0" tIns="0" rIns="0" bIns="0" rtlCol="0" anchor="ctr"/>
+          <a:lstStyle/>
+          <a:p>
+            <a:pPr indent="0" marL="0">
+              <a:buNone/>
+            </a:pPr>
+            <a:r>
+              <a:rPr lang="en-US" sz="1400" b="1" dirty="0">
+                <a:solidFill>
+                  <a:srgbClr val="3B6B4A"/>
+                </a:solidFill>
+                <a:latin typeface="Yu Gothic" pitchFamily="34" charset="0"/>
+                <a:ea typeface="Yu Gothic" pitchFamily="34" charset="-122"/>
+                <a:cs typeface="Yu Gothic" pitchFamily="34" charset="-120"/>
+              </a:rPr>
+              <a:t>いつ渡すか</a:t>
+            </a:r>
+            <a:endParaRPr lang="en-US" sz="1400" dirty="0"/>
+          </a:p>
+        </p:txBody>
+      </p:sp>
+      <p:sp>
+        <p:nvSpPr>
+          <p:cNvPr id="12" name="Text 10"/>
+          <p:cNvSpPr txBox="1"/>
+          <p:nvPr/>
+        </p:nvSpPr>
+        <p:spPr>
+          <a:xfrm>
+            <a:off x="4006901" y="3227832"/>
+            <a:ext cx="7011619" cy="768096"/>
+          </a:xfrm>
+          <a:prstGeom prst="rect">
+            <a:avLst/>
+          </a:prstGeom>
+          <a:noFill/>
+          <a:ln/>
+        </p:spPr>
+        <p:txBody>
+          <a:bodyPr wrap="square" lIns="0" tIns="0" rIns="0" bIns="0" rtlCol="0" anchor="ctr"/>
+          <a:lstStyle/>
+          <a:p>
+            <a:pPr indent="0" marL="0">
+              <a:lnSpc>
+                <a:spcPct val="130000"/>
+              </a:lnSpc>
+              <a:buNone/>
+            </a:pPr>
+            <a:r>
+              <a:rPr lang="en-US" sz="1250" dirty="0">
+                <a:solidFill>
+                  <a:srgbClr val="3F3933"/>
+                </a:solidFill>
+                <a:latin typeface="Yu Gothic" pitchFamily="34" charset="0"/>
+                <a:ea typeface="Yu Gothic" pitchFamily="34" charset="-122"/>
+                <a:cs typeface="Yu Gothic" pitchFamily="34" charset="-120"/>
+              </a:rPr>
+              <a:t>来週中。渡すときの一言も、その場で決めます</a:t>
+            </a:r>
+            <a:endParaRPr lang="en-US" sz="1250" dirty="0"/>
+          </a:p>
+        </p:txBody>
+      </p:sp>
+      <p:sp>
+        <p:nvSpPr>
+          <p:cNvPr id="13" name="Shape 11"/>
+          <p:cNvSpPr/>
+          <p:nvPr/>
+        </p:nvSpPr>
+        <p:spPr>
+          <a:xfrm>
+            <a:off x="777240" y="4206240"/>
+            <a:ext cx="10607040" cy="914400"/>
+          </a:xfrm>
+          <a:prstGeom prst="rect">
+            <a:avLst/>
+          </a:prstGeom>
+          <a:solidFill>
+            <a:srgbClr val="FFFFFF"/>
+          </a:solidFill>
+          <a:ln w="12700">
+            <a:solidFill>
+              <a:srgbClr val="EDE7DB"/>
+            </a:solidFill>
+            <a:prstDash val="solid"/>
+          </a:ln>
+        </p:spPr>
+      </p:sp>
+      <p:sp>
+        <p:nvSpPr>
+          <p:cNvPr id="14" name="Shape 12"/>
+          <p:cNvSpPr/>
+          <p:nvPr/>
+        </p:nvSpPr>
+        <p:spPr>
+          <a:xfrm>
+            <a:off x="777240" y="4206240"/>
+            <a:ext cx="54864" cy="914400"/>
+          </a:xfrm>
+          <a:prstGeom prst="rect">
+            <a:avLst/>
+          </a:prstGeom>
+          <a:solidFill>
+            <a:srgbClr val="3B6B4A"/>
+          </a:solidFill>
+          <a:ln w="12700">
+            <a:solidFill>
+              <a:srgbClr val="333333"/>
+            </a:solidFill>
+            <a:prstDash val="solid"/>
+          </a:ln>
+        </p:spPr>
+      </p:sp>
+      <p:sp>
+        <p:nvSpPr>
+          <p:cNvPr id="15" name="Text 13"/>
+          <p:cNvSpPr txBox="1"/>
+          <p:nvPr/>
+        </p:nvSpPr>
+        <p:spPr>
+          <a:xfrm>
+            <a:off x="1143000" y="4279392"/>
+            <a:ext cx="2757830" cy="768096"/>
+          </a:xfrm>
+          <a:prstGeom prst="rect">
+            <a:avLst/>
+          </a:prstGeom>
+          <a:noFill/>
+          <a:ln/>
+        </p:spPr>
+        <p:txBody>
+          <a:bodyPr wrap="square" lIns="0" tIns="0" rIns="0" bIns="0" rtlCol="0" anchor="ctr"/>
+          <a:lstStyle/>
+          <a:p>
+            <a:pPr indent="0" marL="0">
+              <a:buNone/>
+            </a:pPr>
+            <a:r>
+              <a:rPr lang="en-US" sz="1400" b="1" dirty="0">
+                <a:solidFill>
+                  <a:srgbClr val="3B6B4A"/>
+                </a:solidFill>
+                <a:latin typeface="Yu Gothic" pitchFamily="34" charset="0"/>
+                <a:ea typeface="Yu Gothic" pitchFamily="34" charset="-122"/>
+                <a:cs typeface="Yu Gothic" pitchFamily="34" charset="-120"/>
+              </a:rPr>
+              <a:t>どう聞き返すか</a:t>
+            </a:r>
+            <a:endParaRPr lang="en-US" sz="1400" dirty="0"/>
+          </a:p>
+        </p:txBody>
+      </p:sp>
+      <p:sp>
+        <p:nvSpPr>
+          <p:cNvPr id="16" name="Text 14"/>
+          <p:cNvSpPr txBox="1"/>
+          <p:nvPr/>
+        </p:nvSpPr>
+        <p:spPr>
+          <a:xfrm>
+            <a:off x="4006901" y="4279392"/>
+            <a:ext cx="7011619" cy="768096"/>
+          </a:xfrm>
+          <a:prstGeom prst="rect">
+            <a:avLst/>
+          </a:prstGeom>
+          <a:noFill/>
+          <a:ln/>
+        </p:spPr>
+        <p:txBody>
+          <a:bodyPr wrap="square" lIns="0" tIns="0" rIns="0" bIns="0" rtlCol="0" anchor="ctr"/>
+          <a:lstStyle/>
+          <a:p>
+            <a:pPr indent="0" marL="0">
+              <a:lnSpc>
+                <a:spcPct val="130000"/>
+              </a:lnSpc>
+              <a:buNone/>
+            </a:pPr>
+            <a:r>
+              <a:rPr lang="en-US" sz="1250" dirty="0">
+                <a:solidFill>
+                  <a:srgbClr val="3F3933"/>
+                </a:solidFill>
+                <a:latin typeface="Yu Gothic" pitchFamily="34" charset="0"/>
+                <a:ea typeface="Yu Gothic" pitchFamily="34" charset="-122"/>
+                <a:cs typeface="Yu Gothic" pitchFamily="34" charset="-120"/>
+              </a:rPr>
+              <a:t>「使ってみてどうだった」を1週間後に聞く。感想を第4回に持ってきていただきます</a:t>
+            </a:r>
+            <a:endParaRPr lang="en-US" sz="1250" dirty="0"/>
+          </a:p>
+        </p:txBody>
+      </p:sp>
+      <p:sp>
+        <p:nvSpPr>
+          <p:cNvPr id="17" name="Text 15"/>
+          <p:cNvSpPr txBox="1"/>
+          <p:nvPr/>
+        </p:nvSpPr>
+        <p:spPr>
+          <a:xfrm>
+            <a:off x="777240" y="6382512"/>
+            <a:ext cx="7424928" cy="256032"/>
+          </a:xfrm>
+          <a:prstGeom prst="rect">
+            <a:avLst/>
+          </a:prstGeom>
+          <a:noFill/>
+          <a:ln/>
+        </p:spPr>
+        <p:txBody>
+          <a:bodyPr wrap="square" lIns="0" tIns="0" rIns="0" bIns="0" rtlCol="0" anchor="ctr"/>
+          <a:lstStyle/>
+          <a:p>
+            <a:pPr indent="0" marL="0">
+              <a:buNone/>
+            </a:pPr>
+            <a:r>
+              <a:rPr lang="en-US" sz="900" dirty="0">
+                <a:solidFill>
+                  <a:srgbClr val="8A8177"/>
+                </a:solidFill>
+                <a:latin typeface="Yu Gothic" pitchFamily="34" charset="0"/>
+                <a:ea typeface="Yu Gothic" pitchFamily="34" charset="-122"/>
+                <a:cs typeface="Yu Gothic" pitchFamily="34" charset="-120"/>
+              </a:rPr>
+              <a:t>第3回　文書とコミュニケーションのAI化</a:t>
+            </a:r>
+            <a:endParaRPr lang="en-US" sz="900" dirty="0"/>
+          </a:p>
+        </p:txBody>
+      </p:sp>
+      <p:sp>
+        <p:nvSpPr>
+          <p:cNvPr id="18" name="Text 16"/>
+          <p:cNvSpPr txBox="1"/>
+          <p:nvPr/>
+        </p:nvSpPr>
+        <p:spPr>
+          <a:xfrm>
+            <a:off x="8202168" y="6382512"/>
+            <a:ext cx="3182112" cy="256032"/>
+          </a:xfrm>
+          <a:prstGeom prst="rect">
+            <a:avLst/>
+          </a:prstGeom>
+          <a:noFill/>
+          <a:ln/>
+        </p:spPr>
+        <p:txBody>
+          <a:bodyPr wrap="square" lIns="0" tIns="0" rIns="0" bIns="0" rtlCol="0" anchor="ctr"/>
+          <a:lstStyle/>
+          <a:p>
+            <a:pPr algn="r" indent="0" marL="0">
+              <a:buNone/>
+            </a:pPr>
+            <a:r>
+              <a:rPr lang="en-US" sz="900" dirty="0">
+                <a:solidFill>
+                  <a:srgbClr val="8A8177"/>
+                </a:solidFill>
+                <a:latin typeface="Yu Gothic" pitchFamily="34" charset="0"/>
+                <a:ea typeface="Yu Gothic" pitchFamily="34" charset="-122"/>
+                <a:cs typeface="Yu Gothic" pitchFamily="34" charset="-120"/>
+              </a:rPr>
+              <a:t>組み込み</a:t>
+            </a:r>
+            <a:endParaRPr lang="en-US" sz="900" dirty="0"/>
+          </a:p>
+        </p:txBody>
+      </p:sp>
+    </p:spTree>
+  </p:cSld>
+  <p:clrMapOvr>
+    <a:masterClrMapping/>
+  </p:clrMapOvr>
+</p:sld>
+</file>
+
+<file path=ppt/slides/slide13.xml><?xml version="1.0" encoding="utf-8"?>
+<p:sld xmlns:a="http://schemas.openxmlformats.org/drawingml/2006/main" xmlns:r="http://schemas.openxmlformats.org/officeDocument/2006/relationships" xmlns:p="http://schemas.openxmlformats.org/presentationml/2006/main">
+  <p:cSld name="Slide 13">
+    <p:bg>
+      <p:bgPr>
+        <a:solidFill>
+          <a:srgbClr val="F6F2EA"/>
+        </a:solidFill>
+      </p:bgPr>
+    </p:bg>
+    <p:spTree>
+      <p:nvGrpSpPr>
+        <p:cNvPr id="1" name=""/>
+        <p:cNvGrpSpPr/>
+        <p:nvPr/>
+      </p:nvGrpSpPr>
+      <p:grpSpPr>
+        <a:xfrm>
+          <a:off x="0" y="0"/>
+          <a:ext cx="0" cy="0"/>
+          <a:chOff x="0" y="0"/>
+          <a:chExt cx="0" cy="0"/>
+        </a:xfrm>
+      </p:grpSpPr>
+      <p:sp>
+        <p:nvSpPr>
+          <p:cNvPr id="2" name="Text 0"/>
+          <p:cNvSpPr txBox="1"/>
+          <p:nvPr/>
+        </p:nvSpPr>
+        <p:spPr>
+          <a:xfrm>
+            <a:off x="777240" y="566928"/>
+            <a:ext cx="10607040" cy="274320"/>
+          </a:xfrm>
+          <a:prstGeom prst="rect">
+            <a:avLst/>
+          </a:prstGeom>
+          <a:noFill/>
+          <a:ln/>
+        </p:spPr>
+        <p:txBody>
+          <a:bodyPr wrap="square" lIns="0" tIns="0" rIns="0" bIns="0" rtlCol="0" anchor="ctr"/>
+          <a:lstStyle/>
+          <a:p>
+            <a:pPr indent="0" marL="0">
+              <a:buNone/>
+            </a:pPr>
+            <a:r>
+              <a:rPr lang="en-US" sz="1100" b="1" spc="250" kern="0" dirty="0">
+                <a:solidFill>
+                  <a:srgbClr val="B04A2F"/>
+                </a:solidFill>
+                <a:latin typeface="Yu Gothic" pitchFamily="34" charset="0"/>
+                <a:ea typeface="Yu Gothic" pitchFamily="34" charset="-122"/>
+                <a:cs typeface="Yu Gothic" pitchFamily="34" charset="-120"/>
+              </a:rPr>
+              <a:t>ここだけは</a:t>
+            </a:r>
+            <a:endParaRPr lang="en-US" sz="1100" dirty="0"/>
+          </a:p>
+        </p:txBody>
+      </p:sp>
+      <p:sp>
+        <p:nvSpPr>
+          <p:cNvPr id="3" name="Text 1"/>
+          <p:cNvSpPr txBox="1"/>
+          <p:nvPr/>
+        </p:nvSpPr>
+        <p:spPr>
+          <a:xfrm>
+            <a:off x="777240" y="1097280"/>
+            <a:ext cx="10607040" cy="640080"/>
+          </a:xfrm>
+          <a:prstGeom prst="rect">
+            <a:avLst/>
+          </a:prstGeom>
+          <a:noFill/>
+          <a:ln/>
+        </p:spPr>
+        <p:txBody>
+          <a:bodyPr wrap="square" lIns="0" tIns="0" rIns="0" bIns="0" rtlCol="0" anchor="ctr"/>
+          <a:lstStyle/>
+          <a:p>
+            <a:pPr indent="0" marL="0">
+              <a:buNone/>
+            </a:pPr>
+            <a:r>
+              <a:rPr lang="en-US" sz="2600" b="1" dirty="0">
+                <a:solidFill>
+                  <a:srgbClr val="23201D"/>
+                </a:solidFill>
+                <a:latin typeface="Yu Gothic" pitchFamily="34" charset="0"/>
+                <a:ea typeface="Yu Gothic" pitchFamily="34" charset="-122"/>
+                <a:cs typeface="Yu Gothic" pitchFamily="34" charset="-120"/>
+              </a:rPr>
+              <a:t>この回から、機密資料が出てきます</a:t>
+            </a:r>
+            <a:endParaRPr lang="en-US" sz="2600" dirty="0"/>
+          </a:p>
+        </p:txBody>
+      </p:sp>
+      <p:sp>
+        <p:nvSpPr>
+          <p:cNvPr id="4" name="Shape 2"/>
+          <p:cNvSpPr/>
+          <p:nvPr/>
+        </p:nvSpPr>
+        <p:spPr>
+          <a:xfrm>
+            <a:off x="777240" y="2148840"/>
+            <a:ext cx="64008" cy="2194560"/>
+          </a:xfrm>
+          <a:prstGeom prst="rect">
+            <a:avLst/>
+          </a:prstGeom>
+          <a:solidFill>
+            <a:srgbClr val="B04A2F"/>
+          </a:solidFill>
+          <a:ln w="12700">
+            <a:solidFill>
+              <a:srgbClr val="333333"/>
+            </a:solidFill>
+            <a:prstDash val="solid"/>
+          </a:ln>
+        </p:spPr>
+      </p:sp>
+      <p:sp>
+        <p:nvSpPr>
+          <p:cNvPr id="5" name="Text 3"/>
+          <p:cNvSpPr txBox="1"/>
+          <p:nvPr/>
+        </p:nvSpPr>
+        <p:spPr>
+          <a:xfrm>
+            <a:off x="1188720" y="2148840"/>
+            <a:ext cx="9966960" cy="2194560"/>
+          </a:xfrm>
+          <a:prstGeom prst="rect">
+            <a:avLst/>
+          </a:prstGeom>
+          <a:noFill/>
+          <a:ln/>
+        </p:spPr>
+        <p:txBody>
+          <a:bodyPr wrap="square" lIns="0" tIns="0" rIns="0" bIns="0" rtlCol="0" anchor="ctr"/>
+          <a:lstStyle/>
+          <a:p>
+            <a:pPr indent="0" marL="0">
+              <a:lnSpc>
+                <a:spcPct val="160000"/>
+              </a:lnSpc>
+              <a:buNone/>
+            </a:pPr>
+            <a:r>
+              <a:rPr lang="en-US" sz="1650" dirty="0">
+                <a:solidFill>
+                  <a:srgbClr val="3F3933"/>
+                </a:solidFill>
+                <a:latin typeface="Yu Gothic" pitchFamily="34" charset="0"/>
+                <a:ea typeface="Yu Gothic" pitchFamily="34" charset="-122"/>
+                <a:cs typeface="Yu Gothic" pitchFamily="34" charset="-120"/>
+              </a:rPr>
+              <a:t>録画にどこまで映してよいか、事前に確認してください。「この区間は録画を止めます」という運用にしておくと、受講者は安心して実物を出せます。実物が出るかどうかで、この講座の価値は倍変わります。</a:t>
+            </a:r>
+            <a:endParaRPr lang="en-US" sz="1650" dirty="0"/>
+          </a:p>
+        </p:txBody>
+      </p:sp>
+      <p:sp>
+        <p:nvSpPr>
+          <p:cNvPr id="6" name="Shape 4"/>
+          <p:cNvSpPr/>
+          <p:nvPr/>
+        </p:nvSpPr>
+        <p:spPr>
+          <a:xfrm>
+            <a:off x="777240" y="4709160"/>
+            <a:ext cx="10607040" cy="960120"/>
+          </a:xfrm>
+          <a:prstGeom prst="rect">
+            <a:avLst/>
+          </a:prstGeom>
+          <a:solidFill>
+            <a:srgbClr val="EDE7DB"/>
+          </a:solidFill>
+          <a:ln w="12700">
+            <a:solidFill>
+              <a:srgbClr val="333333"/>
+            </a:solidFill>
+            <a:prstDash val="solid"/>
+          </a:ln>
+        </p:spPr>
+      </p:sp>
+      <p:sp>
+        <p:nvSpPr>
+          <p:cNvPr id="7" name="Text 5"/>
+          <p:cNvSpPr txBox="1"/>
+          <p:nvPr/>
+        </p:nvSpPr>
+        <p:spPr>
+          <a:xfrm>
+            <a:off x="1051560" y="4800600"/>
+            <a:ext cx="1463040" cy="256032"/>
+          </a:xfrm>
+          <a:prstGeom prst="rect">
+            <a:avLst/>
+          </a:prstGeom>
+          <a:noFill/>
+          <a:ln/>
+        </p:spPr>
+        <p:txBody>
+          <a:bodyPr wrap="square" lIns="0" tIns="0" rIns="0" bIns="0" rtlCol="0" anchor="ctr"/>
+          <a:lstStyle/>
+          <a:p>
+            <a:pPr indent="0" marL="0">
+              <a:buNone/>
+            </a:pPr>
+            <a:r>
+              <a:rPr lang="en-US" sz="900" b="1" spc="150" kern="0" dirty="0">
+                <a:solidFill>
+                  <a:srgbClr val="B04A2F"/>
+                </a:solidFill>
+                <a:latin typeface="Yu Gothic" pitchFamily="34" charset="0"/>
+                <a:ea typeface="Yu Gothic" pitchFamily="34" charset="-122"/>
+                <a:cs typeface="Yu Gothic" pitchFamily="34" charset="-120"/>
+              </a:rPr>
+              <a:t>他社では</a:t>
+            </a:r>
+            <a:endParaRPr lang="en-US" sz="900" dirty="0"/>
+          </a:p>
+        </p:txBody>
+      </p:sp>
+      <p:sp>
+        <p:nvSpPr>
+          <p:cNvPr id="8" name="Text 6"/>
+          <p:cNvSpPr txBox="1"/>
+          <p:nvPr/>
+        </p:nvSpPr>
+        <p:spPr>
+          <a:xfrm>
+            <a:off x="1051560" y="5029200"/>
+            <a:ext cx="10058400" cy="566928"/>
+          </a:xfrm>
+          <a:prstGeom prst="rect">
+            <a:avLst/>
+          </a:prstGeom>
+          <a:noFill/>
+          <a:ln/>
+        </p:spPr>
+        <p:txBody>
+          <a:bodyPr wrap="square" lIns="0" tIns="0" rIns="0" bIns="0" rtlCol="0" anchor="ctr"/>
+          <a:lstStyle/>
+          <a:p>
+            <a:pPr indent="0" marL="0">
+              <a:lnSpc>
+                <a:spcPct val="130000"/>
+              </a:lnSpc>
+              <a:buNone/>
+            </a:pPr>
+            <a:r>
+              <a:rPr lang="en-US" sz="1250" dirty="0">
+                <a:solidFill>
+                  <a:srgbClr val="3F3933"/>
+                </a:solidFill>
+                <a:latin typeface="Yu Gothic" pitchFamily="34" charset="0"/>
+                <a:ea typeface="Yu Gothic" pitchFamily="34" charset="-122"/>
+                <a:cs typeface="Yu Gothic" pitchFamily="34" charset="-120"/>
+              </a:rPr>
+              <a:t>ある会社では、議事録を全文書き起こしからではなく、箇条書きメモ＋AIで整形する形に変えました。効果は会議後30分が5分に。ただ、それより大きかったのは「議事録が必ず当日中に出る」ようになったことでした。</a:t>
+            </a:r>
+            <a:endParaRPr lang="en-US" sz="1250" dirty="0"/>
+          </a:p>
+        </p:txBody>
+      </p:sp>
+      <p:sp>
+        <p:nvSpPr>
+          <p:cNvPr id="9" name="Text 7"/>
+          <p:cNvSpPr txBox="1"/>
+          <p:nvPr/>
+        </p:nvSpPr>
+        <p:spPr>
+          <a:xfrm>
+            <a:off x="777240" y="6382512"/>
+            <a:ext cx="7424928" cy="256032"/>
+          </a:xfrm>
+          <a:prstGeom prst="rect">
+            <a:avLst/>
+          </a:prstGeom>
+          <a:noFill/>
+          <a:ln/>
+        </p:spPr>
+        <p:txBody>
+          <a:bodyPr wrap="square" lIns="0" tIns="0" rIns="0" bIns="0" rtlCol="0" anchor="ctr"/>
+          <a:lstStyle/>
+          <a:p>
+            <a:pPr indent="0" marL="0">
+              <a:buNone/>
+            </a:pPr>
+            <a:r>
+              <a:rPr lang="en-US" sz="900" dirty="0">
+                <a:solidFill>
+                  <a:srgbClr val="8A8177"/>
+                </a:solidFill>
+                <a:latin typeface="Yu Gothic" pitchFamily="34" charset="0"/>
+                <a:ea typeface="Yu Gothic" pitchFamily="34" charset="-122"/>
+                <a:cs typeface="Yu Gothic" pitchFamily="34" charset="-120"/>
+              </a:rPr>
+              <a:t>第3回　文書とコミュニケーションのAI化</a:t>
+            </a:r>
+            <a:endParaRPr lang="en-US" sz="900" dirty="0"/>
+          </a:p>
+        </p:txBody>
+      </p:sp>
+      <p:sp>
+        <p:nvSpPr>
+          <p:cNvPr id="10" name="Text 8"/>
+          <p:cNvSpPr txBox="1"/>
+          <p:nvPr/>
+        </p:nvSpPr>
+        <p:spPr>
+          <a:xfrm>
+            <a:off x="8202168" y="6382512"/>
+            <a:ext cx="3182112" cy="256032"/>
+          </a:xfrm>
+          <a:prstGeom prst="rect">
+            <a:avLst/>
+          </a:prstGeom>
+          <a:noFill/>
+          <a:ln/>
+        </p:spPr>
+        <p:txBody>
+          <a:bodyPr wrap="square" lIns="0" tIns="0" rIns="0" bIns="0" rtlCol="0" anchor="ctr"/>
+          <a:lstStyle/>
+          <a:p>
+            <a:pPr algn="r" indent="0" marL="0">
+              <a:buNone/>
+            </a:pPr>
+            <a:r>
+              <a:rPr lang="en-US" sz="900" dirty="0">
+                <a:solidFill>
+                  <a:srgbClr val="8A8177"/>
+                </a:solidFill>
+                <a:latin typeface="Yu Gothic" pitchFamily="34" charset="0"/>
+                <a:ea typeface="Yu Gothic" pitchFamily="34" charset="-122"/>
+                <a:cs typeface="Yu Gothic" pitchFamily="34" charset="-120"/>
+              </a:rPr>
+              <a:t>ここだけは</a:t>
+            </a:r>
+            <a:endParaRPr lang="en-US" sz="900" dirty="0"/>
+          </a:p>
+        </p:txBody>
+      </p:sp>
+    </p:spTree>
+  </p:cSld>
+  <p:clrMapOvr>
+    <a:masterClrMapping/>
+  </p:clrMapOvr>
+</p:sld>
+</file>
+
+<file path=ppt/slides/slide14.xml><?xml version="1.0" encoding="utf-8"?>
+<p:sld xmlns:a="http://schemas.openxmlformats.org/drawingml/2006/main" xmlns:r="http://schemas.openxmlformats.org/officeDocument/2006/relationships" xmlns:p="http://schemas.openxmlformats.org/presentationml/2006/main">
+  <p:cSld name="Slide 14">
+    <p:bg>
+      <p:bgPr>
+        <a:solidFill>
+          <a:srgbClr val="F6F2EA"/>
+        </a:solidFill>
+      </p:bgPr>
+    </p:bg>
+    <p:spTree>
+      <p:nvGrpSpPr>
+        <p:cNvPr id="1" name=""/>
+        <p:cNvGrpSpPr/>
+        <p:nvPr/>
+      </p:nvGrpSpPr>
+      <p:grpSpPr>
+        <a:xfrm>
+          <a:off x="0" y="0"/>
+          <a:ext cx="0" cy="0"/>
+          <a:chOff x="0" y="0"/>
+          <a:chExt cx="0" cy="0"/>
+        </a:xfrm>
+      </p:grpSpPr>
+      <p:sp>
+        <p:nvSpPr>
+          <p:cNvPr id="2" name="Text 0"/>
+          <p:cNvSpPr txBox="1"/>
+          <p:nvPr/>
+        </p:nvSpPr>
+        <p:spPr>
+          <a:xfrm>
+            <a:off x="777240" y="566928"/>
+            <a:ext cx="10607040" cy="274320"/>
+          </a:xfrm>
+          <a:prstGeom prst="rect">
+            <a:avLst/>
+          </a:prstGeom>
+          <a:noFill/>
+          <a:ln/>
+        </p:spPr>
+        <p:txBody>
+          <a:bodyPr wrap="square" lIns="0" tIns="0" rIns="0" bIns="0" rtlCol="0" anchor="ctr"/>
+          <a:lstStyle/>
+          <a:p>
+            <a:pPr indent="0" marL="0">
+              <a:buNone/>
+            </a:pPr>
+            <a:r>
+              <a:rPr lang="en-US" sz="1100" b="1" spc="250" kern="0" dirty="0">
+                <a:solidFill>
+                  <a:srgbClr val="3B6B4A"/>
+                </a:solidFill>
+                <a:latin typeface="Yu Gothic" pitchFamily="34" charset="0"/>
+                <a:ea typeface="Yu Gothic" pitchFamily="34" charset="-122"/>
+                <a:cs typeface="Yu Gothic" pitchFamily="34" charset="-120"/>
+              </a:rPr>
+              <a:t>次回まで</a:t>
+            </a:r>
+            <a:endParaRPr lang="en-US" sz="1100" dirty="0"/>
+          </a:p>
+        </p:txBody>
+      </p:sp>
+      <p:sp>
+        <p:nvSpPr>
+          <p:cNvPr id="3" name="Text 1"/>
+          <p:cNvSpPr txBox="1"/>
+          <p:nvPr/>
+        </p:nvSpPr>
+        <p:spPr>
+          <a:xfrm>
+            <a:off x="777240" y="896112"/>
+            <a:ext cx="10607040" cy="640080"/>
+          </a:xfrm>
+          <a:prstGeom prst="rect">
+            <a:avLst/>
+          </a:prstGeom>
+          <a:noFill/>
+          <a:ln/>
+        </p:spPr>
+        <p:txBody>
+          <a:bodyPr wrap="square" lIns="0" tIns="0" rIns="0" bIns="0" rtlCol="0" anchor="ctr"/>
+          <a:lstStyle/>
+          <a:p>
+            <a:pPr indent="0" marL="0">
+              <a:buNone/>
+            </a:pPr>
+            <a:r>
+              <a:rPr lang="en-US" sz="2600" b="1" dirty="0">
+                <a:solidFill>
+                  <a:srgbClr val="23201D"/>
+                </a:solidFill>
+                <a:latin typeface="Yu Gothic" pitchFamily="34" charset="0"/>
+                <a:ea typeface="Yu Gothic" pitchFamily="34" charset="-122"/>
+                <a:cs typeface="Yu Gothic" pitchFamily="34" charset="-120"/>
+              </a:rPr>
+              <a:t>次回は「数字と判断のAI化」</a:t>
+            </a:r>
+            <a:endParaRPr lang="en-US" sz="2600" dirty="0"/>
+          </a:p>
+        </p:txBody>
+      </p:sp>
+      <p:sp>
+        <p:nvSpPr>
+          <p:cNvPr id="4" name="Text 2"/>
+          <p:cNvSpPr txBox="1"/>
+          <p:nvPr/>
+        </p:nvSpPr>
+        <p:spPr>
+          <a:xfrm>
+            <a:off x="777240" y="1572768"/>
+            <a:ext cx="9546336" cy="457200"/>
+          </a:xfrm>
+          <a:prstGeom prst="rect">
+            <a:avLst/>
+          </a:prstGeom>
+          <a:noFill/>
+          <a:ln/>
+        </p:spPr>
+        <p:txBody>
+          <a:bodyPr wrap="square" lIns="0" tIns="0" rIns="0" bIns="0" rtlCol="0" anchor="ctr"/>
+          <a:lstStyle/>
+          <a:p>
+            <a:pPr indent="0" marL="0">
+              <a:buNone/>
+            </a:pPr>
+            <a:r>
+              <a:rPr lang="en-US" sz="1400" b="1" dirty="0">
+                <a:solidFill>
+                  <a:srgbClr val="3B6B4A"/>
+                </a:solidFill>
+                <a:latin typeface="Yu Gothic" pitchFamily="34" charset="0"/>
+                <a:ea typeface="Yu Gothic" pitchFamily="34" charset="-122"/>
+                <a:cs typeface="Yu Gothic" pitchFamily="34" charset="-120"/>
+              </a:rPr>
+              <a:t>次回は、文章の道具から判断を助ける道具へ。ただし計算はさせません。</a:t>
+            </a:r>
+            <a:endParaRPr lang="en-US" sz="1400" dirty="0"/>
+          </a:p>
+        </p:txBody>
+      </p:sp>
+      <p:sp>
+        <p:nvSpPr>
+          <p:cNvPr id="5" name="Shape 3"/>
+          <p:cNvSpPr/>
+          <p:nvPr/>
+        </p:nvSpPr>
+        <p:spPr>
+          <a:xfrm>
+            <a:off x="777240" y="2240280"/>
+            <a:ext cx="4985309" cy="2286000"/>
+          </a:xfrm>
+          <a:prstGeom prst="rect">
+            <a:avLst/>
+          </a:prstGeom>
+          <a:solidFill>
+            <a:srgbClr val="FFFFFF"/>
+          </a:solidFill>
+          <a:ln w="12700">
+            <a:solidFill>
+              <a:srgbClr val="EDE7DB"/>
+            </a:solidFill>
+            <a:prstDash val="solid"/>
+          </a:ln>
+        </p:spPr>
+      </p:sp>
+      <p:sp>
+        <p:nvSpPr>
+          <p:cNvPr id="6" name="Text 4"/>
+          <p:cNvSpPr txBox="1"/>
+          <p:nvPr/>
+        </p:nvSpPr>
+        <p:spPr>
+          <a:xfrm>
+            <a:off x="1051560" y="2377440"/>
+            <a:ext cx="4242816" cy="274320"/>
+          </a:xfrm>
+          <a:prstGeom prst="rect">
+            <a:avLst/>
+          </a:prstGeom>
+          <a:noFill/>
+          <a:ln/>
+        </p:spPr>
+        <p:txBody>
+          <a:bodyPr wrap="square" lIns="0" tIns="0" rIns="0" bIns="0" rtlCol="0" anchor="ctr"/>
+          <a:lstStyle/>
+          <a:p>
+            <a:pPr indent="0" marL="0">
+              <a:buNone/>
+            </a:pPr>
+            <a:r>
+              <a:rPr lang="en-US" sz="1000" b="1" spc="150" kern="0" dirty="0">
+                <a:solidFill>
+                  <a:srgbClr val="B04A2F"/>
+                </a:solidFill>
+                <a:latin typeface="Yu Gothic" pitchFamily="34" charset="0"/>
+                <a:ea typeface="Yu Gothic" pitchFamily="34" charset="-122"/>
+                <a:cs typeface="Yu Gothic" pitchFamily="34" charset="-120"/>
+              </a:rPr>
+              <a:t>次回までにやること</a:t>
+            </a:r>
+            <a:endParaRPr lang="en-US" sz="1000" dirty="0"/>
+          </a:p>
+        </p:txBody>
+      </p:sp>
+      <p:sp>
+        <p:nvSpPr>
+          <p:cNvPr id="7" name="Text 5"/>
+          <p:cNvSpPr txBox="1"/>
+          <p:nvPr/>
+        </p:nvSpPr>
+        <p:spPr>
+          <a:xfrm>
+            <a:off x="1051560" y="2743200"/>
+            <a:ext cx="4436669" cy="1554480"/>
+          </a:xfrm>
+          <a:prstGeom prst="rect">
+            <a:avLst/>
+          </a:prstGeom>
+          <a:noFill/>
+          <a:ln/>
+        </p:spPr>
+        <p:txBody>
+          <a:bodyPr wrap="square" lIns="0" tIns="0" rIns="0" bIns="0" rtlCol="0" anchor="ctr"/>
+          <a:lstStyle/>
+          <a:p>
+            <a:pPr indent="0" marL="0">
+              <a:lnSpc>
+                <a:spcPct val="140000"/>
+              </a:lnSpc>
+              <a:buNone/>
+            </a:pPr>
+            <a:r>
+              <a:rPr lang="en-US" sz="1400" dirty="0">
+                <a:solidFill>
+                  <a:srgbClr val="23201D"/>
+                </a:solidFill>
+                <a:latin typeface="Yu Gothic" pitchFamily="34" charset="0"/>
+                <a:ea typeface="Yu Gothic" pitchFamily="34" charset="-122"/>
+                <a:cs typeface="Yu Gothic" pitchFamily="34" charset="-120"/>
+              </a:rPr>
+              <a:t>テンプレート1本を社員1名に渡し、感想を聞いてくる</a:t>
+            </a:r>
+            <a:endParaRPr lang="en-US" sz="1400" dirty="0"/>
+          </a:p>
+        </p:txBody>
+      </p:sp>
+      <p:sp>
+        <p:nvSpPr>
+          <p:cNvPr id="8" name="Shape 6"/>
+          <p:cNvSpPr/>
+          <p:nvPr/>
+        </p:nvSpPr>
+        <p:spPr>
+          <a:xfrm>
+            <a:off x="6398971" y="2240280"/>
+            <a:ext cx="4985309" cy="2286000"/>
+          </a:xfrm>
+          <a:prstGeom prst="rect">
+            <a:avLst/>
+          </a:prstGeom>
+          <a:solidFill>
+            <a:srgbClr val="FFFFFF"/>
+          </a:solidFill>
+          <a:ln w="12700">
+            <a:solidFill>
+              <a:srgbClr val="EDE7DB"/>
+            </a:solidFill>
+            <a:prstDash val="solid"/>
+          </a:ln>
+        </p:spPr>
+      </p:sp>
+      <p:sp>
+        <p:nvSpPr>
+          <p:cNvPr id="9" name="Text 7"/>
+          <p:cNvSpPr txBox="1"/>
+          <p:nvPr/>
+        </p:nvSpPr>
+        <p:spPr>
+          <a:xfrm>
+            <a:off x="6673291" y="2377440"/>
+            <a:ext cx="4242816" cy="274320"/>
+          </a:xfrm>
+          <a:prstGeom prst="rect">
+            <a:avLst/>
+          </a:prstGeom>
+          <a:noFill/>
+          <a:ln/>
+        </p:spPr>
+        <p:txBody>
+          <a:bodyPr wrap="square" lIns="0" tIns="0" rIns="0" bIns="0" rtlCol="0" anchor="ctr"/>
+          <a:lstStyle/>
+          <a:p>
+            <a:pPr indent="0" marL="0">
+              <a:buNone/>
+            </a:pPr>
+            <a:r>
+              <a:rPr lang="en-US" sz="1000" b="1" spc="150" kern="0" dirty="0">
+                <a:solidFill>
+                  <a:srgbClr val="3B6B4A"/>
+                </a:solidFill>
+                <a:latin typeface="Yu Gothic" pitchFamily="34" charset="0"/>
+                <a:ea typeface="Yu Gothic" pitchFamily="34" charset="-122"/>
+                <a:cs typeface="Yu Gothic" pitchFamily="34" charset="-120"/>
+              </a:rPr>
+              <a:t>次回の持ち物</a:t>
+            </a:r>
+            <a:endParaRPr lang="en-US" sz="1000" dirty="0"/>
+          </a:p>
+        </p:txBody>
+      </p:sp>
+      <p:sp>
+        <p:nvSpPr>
+          <p:cNvPr id="10" name="Text 8"/>
+          <p:cNvSpPr txBox="1"/>
+          <p:nvPr/>
+        </p:nvSpPr>
+        <p:spPr>
+          <a:xfrm>
+            <a:off x="6673291" y="2743200"/>
+            <a:ext cx="4436669" cy="694944"/>
+          </a:xfrm>
+          <a:prstGeom prst="rect">
+            <a:avLst/>
+          </a:prstGeom>
+          <a:noFill/>
+          <a:ln/>
+        </p:spPr>
+        <p:txBody>
+          <a:bodyPr wrap="square" lIns="0" tIns="0" rIns="0" bIns="0" rtlCol="0" anchor="ctr"/>
+          <a:lstStyle/>
+          <a:p>
+            <a:pPr indent="0" marL="0">
+              <a:lnSpc>
+                <a:spcPct val="130000"/>
+              </a:lnSpc>
+              <a:buNone/>
+            </a:pPr>
+            <a:r>
+              <a:rPr lang="en-US" sz="1250" dirty="0">
+                <a:solidFill>
+                  <a:srgbClr val="23201D"/>
+                </a:solidFill>
+                <a:latin typeface="Yu Gothic" pitchFamily="34" charset="0"/>
+                <a:ea typeface="Yu Gothic" pitchFamily="34" charset="-122"/>
+                <a:cs typeface="Yu Gothic" pitchFamily="34" charset="-120"/>
+              </a:rPr>
+              <a:t>・直近12か月の月次数値（Excel等）</a:t>
+            </a:r>
+            <a:endParaRPr lang="en-US" sz="1250" dirty="0"/>
+          </a:p>
+        </p:txBody>
+      </p:sp>
+      <p:sp>
+        <p:nvSpPr>
+          <p:cNvPr id="11" name="Text 9"/>
+          <p:cNvSpPr txBox="1"/>
+          <p:nvPr/>
+        </p:nvSpPr>
+        <p:spPr>
+          <a:xfrm>
+            <a:off x="6673291" y="3474720"/>
+            <a:ext cx="4436669" cy="694944"/>
+          </a:xfrm>
+          <a:prstGeom prst="rect">
+            <a:avLst/>
+          </a:prstGeom>
+          <a:noFill/>
+          <a:ln/>
+        </p:spPr>
+        <p:txBody>
+          <a:bodyPr wrap="square" lIns="0" tIns="0" rIns="0" bIns="0" rtlCol="0" anchor="ctr"/>
+          <a:lstStyle/>
+          <a:p>
+            <a:pPr indent="0" marL="0">
+              <a:lnSpc>
+                <a:spcPct val="130000"/>
+              </a:lnSpc>
+              <a:buNone/>
+            </a:pPr>
+            <a:r>
+              <a:rPr lang="en-US" sz="1250" dirty="0">
+                <a:solidFill>
+                  <a:srgbClr val="23201D"/>
+                </a:solidFill>
+                <a:latin typeface="Yu Gothic" pitchFamily="34" charset="0"/>
+                <a:ea typeface="Yu Gothic" pitchFamily="34" charset="-122"/>
+                <a:cs typeface="Yu Gothic" pitchFamily="34" charset="-120"/>
+              </a:rPr>
+              <a:t>・前月の会議資料</a:t>
+            </a:r>
+            <a:endParaRPr lang="en-US" sz="1250" dirty="0"/>
+          </a:p>
+        </p:txBody>
+      </p:sp>
+      <p:sp>
+        <p:nvSpPr>
+          <p:cNvPr id="12" name="Shape 10"/>
+          <p:cNvSpPr/>
+          <p:nvPr/>
+        </p:nvSpPr>
+        <p:spPr>
+          <a:xfrm>
+            <a:off x="777240" y="4800600"/>
+            <a:ext cx="10607040" cy="777240"/>
+          </a:xfrm>
+          <a:prstGeom prst="rect">
+            <a:avLst/>
+          </a:prstGeom>
+          <a:solidFill>
+            <a:srgbClr val="EDE7DB"/>
+          </a:solidFill>
+          <a:ln w="12700">
+            <a:solidFill>
+              <a:srgbClr val="333333"/>
+            </a:solidFill>
+            <a:prstDash val="solid"/>
+          </a:ln>
+        </p:spPr>
+      </p:sp>
+      <p:sp>
+        <p:nvSpPr>
+          <p:cNvPr id="13" name="Text 11"/>
+          <p:cNvSpPr txBox="1"/>
+          <p:nvPr/>
+        </p:nvSpPr>
+        <p:spPr>
+          <a:xfrm>
+            <a:off x="1097280" y="4800600"/>
+            <a:ext cx="9966960" cy="777240"/>
+          </a:xfrm>
+          <a:prstGeom prst="rect">
+            <a:avLst/>
+          </a:prstGeom>
+          <a:noFill/>
+          <a:ln/>
+        </p:spPr>
+        <p:txBody>
+          <a:bodyPr wrap="square" lIns="0" tIns="0" rIns="0" bIns="0" rtlCol="0" anchor="ctr"/>
+          <a:lstStyle/>
+          <a:p>
+            <a:pPr indent="0" marL="0">
+              <a:buNone/>
+            </a:pPr>
+            <a:r>
+              <a:rPr lang="en-US" sz="1250" dirty="0">
+                <a:solidFill>
+                  <a:srgbClr val="5A534A"/>
+                </a:solidFill>
+                <a:latin typeface="Yu Gothic" pitchFamily="34" charset="0"/>
+                <a:ea typeface="Yu Gothic" pitchFamily="34" charset="-122"/>
+                <a:cs typeface="Yu Gothic" pitchFamily="34" charset="-120"/>
+              </a:rPr>
+              <a:t>この内容は、次回の3日前にあらためてお送りします。</a:t>
+            </a:r>
+            <a:endParaRPr lang="en-US" sz="1250" dirty="0"/>
+          </a:p>
+        </p:txBody>
+      </p:sp>
+      <p:sp>
+        <p:nvSpPr>
+          <p:cNvPr id="14" name="Text 12"/>
+          <p:cNvSpPr txBox="1"/>
+          <p:nvPr/>
+        </p:nvSpPr>
+        <p:spPr>
+          <a:xfrm>
+            <a:off x="777240" y="6382512"/>
+            <a:ext cx="7424928" cy="256032"/>
+          </a:xfrm>
+          <a:prstGeom prst="rect">
+            <a:avLst/>
+          </a:prstGeom>
+          <a:noFill/>
+          <a:ln/>
+        </p:spPr>
+        <p:txBody>
+          <a:bodyPr wrap="square" lIns="0" tIns="0" rIns="0" bIns="0" rtlCol="0" anchor="ctr"/>
+          <a:lstStyle/>
+          <a:p>
+            <a:pPr indent="0" marL="0">
+              <a:buNone/>
+            </a:pPr>
+            <a:r>
+              <a:rPr lang="en-US" sz="900" dirty="0">
+                <a:solidFill>
+                  <a:srgbClr val="8A8177"/>
+                </a:solidFill>
+                <a:latin typeface="Yu Gothic" pitchFamily="34" charset="0"/>
+                <a:ea typeface="Yu Gothic" pitchFamily="34" charset="-122"/>
+                <a:cs typeface="Yu Gothic" pitchFamily="34" charset="-120"/>
+              </a:rPr>
+              <a:t>第3回　文書とコミュニケーションのAI化</a:t>
+            </a:r>
+            <a:endParaRPr lang="en-US" sz="900" dirty="0"/>
+          </a:p>
+        </p:txBody>
+      </p:sp>
+      <p:sp>
+        <p:nvSpPr>
+          <p:cNvPr id="15" name="Text 13"/>
+          <p:cNvSpPr txBox="1"/>
+          <p:nvPr/>
+        </p:nvSpPr>
+        <p:spPr>
+          <a:xfrm>
+            <a:off x="8202168" y="6382512"/>
+            <a:ext cx="3182112" cy="256032"/>
+          </a:xfrm>
+          <a:prstGeom prst="rect">
+            <a:avLst/>
+          </a:prstGeom>
+          <a:noFill/>
+          <a:ln/>
+        </p:spPr>
+        <p:txBody>
+          <a:bodyPr wrap="square" lIns="0" tIns="0" rIns="0" bIns="0" rtlCol="0" anchor="ctr"/>
+          <a:lstStyle/>
+          <a:p>
+            <a:pPr algn="r" indent="0" marL="0">
+              <a:buNone/>
+            </a:pPr>
+            <a:r>
+              <a:rPr lang="en-US" sz="900" dirty="0">
+                <a:solidFill>
+                  <a:srgbClr val="8A8177"/>
+                </a:solidFill>
+                <a:latin typeface="Yu Gothic" pitchFamily="34" charset="0"/>
+                <a:ea typeface="Yu Gothic" pitchFamily="34" charset="-122"/>
+                <a:cs typeface="Yu Gothic" pitchFamily="34" charset="-120"/>
+              </a:rPr>
+              <a:t>次回まで</a:t>
+            </a:r>
+            <a:endParaRPr lang="en-US" sz="900" dirty="0"/>
+          </a:p>
+        </p:txBody>
+      </p:sp>
+    </p:spTree>
+  </p:cSld>
+  <p:clrMapOvr>
+    <a:masterClrMapping/>
+  </p:clrMapOvr>
+</p:sld>
+</file>
+
+<file path=ppt/slides/slide15.xml><?xml version="1.0" encoding="utf-8"?>
+<p:sld xmlns:a="http://schemas.openxmlformats.org/drawingml/2006/main" xmlns:r="http://schemas.openxmlformats.org/officeDocument/2006/relationships" xmlns:p="http://schemas.openxmlformats.org/presentationml/2006/main">
+  <p:cSld name="Slide 15">
     <p:bg>
       <p:bgPr>
         <a:solidFill>
@@ -8304,13 +10482,13 @@
             <a:r>
               <a:rPr lang="en-US" sz="1100" b="1" spc="250" kern="0" dirty="0">
                 <a:solidFill>
-                  <a:srgbClr val="2F4F6B"/>
-                </a:solidFill>
-                <a:latin typeface="Yu Gothic" pitchFamily="34" charset="0"/>
-                <a:ea typeface="Yu Gothic" pitchFamily="34" charset="-122"/>
-                <a:cs typeface="Yu Gothic" pitchFamily="34" charset="-120"/>
-              </a:rPr>
-              <a:t>演習</a:t>
+                  <a:srgbClr val="B04A2F"/>
+                </a:solidFill>
+                <a:latin typeface="Yu Gothic" pitchFamily="34" charset="0"/>
+                <a:ea typeface="Yu Gothic" pitchFamily="34" charset="-122"/>
+                <a:cs typeface="Yu Gothic" pitchFamily="34" charset="-120"/>
+              </a:rPr>
+              <a:t>想定問答</a:t>
             </a:r>
             <a:endParaRPr lang="en-US" sz="1100" dirty="0"/>
           </a:p>
@@ -8349,7 +10527,7 @@
                 <a:ea typeface="Yu Gothic" pitchFamily="34" charset="-122"/>
                 <a:cs typeface="Yu Gothic" pitchFamily="34" charset="-120"/>
               </a:rPr>
-              <a:t>今日、一緒にやること</a:t>
+              <a:t>この回で、よく聞かれること</a:t>
             </a:r>
             <a:endParaRPr lang="en-US" sz="2600" dirty="0"/>
           </a:p>
@@ -8357,53 +10535,14 @@
       </p:sp>
       <p:sp>
         <p:nvSpPr>
-          <p:cNvPr id="4" name="Text 2"/>
-          <p:cNvSpPr txBox="1"/>
-          <p:nvPr/>
-        </p:nvSpPr>
-        <p:spPr>
-          <a:xfrm>
-            <a:off x="777240" y="1572768"/>
-            <a:ext cx="10607040" cy="320040"/>
-          </a:xfrm>
-          <a:prstGeom prst="rect">
-            <a:avLst/>
-          </a:prstGeom>
-          <a:noFill/>
-          <a:ln/>
-        </p:spPr>
-        <p:txBody>
-          <a:bodyPr wrap="square" lIns="0" tIns="0" rIns="0" bIns="0" rtlCol="0" anchor="ctr"/>
-          <a:lstStyle/>
-          <a:p>
-            <a:pPr indent="0" marL="0">
-              <a:buNone/>
-            </a:pPr>
-            <a:r>
-              <a:rPr lang="en-US" sz="1250" b="1" dirty="0">
-                <a:solidFill>
-                  <a:srgbClr val="2F4F6B"/>
-                </a:solidFill>
-                <a:latin typeface="Yu Gothic" pitchFamily="34" charset="0"/>
-                <a:ea typeface="Yu Gothic" pitchFamily="34" charset="-122"/>
-                <a:cs typeface="Yu Gothic" pitchFamily="34" charset="-120"/>
-              </a:rPr>
-              <a:t>55分。操作するのはご自身です。</a:t>
-            </a:r>
-            <a:endParaRPr lang="en-US" sz="1250" dirty="0"/>
-          </a:p>
-        </p:txBody>
-      </p:sp>
-      <p:sp>
-        <p:nvSpPr>
-          <p:cNvPr id="5" name="Shape 3"/>
+          <p:cNvPr id="4" name="Shape 2"/>
           <p:cNvSpPr/>
           <p:nvPr/>
         </p:nvSpPr>
         <p:spPr>
           <a:xfrm>
-            <a:off x="777240" y="2148840"/>
-            <a:ext cx="3383280" cy="2880360"/>
+            <a:off x="777240" y="1737360"/>
+            <a:ext cx="10607040" cy="1170432"/>
           </a:xfrm>
           <a:prstGeom prst="rect">
             <a:avLst/>
@@ -8421,16 +10560,16 @@
       </p:sp>
       <p:sp>
         <p:nvSpPr>
-          <p:cNvPr id="6" name="Shape 4"/>
+          <p:cNvPr id="5" name="Shape 3"/>
           <p:cNvSpPr/>
           <p:nvPr/>
         </p:nvSpPr>
         <p:spPr>
           <a:xfrm>
-            <a:off x="1051560" y="2395728"/>
-            <a:ext cx="438912" cy="438912"/>
-          </a:xfrm>
-          <a:prstGeom prst="ellipse">
+            <a:off x="777240" y="1737360"/>
+            <a:ext cx="54864" cy="1170432"/>
+          </a:xfrm>
+          <a:prstGeom prst="rect">
             <a:avLst/>
           </a:prstGeom>
           <a:solidFill>
@@ -8446,95 +10585,53 @@
       </p:sp>
       <p:sp>
         <p:nvSpPr>
+          <p:cNvPr id="6" name="Text 4"/>
+          <p:cNvSpPr txBox="1"/>
+          <p:nvPr/>
+        </p:nvSpPr>
+        <p:spPr>
+          <a:xfrm>
+            <a:off x="1097280" y="1828800"/>
+            <a:ext cx="9966960" cy="384048"/>
+          </a:xfrm>
+          <a:prstGeom prst="rect">
+            <a:avLst/>
+          </a:prstGeom>
+          <a:noFill/>
+          <a:ln/>
+        </p:spPr>
+        <p:txBody>
+          <a:bodyPr wrap="square" lIns="0" tIns="0" rIns="0" bIns="0" rtlCol="0" anchor="ctr"/>
+          <a:lstStyle/>
+          <a:p>
+            <a:pPr indent="0" marL="0">
+              <a:buNone/>
+            </a:pPr>
+            <a:r>
+              <a:rPr lang="en-US" sz="1400" b="1" dirty="0">
+                <a:solidFill>
+                  <a:srgbClr val="2F4F6B"/>
+                </a:solidFill>
+                <a:latin typeface="Yu Gothic" pitchFamily="34" charset="0"/>
+                <a:ea typeface="Yu Gothic" pitchFamily="34" charset="-122"/>
+                <a:cs typeface="Yu Gothic" pitchFamily="34" charset="-120"/>
+              </a:rPr>
+              <a:t>「社員が使ってくれなかったらどうしますか」</a:t>
+            </a:r>
+            <a:endParaRPr lang="en-US" sz="1400" dirty="0"/>
+          </a:p>
+        </p:txBody>
+      </p:sp>
+      <p:sp>
+        <p:nvSpPr>
           <p:cNvPr id="7" name="Text 5"/>
           <p:cNvSpPr txBox="1"/>
           <p:nvPr/>
         </p:nvSpPr>
         <p:spPr>
           <a:xfrm>
-            <a:off x="1051560" y="2395728"/>
-            <a:ext cx="438912" cy="438912"/>
-          </a:xfrm>
-          <a:prstGeom prst="rect">
-            <a:avLst/>
-          </a:prstGeom>
-          <a:noFill/>
-          <a:ln/>
-        </p:spPr>
-        <p:txBody>
-          <a:bodyPr wrap="square" lIns="0" tIns="0" rIns="0" bIns="0" rtlCol="0" anchor="ctr"/>
-          <a:lstStyle/>
-          <a:p>
-            <a:pPr algn="ctr" indent="0" marL="0">
-              <a:buNone/>
-            </a:pPr>
-            <a:r>
-              <a:rPr lang="en-US" sz="1300" b="1" dirty="0">
-                <a:solidFill>
-                  <a:srgbClr val="FFFFFF"/>
-                </a:solidFill>
-                <a:latin typeface="Yu Gothic" pitchFamily="34" charset="0"/>
-                <a:ea typeface="Yu Gothic" pitchFamily="34" charset="-122"/>
-                <a:cs typeface="Yu Gothic" pitchFamily="34" charset="-120"/>
-              </a:rPr>
-              <a:t>1</a:t>
-            </a:r>
-            <a:endParaRPr lang="en-US" sz="1300" dirty="0"/>
-          </a:p>
-        </p:txBody>
-      </p:sp>
-      <p:sp>
-        <p:nvSpPr>
-          <p:cNvPr id="8" name="Text 6"/>
-          <p:cNvSpPr txBox="1"/>
-          <p:nvPr/>
-        </p:nvSpPr>
-        <p:spPr>
-          <a:xfrm>
-            <a:off x="1051560" y="2944368"/>
-            <a:ext cx="2834640" cy="731520"/>
-          </a:xfrm>
-          <a:prstGeom prst="rect">
-            <a:avLst/>
-          </a:prstGeom>
-          <a:noFill/>
-          <a:ln/>
-        </p:spPr>
-        <p:txBody>
-          <a:bodyPr wrap="square" lIns="0" tIns="0" rIns="0" bIns="0" rtlCol="0" anchor="ctr"/>
-          <a:lstStyle/>
-          <a:p>
-            <a:pPr indent="0" marL="0">
-              <a:lnSpc>
-                <a:spcPct val="125000"/>
-              </a:lnSpc>
-              <a:buNone/>
-            </a:pPr>
-            <a:r>
-              <a:rPr lang="en-US" sz="1450" b="1" dirty="0">
-                <a:solidFill>
-                  <a:srgbClr val="23201D"/>
-                </a:solidFill>
-                <a:latin typeface="Yu Gothic" pitchFamily="34" charset="0"/>
-                <a:ea typeface="Yu Gothic" pitchFamily="34" charset="-122"/>
-                <a:cs typeface="Yu Gothic" pitchFamily="34" charset="-120"/>
-              </a:rPr>
-              <a:t>実物を3種、テンプレート化する</a:t>
-            </a:r>
-            <a:endParaRPr lang="en-US" sz="1450" dirty="0"/>
-          </a:p>
-        </p:txBody>
-      </p:sp>
-      <p:sp>
-        <p:nvSpPr>
-          <p:cNvPr id="9" name="Text 7"/>
-          <p:cNvSpPr txBox="1"/>
-          <p:nvPr/>
-        </p:nvSpPr>
-        <p:spPr>
-          <a:xfrm>
-            <a:off x="1051560" y="3703320"/>
-            <a:ext cx="2834640" cy="1188720"/>
+            <a:off x="1097280" y="2231136"/>
+            <a:ext cx="9966960" cy="603504"/>
           </a:xfrm>
           <a:prstGeom prst="rect">
             <a:avLst/>
@@ -8553,30 +10650,30 @@
               <a:buNone/>
             </a:pPr>
             <a:r>
-              <a:rPr lang="en-US" sz="1150" dirty="0">
-                <a:solidFill>
-                  <a:srgbClr val="5A534A"/>
-                </a:solidFill>
-                <a:latin typeface="Yu Gothic" pitchFamily="34" charset="0"/>
-                <a:ea typeface="Yu Gothic" pitchFamily="34" charset="-122"/>
-                <a:cs typeface="Yu Gothic" pitchFamily="34" charset="-120"/>
-              </a:rPr>
-              <a:t>お持ちいただいた文書をそのまま使います</a:t>
-            </a:r>
-            <a:endParaRPr lang="en-US" sz="1150" dirty="0"/>
-          </a:p>
-        </p:txBody>
-      </p:sp>
-      <p:sp>
-        <p:nvSpPr>
-          <p:cNvPr id="10" name="Shape 8"/>
+              <a:rPr lang="en-US" sz="1250" dirty="0">
+                <a:solidFill>
+                  <a:srgbClr val="3F3933"/>
+                </a:solidFill>
+                <a:latin typeface="Yu Gothic" pitchFamily="34" charset="0"/>
+                <a:ea typeface="Yu Gothic" pitchFamily="34" charset="-122"/>
+                <a:cs typeface="Yu Gothic" pitchFamily="34" charset="-120"/>
+              </a:rPr>
+              <a:t>渡し方の問題であることがほとんどです。用途の1行と、確認事項が書かれていないテンプレートは使われません。今日その3条件を入れます。</a:t>
+            </a:r>
+            <a:endParaRPr lang="en-US" sz="1250" dirty="0"/>
+          </a:p>
+        </p:txBody>
+      </p:sp>
+      <p:sp>
+        <p:nvSpPr>
+          <p:cNvPr id="8" name="Shape 6"/>
           <p:cNvSpPr/>
           <p:nvPr/>
         </p:nvSpPr>
         <p:spPr>
           <a:xfrm>
-            <a:off x="4389120" y="2148840"/>
-            <a:ext cx="3383280" cy="2880360"/>
+            <a:off x="777240" y="3035808"/>
+            <a:ext cx="10607040" cy="1170432"/>
           </a:xfrm>
           <a:prstGeom prst="rect">
             <a:avLst/>
@@ -8594,16 +10691,16 @@
       </p:sp>
       <p:sp>
         <p:nvSpPr>
-          <p:cNvPr id="11" name="Shape 9"/>
+          <p:cNvPr id="9" name="Shape 7"/>
           <p:cNvSpPr/>
           <p:nvPr/>
         </p:nvSpPr>
         <p:spPr>
           <a:xfrm>
-            <a:off x="4663440" y="2395728"/>
-            <a:ext cx="438912" cy="438912"/>
-          </a:xfrm>
-          <a:prstGeom prst="ellipse">
+            <a:off x="777240" y="3035808"/>
+            <a:ext cx="54864" cy="1170432"/>
+          </a:xfrm>
+          <a:prstGeom prst="rect">
             <a:avLst/>
           </a:prstGeom>
           <a:solidFill>
@@ -8619,95 +10716,53 @@
       </p:sp>
       <p:sp>
         <p:nvSpPr>
-          <p:cNvPr id="12" name="Text 10"/>
-          <p:cNvSpPr txBox="1"/>
-          <p:nvPr/>
-        </p:nvSpPr>
-        <p:spPr>
-          <a:xfrm>
-            <a:off x="4663440" y="2395728"/>
-            <a:ext cx="438912" cy="438912"/>
-          </a:xfrm>
-          <a:prstGeom prst="rect">
-            <a:avLst/>
-          </a:prstGeom>
-          <a:noFill/>
-          <a:ln/>
-        </p:spPr>
-        <p:txBody>
-          <a:bodyPr wrap="square" lIns="0" tIns="0" rIns="0" bIns="0" rtlCol="0" anchor="ctr"/>
-          <a:lstStyle/>
-          <a:p>
-            <a:pPr algn="ctr" indent="0" marL="0">
-              <a:buNone/>
-            </a:pPr>
-            <a:r>
-              <a:rPr lang="en-US" sz="1300" b="1" dirty="0">
-                <a:solidFill>
-                  <a:srgbClr val="FFFFFF"/>
-                </a:solidFill>
-                <a:latin typeface="Yu Gothic" pitchFamily="34" charset="0"/>
-                <a:ea typeface="Yu Gothic" pitchFamily="34" charset="-122"/>
-                <a:cs typeface="Yu Gothic" pitchFamily="34" charset="-120"/>
-              </a:rPr>
-              <a:t>2</a:t>
-            </a:r>
-            <a:endParaRPr lang="en-US" sz="1300" dirty="0"/>
-          </a:p>
-        </p:txBody>
-      </p:sp>
-      <p:sp>
-        <p:nvSpPr>
-          <p:cNvPr id="13" name="Text 11"/>
-          <p:cNvSpPr txBox="1"/>
-          <p:nvPr/>
-        </p:nvSpPr>
-        <p:spPr>
-          <a:xfrm>
-            <a:off x="4663440" y="2944368"/>
-            <a:ext cx="2834640" cy="731520"/>
-          </a:xfrm>
-          <a:prstGeom prst="rect">
-            <a:avLst/>
-          </a:prstGeom>
-          <a:noFill/>
-          <a:ln/>
-        </p:spPr>
-        <p:txBody>
-          <a:bodyPr wrap="square" lIns="0" tIns="0" rIns="0" bIns="0" rtlCol="0" anchor="ctr"/>
-          <a:lstStyle/>
-          <a:p>
-            <a:pPr indent="0" marL="0">
-              <a:lnSpc>
-                <a:spcPct val="125000"/>
-              </a:lnSpc>
-              <a:buNone/>
-            </a:pPr>
-            <a:r>
-              <a:rPr lang="en-US" sz="1450" b="1" dirty="0">
-                <a:solidFill>
-                  <a:srgbClr val="23201D"/>
-                </a:solidFill>
-                <a:latin typeface="Yu Gothic" pitchFamily="34" charset="0"/>
-                <a:ea typeface="Yu Gothic" pitchFamily="34" charset="-122"/>
-                <a:cs typeface="Yu Gothic" pitchFamily="34" charset="-120"/>
-              </a:rPr>
-              <a:t>1つは、社員に渡す前提で作る</a:t>
-            </a:r>
-            <a:endParaRPr lang="en-US" sz="1450" dirty="0"/>
-          </a:p>
-        </p:txBody>
-      </p:sp>
-      <p:sp>
-        <p:nvSpPr>
-          <p:cNvPr id="14" name="Text 12"/>
-          <p:cNvSpPr txBox="1"/>
-          <p:nvPr/>
-        </p:nvSpPr>
-        <p:spPr>
-          <a:xfrm>
-            <a:off x="4663440" y="3703320"/>
-            <a:ext cx="2834640" cy="1188720"/>
+          <p:cNvPr id="10" name="Text 8"/>
+          <p:cNvSpPr txBox="1"/>
+          <p:nvPr/>
+        </p:nvSpPr>
+        <p:spPr>
+          <a:xfrm>
+            <a:off x="1097280" y="3127248"/>
+            <a:ext cx="9966960" cy="384048"/>
+          </a:xfrm>
+          <a:prstGeom prst="rect">
+            <a:avLst/>
+          </a:prstGeom>
+          <a:noFill/>
+          <a:ln/>
+        </p:spPr>
+        <p:txBody>
+          <a:bodyPr wrap="square" lIns="0" tIns="0" rIns="0" bIns="0" rtlCol="0" anchor="ctr"/>
+          <a:lstStyle/>
+          <a:p>
+            <a:pPr indent="0" marL="0">
+              <a:buNone/>
+            </a:pPr>
+            <a:r>
+              <a:rPr lang="en-US" sz="1400" b="1" dirty="0">
+                <a:solidFill>
+                  <a:srgbClr val="2F4F6B"/>
+                </a:solidFill>
+                <a:latin typeface="Yu Gothic" pitchFamily="34" charset="0"/>
+                <a:ea typeface="Yu Gothic" pitchFamily="34" charset="-122"/>
+                <a:cs typeface="Yu Gothic" pitchFamily="34" charset="-120"/>
+              </a:rPr>
+              <a:t>「AIが書いた文章だと、相手に分かりますか」</a:t>
+            </a:r>
+            <a:endParaRPr lang="en-US" sz="1400" dirty="0"/>
+          </a:p>
+        </p:txBody>
+      </p:sp>
+      <p:sp>
+        <p:nvSpPr>
+          <p:cNvPr id="11" name="Text 9"/>
+          <p:cNvSpPr txBox="1"/>
+          <p:nvPr/>
+        </p:nvSpPr>
+        <p:spPr>
+          <a:xfrm>
+            <a:off x="1097280" y="3529584"/>
+            <a:ext cx="9966960" cy="603504"/>
           </a:xfrm>
           <a:prstGeom prst="rect">
             <a:avLst/>
@@ -8726,30 +10781,30 @@
               <a:buNone/>
             </a:pPr>
             <a:r>
-              <a:rPr lang="en-US" sz="1150" dirty="0">
-                <a:solidFill>
-                  <a:srgbClr val="5A534A"/>
-                </a:solidFill>
-                <a:latin typeface="Yu Gothic" pitchFamily="34" charset="0"/>
-                <a:ea typeface="Yu Gothic" pitchFamily="34" charset="-122"/>
-                <a:cs typeface="Yu Gothic" pitchFamily="34" charset="-120"/>
-              </a:rPr>
-              <a:t>用途の1行・差し替え箇所・確認事項の5行を必ず入れます</a:t>
-            </a:r>
-            <a:endParaRPr lang="en-US" sz="1150" dirty="0"/>
-          </a:p>
-        </p:txBody>
-      </p:sp>
-      <p:sp>
-        <p:nvSpPr>
-          <p:cNvPr id="15" name="Shape 13"/>
+              <a:rPr lang="en-US" sz="1250" dirty="0">
+                <a:solidFill>
+                  <a:srgbClr val="3F3933"/>
+                </a:solidFill>
+                <a:latin typeface="Yu Gothic" pitchFamily="34" charset="0"/>
+                <a:ea typeface="Yu Gothic" pitchFamily="34" charset="-122"/>
+                <a:cs typeface="Yu Gothic" pitchFamily="34" charset="-120"/>
+              </a:rPr>
+              <a:t>自社の文書3本を読ませて文体を合わせれば、まず分かりません。むしろ、社内で文書の質が揃うほうが効果として大きくなります。</a:t>
+            </a:r>
+            <a:endParaRPr lang="en-US" sz="1250" dirty="0"/>
+          </a:p>
+        </p:txBody>
+      </p:sp>
+      <p:sp>
+        <p:nvSpPr>
+          <p:cNvPr id="12" name="Shape 10"/>
           <p:cNvSpPr/>
           <p:nvPr/>
         </p:nvSpPr>
         <p:spPr>
           <a:xfrm>
-            <a:off x="8001000" y="2148840"/>
-            <a:ext cx="3383280" cy="2880360"/>
+            <a:off x="777240" y="4334256"/>
+            <a:ext cx="10607040" cy="1170432"/>
           </a:xfrm>
           <a:prstGeom prst="rect">
             <a:avLst/>
@@ -8767,16 +10822,16 @@
       </p:sp>
       <p:sp>
         <p:nvSpPr>
-          <p:cNvPr id="16" name="Shape 14"/>
+          <p:cNvPr id="13" name="Shape 11"/>
           <p:cNvSpPr/>
           <p:nvPr/>
         </p:nvSpPr>
         <p:spPr>
           <a:xfrm>
-            <a:off x="8275320" y="2395728"/>
-            <a:ext cx="438912" cy="438912"/>
-          </a:xfrm>
-          <a:prstGeom prst="ellipse">
+            <a:off x="777240" y="4334256"/>
+            <a:ext cx="54864" cy="1170432"/>
+          </a:xfrm>
+          <a:prstGeom prst="rect">
             <a:avLst/>
           </a:prstGeom>
           <a:solidFill>
@@ -8792,95 +10847,53 @@
       </p:sp>
       <p:sp>
         <p:nvSpPr>
-          <p:cNvPr id="17" name="Text 15"/>
-          <p:cNvSpPr txBox="1"/>
-          <p:nvPr/>
-        </p:nvSpPr>
-        <p:spPr>
-          <a:xfrm>
-            <a:off x="8275320" y="2395728"/>
-            <a:ext cx="438912" cy="438912"/>
-          </a:xfrm>
-          <a:prstGeom prst="rect">
-            <a:avLst/>
-          </a:prstGeom>
-          <a:noFill/>
-          <a:ln/>
-        </p:spPr>
-        <p:txBody>
-          <a:bodyPr wrap="square" lIns="0" tIns="0" rIns="0" bIns="0" rtlCol="0" anchor="ctr"/>
-          <a:lstStyle/>
-          <a:p>
-            <a:pPr algn="ctr" indent="0" marL="0">
-              <a:buNone/>
-            </a:pPr>
-            <a:r>
-              <a:rPr lang="en-US" sz="1300" b="1" dirty="0">
-                <a:solidFill>
-                  <a:srgbClr val="FFFFFF"/>
-                </a:solidFill>
-                <a:latin typeface="Yu Gothic" pitchFamily="34" charset="0"/>
-                <a:ea typeface="Yu Gothic" pitchFamily="34" charset="-122"/>
-                <a:cs typeface="Yu Gothic" pitchFamily="34" charset="-120"/>
-              </a:rPr>
-              <a:t>3</a:t>
-            </a:r>
-            <a:endParaRPr lang="en-US" sz="1300" dirty="0"/>
-          </a:p>
-        </p:txBody>
-      </p:sp>
-      <p:sp>
-        <p:nvSpPr>
-          <p:cNvPr id="18" name="Text 16"/>
-          <p:cNvSpPr txBox="1"/>
-          <p:nvPr/>
-        </p:nvSpPr>
-        <p:spPr>
-          <a:xfrm>
-            <a:off x="8275320" y="2944368"/>
-            <a:ext cx="2834640" cy="731520"/>
-          </a:xfrm>
-          <a:prstGeom prst="rect">
-            <a:avLst/>
-          </a:prstGeom>
-          <a:noFill/>
-          <a:ln/>
-        </p:spPr>
-        <p:txBody>
-          <a:bodyPr wrap="square" lIns="0" tIns="0" rIns="0" bIns="0" rtlCol="0" anchor="ctr"/>
-          <a:lstStyle/>
-          <a:p>
-            <a:pPr indent="0" marL="0">
-              <a:lnSpc>
-                <a:spcPct val="125000"/>
-              </a:lnSpc>
-              <a:buNone/>
-            </a:pPr>
-            <a:r>
-              <a:rPr lang="en-US" sz="1450" b="1" dirty="0">
-                <a:solidFill>
-                  <a:srgbClr val="23201D"/>
-                </a:solidFill>
-                <a:latin typeface="Yu Gothic" pitchFamily="34" charset="0"/>
-                <a:ea typeface="Yu Gothic" pitchFamily="34" charset="-122"/>
-                <a:cs typeface="Yu Gothic" pitchFamily="34" charset="-120"/>
-              </a:rPr>
-              <a:t>渡し方の一言まで決める</a:t>
-            </a:r>
-            <a:endParaRPr lang="en-US" sz="1450" dirty="0"/>
-          </a:p>
-        </p:txBody>
-      </p:sp>
-      <p:sp>
-        <p:nvSpPr>
-          <p:cNvPr id="19" name="Text 17"/>
-          <p:cNvSpPr txBox="1"/>
-          <p:nvPr/>
-        </p:nvSpPr>
-        <p:spPr>
-          <a:xfrm>
-            <a:off x="8275320" y="3703320"/>
-            <a:ext cx="2834640" cy="1188720"/>
+          <p:cNvPr id="14" name="Text 12"/>
+          <p:cNvSpPr txBox="1"/>
+          <p:nvPr/>
+        </p:nvSpPr>
+        <p:spPr>
+          <a:xfrm>
+            <a:off x="1097280" y="4425696"/>
+            <a:ext cx="9966960" cy="384048"/>
+          </a:xfrm>
+          <a:prstGeom prst="rect">
+            <a:avLst/>
+          </a:prstGeom>
+          <a:noFill/>
+          <a:ln/>
+        </p:spPr>
+        <p:txBody>
+          <a:bodyPr wrap="square" lIns="0" tIns="0" rIns="0" bIns="0" rtlCol="0" anchor="ctr"/>
+          <a:lstStyle/>
+          <a:p>
+            <a:pPr indent="0" marL="0">
+              <a:buNone/>
+            </a:pPr>
+            <a:r>
+              <a:rPr lang="en-US" sz="1400" b="1" dirty="0">
+                <a:solidFill>
+                  <a:srgbClr val="2F4F6B"/>
+                </a:solidFill>
+                <a:latin typeface="Yu Gothic" pitchFamily="34" charset="0"/>
+                <a:ea typeface="Yu Gothic" pitchFamily="34" charset="-122"/>
+                <a:cs typeface="Yu Gothic" pitchFamily="34" charset="-120"/>
+              </a:rPr>
+              <a:t>「議事録の精度が低いのですが」</a:t>
+            </a:r>
+            <a:endParaRPr lang="en-US" sz="1400" dirty="0"/>
+          </a:p>
+        </p:txBody>
+      </p:sp>
+      <p:sp>
+        <p:nvSpPr>
+          <p:cNvPr id="15" name="Text 13"/>
+          <p:cNvSpPr txBox="1"/>
+          <p:nvPr/>
+        </p:nvSpPr>
+        <p:spPr>
+          <a:xfrm>
+            <a:off x="1097280" y="4828032"/>
+            <a:ext cx="9966960" cy="603504"/>
           </a:xfrm>
           <a:prstGeom prst="rect">
             <a:avLst/>
@@ -8899,23 +10912,23 @@
               <a:buNone/>
             </a:pPr>
             <a:r>
-              <a:rPr lang="en-US" sz="1150" dirty="0">
-                <a:solidFill>
-                  <a:srgbClr val="5A534A"/>
-                </a:solidFill>
-                <a:latin typeface="Yu Gothic" pitchFamily="34" charset="0"/>
-                <a:ea typeface="Yu Gothic" pitchFamily="34" charset="-122"/>
-                <a:cs typeface="Yu Gothic" pitchFamily="34" charset="-120"/>
-              </a:rPr>
-              <a:t>誰に、どう説明して渡すか。ここまで決めないと使われません</a:t>
-            </a:r>
-            <a:endParaRPr lang="en-US" sz="1150" dirty="0"/>
-          </a:p>
-        </p:txBody>
-      </p:sp>
-      <p:sp>
-        <p:nvSpPr>
-          <p:cNvPr id="20" name="Text 18"/>
+              <a:rPr lang="en-US" sz="1250" dirty="0">
+                <a:solidFill>
+                  <a:srgbClr val="3F3933"/>
+                </a:solidFill>
+                <a:latin typeface="Yu Gothic" pitchFamily="34" charset="0"/>
+                <a:ea typeface="Yu Gothic" pitchFamily="34" charset="-122"/>
+                <a:cs typeface="Yu Gothic" pitchFamily="34" charset="-120"/>
+              </a:rPr>
+              <a:t>録音の質と、話者の重なりが原因です。要約の前に登場人物と議題を先に伝えるだけで、大きく変わります。今日やってみます。</a:t>
+            </a:r>
+            <a:endParaRPr lang="en-US" sz="1250" dirty="0"/>
+          </a:p>
+        </p:txBody>
+      </p:sp>
+      <p:sp>
+        <p:nvSpPr>
+          <p:cNvPr id="16" name="Text 14"/>
           <p:cNvSpPr txBox="1"/>
           <p:nvPr/>
         </p:nvSpPr>
@@ -8954,7 +10967,7 @@
       </p:sp>
       <p:sp>
         <p:nvSpPr>
-          <p:cNvPr id="21" name="Text 19"/>
+          <p:cNvPr id="17" name="Text 15"/>
           <p:cNvSpPr txBox="1"/>
           <p:nvPr/>
         </p:nvSpPr>
@@ -8985,7 +10998,7 @@
                 <a:ea typeface="Yu Gothic" pitchFamily="34" charset="-122"/>
                 <a:cs typeface="Yu Gothic" pitchFamily="34" charset="-120"/>
               </a:rPr>
-              <a:t>演習</a:t>
+              <a:t>想定問答</a:t>
             </a:r>
             <a:endParaRPr lang="en-US" sz="900" dirty="0"/>
           </a:p>

--- a/slides/pptx/第03回_文書とコミュニケーションのAI化.pptx
+++ b/slides/pptx/第03回_文書とコミュニケーションのAI化.pptx
@@ -4604,7 +4604,7 @@
                 <a:ea typeface="Yu Gothic" pitchFamily="34" charset="-122"/>
                 <a:cs typeface="Yu Gothic" pitchFamily="34" charset="-120"/>
               </a:rPr>
-              <a:t>他社では</a:t>
+              <a:t>よくある型</a:t>
             </a:r>
             <a:endParaRPr lang="en-US" sz="900" dirty="0"/>
           </a:p>
@@ -4646,7 +4646,7 @@
                 <a:ea typeface="Yu Gothic" pitchFamily="34" charset="-122"/>
                 <a:cs typeface="Yu Gothic" pitchFamily="34" charset="-120"/>
               </a:rPr>
-              <a:t>ある会社では、議事録を全文書き起こしからではなく、箇条書きメモ＋AIで整形する形に変えました。効果は会議後30分が5分に。ただ、それより大きかったのは「議事録が必ず当日中に出る」ようになったことでした。</a:t>
+              <a:t>議事録は、全文の書き起こしより「箇条書きメモ＋整形」のほうが早い。ただし本当に効くのは時間ではなく、当日中に必ず出るようになること。</a:t>
             </a:r>
             <a:endParaRPr lang="en-US" sz="1250" dirty="0"/>
           </a:p>

--- a/slides/pptx/第03回_文書とコミュニケーションのAI化.pptx
+++ b/slides/pptx/第03回_文書とコミュニケーションのAI化.pptx
@@ -2304,6 +2304,10 @@
             <a:prstDash val="solid"/>
           </a:ln>
         </p:spPr>
+        <p:txBody>
+          <a:bodyPr/>
+          <a:p/>
+        </p:txBody>
       </p:sp>
       <p:sp>
         <p:nvSpPr>
@@ -2517,6 +2521,10 @@
             <a:prstDash val="solid"/>
           </a:ln>
         </p:spPr>
+        <p:txBody>
+          <a:bodyPr/>
+          <a:p/>
+        </p:txBody>
       </p:sp>
       <p:sp>
         <p:nvSpPr>
@@ -2581,6 +2589,10 @@
             <a:prstDash val="solid"/>
           </a:ln>
         </p:spPr>
+        <p:txBody>
+          <a:bodyPr/>
+          <a:p/>
+        </p:txBody>
       </p:sp>
       <p:sp>
         <p:nvSpPr>
@@ -2648,6 +2660,10 @@
             <a:prstDash val="solid"/>
           </a:ln>
         </p:spPr>
+        <p:txBody>
+          <a:bodyPr/>
+          <a:p/>
+        </p:txBody>
       </p:sp>
       <p:sp>
         <p:nvSpPr>
@@ -2712,6 +2728,10 @@
             <a:prstDash val="solid"/>
           </a:ln>
         </p:spPr>
+        <p:txBody>
+          <a:bodyPr/>
+          <a:p/>
+        </p:txBody>
       </p:sp>
       <p:sp>
         <p:nvSpPr>
@@ -2779,6 +2799,10 @@
             <a:prstDash val="solid"/>
           </a:ln>
         </p:spPr>
+        <p:txBody>
+          <a:bodyPr/>
+          <a:p/>
+        </p:txBody>
       </p:sp>
       <p:sp>
         <p:nvSpPr>
@@ -2843,6 +2867,10 @@
             <a:prstDash val="solid"/>
           </a:ln>
         </p:spPr>
+        <p:txBody>
+          <a:bodyPr/>
+          <a:p/>
+        </p:txBody>
       </p:sp>
       <p:sp>
         <p:nvSpPr>
@@ -3068,7 +3096,7 @@
                 <a:ea typeface="Yu Gothic" pitchFamily="34" charset="-122"/>
                 <a:cs typeface="Yu Gothic" pitchFamily="34" charset="-120"/>
               </a:rPr>
-              <a:t>演習</a:t>
+              <a:t>実演</a:t>
             </a:r>
             <a:endParaRPr lang="en-US" sz="1100" dirty="0"/>
           </a:p>
@@ -3107,7 +3135,7 @@
                 <a:ea typeface="Yu Gothic" pitchFamily="34" charset="-122"/>
                 <a:cs typeface="Yu Gothic" pitchFamily="34" charset="-120"/>
               </a:rPr>
-              <a:t>今日、一緒にやること</a:t>
+              <a:t>今日、画面でお見せすること</a:t>
             </a:r>
             <a:endParaRPr lang="en-US" sz="2600" dirty="0"/>
           </a:p>
@@ -3146,7 +3174,7 @@
                 <a:ea typeface="Yu Gothic" pitchFamily="34" charset="-122"/>
                 <a:cs typeface="Yu Gothic" pitchFamily="34" charset="-120"/>
               </a:rPr>
-              <a:t>55分。操作するのはご自身です。</a:t>
+              <a:t>55分。講師の画面でお見せします。</a:t>
             </a:r>
             <a:endParaRPr lang="en-US" sz="1250" dirty="0"/>
           </a:p>
@@ -3176,6 +3204,10 @@
             <a:prstDash val="solid"/>
           </a:ln>
         </p:spPr>
+        <p:txBody>
+          <a:bodyPr/>
+          <a:p/>
+        </p:txBody>
       </p:sp>
       <p:sp>
         <p:nvSpPr>
@@ -3201,6 +3233,10 @@
             <a:prstDash val="solid"/>
           </a:ln>
         </p:spPr>
+        <p:txBody>
+          <a:bodyPr/>
+          <a:p/>
+        </p:txBody>
       </p:sp>
       <p:sp>
         <p:nvSpPr>
@@ -3349,6 +3385,10 @@
             <a:prstDash val="solid"/>
           </a:ln>
         </p:spPr>
+        <p:txBody>
+          <a:bodyPr/>
+          <a:p/>
+        </p:txBody>
       </p:sp>
       <p:sp>
         <p:nvSpPr>
@@ -3374,6 +3414,10 @@
             <a:prstDash val="solid"/>
           </a:ln>
         </p:spPr>
+        <p:txBody>
+          <a:bodyPr/>
+          <a:p/>
+        </p:txBody>
       </p:sp>
       <p:sp>
         <p:nvSpPr>
@@ -3522,6 +3566,10 @@
             <a:prstDash val="solid"/>
           </a:ln>
         </p:spPr>
+        <p:txBody>
+          <a:bodyPr/>
+          <a:p/>
+        </p:txBody>
       </p:sp>
       <p:sp>
         <p:nvSpPr>
@@ -3547,6 +3595,10 @@
             <a:prstDash val="solid"/>
           </a:ln>
         </p:spPr>
+        <p:txBody>
+          <a:bodyPr/>
+          <a:p/>
+        </p:txBody>
       </p:sp>
       <p:sp>
         <p:nvSpPr>
@@ -3743,7 +3795,7 @@
                 <a:ea typeface="Yu Gothic" pitchFamily="34" charset="-122"/>
                 <a:cs typeface="Yu Gothic" pitchFamily="34" charset="-120"/>
               </a:rPr>
-              <a:t>演習</a:t>
+              <a:t>実演</a:t>
             </a:r>
             <a:endParaRPr lang="en-US" sz="900" dirty="0"/>
           </a:p>
@@ -3922,6 +3974,10 @@
             <a:prstDash val="solid"/>
           </a:ln>
         </p:spPr>
+        <p:txBody>
+          <a:bodyPr/>
+          <a:p/>
+        </p:txBody>
       </p:sp>
       <p:sp>
         <p:nvSpPr>
@@ -3947,6 +4003,10 @@
             <a:prstDash val="solid"/>
           </a:ln>
         </p:spPr>
+        <p:txBody>
+          <a:bodyPr/>
+          <a:p/>
+        </p:txBody>
       </p:sp>
       <p:sp>
         <p:nvSpPr>
@@ -4053,6 +4113,10 @@
             <a:prstDash val="solid"/>
           </a:ln>
         </p:spPr>
+        <p:txBody>
+          <a:bodyPr/>
+          <a:p/>
+        </p:txBody>
       </p:sp>
       <p:sp>
         <p:nvSpPr>
@@ -4078,6 +4142,10 @@
             <a:prstDash val="solid"/>
           </a:ln>
         </p:spPr>
+        <p:txBody>
+          <a:bodyPr/>
+          <a:p/>
+        </p:txBody>
       </p:sp>
       <p:sp>
         <p:nvSpPr>
@@ -4184,6 +4252,10 @@
             <a:prstDash val="solid"/>
           </a:ln>
         </p:spPr>
+        <p:txBody>
+          <a:bodyPr/>
+          <a:p/>
+        </p:txBody>
       </p:sp>
       <p:sp>
         <p:nvSpPr>
@@ -4209,6 +4281,10 @@
             <a:prstDash val="solid"/>
           </a:ln>
         </p:spPr>
+        <p:txBody>
+          <a:bodyPr/>
+          <a:p/>
+        </p:txBody>
       </p:sp>
       <p:sp>
         <p:nvSpPr>
@@ -4503,6 +4579,10 @@
             <a:prstDash val="solid"/>
           </a:ln>
         </p:spPr>
+        <p:txBody>
+          <a:bodyPr/>
+          <a:p/>
+        </p:txBody>
       </p:sp>
       <p:sp>
         <p:nvSpPr>
@@ -4570,6 +4650,10 @@
             <a:prstDash val="solid"/>
           </a:ln>
         </p:spPr>
+        <p:txBody>
+          <a:bodyPr/>
+          <a:p/>
+        </p:txBody>
       </p:sp>
       <p:sp>
         <p:nvSpPr>
@@ -4903,6 +4987,10 @@
             <a:prstDash val="solid"/>
           </a:ln>
         </p:spPr>
+        <p:txBody>
+          <a:bodyPr/>
+          <a:p/>
+        </p:txBody>
       </p:sp>
       <p:sp>
         <p:nvSpPr>
@@ -5009,6 +5097,10 @@
             <a:prstDash val="solid"/>
           </a:ln>
         </p:spPr>
+        <p:txBody>
+          <a:bodyPr/>
+          <a:p/>
+        </p:txBody>
       </p:sp>
       <p:sp>
         <p:nvSpPr>
@@ -5157,6 +5249,10 @@
             <a:prstDash val="solid"/>
           </a:ln>
         </p:spPr>
+        <p:txBody>
+          <a:bodyPr/>
+          <a:p/>
+        </p:txBody>
       </p:sp>
       <p:sp>
         <p:nvSpPr>
@@ -5409,6 +5505,10 @@
             <a:prstDash val="solid"/>
           </a:ln>
         </p:spPr>
+        <p:txBody>
+          <a:bodyPr/>
+          <a:p/>
+        </p:txBody>
       </p:sp>
       <p:sp>
         <p:nvSpPr>
@@ -5706,6 +5806,10 @@
             <a:prstDash val="solid"/>
           </a:ln>
         </p:spPr>
+        <p:txBody>
+          <a:bodyPr/>
+          <a:p/>
+        </p:txBody>
       </p:sp>
       <p:sp>
         <p:nvSpPr>
@@ -5809,6 +5913,10 @@
             <a:prstDash val="solid"/>
           </a:ln>
         </p:spPr>
+        <p:txBody>
+          <a:bodyPr/>
+          <a:p/>
+        </p:txBody>
       </p:sp>
       <p:sp>
         <p:nvSpPr>
@@ -5912,6 +6020,10 @@
             <a:prstDash val="solid"/>
           </a:ln>
         </p:spPr>
+        <p:txBody>
+          <a:bodyPr/>
+          <a:p/>
+        </p:txBody>
       </p:sp>
       <p:sp>
         <p:nvSpPr>
@@ -6015,6 +6127,10 @@
             <a:prstDash val="solid"/>
           </a:ln>
         </p:spPr>
+        <p:txBody>
+          <a:bodyPr/>
+          <a:p/>
+        </p:txBody>
       </p:sp>
       <p:sp>
         <p:nvSpPr>
@@ -6273,6 +6389,10 @@
             <a:prstDash val="solid"/>
           </a:ln>
         </p:spPr>
+        <p:txBody>
+          <a:bodyPr/>
+          <a:p/>
+        </p:txBody>
       </p:sp>
       <p:sp>
         <p:nvSpPr>
@@ -6340,6 +6460,10 @@
             <a:prstDash val="solid"/>
           </a:ln>
         </p:spPr>
+        <p:txBody>
+          <a:bodyPr/>
+          <a:p/>
+        </p:txBody>
       </p:sp>
       <p:sp>
         <p:nvSpPr>
@@ -6569,7 +6693,7 @@
                 <a:ea typeface="Yu Gothic" pitchFamily="34" charset="-122"/>
                 <a:cs typeface="Yu Gothic" pitchFamily="34" charset="-120"/>
               </a:rPr>
-              <a:t>一緒に手を動かす</a:t>
+              <a:t>画面で順にお見せする</a:t>
             </a:r>
             <a:endParaRPr lang="en-US" sz="1100" dirty="0"/>
           </a:p>
@@ -6943,6 +7067,10 @@
             <a:prstDash val="solid"/>
           </a:ln>
         </p:spPr>
+        <p:txBody>
+          <a:bodyPr/>
+          <a:p/>
+        </p:txBody>
       </p:sp>
       <p:sp>
         <p:nvSpPr>
@@ -6968,6 +7096,10 @@
             <a:prstDash val="solid"/>
           </a:ln>
         </p:spPr>
+        <p:txBody>
+          <a:bodyPr/>
+          <a:p/>
+        </p:txBody>
       </p:sp>
       <p:sp>
         <p:nvSpPr>
@@ -7113,6 +7245,10 @@
             <a:prstDash val="solid"/>
           </a:ln>
         </p:spPr>
+        <p:txBody>
+          <a:bodyPr/>
+          <a:p/>
+        </p:txBody>
       </p:sp>
       <p:sp>
         <p:nvSpPr>
@@ -7138,6 +7274,10 @@
             <a:prstDash val="solid"/>
           </a:ln>
         </p:spPr>
+        <p:txBody>
+          <a:bodyPr/>
+          <a:p/>
+        </p:txBody>
       </p:sp>
       <p:sp>
         <p:nvSpPr>
@@ -7283,6 +7423,10 @@
             <a:prstDash val="solid"/>
           </a:ln>
         </p:spPr>
+        <p:txBody>
+          <a:bodyPr/>
+          <a:p/>
+        </p:txBody>
       </p:sp>
       <p:sp>
         <p:nvSpPr>
@@ -7308,6 +7452,10 @@
             <a:prstDash val="solid"/>
           </a:ln>
         </p:spPr>
+        <p:txBody>
+          <a:bodyPr/>
+          <a:p/>
+        </p:txBody>
       </p:sp>
       <p:sp>
         <p:nvSpPr>
@@ -7680,6 +7828,10 @@
             <a:prstDash val="solid"/>
           </a:ln>
         </p:spPr>
+        <p:txBody>
+          <a:bodyPr/>
+          <a:p/>
+        </p:txBody>
       </p:sp>
       <p:sp>
         <p:nvSpPr>
@@ -7705,6 +7857,10 @@
             <a:prstDash val="solid"/>
           </a:ln>
         </p:spPr>
+        <p:txBody>
+          <a:bodyPr/>
+          <a:p/>
+        </p:txBody>
       </p:sp>
       <p:sp>
         <p:nvSpPr>
@@ -8419,6 +8575,10 @@
             <a:prstDash val="solid"/>
           </a:ln>
         </p:spPr>
+        <p:txBody>
+          <a:bodyPr/>
+          <a:p/>
+        </p:txBody>
       </p:sp>
       <p:sp>
         <p:nvSpPr>
@@ -8525,6 +8685,10 @@
             <a:prstDash val="solid"/>
           </a:ln>
         </p:spPr>
+        <p:txBody>
+          <a:bodyPr/>
+          <a:p/>
+        </p:txBody>
       </p:sp>
       <p:sp>
         <p:nvSpPr>
@@ -8757,6 +8921,10 @@
             <a:prstDash val="solid"/>
           </a:ln>
         </p:spPr>
+        <p:txBody>
+          <a:bodyPr/>
+          <a:p/>
+        </p:txBody>
       </p:sp>
       <p:sp>
         <p:nvSpPr>
@@ -8824,6 +8992,10 @@
             <a:prstDash val="solid"/>
           </a:ln>
         </p:spPr>
+        <p:txBody>
+          <a:bodyPr/>
+          <a:p/>
+        </p:txBody>
       </p:sp>
       <p:sp>
         <p:nvSpPr>
@@ -9076,6 +9248,10 @@
             <a:prstDash val="solid"/>
           </a:ln>
         </p:spPr>
+        <p:txBody>
+          <a:bodyPr/>
+          <a:p/>
+        </p:txBody>
       </p:sp>
       <p:sp>
         <p:nvSpPr>
@@ -9182,6 +9358,10 @@
             <a:prstDash val="solid"/>
           </a:ln>
         </p:spPr>
+        <p:txBody>
+          <a:bodyPr/>
+          <a:p/>
+        </p:txBody>
       </p:sp>
       <p:sp>
         <p:nvSpPr>
@@ -9414,6 +9594,10 @@
             <a:prstDash val="solid"/>
           </a:ln>
         </p:spPr>
+        <p:txBody>
+          <a:bodyPr/>
+          <a:p/>
+        </p:txBody>
       </p:sp>
       <p:sp>
         <p:nvSpPr>
@@ -9481,6 +9665,10 @@
             <a:prstDash val="solid"/>
           </a:ln>
         </p:spPr>
+        <p:txBody>
+          <a:bodyPr/>
+          <a:p/>
+        </p:txBody>
       </p:sp>
       <p:sp>
         <p:nvSpPr>
@@ -9733,6 +9921,10 @@
             <a:prstDash val="solid"/>
           </a:ln>
         </p:spPr>
+        <p:txBody>
+          <a:bodyPr/>
+          <a:p/>
+        </p:txBody>
       </p:sp>
       <p:sp>
         <p:nvSpPr>
@@ -9839,6 +10031,10 @@
             <a:prstDash val="solid"/>
           </a:ln>
         </p:spPr>
+        <p:txBody>
+          <a:bodyPr/>
+          <a:p/>
+        </p:txBody>
       </p:sp>
       <p:sp>
         <p:nvSpPr>
@@ -9945,6 +10141,10 @@
             <a:prstDash val="solid"/>
           </a:ln>
         </p:spPr>
+        <p:txBody>
+          <a:bodyPr/>
+          <a:p/>
+        </p:txBody>
       </p:sp>
       <p:sp>
         <p:nvSpPr>
@@ -10051,6 +10251,10 @@
             <a:prstDash val="solid"/>
           </a:ln>
         </p:spPr>
+        <p:txBody>
+          <a:bodyPr/>
+          <a:p/>
+        </p:txBody>
       </p:sp>
       <p:sp>
         <p:nvSpPr>
@@ -10157,6 +10361,10 @@
             <a:prstDash val="solid"/>
           </a:ln>
         </p:spPr>
+        <p:txBody>
+          <a:bodyPr/>
+          <a:p/>
+        </p:txBody>
       </p:sp>
       <p:sp>
         <p:nvSpPr>
@@ -10263,6 +10471,10 @@
             <a:prstDash val="solid"/>
           </a:ln>
         </p:spPr>
+        <p:txBody>
+          <a:bodyPr/>
+          <a:p/>
+        </p:txBody>
       </p:sp>
       <p:sp>
         <p:nvSpPr>
@@ -10557,6 +10769,10 @@
             <a:prstDash val="solid"/>
           </a:ln>
         </p:spPr>
+        <p:txBody>
+          <a:bodyPr/>
+          <a:p/>
+        </p:txBody>
       </p:sp>
       <p:sp>
         <p:nvSpPr>
@@ -10582,6 +10798,10 @@
             <a:prstDash val="solid"/>
           </a:ln>
         </p:spPr>
+        <p:txBody>
+          <a:bodyPr/>
+          <a:p/>
+        </p:txBody>
       </p:sp>
       <p:sp>
         <p:nvSpPr>
@@ -10688,6 +10908,10 @@
             <a:prstDash val="solid"/>
           </a:ln>
         </p:spPr>
+        <p:txBody>
+          <a:bodyPr/>
+          <a:p/>
+        </p:txBody>
       </p:sp>
       <p:sp>
         <p:nvSpPr>
@@ -10713,6 +10937,10 @@
             <a:prstDash val="solid"/>
           </a:ln>
         </p:spPr>
+        <p:txBody>
+          <a:bodyPr/>
+          <a:p/>
+        </p:txBody>
       </p:sp>
       <p:sp>
         <p:nvSpPr>
@@ -10819,6 +11047,10 @@
             <a:prstDash val="solid"/>
           </a:ln>
         </p:spPr>
+        <p:txBody>
+          <a:bodyPr/>
+          <a:p/>
+        </p:txBody>
       </p:sp>
       <p:sp>
         <p:nvSpPr>
@@ -10844,6 +11076,10 @@
             <a:prstDash val="solid"/>
           </a:ln>
         </p:spPr>
+        <p:txBody>
+          <a:bodyPr/>
+          <a:p/>
+        </p:txBody>
       </p:sp>
       <p:sp>
         <p:nvSpPr>

--- a/slides/pptx/第03回_文書とコミュニケーションのAI化.pptx
+++ b/slides/pptx/第03回_文書とコミュニケーションのAI化.pptx
@@ -3313,7 +3313,7 @@
                 <a:ea typeface="Yu Gothic" pitchFamily="34" charset="-122"/>
                 <a:cs typeface="Yu Gothic" pitchFamily="34" charset="-120"/>
               </a:rPr>
-              <a:t>実物を3種、テンプレート化する</a:t>
+              <a:t>実物を2種、テンプレート化する</a:t>
             </a:r>
             <a:endParaRPr lang="en-US" sz="1450" dirty="0"/>
           </a:p>
@@ -3944,7 +3944,7 @@
                 <a:ea typeface="Yu Gothic" pitchFamily="34" charset="-122"/>
                 <a:cs typeface="Yu Gothic" pitchFamily="34" charset="-120"/>
               </a:rPr>
-              <a:t>ここを決めないと、持ち帰っても使われません。紙に書きます。</a:t>
+              <a:t>ここを決めないと、持ち帰っても使われません。講師が書き留めます。</a:t>
             </a:r>
             <a:endParaRPr lang="en-US" sz="1250" dirty="0"/>
           </a:p>
@@ -4620,7 +4620,7 @@
                 <a:ea typeface="Yu Gothic" pitchFamily="34" charset="-122"/>
                 <a:cs typeface="Yu Gothic" pitchFamily="34" charset="-120"/>
               </a:rPr>
-              <a:t>録画にどこまで映してよいか、事前に確認してください。「この区間は録画を止めます」という運用にしておくと、受講者は安心して実物を出せます。実物が出るかどうかで、この講座の価値は倍変わります。</a:t>
+              <a:t>この回から、実際の社内文書を使います。録画にどこまで映してよいかを、始める前に確認します。「この区間は録画を止めます」という運用もできますので、安心して実物をお出しください。</a:t>
             </a:r>
             <a:endParaRPr lang="en-US" sz="1650" dirty="0"/>
           </a:p>
@@ -9635,7 +9635,7 @@
                 <a:ea typeface="Yu Gothic" pitchFamily="34" charset="-122"/>
                 <a:cs typeface="Yu Gothic" pitchFamily="34" charset="-120"/>
               </a:rPr>
-              <a:t>受講者がいちばん手応えを感じる場面です。3本でよいので、実際に送った文書を使ってください。</a:t>
+              <a:t>いちばん手応えを感じていただける場面です。3本でよいので、実際に送った文書をお持ちください。</a:t>
             </a:r>
             <a:endParaRPr lang="en-US" sz="1250" dirty="0"/>
           </a:p>
@@ -10551,7 +10551,7 @@
                 <a:ea typeface="Yu Gothic" pitchFamily="34" charset="-122"/>
                 <a:cs typeface="Yu Gothic" pitchFamily="34" charset="-120"/>
               </a:rPr>
-              <a:t>3種で止めます。10種作っても、使われるのは結局2〜3種です</a:t>
+              <a:t>2〜3種で止めます。10種作っても、使われるのは結局2〜3種です</a:t>
             </a:r>
             <a:endParaRPr lang="en-US" sz="1250" dirty="0"/>
           </a:p>
